--- a/manual.pptx
+++ b/manual.pptx
@@ -10,13 +10,14 @@
     <p:sldId id="257" r:id="rId4"/>
     <p:sldId id="258" r:id="rId5"/>
     <p:sldId id="260" r:id="rId6"/>
-    <p:sldId id="259" r:id="rId7"/>
-    <p:sldId id="261" r:id="rId8"/>
-    <p:sldId id="265" r:id="rId9"/>
-    <p:sldId id="262" r:id="rId10"/>
-    <p:sldId id="263" r:id="rId11"/>
-    <p:sldId id="264" r:id="rId12"/>
-    <p:sldId id="267" r:id="rId13"/>
+    <p:sldId id="268" r:id="rId7"/>
+    <p:sldId id="259" r:id="rId8"/>
+    <p:sldId id="261" r:id="rId9"/>
+    <p:sldId id="265" r:id="rId10"/>
+    <p:sldId id="262" r:id="rId11"/>
+    <p:sldId id="263" r:id="rId12"/>
+    <p:sldId id="264" r:id="rId13"/>
+    <p:sldId id="267" r:id="rId14"/>
   </p:sldIdLst>
   <p:sldSz cx="10799763" cy="14400213"/>
   <p:notesSz cx="6858000" cy="9144000"/>
@@ -3201,6 +3202,425 @@
           <a:chExt cx="0" cy="0"/>
         </a:xfrm>
       </p:grpSpPr>
+      <p:grpSp>
+        <p:nvGrpSpPr>
+          <p:cNvPr id="20" name="그룹 19">
+            <a:extLst>
+              <a:ext uri="{FF2B5EF4-FFF2-40B4-BE49-F238E27FC236}">
+                <a16:creationId xmlns:a16="http://schemas.microsoft.com/office/drawing/2014/main" id="{76FB384F-A674-6907-6C4D-022EAEF969AE}"/>
+              </a:ext>
+            </a:extLst>
+          </p:cNvPr>
+          <p:cNvGrpSpPr/>
+          <p:nvPr/>
+        </p:nvGrpSpPr>
+        <p:grpSpPr>
+          <a:xfrm>
+            <a:off x="-1747" y="0"/>
+            <a:ext cx="10799764" cy="4404337"/>
+            <a:chOff x="-17459" y="0"/>
+            <a:chExt cx="10799764" cy="4404337"/>
+          </a:xfrm>
+        </p:grpSpPr>
+        <p:pic>
+          <p:nvPicPr>
+            <p:cNvPr id="5" name="그림 4">
+              <a:extLst>
+                <a:ext uri="{FF2B5EF4-FFF2-40B4-BE49-F238E27FC236}">
+                  <a16:creationId xmlns:a16="http://schemas.microsoft.com/office/drawing/2014/main" id="{2DC8AF88-4282-0A8B-C8F2-A1CA98793569}"/>
+                </a:ext>
+              </a:extLst>
+            </p:cNvPr>
+            <p:cNvPicPr>
+              <a:picLocks noChangeAspect="1"/>
+            </p:cNvPicPr>
+            <p:nvPr/>
+          </p:nvPicPr>
+          <p:blipFill>
+            <a:blip r:embed="rId2"/>
+            <a:stretch>
+              <a:fillRect/>
+            </a:stretch>
+          </p:blipFill>
+          <p:spPr>
+            <a:xfrm>
+              <a:off x="-3492" y="0"/>
+              <a:ext cx="10771831" cy="1970069"/>
+            </a:xfrm>
+            <a:prstGeom prst="rect">
+              <a:avLst/>
+            </a:prstGeom>
+          </p:spPr>
+        </p:pic>
+        <p:sp>
+          <p:nvSpPr>
+            <p:cNvPr id="7" name="TextBox 6">
+              <a:extLst>
+                <a:ext uri="{FF2B5EF4-FFF2-40B4-BE49-F238E27FC236}">
+                  <a16:creationId xmlns:a16="http://schemas.microsoft.com/office/drawing/2014/main" id="{F3E7F943-E11E-78E4-7339-F602F2C81C97}"/>
+                </a:ext>
+              </a:extLst>
+            </p:cNvPr>
+            <p:cNvSpPr txBox="1"/>
+            <p:nvPr/>
+          </p:nvSpPr>
+          <p:spPr>
+            <a:xfrm>
+              <a:off x="-17459" y="2065235"/>
+              <a:ext cx="10799764" cy="2339102"/>
+            </a:xfrm>
+            <a:prstGeom prst="rect">
+              <a:avLst/>
+            </a:prstGeom>
+            <a:noFill/>
+          </p:spPr>
+          <p:txBody>
+            <a:bodyPr wrap="square">
+              <a:spAutoFit/>
+            </a:bodyPr>
+            <a:lstStyle/>
+            <a:p>
+              <a:r>
+                <a:rPr lang="ko-KR" altLang="en-US" sz="3650" b="1" dirty="0"/>
+                <a:t>✍️ 개별 직접 등록</a:t>
+              </a:r>
+              <a:r>
+                <a:rPr lang="en-US" altLang="ko-KR" sz="3650" b="1" dirty="0"/>
+                <a:t>:</a:t>
+              </a:r>
+              <a:r>
+                <a:rPr lang="ko-KR" altLang="en-US" sz="3650" dirty="0"/>
+                <a:t> 품목코드</a:t>
+              </a:r>
+              <a:r>
+                <a:rPr lang="en-US" altLang="ko-KR" sz="3650" dirty="0"/>
+                <a:t>, </a:t>
+              </a:r>
+              <a:r>
+                <a:rPr lang="ko-KR" altLang="en-US" sz="3650" dirty="0"/>
+                <a:t>품명</a:t>
+              </a:r>
+              <a:r>
+                <a:rPr lang="en-US" altLang="ko-KR" sz="3650" dirty="0"/>
+                <a:t>, </a:t>
+              </a:r>
+              <a:r>
+                <a:rPr lang="ko-KR" altLang="en-US" sz="3650" dirty="0"/>
+                <a:t>규격</a:t>
+              </a:r>
+              <a:r>
+                <a:rPr lang="en-US" altLang="ko-KR" sz="3650" dirty="0"/>
+                <a:t>, </a:t>
+              </a:r>
+              <a:r>
+                <a:rPr lang="ko-KR" altLang="en-US" sz="3650" dirty="0"/>
+                <a:t>분류</a:t>
+              </a:r>
+              <a:r>
+                <a:rPr lang="en-US" altLang="ko-KR" sz="3650" dirty="0"/>
+                <a:t>, </a:t>
+              </a:r>
+              <a:r>
+                <a:rPr lang="ko-KR" altLang="en-US" sz="3650" dirty="0"/>
+                <a:t>사진</a:t>
+              </a:r>
+              <a:r>
+                <a:rPr lang="en-US" altLang="ko-KR" sz="3650" dirty="0"/>
+                <a:t>, </a:t>
+              </a:r>
+              <a:r>
+                <a:rPr lang="ko-KR" altLang="en-US" sz="3650" dirty="0"/>
+                <a:t>초기 재고 수량 등을 직접 입력하여 신규 등록합니다</a:t>
+              </a:r>
+              <a:r>
+                <a:rPr lang="en-US" altLang="ko-KR" sz="3650" dirty="0"/>
+                <a:t>. DB</a:t>
+              </a:r>
+              <a:r>
+                <a:rPr lang="ko-KR" altLang="en-US" sz="3650" dirty="0"/>
+                <a:t>에 등록되어 있지 않은 완전 신규 품목을 등록하는 기능입니다</a:t>
+              </a:r>
+              <a:r>
+                <a:rPr lang="en-US" altLang="ko-KR" sz="3650" dirty="0"/>
+                <a:t>.</a:t>
+              </a:r>
+              <a:endParaRPr lang="ko-KR" altLang="en-US" sz="3650" dirty="0"/>
+            </a:p>
+          </p:txBody>
+        </p:sp>
+      </p:grpSp>
+      <p:grpSp>
+        <p:nvGrpSpPr>
+          <p:cNvPr id="19" name="그룹 18">
+            <a:extLst>
+              <a:ext uri="{FF2B5EF4-FFF2-40B4-BE49-F238E27FC236}">
+                <a16:creationId xmlns:a16="http://schemas.microsoft.com/office/drawing/2014/main" id="{B53FF5F2-8073-8825-4897-3E8990A7F45C}"/>
+              </a:ext>
+            </a:extLst>
+          </p:cNvPr>
+          <p:cNvGrpSpPr/>
+          <p:nvPr/>
+        </p:nvGrpSpPr>
+        <p:grpSpPr>
+          <a:xfrm>
+            <a:off x="5237" y="5865111"/>
+            <a:ext cx="10785797" cy="3169620"/>
+            <a:chOff x="27933" y="4926164"/>
+            <a:chExt cx="10785797" cy="3169620"/>
+          </a:xfrm>
+        </p:grpSpPr>
+        <p:pic>
+          <p:nvPicPr>
+            <p:cNvPr id="9" name="그림 8">
+              <a:extLst>
+                <a:ext uri="{FF2B5EF4-FFF2-40B4-BE49-F238E27FC236}">
+                  <a16:creationId xmlns:a16="http://schemas.microsoft.com/office/drawing/2014/main" id="{14B51362-6C77-4595-5374-37DD9D9D93F1}"/>
+                </a:ext>
+              </a:extLst>
+            </p:cNvPr>
+            <p:cNvPicPr>
+              <a:picLocks noChangeAspect="1"/>
+            </p:cNvPicPr>
+            <p:nvPr/>
+          </p:nvPicPr>
+          <p:blipFill>
+            <a:blip r:embed="rId3"/>
+            <a:stretch>
+              <a:fillRect/>
+            </a:stretch>
+          </p:blipFill>
+          <p:spPr>
+            <a:xfrm>
+              <a:off x="27933" y="4926164"/>
+              <a:ext cx="10785797" cy="1920320"/>
+            </a:xfrm>
+            <a:prstGeom prst="rect">
+              <a:avLst/>
+            </a:prstGeom>
+          </p:spPr>
+        </p:pic>
+        <p:sp>
+          <p:nvSpPr>
+            <p:cNvPr id="11" name="TextBox 10">
+              <a:extLst>
+                <a:ext uri="{FF2B5EF4-FFF2-40B4-BE49-F238E27FC236}">
+                  <a16:creationId xmlns:a16="http://schemas.microsoft.com/office/drawing/2014/main" id="{BDE810C5-2E12-9F1D-85B2-9FD9EB97757D}"/>
+                </a:ext>
+              </a:extLst>
+            </p:cNvPr>
+            <p:cNvSpPr txBox="1"/>
+            <p:nvPr/>
+          </p:nvSpPr>
+          <p:spPr>
+            <a:xfrm>
+              <a:off x="27933" y="6880067"/>
+              <a:ext cx="10757864" cy="1215717"/>
+            </a:xfrm>
+            <a:prstGeom prst="rect">
+              <a:avLst/>
+            </a:prstGeom>
+            <a:noFill/>
+          </p:spPr>
+          <p:txBody>
+            <a:bodyPr wrap="square">
+              <a:spAutoFit/>
+            </a:bodyPr>
+            <a:lstStyle/>
+            <a:p>
+              <a:r>
+                <a:rPr lang="ko-KR" altLang="en-US" sz="3650" b="1" dirty="0"/>
+                <a:t>✏️ 기존 품목 수정</a:t>
+              </a:r>
+              <a:r>
+                <a:rPr lang="en-US" altLang="ko-KR" sz="3650" b="1" dirty="0"/>
+                <a:t>:</a:t>
+              </a:r>
+              <a:r>
+                <a:rPr lang="ko-KR" altLang="en-US" sz="3650" dirty="0"/>
+                <a:t> 기존 자재의 품명</a:t>
+              </a:r>
+              <a:r>
+                <a:rPr lang="en-US" altLang="ko-KR" sz="3650" dirty="0"/>
+                <a:t>, </a:t>
+              </a:r>
+              <a:r>
+                <a:rPr lang="ko-KR" altLang="en-US" sz="3650" dirty="0"/>
+                <a:t>단가</a:t>
+              </a:r>
+              <a:r>
+                <a:rPr lang="en-US" altLang="ko-KR" sz="3650" dirty="0"/>
+                <a:t>, </a:t>
+              </a:r>
+              <a:r>
+                <a:rPr lang="ko-KR" altLang="en-US" sz="3650" dirty="0"/>
+                <a:t>비고 및 첨부 사진을 수정하거나 교체합니다</a:t>
+              </a:r>
+              <a:r>
+                <a:rPr lang="en-US" altLang="ko-KR" sz="3650" dirty="0"/>
+                <a:t>.</a:t>
+              </a:r>
+              <a:endParaRPr lang="ko-KR" altLang="en-US" sz="3650" dirty="0"/>
+            </a:p>
+          </p:txBody>
+        </p:sp>
+      </p:grpSp>
+      <p:grpSp>
+        <p:nvGrpSpPr>
+          <p:cNvPr id="18" name="그룹 17">
+            <a:extLst>
+              <a:ext uri="{FF2B5EF4-FFF2-40B4-BE49-F238E27FC236}">
+                <a16:creationId xmlns:a16="http://schemas.microsoft.com/office/drawing/2014/main" id="{7FC40734-EF12-C28C-1C57-E6B2EBB24D6E}"/>
+              </a:ext>
+            </a:extLst>
+          </p:cNvPr>
+          <p:cNvGrpSpPr/>
+          <p:nvPr/>
+        </p:nvGrpSpPr>
+        <p:grpSpPr>
+          <a:xfrm>
+            <a:off x="19203" y="10495504"/>
+            <a:ext cx="10757864" cy="3678947"/>
+            <a:chOff x="20949" y="9458842"/>
+            <a:chExt cx="10757864" cy="3678947"/>
+          </a:xfrm>
+        </p:grpSpPr>
+        <p:pic>
+          <p:nvPicPr>
+            <p:cNvPr id="15" name="그림 14">
+              <a:extLst>
+                <a:ext uri="{FF2B5EF4-FFF2-40B4-BE49-F238E27FC236}">
+                  <a16:creationId xmlns:a16="http://schemas.microsoft.com/office/drawing/2014/main" id="{22CA19E0-14D7-047E-2223-9207EC00FC2B}"/>
+                </a:ext>
+              </a:extLst>
+            </p:cNvPr>
+            <p:cNvPicPr>
+              <a:picLocks noChangeAspect="1"/>
+            </p:cNvPicPr>
+            <p:nvPr/>
+          </p:nvPicPr>
+          <p:blipFill>
+            <a:blip r:embed="rId4"/>
+            <a:stretch>
+              <a:fillRect/>
+            </a:stretch>
+          </p:blipFill>
+          <p:spPr>
+            <a:xfrm>
+              <a:off x="20949" y="9458842"/>
+              <a:ext cx="10757864" cy="1901537"/>
+            </a:xfrm>
+            <a:prstGeom prst="rect">
+              <a:avLst/>
+            </a:prstGeom>
+          </p:spPr>
+        </p:pic>
+        <p:sp>
+          <p:nvSpPr>
+            <p:cNvPr id="17" name="TextBox 16">
+              <a:extLst>
+                <a:ext uri="{FF2B5EF4-FFF2-40B4-BE49-F238E27FC236}">
+                  <a16:creationId xmlns:a16="http://schemas.microsoft.com/office/drawing/2014/main" id="{187E6F58-2DE4-E77A-F910-312618A5EACA}"/>
+                </a:ext>
+              </a:extLst>
+            </p:cNvPr>
+            <p:cNvSpPr txBox="1"/>
+            <p:nvPr/>
+          </p:nvSpPr>
+          <p:spPr>
+            <a:xfrm>
+              <a:off x="20949" y="11360379"/>
+              <a:ext cx="10757864" cy="1777410"/>
+            </a:xfrm>
+            <a:prstGeom prst="rect">
+              <a:avLst/>
+            </a:prstGeom>
+            <a:noFill/>
+          </p:spPr>
+          <p:txBody>
+            <a:bodyPr wrap="square">
+              <a:spAutoFit/>
+            </a:bodyPr>
+            <a:lstStyle/>
+            <a:p>
+              <a:r>
+                <a:rPr lang="ko-KR" altLang="en-US" sz="3650" b="1" dirty="0"/>
+                <a:t>📂 기초 데이터 엑셀 일괄 등록</a:t>
+              </a:r>
+              <a:r>
+                <a:rPr lang="en-US" altLang="ko-KR" sz="3650" b="1" dirty="0"/>
+                <a:t>:</a:t>
+              </a:r>
+              <a:r>
+                <a:rPr lang="ko-KR" altLang="en-US" sz="3650" dirty="0"/>
+                <a:t> 대량의 자재 목록을 엑셀 파일</a:t>
+              </a:r>
+              <a:r>
+                <a:rPr lang="en-US" altLang="ko-KR" sz="3650" dirty="0"/>
+                <a:t>(.xlsx)</a:t>
+              </a:r>
+              <a:r>
+                <a:rPr lang="ko-KR" altLang="en-US" sz="3650" dirty="0"/>
+                <a:t>로 한번에 일괄 업로드합니다</a:t>
+              </a:r>
+              <a:r>
+                <a:rPr lang="en-US" altLang="ko-KR" sz="3650" dirty="0"/>
+                <a:t>. </a:t>
+              </a:r>
+              <a:r>
+                <a:rPr lang="ko-KR" altLang="en-US" sz="3650" dirty="0"/>
+                <a:t>양식 파일은 </a:t>
+              </a:r>
+              <a:r>
+                <a:rPr lang="en-US" altLang="ko-KR" sz="3650" dirty="0" err="1"/>
+                <a:t>my_erp</a:t>
+              </a:r>
+              <a:r>
+                <a:rPr lang="en-US" altLang="ko-KR" sz="3650" dirty="0"/>
+                <a:t> </a:t>
+              </a:r>
+              <a:r>
+                <a:rPr lang="ko-KR" altLang="en-US" sz="3650" dirty="0"/>
+                <a:t>폴더 안에 있습니다</a:t>
+              </a:r>
+              <a:r>
+                <a:rPr lang="en-US" altLang="ko-KR" sz="3650" dirty="0"/>
+                <a:t>.</a:t>
+              </a:r>
+              <a:endParaRPr lang="ko-KR" altLang="en-US" sz="3650" dirty="0"/>
+            </a:p>
+          </p:txBody>
+        </p:sp>
+      </p:grpSp>
+    </p:spTree>
+    <p:extLst>
+      <p:ext uri="{BB962C8B-B14F-4D97-AF65-F5344CB8AC3E}">
+        <p14:creationId xmlns:p14="http://schemas.microsoft.com/office/powerpoint/2010/main" val="3790577884"/>
+      </p:ext>
+    </p:extLst>
+  </p:cSld>
+  <p:clrMapOvr>
+    <a:masterClrMapping/>
+  </p:clrMapOvr>
+</p:sld>
+</file>
+
+<file path=ppt/slides/slide11.xml><?xml version="1.0" encoding="utf-8"?>
+<p:sld xmlns:a="http://schemas.openxmlformats.org/drawingml/2006/main" xmlns:r="http://schemas.openxmlformats.org/officeDocument/2006/relationships" xmlns:p="http://schemas.openxmlformats.org/presentationml/2006/main">
+  <p:cSld>
+    <p:spTree>
+      <p:nvGrpSpPr>
+        <p:cNvPr id="1" name=""/>
+        <p:cNvGrpSpPr/>
+        <p:nvPr/>
+      </p:nvGrpSpPr>
+      <p:grpSpPr>
+        <a:xfrm>
+          <a:off x="0" y="0"/>
+          <a:ext cx="0" cy="0"/>
+          <a:chOff x="0" y="0"/>
+          <a:chExt cx="0" cy="0"/>
+        </a:xfrm>
+      </p:grpSpPr>
       <p:sp>
         <p:nvSpPr>
           <p:cNvPr id="5" name="TextBox 4">
@@ -3596,7 +4016,7 @@
 </p:sld>
 </file>
 
-<file path=ppt/slides/slide11.xml><?xml version="1.0" encoding="utf-8"?>
+<file path=ppt/slides/slide12.xml><?xml version="1.0" encoding="utf-8"?>
 <p:sld xmlns:a="http://schemas.openxmlformats.org/drawingml/2006/main" xmlns:r="http://schemas.openxmlformats.org/officeDocument/2006/relationships" xmlns:p="http://schemas.openxmlformats.org/presentationml/2006/main">
   <p:cSld>
     <p:spTree>
@@ -4043,7 +4463,7 @@
 </p:sld>
 </file>
 
-<file path=ppt/slides/slide12.xml><?xml version="1.0" encoding="utf-8"?>
+<file path=ppt/slides/slide13.xml><?xml version="1.0" encoding="utf-8"?>
 <p:sld xmlns:a="http://schemas.openxmlformats.org/drawingml/2006/main" xmlns:r="http://schemas.openxmlformats.org/officeDocument/2006/relationships" xmlns:p="http://schemas.openxmlformats.org/presentationml/2006/main">
   <p:cSld>
     <p:spTree>
@@ -5652,7 +6072,7 @@
         <p:spPr>
           <a:xfrm>
             <a:off x="-1" y="2618723"/>
-            <a:ext cx="10799763" cy="20317870"/>
+            <a:ext cx="10799763" cy="11890563"/>
           </a:xfrm>
           <a:prstGeom prst="rect">
             <a:avLst/>
@@ -6031,211 +6451,6 @@
             <a:r>
               <a:rPr lang="ko-KR" altLang="en-US" sz="3651" dirty="0"/>
               <a:t> 구분을 위해 부여하는 임시 번호 입니다</a:t>
-            </a:r>
-            <a:r>
-              <a:rPr lang="en-US" altLang="ko-KR" sz="3651" dirty="0"/>
-              <a:t>.</a:t>
-            </a:r>
-          </a:p>
-          <a:p>
-            <a:pPr>
-              <a:buFont typeface="Arial" panose="020B0604020202020204" pitchFamily="34" charset="0"/>
-              <a:buChar char="•"/>
-            </a:pPr>
-            <a:endParaRPr lang="en-US" altLang="ko-KR" sz="3651" dirty="0"/>
-          </a:p>
-          <a:p>
-            <a:pPr>
-              <a:buFont typeface="Arial" panose="020B0604020202020204" pitchFamily="34" charset="0"/>
-              <a:buChar char="•"/>
-            </a:pPr>
-            <a:r>
-              <a:rPr lang="en-US" altLang="ko-KR" sz="3651" dirty="0"/>
-              <a:t> </a:t>
-            </a:r>
-            <a:r>
-              <a:rPr lang="ko-KR" altLang="en-US" sz="3651" b="1" dirty="0"/>
-              <a:t>분류체계</a:t>
-            </a:r>
-            <a:r>
-              <a:rPr lang="ko-KR" altLang="en-US" sz="3651" dirty="0"/>
-              <a:t> </a:t>
-            </a:r>
-            <a:r>
-              <a:rPr lang="en-US" altLang="ko-KR" sz="3651" dirty="0"/>
-              <a:t>: </a:t>
-            </a:r>
-            <a:r>
-              <a:rPr lang="ko-KR" altLang="en-US" sz="3651" dirty="0"/>
-              <a:t>상품을 보관중인 </a:t>
-            </a:r>
-            <a:r>
-              <a:rPr lang="ko-KR" altLang="en-US" sz="3651" dirty="0" err="1"/>
-              <a:t>렉</a:t>
-            </a:r>
-            <a:r>
-              <a:rPr lang="ko-KR" altLang="en-US" sz="3651" dirty="0"/>
-              <a:t> 선반의 위치 입니다</a:t>
-            </a:r>
-            <a:r>
-              <a:rPr lang="en-US" altLang="ko-KR" sz="3651" dirty="0"/>
-              <a:t>.</a:t>
-            </a:r>
-          </a:p>
-          <a:p>
-            <a:pPr>
-              <a:buFont typeface="Arial" panose="020B0604020202020204" pitchFamily="34" charset="0"/>
-              <a:buChar char="•"/>
-            </a:pPr>
-            <a:endParaRPr lang="en-US" altLang="ko-KR" sz="3651" dirty="0"/>
-          </a:p>
-          <a:p>
-            <a:pPr>
-              <a:buFont typeface="Arial" panose="020B0604020202020204" pitchFamily="34" charset="0"/>
-              <a:buChar char="•"/>
-            </a:pPr>
-            <a:r>
-              <a:rPr lang="en-US" altLang="ko-KR" sz="3651" dirty="0"/>
-              <a:t> </a:t>
-            </a:r>
-            <a:r>
-              <a:rPr lang="ko-KR" altLang="en-US" sz="3651" b="1" dirty="0" err="1"/>
-              <a:t>기기명</a:t>
-            </a:r>
-            <a:r>
-              <a:rPr lang="ko-KR" altLang="en-US" sz="3651" dirty="0"/>
-              <a:t> </a:t>
-            </a:r>
-            <a:r>
-              <a:rPr lang="en-US" altLang="ko-KR" sz="3651" dirty="0"/>
-              <a:t>: </a:t>
-            </a:r>
-            <a:r>
-              <a:rPr lang="ko-KR" altLang="en-US" sz="3651" dirty="0"/>
-              <a:t>품목이 설치되는 자동화 설비의 명칭 입니다</a:t>
-            </a:r>
-            <a:r>
-              <a:rPr lang="en-US" altLang="ko-KR" sz="3651" dirty="0"/>
-              <a:t>.</a:t>
-            </a:r>
-          </a:p>
-          <a:p>
-            <a:pPr>
-              <a:buFont typeface="Arial" panose="020B0604020202020204" pitchFamily="34" charset="0"/>
-              <a:buChar char="•"/>
-            </a:pPr>
-            <a:endParaRPr lang="en-US" altLang="ko-KR" sz="3651" dirty="0"/>
-          </a:p>
-          <a:p>
-            <a:pPr>
-              <a:buFont typeface="Arial" panose="020B0604020202020204" pitchFamily="34" charset="0"/>
-              <a:buChar char="•"/>
-            </a:pPr>
-            <a:r>
-              <a:rPr lang="en-US" altLang="ko-KR" sz="3651" dirty="0"/>
-              <a:t> </a:t>
-            </a:r>
-            <a:r>
-              <a:rPr lang="en-US" altLang="ko-KR" sz="3651" b="1" dirty="0"/>
-              <a:t>Maker</a:t>
-            </a:r>
-            <a:r>
-              <a:rPr lang="en-US" altLang="ko-KR" sz="3651" dirty="0"/>
-              <a:t> : </a:t>
-            </a:r>
-            <a:r>
-              <a:rPr lang="ko-KR" altLang="en-US" sz="3651" dirty="0"/>
-              <a:t>품목을 제조 혹은 유통하는 회사의 명칭 입니다</a:t>
-            </a:r>
-            <a:r>
-              <a:rPr lang="en-US" altLang="ko-KR" sz="3651" dirty="0"/>
-              <a:t>.</a:t>
-            </a:r>
-          </a:p>
-          <a:p>
-            <a:pPr>
-              <a:buFont typeface="Arial" panose="020B0604020202020204" pitchFamily="34" charset="0"/>
-              <a:buChar char="•"/>
-            </a:pPr>
-            <a:endParaRPr lang="en-US" altLang="ko-KR" sz="3651" dirty="0"/>
-          </a:p>
-          <a:p>
-            <a:pPr>
-              <a:buFont typeface="Arial" panose="020B0604020202020204" pitchFamily="34" charset="0"/>
-              <a:buChar char="•"/>
-            </a:pPr>
-            <a:r>
-              <a:rPr lang="en-US" altLang="ko-KR" sz="3651" dirty="0"/>
-              <a:t> </a:t>
-            </a:r>
-            <a:r>
-              <a:rPr lang="ko-KR" altLang="en-US" sz="3651" b="1" dirty="0"/>
-              <a:t>원화환산액</a:t>
-            </a:r>
-            <a:r>
-              <a:rPr lang="ko-KR" altLang="en-US" sz="3651" dirty="0"/>
-              <a:t> </a:t>
-            </a:r>
-            <a:r>
-              <a:rPr lang="en-US" altLang="ko-KR" sz="3651" dirty="0"/>
-              <a:t>:  </a:t>
-            </a:r>
-            <a:r>
-              <a:rPr lang="ko-KR" altLang="en-US" sz="3651" dirty="0"/>
-              <a:t>입고되는 품목이 수입되는 경우</a:t>
-            </a:r>
-            <a:r>
-              <a:rPr lang="en-US" altLang="ko-KR" sz="3651" dirty="0"/>
-              <a:t>, </a:t>
-            </a:r>
-            <a:r>
-              <a:rPr lang="ko-KR" altLang="en-US" sz="3651" dirty="0"/>
-              <a:t>외화로 결제된 품목의 단가를 환율을 적용하여 원화로 환산한 금액을 의미합니다</a:t>
-            </a:r>
-            <a:r>
-              <a:rPr lang="en-US" altLang="ko-KR" sz="3651" dirty="0"/>
-              <a:t>.</a:t>
-            </a:r>
-          </a:p>
-          <a:p>
-            <a:pPr>
-              <a:buFont typeface="Arial" panose="020B0604020202020204" pitchFamily="34" charset="0"/>
-              <a:buChar char="•"/>
-            </a:pPr>
-            <a:endParaRPr lang="en-US" altLang="ko-KR" sz="3651" dirty="0"/>
-          </a:p>
-          <a:p>
-            <a:pPr>
-              <a:buFont typeface="Arial" panose="020B0604020202020204" pitchFamily="34" charset="0"/>
-              <a:buChar char="•"/>
-            </a:pPr>
-            <a:r>
-              <a:rPr lang="en-US" altLang="ko-KR" sz="3651" dirty="0"/>
-              <a:t> </a:t>
-            </a:r>
-            <a:r>
-              <a:rPr lang="ko-KR" altLang="en-US" sz="3651" b="1" dirty="0"/>
-              <a:t>재고금액</a:t>
-            </a:r>
-            <a:r>
-              <a:rPr lang="ko-KR" altLang="en-US" sz="3651" dirty="0"/>
-              <a:t> </a:t>
-            </a:r>
-            <a:r>
-              <a:rPr lang="en-US" altLang="ko-KR" sz="3651" dirty="0"/>
-              <a:t>: </a:t>
-            </a:r>
-            <a:r>
-              <a:rPr lang="ko-KR" altLang="en-US" sz="3651" dirty="0"/>
-              <a:t>품목의 수량 </a:t>
-            </a:r>
-            <a:r>
-              <a:rPr lang="en-US" altLang="ko-KR" sz="3651" dirty="0"/>
-              <a:t>X </a:t>
-            </a:r>
-            <a:r>
-              <a:rPr lang="ko-KR" altLang="en-US" sz="3651" dirty="0"/>
-              <a:t>원화환산액 의 금액입니다</a:t>
             </a:r>
             <a:r>
               <a:rPr lang="en-US" altLang="ko-KR" sz="3651" dirty="0"/>
@@ -6318,6 +6533,323 @@
 </file>
 
 <file path=ppt/slides/slide6.xml><?xml version="1.0" encoding="utf-8"?>
+<p:sld xmlns:a="http://schemas.openxmlformats.org/drawingml/2006/main" xmlns:r="http://schemas.openxmlformats.org/officeDocument/2006/relationships" xmlns:p="http://schemas.openxmlformats.org/presentationml/2006/main">
+  <p:cSld>
+    <p:spTree>
+      <p:nvGrpSpPr>
+        <p:cNvPr id="1" name=""/>
+        <p:cNvGrpSpPr/>
+        <p:nvPr/>
+      </p:nvGrpSpPr>
+      <p:grpSpPr>
+        <a:xfrm>
+          <a:off x="0" y="0"/>
+          <a:ext cx="0" cy="0"/>
+          <a:chOff x="0" y="0"/>
+          <a:chExt cx="0" cy="0"/>
+        </a:xfrm>
+      </p:grpSpPr>
+      <p:pic>
+        <p:nvPicPr>
+          <p:cNvPr id="4" name="그림 3">
+            <a:extLst>
+              <a:ext uri="{FF2B5EF4-FFF2-40B4-BE49-F238E27FC236}">
+                <a16:creationId xmlns:a16="http://schemas.microsoft.com/office/drawing/2014/main" id="{A4162066-2425-DD53-E915-49F26F483FA2}"/>
+              </a:ext>
+            </a:extLst>
+          </p:cNvPr>
+          <p:cNvPicPr>
+            <a:picLocks noChangeAspect="1"/>
+          </p:cNvPicPr>
+          <p:nvPr/>
+        </p:nvPicPr>
+        <p:blipFill>
+          <a:blip r:embed="rId2"/>
+          <a:stretch>
+            <a:fillRect/>
+          </a:stretch>
+        </p:blipFill>
+        <p:spPr>
+          <a:xfrm>
+            <a:off x="-1" y="-257774"/>
+            <a:ext cx="10799763" cy="1343200"/>
+          </a:xfrm>
+          <a:prstGeom prst="rect">
+            <a:avLst/>
+          </a:prstGeom>
+        </p:spPr>
+      </p:pic>
+      <p:pic>
+        <p:nvPicPr>
+          <p:cNvPr id="5" name="그림 4">
+            <a:extLst>
+              <a:ext uri="{FF2B5EF4-FFF2-40B4-BE49-F238E27FC236}">
+                <a16:creationId xmlns:a16="http://schemas.microsoft.com/office/drawing/2014/main" id="{F6F2C4F7-5515-BA01-6B0C-7E5DE6B71A63}"/>
+              </a:ext>
+            </a:extLst>
+          </p:cNvPr>
+          <p:cNvPicPr>
+            <a:picLocks noChangeAspect="1"/>
+          </p:cNvPicPr>
+          <p:nvPr/>
+        </p:nvPicPr>
+        <p:blipFill>
+          <a:blip r:embed="rId3"/>
+          <a:stretch>
+            <a:fillRect/>
+          </a:stretch>
+        </p:blipFill>
+        <p:spPr>
+          <a:xfrm>
+            <a:off x="-1" y="1085426"/>
+            <a:ext cx="10799763" cy="1500179"/>
+          </a:xfrm>
+          <a:prstGeom prst="rect">
+            <a:avLst/>
+          </a:prstGeom>
+        </p:spPr>
+      </p:pic>
+      <p:sp>
+        <p:nvSpPr>
+          <p:cNvPr id="6" name="TextBox 5">
+            <a:extLst>
+              <a:ext uri="{FF2B5EF4-FFF2-40B4-BE49-F238E27FC236}">
+                <a16:creationId xmlns:a16="http://schemas.microsoft.com/office/drawing/2014/main" id="{D5A80649-D5B4-5C19-932C-1B349322E652}"/>
+              </a:ext>
+            </a:extLst>
+          </p:cNvPr>
+          <p:cNvSpPr txBox="1"/>
+          <p:nvPr/>
+        </p:nvSpPr>
+        <p:spPr>
+          <a:xfrm>
+            <a:off x="-1" y="2618723"/>
+            <a:ext cx="10799763" cy="7957820"/>
+          </a:xfrm>
+          <a:prstGeom prst="rect">
+            <a:avLst/>
+          </a:prstGeom>
+          <a:noFill/>
+        </p:spPr>
+        <p:txBody>
+          <a:bodyPr wrap="square">
+            <a:spAutoFit/>
+          </a:bodyPr>
+          <a:lstStyle/>
+          <a:p>
+            <a:pPr>
+              <a:buFont typeface="Arial" panose="020B0604020202020204" pitchFamily="34" charset="0"/>
+              <a:buChar char="•"/>
+            </a:pPr>
+            <a:r>
+              <a:rPr lang="en-US" altLang="ko-KR" sz="3651" dirty="0"/>
+              <a:t> </a:t>
+            </a:r>
+            <a:r>
+              <a:rPr lang="ko-KR" altLang="en-US" sz="3651" b="1" dirty="0"/>
+              <a:t>분류체계</a:t>
+            </a:r>
+            <a:r>
+              <a:rPr lang="ko-KR" altLang="en-US" sz="3651" dirty="0"/>
+              <a:t> </a:t>
+            </a:r>
+            <a:r>
+              <a:rPr lang="en-US" altLang="ko-KR" sz="3651" dirty="0"/>
+              <a:t>: </a:t>
+            </a:r>
+            <a:r>
+              <a:rPr lang="ko-KR" altLang="en-US" sz="3651" dirty="0"/>
+              <a:t>상품을 보관중인 </a:t>
+            </a:r>
+            <a:r>
+              <a:rPr lang="ko-KR" altLang="en-US" sz="3651" dirty="0" err="1"/>
+              <a:t>렉</a:t>
+            </a:r>
+            <a:r>
+              <a:rPr lang="ko-KR" altLang="en-US" sz="3651" dirty="0"/>
+              <a:t> 선반의 위치 입니다</a:t>
+            </a:r>
+            <a:r>
+              <a:rPr lang="en-US" altLang="ko-KR" sz="3651" dirty="0"/>
+              <a:t>.</a:t>
+            </a:r>
+          </a:p>
+          <a:p>
+            <a:pPr>
+              <a:buFont typeface="Arial" panose="020B0604020202020204" pitchFamily="34" charset="0"/>
+              <a:buChar char="•"/>
+            </a:pPr>
+            <a:endParaRPr lang="en-US" altLang="ko-KR" sz="3651" dirty="0"/>
+          </a:p>
+          <a:p>
+            <a:pPr>
+              <a:buFont typeface="Arial" panose="020B0604020202020204" pitchFamily="34" charset="0"/>
+              <a:buChar char="•"/>
+            </a:pPr>
+            <a:r>
+              <a:rPr lang="en-US" altLang="ko-KR" sz="3651" dirty="0"/>
+              <a:t> </a:t>
+            </a:r>
+            <a:r>
+              <a:rPr lang="ko-KR" altLang="en-US" sz="3651" b="1" dirty="0" err="1"/>
+              <a:t>기기명</a:t>
+            </a:r>
+            <a:r>
+              <a:rPr lang="ko-KR" altLang="en-US" sz="3651" dirty="0"/>
+              <a:t> </a:t>
+            </a:r>
+            <a:r>
+              <a:rPr lang="en-US" altLang="ko-KR" sz="3651" dirty="0"/>
+              <a:t>: </a:t>
+            </a:r>
+            <a:r>
+              <a:rPr lang="ko-KR" altLang="en-US" sz="3651" dirty="0"/>
+              <a:t>품목이 설치되는 자동화 설비의 명칭 입니다</a:t>
+            </a:r>
+            <a:r>
+              <a:rPr lang="en-US" altLang="ko-KR" sz="3651" dirty="0"/>
+              <a:t>.</a:t>
+            </a:r>
+          </a:p>
+          <a:p>
+            <a:pPr>
+              <a:buFont typeface="Arial" panose="020B0604020202020204" pitchFamily="34" charset="0"/>
+              <a:buChar char="•"/>
+            </a:pPr>
+            <a:endParaRPr lang="en-US" altLang="ko-KR" sz="3651" dirty="0"/>
+          </a:p>
+          <a:p>
+            <a:pPr>
+              <a:buFont typeface="Arial" panose="020B0604020202020204" pitchFamily="34" charset="0"/>
+              <a:buChar char="•"/>
+            </a:pPr>
+            <a:r>
+              <a:rPr lang="en-US" altLang="ko-KR" sz="3651" dirty="0"/>
+              <a:t> </a:t>
+            </a:r>
+            <a:r>
+              <a:rPr lang="en-US" altLang="ko-KR" sz="3651" b="1" dirty="0"/>
+              <a:t>Maker</a:t>
+            </a:r>
+            <a:r>
+              <a:rPr lang="en-US" altLang="ko-KR" sz="3651" dirty="0"/>
+              <a:t> : </a:t>
+            </a:r>
+            <a:r>
+              <a:rPr lang="ko-KR" altLang="en-US" sz="3651" dirty="0"/>
+              <a:t>품목을 제조 혹은 유통하는 회사의 명칭 입니다</a:t>
+            </a:r>
+            <a:r>
+              <a:rPr lang="en-US" altLang="ko-KR" sz="3651" dirty="0"/>
+              <a:t>.</a:t>
+            </a:r>
+          </a:p>
+          <a:p>
+            <a:pPr>
+              <a:buFont typeface="Arial" panose="020B0604020202020204" pitchFamily="34" charset="0"/>
+              <a:buChar char="•"/>
+            </a:pPr>
+            <a:endParaRPr lang="en-US" altLang="ko-KR" sz="3651" dirty="0"/>
+          </a:p>
+          <a:p>
+            <a:pPr>
+              <a:buFont typeface="Arial" panose="020B0604020202020204" pitchFamily="34" charset="0"/>
+              <a:buChar char="•"/>
+            </a:pPr>
+            <a:r>
+              <a:rPr lang="en-US" altLang="ko-KR" sz="3651" dirty="0"/>
+              <a:t> </a:t>
+            </a:r>
+            <a:r>
+              <a:rPr lang="ko-KR" altLang="en-US" sz="3651" b="1" dirty="0"/>
+              <a:t>원화환산액</a:t>
+            </a:r>
+            <a:r>
+              <a:rPr lang="ko-KR" altLang="en-US" sz="3651" dirty="0"/>
+              <a:t> </a:t>
+            </a:r>
+            <a:r>
+              <a:rPr lang="en-US" altLang="ko-KR" sz="3651" dirty="0"/>
+              <a:t>:  </a:t>
+            </a:r>
+            <a:r>
+              <a:rPr lang="ko-KR" altLang="en-US" sz="3651" dirty="0"/>
+              <a:t>입고되는 품목이 수입되는 경우</a:t>
+            </a:r>
+            <a:r>
+              <a:rPr lang="en-US" altLang="ko-KR" sz="3651" dirty="0"/>
+              <a:t>, </a:t>
+            </a:r>
+            <a:r>
+              <a:rPr lang="ko-KR" altLang="en-US" sz="3651" dirty="0"/>
+              <a:t>외화로 결제된 품목의 단가를 환율을 적용하여 원화로 환산한 금액을 의미합니다</a:t>
+            </a:r>
+            <a:r>
+              <a:rPr lang="en-US" altLang="ko-KR" sz="3651" dirty="0"/>
+              <a:t>.</a:t>
+            </a:r>
+          </a:p>
+          <a:p>
+            <a:pPr>
+              <a:buFont typeface="Arial" panose="020B0604020202020204" pitchFamily="34" charset="0"/>
+              <a:buChar char="•"/>
+            </a:pPr>
+            <a:endParaRPr lang="en-US" altLang="ko-KR" sz="3651" dirty="0"/>
+          </a:p>
+          <a:p>
+            <a:pPr>
+              <a:buFont typeface="Arial" panose="020B0604020202020204" pitchFamily="34" charset="0"/>
+              <a:buChar char="•"/>
+            </a:pPr>
+            <a:r>
+              <a:rPr lang="en-US" altLang="ko-KR" sz="3651" dirty="0"/>
+              <a:t> </a:t>
+            </a:r>
+            <a:r>
+              <a:rPr lang="ko-KR" altLang="en-US" sz="3651" b="1" dirty="0"/>
+              <a:t>재고금액</a:t>
+            </a:r>
+            <a:r>
+              <a:rPr lang="ko-KR" altLang="en-US" sz="3651" dirty="0"/>
+              <a:t> </a:t>
+            </a:r>
+            <a:r>
+              <a:rPr lang="en-US" altLang="ko-KR" sz="3651" dirty="0"/>
+              <a:t>: </a:t>
+            </a:r>
+            <a:r>
+              <a:rPr lang="ko-KR" altLang="en-US" sz="3651" dirty="0"/>
+              <a:t>품목의 수량 </a:t>
+            </a:r>
+            <a:r>
+              <a:rPr lang="en-US" altLang="ko-KR" sz="3651" dirty="0"/>
+              <a:t>X </a:t>
+            </a:r>
+            <a:r>
+              <a:rPr lang="ko-KR" altLang="en-US" sz="3651" dirty="0"/>
+              <a:t>원화환산액 의 금액입니다</a:t>
+            </a:r>
+            <a:r>
+              <a:rPr lang="en-US" altLang="ko-KR" sz="3651" dirty="0"/>
+              <a:t>.</a:t>
+            </a:r>
+          </a:p>
+        </p:txBody>
+      </p:sp>
+    </p:spTree>
+    <p:extLst>
+      <p:ext uri="{BB962C8B-B14F-4D97-AF65-F5344CB8AC3E}">
+        <p14:creationId xmlns:p14="http://schemas.microsoft.com/office/powerpoint/2010/main" val="330546788"/>
+      </p:ext>
+    </p:extLst>
+  </p:cSld>
+  <p:clrMapOvr>
+    <a:masterClrMapping/>
+  </p:clrMapOvr>
+</p:sld>
+</file>
+
+<file path=ppt/slides/slide7.xml><?xml version="1.0" encoding="utf-8"?>
 <p:sld xmlns:a="http://schemas.openxmlformats.org/drawingml/2006/main" xmlns:r="http://schemas.openxmlformats.org/officeDocument/2006/relationships" xmlns:p="http://schemas.openxmlformats.org/presentationml/2006/main">
   <p:cSld>
     <p:spTree>
@@ -6725,7 +7257,7 @@
 </p:sld>
 </file>
 
-<file path=ppt/slides/slide7.xml><?xml version="1.0" encoding="utf-8"?>
+<file path=ppt/slides/slide8.xml><?xml version="1.0" encoding="utf-8"?>
 <p:sld xmlns:a="http://schemas.openxmlformats.org/drawingml/2006/main" xmlns:r="http://schemas.openxmlformats.org/officeDocument/2006/relationships" xmlns:p="http://schemas.openxmlformats.org/presentationml/2006/main">
   <p:cSld>
     <p:spTree>
@@ -7146,7 +7678,7 @@
 </p:sld>
 </file>
 
-<file path=ppt/slides/slide8.xml><?xml version="1.0" encoding="utf-8"?>
+<file path=ppt/slides/slide9.xml><?xml version="1.0" encoding="utf-8"?>
 <p:sld xmlns:a="http://schemas.openxmlformats.org/drawingml/2006/main" xmlns:r="http://schemas.openxmlformats.org/officeDocument/2006/relationships" xmlns:p="http://schemas.openxmlformats.org/presentationml/2006/main">
   <p:cSld>
     <p:spTree>
@@ -7355,425 +7887,6 @@
     <p:extLst>
       <p:ext uri="{BB962C8B-B14F-4D97-AF65-F5344CB8AC3E}">
         <p14:creationId xmlns:p14="http://schemas.microsoft.com/office/powerpoint/2010/main" val="1641006525"/>
-      </p:ext>
-    </p:extLst>
-  </p:cSld>
-  <p:clrMapOvr>
-    <a:masterClrMapping/>
-  </p:clrMapOvr>
-</p:sld>
-</file>
-
-<file path=ppt/slides/slide9.xml><?xml version="1.0" encoding="utf-8"?>
-<p:sld xmlns:a="http://schemas.openxmlformats.org/drawingml/2006/main" xmlns:r="http://schemas.openxmlformats.org/officeDocument/2006/relationships" xmlns:p="http://schemas.openxmlformats.org/presentationml/2006/main">
-  <p:cSld>
-    <p:spTree>
-      <p:nvGrpSpPr>
-        <p:cNvPr id="1" name=""/>
-        <p:cNvGrpSpPr/>
-        <p:nvPr/>
-      </p:nvGrpSpPr>
-      <p:grpSpPr>
-        <a:xfrm>
-          <a:off x="0" y="0"/>
-          <a:ext cx="0" cy="0"/>
-          <a:chOff x="0" y="0"/>
-          <a:chExt cx="0" cy="0"/>
-        </a:xfrm>
-      </p:grpSpPr>
-      <p:grpSp>
-        <p:nvGrpSpPr>
-          <p:cNvPr id="20" name="그룹 19">
-            <a:extLst>
-              <a:ext uri="{FF2B5EF4-FFF2-40B4-BE49-F238E27FC236}">
-                <a16:creationId xmlns:a16="http://schemas.microsoft.com/office/drawing/2014/main" id="{76FB384F-A674-6907-6C4D-022EAEF969AE}"/>
-              </a:ext>
-            </a:extLst>
-          </p:cNvPr>
-          <p:cNvGrpSpPr/>
-          <p:nvPr/>
-        </p:nvGrpSpPr>
-        <p:grpSpPr>
-          <a:xfrm>
-            <a:off x="-1747" y="0"/>
-            <a:ext cx="10799764" cy="4404337"/>
-            <a:chOff x="-17459" y="0"/>
-            <a:chExt cx="10799764" cy="4404337"/>
-          </a:xfrm>
-        </p:grpSpPr>
-        <p:pic>
-          <p:nvPicPr>
-            <p:cNvPr id="5" name="그림 4">
-              <a:extLst>
-                <a:ext uri="{FF2B5EF4-FFF2-40B4-BE49-F238E27FC236}">
-                  <a16:creationId xmlns:a16="http://schemas.microsoft.com/office/drawing/2014/main" id="{2DC8AF88-4282-0A8B-C8F2-A1CA98793569}"/>
-                </a:ext>
-              </a:extLst>
-            </p:cNvPr>
-            <p:cNvPicPr>
-              <a:picLocks noChangeAspect="1"/>
-            </p:cNvPicPr>
-            <p:nvPr/>
-          </p:nvPicPr>
-          <p:blipFill>
-            <a:blip r:embed="rId2"/>
-            <a:stretch>
-              <a:fillRect/>
-            </a:stretch>
-          </p:blipFill>
-          <p:spPr>
-            <a:xfrm>
-              <a:off x="-3492" y="0"/>
-              <a:ext cx="10771831" cy="1970069"/>
-            </a:xfrm>
-            <a:prstGeom prst="rect">
-              <a:avLst/>
-            </a:prstGeom>
-          </p:spPr>
-        </p:pic>
-        <p:sp>
-          <p:nvSpPr>
-            <p:cNvPr id="7" name="TextBox 6">
-              <a:extLst>
-                <a:ext uri="{FF2B5EF4-FFF2-40B4-BE49-F238E27FC236}">
-                  <a16:creationId xmlns:a16="http://schemas.microsoft.com/office/drawing/2014/main" id="{F3E7F943-E11E-78E4-7339-F602F2C81C97}"/>
-                </a:ext>
-              </a:extLst>
-            </p:cNvPr>
-            <p:cNvSpPr txBox="1"/>
-            <p:nvPr/>
-          </p:nvSpPr>
-          <p:spPr>
-            <a:xfrm>
-              <a:off x="-17459" y="2065235"/>
-              <a:ext cx="10799764" cy="2339102"/>
-            </a:xfrm>
-            <a:prstGeom prst="rect">
-              <a:avLst/>
-            </a:prstGeom>
-            <a:noFill/>
-          </p:spPr>
-          <p:txBody>
-            <a:bodyPr wrap="square">
-              <a:spAutoFit/>
-            </a:bodyPr>
-            <a:lstStyle/>
-            <a:p>
-              <a:r>
-                <a:rPr lang="ko-KR" altLang="en-US" sz="3650" b="1" dirty="0"/>
-                <a:t>✍️ 개별 직접 등록</a:t>
-              </a:r>
-              <a:r>
-                <a:rPr lang="en-US" altLang="ko-KR" sz="3650" b="1" dirty="0"/>
-                <a:t>:</a:t>
-              </a:r>
-              <a:r>
-                <a:rPr lang="ko-KR" altLang="en-US" sz="3650" dirty="0"/>
-                <a:t> 품목코드</a:t>
-              </a:r>
-              <a:r>
-                <a:rPr lang="en-US" altLang="ko-KR" sz="3650" dirty="0"/>
-                <a:t>, </a:t>
-              </a:r>
-              <a:r>
-                <a:rPr lang="ko-KR" altLang="en-US" sz="3650" dirty="0"/>
-                <a:t>품명</a:t>
-              </a:r>
-              <a:r>
-                <a:rPr lang="en-US" altLang="ko-KR" sz="3650" dirty="0"/>
-                <a:t>, </a:t>
-              </a:r>
-              <a:r>
-                <a:rPr lang="ko-KR" altLang="en-US" sz="3650" dirty="0"/>
-                <a:t>규격</a:t>
-              </a:r>
-              <a:r>
-                <a:rPr lang="en-US" altLang="ko-KR" sz="3650" dirty="0"/>
-                <a:t>, </a:t>
-              </a:r>
-              <a:r>
-                <a:rPr lang="ko-KR" altLang="en-US" sz="3650" dirty="0"/>
-                <a:t>분류</a:t>
-              </a:r>
-              <a:r>
-                <a:rPr lang="en-US" altLang="ko-KR" sz="3650" dirty="0"/>
-                <a:t>, </a:t>
-              </a:r>
-              <a:r>
-                <a:rPr lang="ko-KR" altLang="en-US" sz="3650" dirty="0"/>
-                <a:t>사진</a:t>
-              </a:r>
-              <a:r>
-                <a:rPr lang="en-US" altLang="ko-KR" sz="3650" dirty="0"/>
-                <a:t>, </a:t>
-              </a:r>
-              <a:r>
-                <a:rPr lang="ko-KR" altLang="en-US" sz="3650" dirty="0"/>
-                <a:t>초기 재고 수량 등을 직접 입력하여 신규 등록합니다</a:t>
-              </a:r>
-              <a:r>
-                <a:rPr lang="en-US" altLang="ko-KR" sz="3650" dirty="0"/>
-                <a:t>. DB</a:t>
-              </a:r>
-              <a:r>
-                <a:rPr lang="ko-KR" altLang="en-US" sz="3650" dirty="0"/>
-                <a:t>에 등록되어 있지 않은 완전 신규 품목을 등록하는 기능입니다</a:t>
-              </a:r>
-              <a:r>
-                <a:rPr lang="en-US" altLang="ko-KR" sz="3650" dirty="0"/>
-                <a:t>.</a:t>
-              </a:r>
-              <a:endParaRPr lang="ko-KR" altLang="en-US" sz="3650" dirty="0"/>
-            </a:p>
-          </p:txBody>
-        </p:sp>
-      </p:grpSp>
-      <p:grpSp>
-        <p:nvGrpSpPr>
-          <p:cNvPr id="19" name="그룹 18">
-            <a:extLst>
-              <a:ext uri="{FF2B5EF4-FFF2-40B4-BE49-F238E27FC236}">
-                <a16:creationId xmlns:a16="http://schemas.microsoft.com/office/drawing/2014/main" id="{B53FF5F2-8073-8825-4897-3E8990A7F45C}"/>
-              </a:ext>
-            </a:extLst>
-          </p:cNvPr>
-          <p:cNvGrpSpPr/>
-          <p:nvPr/>
-        </p:nvGrpSpPr>
-        <p:grpSpPr>
-          <a:xfrm>
-            <a:off x="5237" y="5865111"/>
-            <a:ext cx="10785797" cy="3169620"/>
-            <a:chOff x="27933" y="4926164"/>
-            <a:chExt cx="10785797" cy="3169620"/>
-          </a:xfrm>
-        </p:grpSpPr>
-        <p:pic>
-          <p:nvPicPr>
-            <p:cNvPr id="9" name="그림 8">
-              <a:extLst>
-                <a:ext uri="{FF2B5EF4-FFF2-40B4-BE49-F238E27FC236}">
-                  <a16:creationId xmlns:a16="http://schemas.microsoft.com/office/drawing/2014/main" id="{14B51362-6C77-4595-5374-37DD9D9D93F1}"/>
-                </a:ext>
-              </a:extLst>
-            </p:cNvPr>
-            <p:cNvPicPr>
-              <a:picLocks noChangeAspect="1"/>
-            </p:cNvPicPr>
-            <p:nvPr/>
-          </p:nvPicPr>
-          <p:blipFill>
-            <a:blip r:embed="rId3"/>
-            <a:stretch>
-              <a:fillRect/>
-            </a:stretch>
-          </p:blipFill>
-          <p:spPr>
-            <a:xfrm>
-              <a:off x="27933" y="4926164"/>
-              <a:ext cx="10785797" cy="1920320"/>
-            </a:xfrm>
-            <a:prstGeom prst="rect">
-              <a:avLst/>
-            </a:prstGeom>
-          </p:spPr>
-        </p:pic>
-        <p:sp>
-          <p:nvSpPr>
-            <p:cNvPr id="11" name="TextBox 10">
-              <a:extLst>
-                <a:ext uri="{FF2B5EF4-FFF2-40B4-BE49-F238E27FC236}">
-                  <a16:creationId xmlns:a16="http://schemas.microsoft.com/office/drawing/2014/main" id="{BDE810C5-2E12-9F1D-85B2-9FD9EB97757D}"/>
-                </a:ext>
-              </a:extLst>
-            </p:cNvPr>
-            <p:cNvSpPr txBox="1"/>
-            <p:nvPr/>
-          </p:nvSpPr>
-          <p:spPr>
-            <a:xfrm>
-              <a:off x="27933" y="6880067"/>
-              <a:ext cx="10757864" cy="1215717"/>
-            </a:xfrm>
-            <a:prstGeom prst="rect">
-              <a:avLst/>
-            </a:prstGeom>
-            <a:noFill/>
-          </p:spPr>
-          <p:txBody>
-            <a:bodyPr wrap="square">
-              <a:spAutoFit/>
-            </a:bodyPr>
-            <a:lstStyle/>
-            <a:p>
-              <a:r>
-                <a:rPr lang="ko-KR" altLang="en-US" sz="3650" b="1" dirty="0"/>
-                <a:t>✏️ 기존 품목 수정</a:t>
-              </a:r>
-              <a:r>
-                <a:rPr lang="en-US" altLang="ko-KR" sz="3650" b="1" dirty="0"/>
-                <a:t>:</a:t>
-              </a:r>
-              <a:r>
-                <a:rPr lang="ko-KR" altLang="en-US" sz="3650" dirty="0"/>
-                <a:t> 기존 자재의 품명</a:t>
-              </a:r>
-              <a:r>
-                <a:rPr lang="en-US" altLang="ko-KR" sz="3650" dirty="0"/>
-                <a:t>, </a:t>
-              </a:r>
-              <a:r>
-                <a:rPr lang="ko-KR" altLang="en-US" sz="3650" dirty="0"/>
-                <a:t>단가</a:t>
-              </a:r>
-              <a:r>
-                <a:rPr lang="en-US" altLang="ko-KR" sz="3650" dirty="0"/>
-                <a:t>, </a:t>
-              </a:r>
-              <a:r>
-                <a:rPr lang="ko-KR" altLang="en-US" sz="3650" dirty="0"/>
-                <a:t>비고 및 첨부 사진을 수정하거나 교체합니다</a:t>
-              </a:r>
-              <a:r>
-                <a:rPr lang="en-US" altLang="ko-KR" sz="3650" dirty="0"/>
-                <a:t>.</a:t>
-              </a:r>
-              <a:endParaRPr lang="ko-KR" altLang="en-US" sz="3650" dirty="0"/>
-            </a:p>
-          </p:txBody>
-        </p:sp>
-      </p:grpSp>
-      <p:grpSp>
-        <p:nvGrpSpPr>
-          <p:cNvPr id="18" name="그룹 17">
-            <a:extLst>
-              <a:ext uri="{FF2B5EF4-FFF2-40B4-BE49-F238E27FC236}">
-                <a16:creationId xmlns:a16="http://schemas.microsoft.com/office/drawing/2014/main" id="{7FC40734-EF12-C28C-1C57-E6B2EBB24D6E}"/>
-              </a:ext>
-            </a:extLst>
-          </p:cNvPr>
-          <p:cNvGrpSpPr/>
-          <p:nvPr/>
-        </p:nvGrpSpPr>
-        <p:grpSpPr>
-          <a:xfrm>
-            <a:off x="19203" y="10495504"/>
-            <a:ext cx="10757864" cy="3678947"/>
-            <a:chOff x="20949" y="9458842"/>
-            <a:chExt cx="10757864" cy="3678947"/>
-          </a:xfrm>
-        </p:grpSpPr>
-        <p:pic>
-          <p:nvPicPr>
-            <p:cNvPr id="15" name="그림 14">
-              <a:extLst>
-                <a:ext uri="{FF2B5EF4-FFF2-40B4-BE49-F238E27FC236}">
-                  <a16:creationId xmlns:a16="http://schemas.microsoft.com/office/drawing/2014/main" id="{22CA19E0-14D7-047E-2223-9207EC00FC2B}"/>
-                </a:ext>
-              </a:extLst>
-            </p:cNvPr>
-            <p:cNvPicPr>
-              <a:picLocks noChangeAspect="1"/>
-            </p:cNvPicPr>
-            <p:nvPr/>
-          </p:nvPicPr>
-          <p:blipFill>
-            <a:blip r:embed="rId4"/>
-            <a:stretch>
-              <a:fillRect/>
-            </a:stretch>
-          </p:blipFill>
-          <p:spPr>
-            <a:xfrm>
-              <a:off x="20949" y="9458842"/>
-              <a:ext cx="10757864" cy="1901537"/>
-            </a:xfrm>
-            <a:prstGeom prst="rect">
-              <a:avLst/>
-            </a:prstGeom>
-          </p:spPr>
-        </p:pic>
-        <p:sp>
-          <p:nvSpPr>
-            <p:cNvPr id="17" name="TextBox 16">
-              <a:extLst>
-                <a:ext uri="{FF2B5EF4-FFF2-40B4-BE49-F238E27FC236}">
-                  <a16:creationId xmlns:a16="http://schemas.microsoft.com/office/drawing/2014/main" id="{187E6F58-2DE4-E77A-F910-312618A5EACA}"/>
-                </a:ext>
-              </a:extLst>
-            </p:cNvPr>
-            <p:cNvSpPr txBox="1"/>
-            <p:nvPr/>
-          </p:nvSpPr>
-          <p:spPr>
-            <a:xfrm>
-              <a:off x="20949" y="11360379"/>
-              <a:ext cx="10757864" cy="1777410"/>
-            </a:xfrm>
-            <a:prstGeom prst="rect">
-              <a:avLst/>
-            </a:prstGeom>
-            <a:noFill/>
-          </p:spPr>
-          <p:txBody>
-            <a:bodyPr wrap="square">
-              <a:spAutoFit/>
-            </a:bodyPr>
-            <a:lstStyle/>
-            <a:p>
-              <a:r>
-                <a:rPr lang="ko-KR" altLang="en-US" sz="3650" b="1" dirty="0"/>
-                <a:t>📂 기초 데이터 엑셀 일괄 등록</a:t>
-              </a:r>
-              <a:r>
-                <a:rPr lang="en-US" altLang="ko-KR" sz="3650" b="1" dirty="0"/>
-                <a:t>:</a:t>
-              </a:r>
-              <a:r>
-                <a:rPr lang="ko-KR" altLang="en-US" sz="3650" dirty="0"/>
-                <a:t> 대량의 자재 목록을 엑셀 파일</a:t>
-              </a:r>
-              <a:r>
-                <a:rPr lang="en-US" altLang="ko-KR" sz="3650" dirty="0"/>
-                <a:t>(.xlsx)</a:t>
-              </a:r>
-              <a:r>
-                <a:rPr lang="ko-KR" altLang="en-US" sz="3650" dirty="0"/>
-                <a:t>로 한번에 일괄 업로드합니다</a:t>
-              </a:r>
-              <a:r>
-                <a:rPr lang="en-US" altLang="ko-KR" sz="3650" dirty="0"/>
-                <a:t>. </a:t>
-              </a:r>
-              <a:r>
-                <a:rPr lang="ko-KR" altLang="en-US" sz="3650" dirty="0"/>
-                <a:t>양식 파일은 </a:t>
-              </a:r>
-              <a:r>
-                <a:rPr lang="en-US" altLang="ko-KR" sz="3650" dirty="0" err="1"/>
-                <a:t>my_erp</a:t>
-              </a:r>
-              <a:r>
-                <a:rPr lang="en-US" altLang="ko-KR" sz="3650" dirty="0"/>
-                <a:t> </a:t>
-              </a:r>
-              <a:r>
-                <a:rPr lang="ko-KR" altLang="en-US" sz="3650" dirty="0"/>
-                <a:t>폴더 안에 있습니다</a:t>
-              </a:r>
-              <a:r>
-                <a:rPr lang="en-US" altLang="ko-KR" sz="3650" dirty="0"/>
-                <a:t>.</a:t>
-              </a:r>
-              <a:endParaRPr lang="ko-KR" altLang="en-US" sz="3650" dirty="0"/>
-            </a:p>
-          </p:txBody>
-        </p:sp>
-      </p:grpSp>
-    </p:spTree>
-    <p:extLst>
-      <p:ext uri="{BB962C8B-B14F-4D97-AF65-F5344CB8AC3E}">
-        <p14:creationId xmlns:p14="http://schemas.microsoft.com/office/powerpoint/2010/main" val="3790577884"/>
       </p:ext>
     </p:extLst>
   </p:cSld>

--- a/manual.pptx
+++ b/manual.pptx
@@ -2,24 +2,29 @@
 <file path=ppt/presentation.xml><?xml version="1.0" encoding="utf-8"?>
 <p:presentation xmlns:a="http://schemas.openxmlformats.org/drawingml/2006/main" xmlns:r="http://schemas.openxmlformats.org/officeDocument/2006/relationships" xmlns:p="http://schemas.openxmlformats.org/presentationml/2006/main" saveSubsetFonts="1">
   <p:sldMasterIdLst>
-    <p:sldMasterId id="2147483696" r:id="rId1"/>
+    <p:sldMasterId id="2147483672" r:id="rId1"/>
   </p:sldMasterIdLst>
   <p:sldIdLst>
-    <p:sldId id="266" r:id="rId2"/>
-    <p:sldId id="256" r:id="rId3"/>
+    <p:sldId id="256" r:id="rId2"/>
+    <p:sldId id="258" r:id="rId3"/>
     <p:sldId id="257" r:id="rId4"/>
-    <p:sldId id="258" r:id="rId5"/>
+    <p:sldId id="259" r:id="rId5"/>
     <p:sldId id="260" r:id="rId6"/>
-    <p:sldId id="268" r:id="rId7"/>
-    <p:sldId id="259" r:id="rId8"/>
+    <p:sldId id="262" r:id="rId7"/>
+    <p:sldId id="271" r:id="rId8"/>
     <p:sldId id="261" r:id="rId9"/>
-    <p:sldId id="265" r:id="rId10"/>
-    <p:sldId id="262" r:id="rId11"/>
-    <p:sldId id="263" r:id="rId12"/>
-    <p:sldId id="264" r:id="rId13"/>
+    <p:sldId id="263" r:id="rId10"/>
+    <p:sldId id="264" r:id="rId11"/>
+    <p:sldId id="265" r:id="rId12"/>
+    <p:sldId id="266" r:id="rId13"/>
     <p:sldId id="267" r:id="rId14"/>
+    <p:sldId id="268" r:id="rId15"/>
+    <p:sldId id="269" r:id="rId16"/>
+    <p:sldId id="270" r:id="rId17"/>
+    <p:sldId id="272" r:id="rId18"/>
+    <p:sldId id="273" r:id="rId19"/>
   </p:sldIdLst>
-  <p:sldSz cx="10799763" cy="14400213"/>
+  <p:sldSz cx="9144000" cy="6858000" type="screen4x3"/>
   <p:notesSz cx="6858000" cy="9144000"/>
   <p:defaultTextStyle>
     <a:defPPr>
@@ -116,11 +121,6 @@
       </a:defRPr>
     </a:lvl9pPr>
   </p:defaultTextStyle>
-  <p:extLst>
-    <p:ext uri="{EFAFB233-063F-42B5-8137-9DF3F51BA10A}">
-      <p15:sldGuideLst xmlns:p15="http://schemas.microsoft.com/office/powerpoint/2012/main"/>
-    </p:ext>
-  </p:extLst>
 </p:presentation>
 </file>
 
@@ -153,15 +153,15 @@
         </p:nvSpPr>
         <p:spPr>
           <a:xfrm>
-            <a:off x="809982" y="2356703"/>
-            <a:ext cx="9179799" cy="5013407"/>
+            <a:off x="685800" y="1122363"/>
+            <a:ext cx="7772400" cy="2387600"/>
           </a:xfrm>
         </p:spPr>
         <p:txBody>
           <a:bodyPr anchor="b"/>
           <a:lstStyle>
             <a:lvl1pPr algn="ctr">
-              <a:defRPr sz="7087"/>
+              <a:defRPr sz="6000"/>
             </a:lvl1pPr>
           </a:lstStyle>
           <a:p>
@@ -185,8 +185,8 @@
         </p:nvSpPr>
         <p:spPr>
           <a:xfrm>
-            <a:off x="1349971" y="7563446"/>
-            <a:ext cx="8099822" cy="3476717"/>
+            <a:off x="1143000" y="3602038"/>
+            <a:ext cx="6858000" cy="1655762"/>
           </a:xfrm>
         </p:spPr>
         <p:txBody>
@@ -194,39 +194,39 @@
           <a:lstStyle>
             <a:lvl1pPr marL="0" indent="0" algn="ctr">
               <a:buNone/>
-              <a:defRPr sz="2835"/>
+              <a:defRPr sz="2400"/>
             </a:lvl1pPr>
-            <a:lvl2pPr marL="539999" indent="0" algn="ctr">
-              <a:buNone/>
-              <a:defRPr sz="2362"/>
+            <a:lvl2pPr marL="457200" indent="0" algn="ctr">
+              <a:buNone/>
+              <a:defRPr sz="2000"/>
             </a:lvl2pPr>
-            <a:lvl3pPr marL="1079998" indent="0" algn="ctr">
-              <a:buNone/>
-              <a:defRPr sz="2126"/>
+            <a:lvl3pPr marL="914400" indent="0" algn="ctr">
+              <a:buNone/>
+              <a:defRPr sz="1800"/>
             </a:lvl3pPr>
-            <a:lvl4pPr marL="1619997" indent="0" algn="ctr">
-              <a:buNone/>
-              <a:defRPr sz="1890"/>
+            <a:lvl4pPr marL="1371600" indent="0" algn="ctr">
+              <a:buNone/>
+              <a:defRPr sz="1600"/>
             </a:lvl4pPr>
-            <a:lvl5pPr marL="2159996" indent="0" algn="ctr">
-              <a:buNone/>
-              <a:defRPr sz="1890"/>
+            <a:lvl5pPr marL="1828800" indent="0" algn="ctr">
+              <a:buNone/>
+              <a:defRPr sz="1600"/>
             </a:lvl5pPr>
-            <a:lvl6pPr marL="2699995" indent="0" algn="ctr">
-              <a:buNone/>
-              <a:defRPr sz="1890"/>
+            <a:lvl6pPr marL="2286000" indent="0" algn="ctr">
+              <a:buNone/>
+              <a:defRPr sz="1600"/>
             </a:lvl6pPr>
-            <a:lvl7pPr marL="3239994" indent="0" algn="ctr">
-              <a:buNone/>
-              <a:defRPr sz="1890"/>
+            <a:lvl7pPr marL="2743200" indent="0" algn="ctr">
+              <a:buNone/>
+              <a:defRPr sz="1600"/>
             </a:lvl7pPr>
-            <a:lvl8pPr marL="3779992" indent="0" algn="ctr">
-              <a:buNone/>
-              <a:defRPr sz="1890"/>
+            <a:lvl8pPr marL="3200400" indent="0" algn="ctr">
+              <a:buNone/>
+              <a:defRPr sz="1600"/>
             </a:lvl8pPr>
-            <a:lvl9pPr marL="4319991" indent="0" algn="ctr">
-              <a:buNone/>
-              <a:defRPr sz="1890"/>
+            <a:lvl9pPr marL="3657600" indent="0" algn="ctr">
+              <a:buNone/>
+              <a:defRPr sz="1600"/>
             </a:lvl9pPr>
           </a:lstStyle>
           <a:p>
@@ -253,9 +253,9 @@
           <a:bodyPr/>
           <a:lstStyle/>
           <a:p>
-            <a:fld id="{15EE0AB8-33DC-4B5B-A688-FFBB75A029EA}" type="datetimeFigureOut">
+            <a:fld id="{C51DE5AC-CE6A-4BF3-88B0-C67A936732FF}" type="datetimeFigureOut">
               <a:rPr lang="ko-KR" altLang="en-US" smtClean="0"/>
-              <a:t>2026-10-19</a:t>
+              <a:t>2026-10-26</a:t>
             </a:fld>
             <a:endParaRPr lang="ko-KR" altLang="en-US"/>
           </a:p>
@@ -295,7 +295,7 @@
           <a:bodyPr/>
           <a:lstStyle/>
           <a:p>
-            <a:fld id="{874D6781-1ACF-4161-B154-8F96D6F10320}" type="slidenum">
+            <a:fld id="{DECD31DD-CD27-4566-B957-3307A87E32A4}" type="slidenum">
               <a:rPr lang="ko-KR" altLang="en-US" smtClean="0"/>
               <a:t>‹#›</a:t>
             </a:fld>
@@ -306,7 +306,7 @@
     </p:spTree>
     <p:extLst>
       <p:ext uri="{BB962C8B-B14F-4D97-AF65-F5344CB8AC3E}">
-        <p14:creationId xmlns:p14="http://schemas.microsoft.com/office/powerpoint/2010/main" val="1081145057"/>
+        <p14:creationId xmlns:p14="http://schemas.microsoft.com/office/powerpoint/2010/main" val="2043899181"/>
       </p:ext>
     </p:extLst>
   </p:cSld>
@@ -423,9 +423,9 @@
           <a:bodyPr/>
           <a:lstStyle/>
           <a:p>
-            <a:fld id="{15EE0AB8-33DC-4B5B-A688-FFBB75A029EA}" type="datetimeFigureOut">
+            <a:fld id="{C51DE5AC-CE6A-4BF3-88B0-C67A936732FF}" type="datetimeFigureOut">
               <a:rPr lang="ko-KR" altLang="en-US" smtClean="0"/>
-              <a:t>2026-10-19</a:t>
+              <a:t>2026-10-26</a:t>
             </a:fld>
             <a:endParaRPr lang="ko-KR" altLang="en-US"/>
           </a:p>
@@ -465,7 +465,7 @@
           <a:bodyPr/>
           <a:lstStyle/>
           <a:p>
-            <a:fld id="{874D6781-1ACF-4161-B154-8F96D6F10320}" type="slidenum">
+            <a:fld id="{DECD31DD-CD27-4566-B957-3307A87E32A4}" type="slidenum">
               <a:rPr lang="ko-KR" altLang="en-US" smtClean="0"/>
               <a:t>‹#›</a:t>
             </a:fld>
@@ -476,7 +476,7 @@
     </p:spTree>
     <p:extLst>
       <p:ext uri="{BB962C8B-B14F-4D97-AF65-F5344CB8AC3E}">
-        <p14:creationId xmlns:p14="http://schemas.microsoft.com/office/powerpoint/2010/main" val="46468429"/>
+        <p14:creationId xmlns:p14="http://schemas.microsoft.com/office/powerpoint/2010/main" val="1739779514"/>
       </p:ext>
     </p:extLst>
   </p:cSld>
@@ -515,8 +515,8 @@
         </p:nvSpPr>
         <p:spPr>
           <a:xfrm>
-            <a:off x="7728581" y="766678"/>
-            <a:ext cx="2328699" cy="12203515"/>
+            <a:off x="6543675" y="365125"/>
+            <a:ext cx="1971675" cy="5811838"/>
           </a:xfrm>
         </p:spPr>
         <p:txBody>
@@ -543,8 +543,8 @@
         </p:nvSpPr>
         <p:spPr>
           <a:xfrm>
-            <a:off x="742484" y="766678"/>
-            <a:ext cx="6851100" cy="12203515"/>
+            <a:off x="628650" y="365125"/>
+            <a:ext cx="5800725" cy="5811838"/>
           </a:xfrm>
         </p:spPr>
         <p:txBody>
@@ -603,9 +603,9 @@
           <a:bodyPr/>
           <a:lstStyle/>
           <a:p>
-            <a:fld id="{15EE0AB8-33DC-4B5B-A688-FFBB75A029EA}" type="datetimeFigureOut">
+            <a:fld id="{C51DE5AC-CE6A-4BF3-88B0-C67A936732FF}" type="datetimeFigureOut">
               <a:rPr lang="ko-KR" altLang="en-US" smtClean="0"/>
-              <a:t>2026-10-19</a:t>
+              <a:t>2026-10-26</a:t>
             </a:fld>
             <a:endParaRPr lang="ko-KR" altLang="en-US"/>
           </a:p>
@@ -645,7 +645,7 @@
           <a:bodyPr/>
           <a:lstStyle/>
           <a:p>
-            <a:fld id="{874D6781-1ACF-4161-B154-8F96D6F10320}" type="slidenum">
+            <a:fld id="{DECD31DD-CD27-4566-B957-3307A87E32A4}" type="slidenum">
               <a:rPr lang="ko-KR" altLang="en-US" smtClean="0"/>
               <a:t>‹#›</a:t>
             </a:fld>
@@ -656,7 +656,7 @@
     </p:spTree>
     <p:extLst>
       <p:ext uri="{BB962C8B-B14F-4D97-AF65-F5344CB8AC3E}">
-        <p14:creationId xmlns:p14="http://schemas.microsoft.com/office/powerpoint/2010/main" val="3652768907"/>
+        <p14:creationId xmlns:p14="http://schemas.microsoft.com/office/powerpoint/2010/main" val="2346665069"/>
       </p:ext>
     </p:extLst>
   </p:cSld>
@@ -773,9 +773,9 @@
           <a:bodyPr/>
           <a:lstStyle/>
           <a:p>
-            <a:fld id="{15EE0AB8-33DC-4B5B-A688-FFBB75A029EA}" type="datetimeFigureOut">
+            <a:fld id="{C51DE5AC-CE6A-4BF3-88B0-C67A936732FF}" type="datetimeFigureOut">
               <a:rPr lang="ko-KR" altLang="en-US" smtClean="0"/>
-              <a:t>2026-10-19</a:t>
+              <a:t>2026-10-26</a:t>
             </a:fld>
             <a:endParaRPr lang="ko-KR" altLang="en-US"/>
           </a:p>
@@ -815,7 +815,7 @@
           <a:bodyPr/>
           <a:lstStyle/>
           <a:p>
-            <a:fld id="{874D6781-1ACF-4161-B154-8F96D6F10320}" type="slidenum">
+            <a:fld id="{DECD31DD-CD27-4566-B957-3307A87E32A4}" type="slidenum">
               <a:rPr lang="ko-KR" altLang="en-US" smtClean="0"/>
               <a:t>‹#›</a:t>
             </a:fld>
@@ -826,7 +826,7 @@
     </p:spTree>
     <p:extLst>
       <p:ext uri="{BB962C8B-B14F-4D97-AF65-F5344CB8AC3E}">
-        <p14:creationId xmlns:p14="http://schemas.microsoft.com/office/powerpoint/2010/main" val="3020197593"/>
+        <p14:creationId xmlns:p14="http://schemas.microsoft.com/office/powerpoint/2010/main" val="673353064"/>
       </p:ext>
     </p:extLst>
   </p:cSld>
@@ -865,15 +865,15 @@
         </p:nvSpPr>
         <p:spPr>
           <a:xfrm>
-            <a:off x="736859" y="3590057"/>
-            <a:ext cx="9314796" cy="5990088"/>
+            <a:off x="623888" y="1709739"/>
+            <a:ext cx="7886700" cy="2852737"/>
           </a:xfrm>
         </p:spPr>
         <p:txBody>
           <a:bodyPr anchor="b"/>
           <a:lstStyle>
             <a:lvl1pPr>
-              <a:defRPr sz="7087"/>
+              <a:defRPr sz="6000"/>
             </a:lvl1pPr>
           </a:lstStyle>
           <a:p>
@@ -897,8 +897,8 @@
         </p:nvSpPr>
         <p:spPr>
           <a:xfrm>
-            <a:off x="736859" y="9636813"/>
-            <a:ext cx="9314796" cy="3150046"/>
+            <a:off x="623888" y="4589464"/>
+            <a:ext cx="7886700" cy="1500187"/>
           </a:xfrm>
         </p:spPr>
         <p:txBody>
@@ -906,15 +906,15 @@
           <a:lstStyle>
             <a:lvl1pPr marL="0" indent="0">
               <a:buNone/>
-              <a:defRPr sz="2835">
+              <a:defRPr sz="2400">
                 <a:solidFill>
                   <a:schemeClr val="tx1"/>
                 </a:solidFill>
               </a:defRPr>
             </a:lvl1pPr>
-            <a:lvl2pPr marL="539999" indent="0">
-              <a:buNone/>
-              <a:defRPr sz="2362">
+            <a:lvl2pPr marL="457200" indent="0">
+              <a:buNone/>
+              <a:defRPr sz="2000">
                 <a:solidFill>
                   <a:schemeClr val="tx1">
                     <a:tint val="75000"/>
@@ -922,9 +922,9 @@
                 </a:solidFill>
               </a:defRPr>
             </a:lvl2pPr>
-            <a:lvl3pPr marL="1079998" indent="0">
-              <a:buNone/>
-              <a:defRPr sz="2126">
+            <a:lvl3pPr marL="914400" indent="0">
+              <a:buNone/>
+              <a:defRPr sz="1800">
                 <a:solidFill>
                   <a:schemeClr val="tx1">
                     <a:tint val="75000"/>
@@ -932,9 +932,9 @@
                 </a:solidFill>
               </a:defRPr>
             </a:lvl3pPr>
-            <a:lvl4pPr marL="1619997" indent="0">
-              <a:buNone/>
-              <a:defRPr sz="1890">
+            <a:lvl4pPr marL="1371600" indent="0">
+              <a:buNone/>
+              <a:defRPr sz="1600">
                 <a:solidFill>
                   <a:schemeClr val="tx1">
                     <a:tint val="75000"/>
@@ -942,9 +942,9 @@
                 </a:solidFill>
               </a:defRPr>
             </a:lvl4pPr>
-            <a:lvl5pPr marL="2159996" indent="0">
-              <a:buNone/>
-              <a:defRPr sz="1890">
+            <a:lvl5pPr marL="1828800" indent="0">
+              <a:buNone/>
+              <a:defRPr sz="1600">
                 <a:solidFill>
                   <a:schemeClr val="tx1">
                     <a:tint val="75000"/>
@@ -952,9 +952,9 @@
                 </a:solidFill>
               </a:defRPr>
             </a:lvl5pPr>
-            <a:lvl6pPr marL="2699995" indent="0">
-              <a:buNone/>
-              <a:defRPr sz="1890">
+            <a:lvl6pPr marL="2286000" indent="0">
+              <a:buNone/>
+              <a:defRPr sz="1600">
                 <a:solidFill>
                   <a:schemeClr val="tx1">
                     <a:tint val="75000"/>
@@ -962,9 +962,9 @@
                 </a:solidFill>
               </a:defRPr>
             </a:lvl6pPr>
-            <a:lvl7pPr marL="3239994" indent="0">
-              <a:buNone/>
-              <a:defRPr sz="1890">
+            <a:lvl7pPr marL="2743200" indent="0">
+              <a:buNone/>
+              <a:defRPr sz="1600">
                 <a:solidFill>
                   <a:schemeClr val="tx1">
                     <a:tint val="75000"/>
@@ -972,9 +972,9 @@
                 </a:solidFill>
               </a:defRPr>
             </a:lvl7pPr>
-            <a:lvl8pPr marL="3779992" indent="0">
-              <a:buNone/>
-              <a:defRPr sz="1890">
+            <a:lvl8pPr marL="3200400" indent="0">
+              <a:buNone/>
+              <a:defRPr sz="1600">
                 <a:solidFill>
                   <a:schemeClr val="tx1">
                     <a:tint val="75000"/>
@@ -982,9 +982,9 @@
                 </a:solidFill>
               </a:defRPr>
             </a:lvl8pPr>
-            <a:lvl9pPr marL="4319991" indent="0">
-              <a:buNone/>
-              <a:defRPr sz="1890">
+            <a:lvl9pPr marL="3657600" indent="0">
+              <a:buNone/>
+              <a:defRPr sz="1600">
                 <a:solidFill>
                   <a:schemeClr val="tx1">
                     <a:tint val="75000"/>
@@ -1017,9 +1017,9 @@
           <a:bodyPr/>
           <a:lstStyle/>
           <a:p>
-            <a:fld id="{15EE0AB8-33DC-4B5B-A688-FFBB75A029EA}" type="datetimeFigureOut">
+            <a:fld id="{C51DE5AC-CE6A-4BF3-88B0-C67A936732FF}" type="datetimeFigureOut">
               <a:rPr lang="ko-KR" altLang="en-US" smtClean="0"/>
-              <a:t>2026-10-19</a:t>
+              <a:t>2026-10-26</a:t>
             </a:fld>
             <a:endParaRPr lang="ko-KR" altLang="en-US"/>
           </a:p>
@@ -1059,7 +1059,7 @@
           <a:bodyPr/>
           <a:lstStyle/>
           <a:p>
-            <a:fld id="{874D6781-1ACF-4161-B154-8F96D6F10320}" type="slidenum">
+            <a:fld id="{DECD31DD-CD27-4566-B957-3307A87E32A4}" type="slidenum">
               <a:rPr lang="ko-KR" altLang="en-US" smtClean="0"/>
               <a:t>‹#›</a:t>
             </a:fld>
@@ -1070,7 +1070,7 @@
     </p:spTree>
     <p:extLst>
       <p:ext uri="{BB962C8B-B14F-4D97-AF65-F5344CB8AC3E}">
-        <p14:creationId xmlns:p14="http://schemas.microsoft.com/office/powerpoint/2010/main" val="2762670143"/>
+        <p14:creationId xmlns:p14="http://schemas.microsoft.com/office/powerpoint/2010/main" val="2621198793"/>
       </p:ext>
     </p:extLst>
   </p:cSld>
@@ -1132,8 +1132,8 @@
         </p:nvSpPr>
         <p:spPr>
           <a:xfrm>
-            <a:off x="742484" y="3833390"/>
-            <a:ext cx="4589899" cy="9136803"/>
+            <a:off x="628650" y="1825625"/>
+            <a:ext cx="3886200" cy="4351338"/>
           </a:xfrm>
         </p:spPr>
         <p:txBody>
@@ -1189,8 +1189,8 @@
         </p:nvSpPr>
         <p:spPr>
           <a:xfrm>
-            <a:off x="5467380" y="3833390"/>
-            <a:ext cx="4589899" cy="9136803"/>
+            <a:off x="4629150" y="1825625"/>
+            <a:ext cx="3886200" cy="4351338"/>
           </a:xfrm>
         </p:spPr>
         <p:txBody>
@@ -1249,9 +1249,9 @@
           <a:bodyPr/>
           <a:lstStyle/>
           <a:p>
-            <a:fld id="{15EE0AB8-33DC-4B5B-A688-FFBB75A029EA}" type="datetimeFigureOut">
+            <a:fld id="{C51DE5AC-CE6A-4BF3-88B0-C67A936732FF}" type="datetimeFigureOut">
               <a:rPr lang="ko-KR" altLang="en-US" smtClean="0"/>
-              <a:t>2026-10-19</a:t>
+              <a:t>2026-10-26</a:t>
             </a:fld>
             <a:endParaRPr lang="ko-KR" altLang="en-US"/>
           </a:p>
@@ -1291,7 +1291,7 @@
           <a:bodyPr/>
           <a:lstStyle/>
           <a:p>
-            <a:fld id="{874D6781-1ACF-4161-B154-8F96D6F10320}" type="slidenum">
+            <a:fld id="{DECD31DD-CD27-4566-B957-3307A87E32A4}" type="slidenum">
               <a:rPr lang="ko-KR" altLang="en-US" smtClean="0"/>
               <a:t>‹#›</a:t>
             </a:fld>
@@ -1302,7 +1302,7 @@
     </p:spTree>
     <p:extLst>
       <p:ext uri="{BB962C8B-B14F-4D97-AF65-F5344CB8AC3E}">
-        <p14:creationId xmlns:p14="http://schemas.microsoft.com/office/powerpoint/2010/main" val="2981262627"/>
+        <p14:creationId xmlns:p14="http://schemas.microsoft.com/office/powerpoint/2010/main" val="1189102293"/>
       </p:ext>
     </p:extLst>
   </p:cSld>
@@ -1341,8 +1341,8 @@
         </p:nvSpPr>
         <p:spPr>
           <a:xfrm>
-            <a:off x="743890" y="766681"/>
-            <a:ext cx="9314796" cy="2783376"/>
+            <a:off x="629841" y="365126"/>
+            <a:ext cx="7886700" cy="1325563"/>
           </a:xfrm>
         </p:spPr>
         <p:txBody>
@@ -1369,8 +1369,8 @@
         </p:nvSpPr>
         <p:spPr>
           <a:xfrm>
-            <a:off x="743892" y="3530053"/>
-            <a:ext cx="4568805" cy="1730025"/>
+            <a:off x="629842" y="1681163"/>
+            <a:ext cx="3868340" cy="823912"/>
           </a:xfrm>
         </p:spPr>
         <p:txBody>
@@ -1378,39 +1378,39 @@
           <a:lstStyle>
             <a:lvl1pPr marL="0" indent="0">
               <a:buNone/>
-              <a:defRPr sz="2835" b="1"/>
+              <a:defRPr sz="2400" b="1"/>
             </a:lvl1pPr>
-            <a:lvl2pPr marL="539999" indent="0">
-              <a:buNone/>
-              <a:defRPr sz="2362" b="1"/>
+            <a:lvl2pPr marL="457200" indent="0">
+              <a:buNone/>
+              <a:defRPr sz="2000" b="1"/>
             </a:lvl2pPr>
-            <a:lvl3pPr marL="1079998" indent="0">
-              <a:buNone/>
-              <a:defRPr sz="2126" b="1"/>
+            <a:lvl3pPr marL="914400" indent="0">
+              <a:buNone/>
+              <a:defRPr sz="1800" b="1"/>
             </a:lvl3pPr>
-            <a:lvl4pPr marL="1619997" indent="0">
-              <a:buNone/>
-              <a:defRPr sz="1890" b="1"/>
+            <a:lvl4pPr marL="1371600" indent="0">
+              <a:buNone/>
+              <a:defRPr sz="1600" b="1"/>
             </a:lvl4pPr>
-            <a:lvl5pPr marL="2159996" indent="0">
-              <a:buNone/>
-              <a:defRPr sz="1890" b="1"/>
+            <a:lvl5pPr marL="1828800" indent="0">
+              <a:buNone/>
+              <a:defRPr sz="1600" b="1"/>
             </a:lvl5pPr>
-            <a:lvl6pPr marL="2699995" indent="0">
-              <a:buNone/>
-              <a:defRPr sz="1890" b="1"/>
+            <a:lvl6pPr marL="2286000" indent="0">
+              <a:buNone/>
+              <a:defRPr sz="1600" b="1"/>
             </a:lvl6pPr>
-            <a:lvl7pPr marL="3239994" indent="0">
-              <a:buNone/>
-              <a:defRPr sz="1890" b="1"/>
+            <a:lvl7pPr marL="2743200" indent="0">
+              <a:buNone/>
+              <a:defRPr sz="1600" b="1"/>
             </a:lvl7pPr>
-            <a:lvl8pPr marL="3779992" indent="0">
-              <a:buNone/>
-              <a:defRPr sz="1890" b="1"/>
+            <a:lvl8pPr marL="3200400" indent="0">
+              <a:buNone/>
+              <a:defRPr sz="1600" b="1"/>
             </a:lvl8pPr>
-            <a:lvl9pPr marL="4319991" indent="0">
-              <a:buNone/>
-              <a:defRPr sz="1890" b="1"/>
+            <a:lvl9pPr marL="3657600" indent="0">
+              <a:buNone/>
+              <a:defRPr sz="1600" b="1"/>
             </a:lvl9pPr>
           </a:lstStyle>
           <a:p>
@@ -1434,8 +1434,8 @@
         </p:nvSpPr>
         <p:spPr>
           <a:xfrm>
-            <a:off x="743892" y="5260078"/>
-            <a:ext cx="4568805" cy="7736782"/>
+            <a:off x="629842" y="2505075"/>
+            <a:ext cx="3868340" cy="3684588"/>
           </a:xfrm>
         </p:spPr>
         <p:txBody>
@@ -1491,8 +1491,8 @@
         </p:nvSpPr>
         <p:spPr>
           <a:xfrm>
-            <a:off x="5467381" y="3530053"/>
-            <a:ext cx="4591306" cy="1730025"/>
+            <a:off x="4629150" y="1681163"/>
+            <a:ext cx="3887391" cy="823912"/>
           </a:xfrm>
         </p:spPr>
         <p:txBody>
@@ -1500,39 +1500,39 @@
           <a:lstStyle>
             <a:lvl1pPr marL="0" indent="0">
               <a:buNone/>
-              <a:defRPr sz="2835" b="1"/>
+              <a:defRPr sz="2400" b="1"/>
             </a:lvl1pPr>
-            <a:lvl2pPr marL="539999" indent="0">
-              <a:buNone/>
-              <a:defRPr sz="2362" b="1"/>
+            <a:lvl2pPr marL="457200" indent="0">
+              <a:buNone/>
+              <a:defRPr sz="2000" b="1"/>
             </a:lvl2pPr>
-            <a:lvl3pPr marL="1079998" indent="0">
-              <a:buNone/>
-              <a:defRPr sz="2126" b="1"/>
+            <a:lvl3pPr marL="914400" indent="0">
+              <a:buNone/>
+              <a:defRPr sz="1800" b="1"/>
             </a:lvl3pPr>
-            <a:lvl4pPr marL="1619997" indent="0">
-              <a:buNone/>
-              <a:defRPr sz="1890" b="1"/>
+            <a:lvl4pPr marL="1371600" indent="0">
+              <a:buNone/>
+              <a:defRPr sz="1600" b="1"/>
             </a:lvl4pPr>
-            <a:lvl5pPr marL="2159996" indent="0">
-              <a:buNone/>
-              <a:defRPr sz="1890" b="1"/>
+            <a:lvl5pPr marL="1828800" indent="0">
+              <a:buNone/>
+              <a:defRPr sz="1600" b="1"/>
             </a:lvl5pPr>
-            <a:lvl6pPr marL="2699995" indent="0">
-              <a:buNone/>
-              <a:defRPr sz="1890" b="1"/>
+            <a:lvl6pPr marL="2286000" indent="0">
+              <a:buNone/>
+              <a:defRPr sz="1600" b="1"/>
             </a:lvl6pPr>
-            <a:lvl7pPr marL="3239994" indent="0">
-              <a:buNone/>
-              <a:defRPr sz="1890" b="1"/>
+            <a:lvl7pPr marL="2743200" indent="0">
+              <a:buNone/>
+              <a:defRPr sz="1600" b="1"/>
             </a:lvl7pPr>
-            <a:lvl8pPr marL="3779992" indent="0">
-              <a:buNone/>
-              <a:defRPr sz="1890" b="1"/>
+            <a:lvl8pPr marL="3200400" indent="0">
+              <a:buNone/>
+              <a:defRPr sz="1600" b="1"/>
             </a:lvl8pPr>
-            <a:lvl9pPr marL="4319991" indent="0">
-              <a:buNone/>
-              <a:defRPr sz="1890" b="1"/>
+            <a:lvl9pPr marL="3657600" indent="0">
+              <a:buNone/>
+              <a:defRPr sz="1600" b="1"/>
             </a:lvl9pPr>
           </a:lstStyle>
           <a:p>
@@ -1556,8 +1556,8 @@
         </p:nvSpPr>
         <p:spPr>
           <a:xfrm>
-            <a:off x="5467381" y="5260078"/>
-            <a:ext cx="4591306" cy="7736782"/>
+            <a:off x="4629150" y="2505075"/>
+            <a:ext cx="3887391" cy="3684588"/>
           </a:xfrm>
         </p:spPr>
         <p:txBody>
@@ -1616,9 +1616,9 @@
           <a:bodyPr/>
           <a:lstStyle/>
           <a:p>
-            <a:fld id="{15EE0AB8-33DC-4B5B-A688-FFBB75A029EA}" type="datetimeFigureOut">
+            <a:fld id="{C51DE5AC-CE6A-4BF3-88B0-C67A936732FF}" type="datetimeFigureOut">
               <a:rPr lang="ko-KR" altLang="en-US" smtClean="0"/>
-              <a:t>2026-10-19</a:t>
+              <a:t>2026-10-26</a:t>
             </a:fld>
             <a:endParaRPr lang="ko-KR" altLang="en-US"/>
           </a:p>
@@ -1658,7 +1658,7 @@
           <a:bodyPr/>
           <a:lstStyle/>
           <a:p>
-            <a:fld id="{874D6781-1ACF-4161-B154-8F96D6F10320}" type="slidenum">
+            <a:fld id="{DECD31DD-CD27-4566-B957-3307A87E32A4}" type="slidenum">
               <a:rPr lang="ko-KR" altLang="en-US" smtClean="0"/>
               <a:t>‹#›</a:t>
             </a:fld>
@@ -1669,7 +1669,7 @@
     </p:spTree>
     <p:extLst>
       <p:ext uri="{BB962C8B-B14F-4D97-AF65-F5344CB8AC3E}">
-        <p14:creationId xmlns:p14="http://schemas.microsoft.com/office/powerpoint/2010/main" val="1227467100"/>
+        <p14:creationId xmlns:p14="http://schemas.microsoft.com/office/powerpoint/2010/main" val="2963639967"/>
       </p:ext>
     </p:extLst>
   </p:cSld>
@@ -1734,9 +1734,9 @@
           <a:bodyPr/>
           <a:lstStyle/>
           <a:p>
-            <a:fld id="{15EE0AB8-33DC-4B5B-A688-FFBB75A029EA}" type="datetimeFigureOut">
+            <a:fld id="{C51DE5AC-CE6A-4BF3-88B0-C67A936732FF}" type="datetimeFigureOut">
               <a:rPr lang="ko-KR" altLang="en-US" smtClean="0"/>
-              <a:t>2026-10-19</a:t>
+              <a:t>2026-10-26</a:t>
             </a:fld>
             <a:endParaRPr lang="ko-KR" altLang="en-US"/>
           </a:p>
@@ -1776,7 +1776,7 @@
           <a:bodyPr/>
           <a:lstStyle/>
           <a:p>
-            <a:fld id="{874D6781-1ACF-4161-B154-8F96D6F10320}" type="slidenum">
+            <a:fld id="{DECD31DD-CD27-4566-B957-3307A87E32A4}" type="slidenum">
               <a:rPr lang="ko-KR" altLang="en-US" smtClean="0"/>
               <a:t>‹#›</a:t>
             </a:fld>
@@ -1787,7 +1787,7 @@
     </p:spTree>
     <p:extLst>
       <p:ext uri="{BB962C8B-B14F-4D97-AF65-F5344CB8AC3E}">
-        <p14:creationId xmlns:p14="http://schemas.microsoft.com/office/powerpoint/2010/main" val="842503373"/>
+        <p14:creationId xmlns:p14="http://schemas.microsoft.com/office/powerpoint/2010/main" val="3991939562"/>
       </p:ext>
     </p:extLst>
   </p:cSld>
@@ -1829,9 +1829,9 @@
           <a:bodyPr/>
           <a:lstStyle/>
           <a:p>
-            <a:fld id="{15EE0AB8-33DC-4B5B-A688-FFBB75A029EA}" type="datetimeFigureOut">
+            <a:fld id="{C51DE5AC-CE6A-4BF3-88B0-C67A936732FF}" type="datetimeFigureOut">
               <a:rPr lang="ko-KR" altLang="en-US" smtClean="0"/>
-              <a:t>2026-10-19</a:t>
+              <a:t>2026-10-26</a:t>
             </a:fld>
             <a:endParaRPr lang="ko-KR" altLang="en-US"/>
           </a:p>
@@ -1871,7 +1871,7 @@
           <a:bodyPr/>
           <a:lstStyle/>
           <a:p>
-            <a:fld id="{874D6781-1ACF-4161-B154-8F96D6F10320}" type="slidenum">
+            <a:fld id="{DECD31DD-CD27-4566-B957-3307A87E32A4}" type="slidenum">
               <a:rPr lang="ko-KR" altLang="en-US" smtClean="0"/>
               <a:t>‹#›</a:t>
             </a:fld>
@@ -1882,7 +1882,7 @@
     </p:spTree>
     <p:extLst>
       <p:ext uri="{BB962C8B-B14F-4D97-AF65-F5344CB8AC3E}">
-        <p14:creationId xmlns:p14="http://schemas.microsoft.com/office/powerpoint/2010/main" val="1930412493"/>
+        <p14:creationId xmlns:p14="http://schemas.microsoft.com/office/powerpoint/2010/main" val="682996140"/>
       </p:ext>
     </p:extLst>
   </p:cSld>
@@ -1921,15 +1921,15 @@
         </p:nvSpPr>
         <p:spPr>
           <a:xfrm>
-            <a:off x="743890" y="960014"/>
-            <a:ext cx="3483205" cy="3360050"/>
+            <a:off x="629841" y="457200"/>
+            <a:ext cx="2949178" cy="1600200"/>
           </a:xfrm>
         </p:spPr>
         <p:txBody>
           <a:bodyPr anchor="b"/>
           <a:lstStyle>
             <a:lvl1pPr>
-              <a:defRPr sz="3780"/>
+              <a:defRPr sz="3200"/>
             </a:lvl1pPr>
           </a:lstStyle>
           <a:p>
@@ -1953,39 +1953,39 @@
         </p:nvSpPr>
         <p:spPr>
           <a:xfrm>
-            <a:off x="4591306" y="2073367"/>
-            <a:ext cx="5467380" cy="10233485"/>
+            <a:off x="3887391" y="987426"/>
+            <a:ext cx="4629150" cy="4873625"/>
           </a:xfrm>
         </p:spPr>
         <p:txBody>
           <a:bodyPr/>
           <a:lstStyle>
             <a:lvl1pPr>
-              <a:defRPr sz="3780"/>
+              <a:defRPr sz="3200"/>
             </a:lvl1pPr>
             <a:lvl2pPr>
-              <a:defRPr sz="3307"/>
+              <a:defRPr sz="2800"/>
             </a:lvl2pPr>
             <a:lvl3pPr>
-              <a:defRPr sz="2835"/>
+              <a:defRPr sz="2400"/>
             </a:lvl3pPr>
             <a:lvl4pPr>
-              <a:defRPr sz="2362"/>
+              <a:defRPr sz="2000"/>
             </a:lvl4pPr>
             <a:lvl5pPr>
-              <a:defRPr sz="2362"/>
+              <a:defRPr sz="2000"/>
             </a:lvl5pPr>
             <a:lvl6pPr>
-              <a:defRPr sz="2362"/>
+              <a:defRPr sz="2000"/>
             </a:lvl6pPr>
             <a:lvl7pPr>
-              <a:defRPr sz="2362"/>
+              <a:defRPr sz="2000"/>
             </a:lvl7pPr>
             <a:lvl8pPr>
-              <a:defRPr sz="2362"/>
+              <a:defRPr sz="2000"/>
             </a:lvl8pPr>
             <a:lvl9pPr>
-              <a:defRPr sz="2362"/>
+              <a:defRPr sz="2000"/>
             </a:lvl9pPr>
           </a:lstStyle>
           <a:p>
@@ -2038,8 +2038,8 @@
         </p:nvSpPr>
         <p:spPr>
           <a:xfrm>
-            <a:off x="743890" y="4320064"/>
-            <a:ext cx="3483205" cy="8003453"/>
+            <a:off x="629841" y="2057400"/>
+            <a:ext cx="2949178" cy="3811588"/>
           </a:xfrm>
         </p:spPr>
         <p:txBody>
@@ -2047,39 +2047,39 @@
           <a:lstStyle>
             <a:lvl1pPr marL="0" indent="0">
               <a:buNone/>
-              <a:defRPr sz="1890"/>
+              <a:defRPr sz="1600"/>
             </a:lvl1pPr>
-            <a:lvl2pPr marL="539999" indent="0">
-              <a:buNone/>
-              <a:defRPr sz="1654"/>
+            <a:lvl2pPr marL="457200" indent="0">
+              <a:buNone/>
+              <a:defRPr sz="1400"/>
             </a:lvl2pPr>
-            <a:lvl3pPr marL="1079998" indent="0">
-              <a:buNone/>
-              <a:defRPr sz="1417"/>
+            <a:lvl3pPr marL="914400" indent="0">
+              <a:buNone/>
+              <a:defRPr sz="1200"/>
             </a:lvl3pPr>
-            <a:lvl4pPr marL="1619997" indent="0">
-              <a:buNone/>
-              <a:defRPr sz="1181"/>
+            <a:lvl4pPr marL="1371600" indent="0">
+              <a:buNone/>
+              <a:defRPr sz="1000"/>
             </a:lvl4pPr>
-            <a:lvl5pPr marL="2159996" indent="0">
-              <a:buNone/>
-              <a:defRPr sz="1181"/>
+            <a:lvl5pPr marL="1828800" indent="0">
+              <a:buNone/>
+              <a:defRPr sz="1000"/>
             </a:lvl5pPr>
-            <a:lvl6pPr marL="2699995" indent="0">
-              <a:buNone/>
-              <a:defRPr sz="1181"/>
+            <a:lvl6pPr marL="2286000" indent="0">
+              <a:buNone/>
+              <a:defRPr sz="1000"/>
             </a:lvl6pPr>
-            <a:lvl7pPr marL="3239994" indent="0">
-              <a:buNone/>
-              <a:defRPr sz="1181"/>
+            <a:lvl7pPr marL="2743200" indent="0">
+              <a:buNone/>
+              <a:defRPr sz="1000"/>
             </a:lvl7pPr>
-            <a:lvl8pPr marL="3779992" indent="0">
-              <a:buNone/>
-              <a:defRPr sz="1181"/>
+            <a:lvl8pPr marL="3200400" indent="0">
+              <a:buNone/>
+              <a:defRPr sz="1000"/>
             </a:lvl8pPr>
-            <a:lvl9pPr marL="4319991" indent="0">
-              <a:buNone/>
-              <a:defRPr sz="1181"/>
+            <a:lvl9pPr marL="3657600" indent="0">
+              <a:buNone/>
+              <a:defRPr sz="1000"/>
             </a:lvl9pPr>
           </a:lstStyle>
           <a:p>
@@ -2106,9 +2106,9 @@
           <a:bodyPr/>
           <a:lstStyle/>
           <a:p>
-            <a:fld id="{15EE0AB8-33DC-4B5B-A688-FFBB75A029EA}" type="datetimeFigureOut">
+            <a:fld id="{C51DE5AC-CE6A-4BF3-88B0-C67A936732FF}" type="datetimeFigureOut">
               <a:rPr lang="ko-KR" altLang="en-US" smtClean="0"/>
-              <a:t>2026-10-19</a:t>
+              <a:t>2026-10-26</a:t>
             </a:fld>
             <a:endParaRPr lang="ko-KR" altLang="en-US"/>
           </a:p>
@@ -2148,7 +2148,7 @@
           <a:bodyPr/>
           <a:lstStyle/>
           <a:p>
-            <a:fld id="{874D6781-1ACF-4161-B154-8F96D6F10320}" type="slidenum">
+            <a:fld id="{DECD31DD-CD27-4566-B957-3307A87E32A4}" type="slidenum">
               <a:rPr lang="ko-KR" altLang="en-US" smtClean="0"/>
               <a:t>‹#›</a:t>
             </a:fld>
@@ -2159,7 +2159,7 @@
     </p:spTree>
     <p:extLst>
       <p:ext uri="{BB962C8B-B14F-4D97-AF65-F5344CB8AC3E}">
-        <p14:creationId xmlns:p14="http://schemas.microsoft.com/office/powerpoint/2010/main" val="3610125847"/>
+        <p14:creationId xmlns:p14="http://schemas.microsoft.com/office/powerpoint/2010/main" val="2187539213"/>
       </p:ext>
     </p:extLst>
   </p:cSld>
@@ -2198,15 +2198,15 @@
         </p:nvSpPr>
         <p:spPr>
           <a:xfrm>
-            <a:off x="743890" y="960014"/>
-            <a:ext cx="3483205" cy="3360050"/>
+            <a:off x="629841" y="457200"/>
+            <a:ext cx="2949178" cy="1600200"/>
           </a:xfrm>
         </p:spPr>
         <p:txBody>
           <a:bodyPr anchor="b"/>
           <a:lstStyle>
             <a:lvl1pPr>
-              <a:defRPr sz="3780"/>
+              <a:defRPr sz="3200"/>
             </a:lvl1pPr>
           </a:lstStyle>
           <a:p>
@@ -2230,8 +2230,8 @@
         </p:nvSpPr>
         <p:spPr>
           <a:xfrm>
-            <a:off x="4591306" y="2073367"/>
-            <a:ext cx="5467380" cy="10233485"/>
+            <a:off x="3887391" y="987426"/>
+            <a:ext cx="4629150" cy="4873625"/>
           </a:xfrm>
         </p:spPr>
         <p:txBody>
@@ -2239,39 +2239,39 @@
           <a:lstStyle>
             <a:lvl1pPr marL="0" indent="0">
               <a:buNone/>
-              <a:defRPr sz="3780"/>
+              <a:defRPr sz="3200"/>
             </a:lvl1pPr>
-            <a:lvl2pPr marL="539999" indent="0">
-              <a:buNone/>
-              <a:defRPr sz="3307"/>
+            <a:lvl2pPr marL="457200" indent="0">
+              <a:buNone/>
+              <a:defRPr sz="2800"/>
             </a:lvl2pPr>
-            <a:lvl3pPr marL="1079998" indent="0">
-              <a:buNone/>
-              <a:defRPr sz="2835"/>
+            <a:lvl3pPr marL="914400" indent="0">
+              <a:buNone/>
+              <a:defRPr sz="2400"/>
             </a:lvl3pPr>
-            <a:lvl4pPr marL="1619997" indent="0">
-              <a:buNone/>
-              <a:defRPr sz="2362"/>
+            <a:lvl4pPr marL="1371600" indent="0">
+              <a:buNone/>
+              <a:defRPr sz="2000"/>
             </a:lvl4pPr>
-            <a:lvl5pPr marL="2159996" indent="0">
-              <a:buNone/>
-              <a:defRPr sz="2362"/>
+            <a:lvl5pPr marL="1828800" indent="0">
+              <a:buNone/>
+              <a:defRPr sz="2000"/>
             </a:lvl5pPr>
-            <a:lvl6pPr marL="2699995" indent="0">
-              <a:buNone/>
-              <a:defRPr sz="2362"/>
+            <a:lvl6pPr marL="2286000" indent="0">
+              <a:buNone/>
+              <a:defRPr sz="2000"/>
             </a:lvl6pPr>
-            <a:lvl7pPr marL="3239994" indent="0">
-              <a:buNone/>
-              <a:defRPr sz="2362"/>
+            <a:lvl7pPr marL="2743200" indent="0">
+              <a:buNone/>
+              <a:defRPr sz="2000"/>
             </a:lvl7pPr>
-            <a:lvl8pPr marL="3779992" indent="0">
-              <a:buNone/>
-              <a:defRPr sz="2362"/>
+            <a:lvl8pPr marL="3200400" indent="0">
+              <a:buNone/>
+              <a:defRPr sz="2000"/>
             </a:lvl8pPr>
-            <a:lvl9pPr marL="4319991" indent="0">
-              <a:buNone/>
-              <a:defRPr sz="2362"/>
+            <a:lvl9pPr marL="3657600" indent="0">
+              <a:buNone/>
+              <a:defRPr sz="2000"/>
             </a:lvl9pPr>
           </a:lstStyle>
           <a:p>
@@ -2295,8 +2295,8 @@
         </p:nvSpPr>
         <p:spPr>
           <a:xfrm>
-            <a:off x="743890" y="4320064"/>
-            <a:ext cx="3483205" cy="8003453"/>
+            <a:off x="629841" y="2057400"/>
+            <a:ext cx="2949178" cy="3811588"/>
           </a:xfrm>
         </p:spPr>
         <p:txBody>
@@ -2304,39 +2304,39 @@
           <a:lstStyle>
             <a:lvl1pPr marL="0" indent="0">
               <a:buNone/>
-              <a:defRPr sz="1890"/>
+              <a:defRPr sz="1600"/>
             </a:lvl1pPr>
-            <a:lvl2pPr marL="539999" indent="0">
-              <a:buNone/>
-              <a:defRPr sz="1654"/>
+            <a:lvl2pPr marL="457200" indent="0">
+              <a:buNone/>
+              <a:defRPr sz="1400"/>
             </a:lvl2pPr>
-            <a:lvl3pPr marL="1079998" indent="0">
-              <a:buNone/>
-              <a:defRPr sz="1417"/>
+            <a:lvl3pPr marL="914400" indent="0">
+              <a:buNone/>
+              <a:defRPr sz="1200"/>
             </a:lvl3pPr>
-            <a:lvl4pPr marL="1619997" indent="0">
-              <a:buNone/>
-              <a:defRPr sz="1181"/>
+            <a:lvl4pPr marL="1371600" indent="0">
+              <a:buNone/>
+              <a:defRPr sz="1000"/>
             </a:lvl4pPr>
-            <a:lvl5pPr marL="2159996" indent="0">
-              <a:buNone/>
-              <a:defRPr sz="1181"/>
+            <a:lvl5pPr marL="1828800" indent="0">
+              <a:buNone/>
+              <a:defRPr sz="1000"/>
             </a:lvl5pPr>
-            <a:lvl6pPr marL="2699995" indent="0">
-              <a:buNone/>
-              <a:defRPr sz="1181"/>
+            <a:lvl6pPr marL="2286000" indent="0">
+              <a:buNone/>
+              <a:defRPr sz="1000"/>
             </a:lvl6pPr>
-            <a:lvl7pPr marL="3239994" indent="0">
-              <a:buNone/>
-              <a:defRPr sz="1181"/>
+            <a:lvl7pPr marL="2743200" indent="0">
+              <a:buNone/>
+              <a:defRPr sz="1000"/>
             </a:lvl7pPr>
-            <a:lvl8pPr marL="3779992" indent="0">
-              <a:buNone/>
-              <a:defRPr sz="1181"/>
+            <a:lvl8pPr marL="3200400" indent="0">
+              <a:buNone/>
+              <a:defRPr sz="1000"/>
             </a:lvl8pPr>
-            <a:lvl9pPr marL="4319991" indent="0">
-              <a:buNone/>
-              <a:defRPr sz="1181"/>
+            <a:lvl9pPr marL="3657600" indent="0">
+              <a:buNone/>
+              <a:defRPr sz="1000"/>
             </a:lvl9pPr>
           </a:lstStyle>
           <a:p>
@@ -2363,9 +2363,9 @@
           <a:bodyPr/>
           <a:lstStyle/>
           <a:p>
-            <a:fld id="{15EE0AB8-33DC-4B5B-A688-FFBB75A029EA}" type="datetimeFigureOut">
+            <a:fld id="{C51DE5AC-CE6A-4BF3-88B0-C67A936732FF}" type="datetimeFigureOut">
               <a:rPr lang="ko-KR" altLang="en-US" smtClean="0"/>
-              <a:t>2026-10-19</a:t>
+              <a:t>2026-10-26</a:t>
             </a:fld>
             <a:endParaRPr lang="ko-KR" altLang="en-US"/>
           </a:p>
@@ -2405,7 +2405,7 @@
           <a:bodyPr/>
           <a:lstStyle/>
           <a:p>
-            <a:fld id="{874D6781-1ACF-4161-B154-8F96D6F10320}" type="slidenum">
+            <a:fld id="{DECD31DD-CD27-4566-B957-3307A87E32A4}" type="slidenum">
               <a:rPr lang="ko-KR" altLang="en-US" smtClean="0"/>
               <a:t>‹#›</a:t>
             </a:fld>
@@ -2416,7 +2416,7 @@
     </p:spTree>
     <p:extLst>
       <p:ext uri="{BB962C8B-B14F-4D97-AF65-F5344CB8AC3E}">
-        <p14:creationId xmlns:p14="http://schemas.microsoft.com/office/powerpoint/2010/main" val="163954043"/>
+        <p14:creationId xmlns:p14="http://schemas.microsoft.com/office/powerpoint/2010/main" val="2381198934"/>
       </p:ext>
     </p:extLst>
   </p:cSld>
@@ -2460,8 +2460,8 @@
         </p:nvSpPr>
         <p:spPr>
           <a:xfrm>
-            <a:off x="742484" y="766681"/>
-            <a:ext cx="9314796" cy="2783376"/>
+            <a:off x="628650" y="365126"/>
+            <a:ext cx="7886700" cy="1325563"/>
           </a:xfrm>
           <a:prstGeom prst="rect">
             <a:avLst/>
@@ -2493,8 +2493,8 @@
         </p:nvSpPr>
         <p:spPr>
           <a:xfrm>
-            <a:off x="742484" y="3833390"/>
-            <a:ext cx="9314796" cy="9136803"/>
+            <a:off x="628650" y="1825625"/>
+            <a:ext cx="7886700" cy="4351338"/>
           </a:xfrm>
           <a:prstGeom prst="rect">
             <a:avLst/>
@@ -2555,8 +2555,8 @@
         </p:nvSpPr>
         <p:spPr>
           <a:xfrm>
-            <a:off x="742484" y="13346867"/>
-            <a:ext cx="2429947" cy="766678"/>
+            <a:off x="628650" y="6356351"/>
+            <a:ext cx="2057400" cy="365125"/>
           </a:xfrm>
           <a:prstGeom prst="rect">
             <a:avLst/>
@@ -2566,7 +2566,7 @@
           <a:bodyPr vert="horz" lIns="91440" tIns="45720" rIns="91440" bIns="45720" rtlCol="0" anchor="ctr"/>
           <a:lstStyle>
             <a:lvl1pPr algn="l">
-              <a:defRPr sz="1417">
+              <a:defRPr sz="1200">
                 <a:solidFill>
                   <a:schemeClr val="tx1">
                     <a:tint val="75000"/>
@@ -2576,9 +2576,9 @@
             </a:lvl1pPr>
           </a:lstStyle>
           <a:p>
-            <a:fld id="{15EE0AB8-33DC-4B5B-A688-FFBB75A029EA}" type="datetimeFigureOut">
+            <a:fld id="{C51DE5AC-CE6A-4BF3-88B0-C67A936732FF}" type="datetimeFigureOut">
               <a:rPr lang="ko-KR" altLang="en-US" smtClean="0"/>
-              <a:t>2026-10-19</a:t>
+              <a:t>2026-10-26</a:t>
             </a:fld>
             <a:endParaRPr lang="ko-KR" altLang="en-US"/>
           </a:p>
@@ -2596,8 +2596,8 @@
         </p:nvSpPr>
         <p:spPr>
           <a:xfrm>
-            <a:off x="3577422" y="13346867"/>
-            <a:ext cx="3644920" cy="766678"/>
+            <a:off x="3028950" y="6356351"/>
+            <a:ext cx="3086100" cy="365125"/>
           </a:xfrm>
           <a:prstGeom prst="rect">
             <a:avLst/>
@@ -2607,7 +2607,7 @@
           <a:bodyPr vert="horz" lIns="91440" tIns="45720" rIns="91440" bIns="45720" rtlCol="0" anchor="ctr"/>
           <a:lstStyle>
             <a:lvl1pPr algn="ctr">
-              <a:defRPr sz="1417">
+              <a:defRPr sz="1200">
                 <a:solidFill>
                   <a:schemeClr val="tx1">
                     <a:tint val="75000"/>
@@ -2633,8 +2633,8 @@
         </p:nvSpPr>
         <p:spPr>
           <a:xfrm>
-            <a:off x="7627332" y="13346867"/>
-            <a:ext cx="2429947" cy="766678"/>
+            <a:off x="6457950" y="6356351"/>
+            <a:ext cx="2057400" cy="365125"/>
           </a:xfrm>
           <a:prstGeom prst="rect">
             <a:avLst/>
@@ -2644,7 +2644,7 @@
           <a:bodyPr vert="horz" lIns="91440" tIns="45720" rIns="91440" bIns="45720" rtlCol="0" anchor="ctr"/>
           <a:lstStyle>
             <a:lvl1pPr algn="r">
-              <a:defRPr sz="1417">
+              <a:defRPr sz="1200">
                 <a:solidFill>
                   <a:schemeClr val="tx1">
                     <a:tint val="75000"/>
@@ -2654,7 +2654,7 @@
             </a:lvl1pPr>
           </a:lstStyle>
           <a:p>
-            <a:fld id="{874D6781-1ACF-4161-B154-8F96D6F10320}" type="slidenum">
+            <a:fld id="{DECD31DD-CD27-4566-B957-3307A87E32A4}" type="slidenum">
               <a:rPr lang="ko-KR" altLang="en-US" smtClean="0"/>
               <a:t>‹#›</a:t>
             </a:fld>
@@ -2665,27 +2665,27 @@
     </p:spTree>
     <p:extLst>
       <p:ext uri="{BB962C8B-B14F-4D97-AF65-F5344CB8AC3E}">
-        <p14:creationId xmlns:p14="http://schemas.microsoft.com/office/powerpoint/2010/main" val="410389613"/>
+        <p14:creationId xmlns:p14="http://schemas.microsoft.com/office/powerpoint/2010/main" val="100372029"/>
       </p:ext>
     </p:extLst>
   </p:cSld>
   <p:clrMap bg1="lt1" tx1="dk1" bg2="lt2" tx2="dk2" accent1="accent1" accent2="accent2" accent3="accent3" accent4="accent4" accent5="accent5" accent6="accent6" hlink="hlink" folHlink="folHlink"/>
   <p:sldLayoutIdLst>
-    <p:sldLayoutId id="2147483697" r:id="rId1"/>
-    <p:sldLayoutId id="2147483698" r:id="rId2"/>
-    <p:sldLayoutId id="2147483699" r:id="rId3"/>
-    <p:sldLayoutId id="2147483700" r:id="rId4"/>
-    <p:sldLayoutId id="2147483701" r:id="rId5"/>
-    <p:sldLayoutId id="2147483702" r:id="rId6"/>
-    <p:sldLayoutId id="2147483703" r:id="rId7"/>
-    <p:sldLayoutId id="2147483704" r:id="rId8"/>
-    <p:sldLayoutId id="2147483705" r:id="rId9"/>
-    <p:sldLayoutId id="2147483706" r:id="rId10"/>
-    <p:sldLayoutId id="2147483707" r:id="rId11"/>
+    <p:sldLayoutId id="2147483673" r:id="rId1"/>
+    <p:sldLayoutId id="2147483674" r:id="rId2"/>
+    <p:sldLayoutId id="2147483675" r:id="rId3"/>
+    <p:sldLayoutId id="2147483676" r:id="rId4"/>
+    <p:sldLayoutId id="2147483677" r:id="rId5"/>
+    <p:sldLayoutId id="2147483678" r:id="rId6"/>
+    <p:sldLayoutId id="2147483679" r:id="rId7"/>
+    <p:sldLayoutId id="2147483680" r:id="rId8"/>
+    <p:sldLayoutId id="2147483681" r:id="rId9"/>
+    <p:sldLayoutId id="2147483682" r:id="rId10"/>
+    <p:sldLayoutId id="2147483683" r:id="rId11"/>
   </p:sldLayoutIdLst>
   <p:txStyles>
     <p:titleStyle>
-      <a:lvl1pPr algn="l" defTabSz="1079998" rtl="0" eaLnBrk="1" latinLnBrk="1" hangingPunct="1">
+      <a:lvl1pPr algn="l" defTabSz="914400" rtl="0" eaLnBrk="1" latinLnBrk="1" hangingPunct="1">
         <a:lnSpc>
           <a:spcPct val="90000"/>
         </a:lnSpc>
@@ -2693,7 +2693,7 @@
           <a:spcPct val="0"/>
         </a:spcBef>
         <a:buNone/>
-        <a:defRPr sz="5197" kern="1200">
+        <a:defRPr sz="4400" kern="1200">
           <a:solidFill>
             <a:schemeClr val="tx1"/>
           </a:solidFill>
@@ -2704,16 +2704,16 @@
       </a:lvl1pPr>
     </p:titleStyle>
     <p:bodyStyle>
-      <a:lvl1pPr marL="269999" indent="-269999" algn="l" defTabSz="1079998" rtl="0" eaLnBrk="1" latinLnBrk="1" hangingPunct="1">
+      <a:lvl1pPr marL="228600" indent="-228600" algn="l" defTabSz="914400" rtl="0" eaLnBrk="1" latinLnBrk="1" hangingPunct="1">
         <a:lnSpc>
           <a:spcPct val="90000"/>
         </a:lnSpc>
         <a:spcBef>
-          <a:spcPts val="1181"/>
+          <a:spcPts val="1000"/>
         </a:spcBef>
         <a:buFont typeface="Arial" panose="020B0604020202020204" pitchFamily="34" charset="0"/>
         <a:buChar char="•"/>
-        <a:defRPr sz="3307" kern="1200">
+        <a:defRPr sz="2800" kern="1200">
           <a:solidFill>
             <a:schemeClr val="tx1"/>
           </a:solidFill>
@@ -2722,16 +2722,16 @@
           <a:cs typeface="+mn-cs"/>
         </a:defRPr>
       </a:lvl1pPr>
-      <a:lvl2pPr marL="809998" indent="-269999" algn="l" defTabSz="1079998" rtl="0" eaLnBrk="1" latinLnBrk="1" hangingPunct="1">
+      <a:lvl2pPr marL="685800" indent="-228600" algn="l" defTabSz="914400" rtl="0" eaLnBrk="1" latinLnBrk="1" hangingPunct="1">
         <a:lnSpc>
           <a:spcPct val="90000"/>
         </a:lnSpc>
         <a:spcBef>
-          <a:spcPts val="591"/>
+          <a:spcPts val="500"/>
         </a:spcBef>
         <a:buFont typeface="Arial" panose="020B0604020202020204" pitchFamily="34" charset="0"/>
         <a:buChar char="•"/>
-        <a:defRPr sz="2835" kern="1200">
+        <a:defRPr sz="2400" kern="1200">
           <a:solidFill>
             <a:schemeClr val="tx1"/>
           </a:solidFill>
@@ -2740,16 +2740,16 @@
           <a:cs typeface="+mn-cs"/>
         </a:defRPr>
       </a:lvl2pPr>
-      <a:lvl3pPr marL="1349997" indent="-269999" algn="l" defTabSz="1079998" rtl="0" eaLnBrk="1" latinLnBrk="1" hangingPunct="1">
+      <a:lvl3pPr marL="1143000" indent="-228600" algn="l" defTabSz="914400" rtl="0" eaLnBrk="1" latinLnBrk="1" hangingPunct="1">
         <a:lnSpc>
           <a:spcPct val="90000"/>
         </a:lnSpc>
         <a:spcBef>
-          <a:spcPts val="591"/>
+          <a:spcPts val="500"/>
         </a:spcBef>
         <a:buFont typeface="Arial" panose="020B0604020202020204" pitchFamily="34" charset="0"/>
         <a:buChar char="•"/>
-        <a:defRPr sz="2362" kern="1200">
+        <a:defRPr sz="2000" kern="1200">
           <a:solidFill>
             <a:schemeClr val="tx1"/>
           </a:solidFill>
@@ -2758,16 +2758,16 @@
           <a:cs typeface="+mn-cs"/>
         </a:defRPr>
       </a:lvl3pPr>
-      <a:lvl4pPr marL="1889996" indent="-269999" algn="l" defTabSz="1079998" rtl="0" eaLnBrk="1" latinLnBrk="1" hangingPunct="1">
+      <a:lvl4pPr marL="1600200" indent="-228600" algn="l" defTabSz="914400" rtl="0" eaLnBrk="1" latinLnBrk="1" hangingPunct="1">
         <a:lnSpc>
           <a:spcPct val="90000"/>
         </a:lnSpc>
         <a:spcBef>
-          <a:spcPts val="591"/>
+          <a:spcPts val="500"/>
         </a:spcBef>
         <a:buFont typeface="Arial" panose="020B0604020202020204" pitchFamily="34" charset="0"/>
         <a:buChar char="•"/>
-        <a:defRPr sz="2126" kern="1200">
+        <a:defRPr sz="1800" kern="1200">
           <a:solidFill>
             <a:schemeClr val="tx1"/>
           </a:solidFill>
@@ -2776,16 +2776,16 @@
           <a:cs typeface="+mn-cs"/>
         </a:defRPr>
       </a:lvl4pPr>
-      <a:lvl5pPr marL="2429995" indent="-269999" algn="l" defTabSz="1079998" rtl="0" eaLnBrk="1" latinLnBrk="1" hangingPunct="1">
+      <a:lvl5pPr marL="2057400" indent="-228600" algn="l" defTabSz="914400" rtl="0" eaLnBrk="1" latinLnBrk="1" hangingPunct="1">
         <a:lnSpc>
           <a:spcPct val="90000"/>
         </a:lnSpc>
         <a:spcBef>
-          <a:spcPts val="591"/>
+          <a:spcPts val="500"/>
         </a:spcBef>
         <a:buFont typeface="Arial" panose="020B0604020202020204" pitchFamily="34" charset="0"/>
         <a:buChar char="•"/>
-        <a:defRPr sz="2126" kern="1200">
+        <a:defRPr sz="1800" kern="1200">
           <a:solidFill>
             <a:schemeClr val="tx1"/>
           </a:solidFill>
@@ -2794,16 +2794,16 @@
           <a:cs typeface="+mn-cs"/>
         </a:defRPr>
       </a:lvl5pPr>
-      <a:lvl6pPr marL="2969994" indent="-269999" algn="l" defTabSz="1079998" rtl="0" eaLnBrk="1" latinLnBrk="1" hangingPunct="1">
+      <a:lvl6pPr marL="2514600" indent="-228600" algn="l" defTabSz="914400" rtl="0" eaLnBrk="1" latinLnBrk="1" hangingPunct="1">
         <a:lnSpc>
           <a:spcPct val="90000"/>
         </a:lnSpc>
         <a:spcBef>
-          <a:spcPts val="591"/>
+          <a:spcPts val="500"/>
         </a:spcBef>
         <a:buFont typeface="Arial" panose="020B0604020202020204" pitchFamily="34" charset="0"/>
         <a:buChar char="•"/>
-        <a:defRPr sz="2126" kern="1200">
+        <a:defRPr sz="1800" kern="1200">
           <a:solidFill>
             <a:schemeClr val="tx1"/>
           </a:solidFill>
@@ -2812,16 +2812,16 @@
           <a:cs typeface="+mn-cs"/>
         </a:defRPr>
       </a:lvl6pPr>
-      <a:lvl7pPr marL="3509993" indent="-269999" algn="l" defTabSz="1079998" rtl="0" eaLnBrk="1" latinLnBrk="1" hangingPunct="1">
+      <a:lvl7pPr marL="2971800" indent="-228600" algn="l" defTabSz="914400" rtl="0" eaLnBrk="1" latinLnBrk="1" hangingPunct="1">
         <a:lnSpc>
           <a:spcPct val="90000"/>
         </a:lnSpc>
         <a:spcBef>
-          <a:spcPts val="591"/>
+          <a:spcPts val="500"/>
         </a:spcBef>
         <a:buFont typeface="Arial" panose="020B0604020202020204" pitchFamily="34" charset="0"/>
         <a:buChar char="•"/>
-        <a:defRPr sz="2126" kern="1200">
+        <a:defRPr sz="1800" kern="1200">
           <a:solidFill>
             <a:schemeClr val="tx1"/>
           </a:solidFill>
@@ -2830,16 +2830,16 @@
           <a:cs typeface="+mn-cs"/>
         </a:defRPr>
       </a:lvl7pPr>
-      <a:lvl8pPr marL="4049992" indent="-269999" algn="l" defTabSz="1079998" rtl="0" eaLnBrk="1" latinLnBrk="1" hangingPunct="1">
+      <a:lvl8pPr marL="3429000" indent="-228600" algn="l" defTabSz="914400" rtl="0" eaLnBrk="1" latinLnBrk="1" hangingPunct="1">
         <a:lnSpc>
           <a:spcPct val="90000"/>
         </a:lnSpc>
         <a:spcBef>
-          <a:spcPts val="591"/>
+          <a:spcPts val="500"/>
         </a:spcBef>
         <a:buFont typeface="Arial" panose="020B0604020202020204" pitchFamily="34" charset="0"/>
         <a:buChar char="•"/>
-        <a:defRPr sz="2126" kern="1200">
+        <a:defRPr sz="1800" kern="1200">
           <a:solidFill>
             <a:schemeClr val="tx1"/>
           </a:solidFill>
@@ -2848,16 +2848,16 @@
           <a:cs typeface="+mn-cs"/>
         </a:defRPr>
       </a:lvl8pPr>
-      <a:lvl9pPr marL="4589991" indent="-269999" algn="l" defTabSz="1079998" rtl="0" eaLnBrk="1" latinLnBrk="1" hangingPunct="1">
+      <a:lvl9pPr marL="3886200" indent="-228600" algn="l" defTabSz="914400" rtl="0" eaLnBrk="1" latinLnBrk="1" hangingPunct="1">
         <a:lnSpc>
           <a:spcPct val="90000"/>
         </a:lnSpc>
         <a:spcBef>
-          <a:spcPts val="591"/>
+          <a:spcPts val="500"/>
         </a:spcBef>
         <a:buFont typeface="Arial" panose="020B0604020202020204" pitchFamily="34" charset="0"/>
         <a:buChar char="•"/>
-        <a:defRPr sz="2126" kern="1200">
+        <a:defRPr sz="1800" kern="1200">
           <a:solidFill>
             <a:schemeClr val="tx1"/>
           </a:solidFill>
@@ -2871,8 +2871,8 @@
       <a:defPPr>
         <a:defRPr lang="en-US"/>
       </a:defPPr>
-      <a:lvl1pPr marL="0" algn="l" defTabSz="1079998" rtl="0" eaLnBrk="1" latinLnBrk="1" hangingPunct="1">
-        <a:defRPr sz="2126" kern="1200">
+      <a:lvl1pPr marL="0" algn="l" defTabSz="914400" rtl="0" eaLnBrk="1" latinLnBrk="1" hangingPunct="1">
+        <a:defRPr sz="1800" kern="1200">
           <a:solidFill>
             <a:schemeClr val="tx1"/>
           </a:solidFill>
@@ -2881,8 +2881,8 @@
           <a:cs typeface="+mn-cs"/>
         </a:defRPr>
       </a:lvl1pPr>
-      <a:lvl2pPr marL="539999" algn="l" defTabSz="1079998" rtl="0" eaLnBrk="1" latinLnBrk="1" hangingPunct="1">
-        <a:defRPr sz="2126" kern="1200">
+      <a:lvl2pPr marL="457200" algn="l" defTabSz="914400" rtl="0" eaLnBrk="1" latinLnBrk="1" hangingPunct="1">
+        <a:defRPr sz="1800" kern="1200">
           <a:solidFill>
             <a:schemeClr val="tx1"/>
           </a:solidFill>
@@ -2891,8 +2891,8 @@
           <a:cs typeface="+mn-cs"/>
         </a:defRPr>
       </a:lvl2pPr>
-      <a:lvl3pPr marL="1079998" algn="l" defTabSz="1079998" rtl="0" eaLnBrk="1" latinLnBrk="1" hangingPunct="1">
-        <a:defRPr sz="2126" kern="1200">
+      <a:lvl3pPr marL="914400" algn="l" defTabSz="914400" rtl="0" eaLnBrk="1" latinLnBrk="1" hangingPunct="1">
+        <a:defRPr sz="1800" kern="1200">
           <a:solidFill>
             <a:schemeClr val="tx1"/>
           </a:solidFill>
@@ -2901,8 +2901,8 @@
           <a:cs typeface="+mn-cs"/>
         </a:defRPr>
       </a:lvl3pPr>
-      <a:lvl4pPr marL="1619997" algn="l" defTabSz="1079998" rtl="0" eaLnBrk="1" latinLnBrk="1" hangingPunct="1">
-        <a:defRPr sz="2126" kern="1200">
+      <a:lvl4pPr marL="1371600" algn="l" defTabSz="914400" rtl="0" eaLnBrk="1" latinLnBrk="1" hangingPunct="1">
+        <a:defRPr sz="1800" kern="1200">
           <a:solidFill>
             <a:schemeClr val="tx1"/>
           </a:solidFill>
@@ -2911,8 +2911,8 @@
           <a:cs typeface="+mn-cs"/>
         </a:defRPr>
       </a:lvl4pPr>
-      <a:lvl5pPr marL="2159996" algn="l" defTabSz="1079998" rtl="0" eaLnBrk="1" latinLnBrk="1" hangingPunct="1">
-        <a:defRPr sz="2126" kern="1200">
+      <a:lvl5pPr marL="1828800" algn="l" defTabSz="914400" rtl="0" eaLnBrk="1" latinLnBrk="1" hangingPunct="1">
+        <a:defRPr sz="1800" kern="1200">
           <a:solidFill>
             <a:schemeClr val="tx1"/>
           </a:solidFill>
@@ -2921,8 +2921,8 @@
           <a:cs typeface="+mn-cs"/>
         </a:defRPr>
       </a:lvl5pPr>
-      <a:lvl6pPr marL="2699995" algn="l" defTabSz="1079998" rtl="0" eaLnBrk="1" latinLnBrk="1" hangingPunct="1">
-        <a:defRPr sz="2126" kern="1200">
+      <a:lvl6pPr marL="2286000" algn="l" defTabSz="914400" rtl="0" eaLnBrk="1" latinLnBrk="1" hangingPunct="1">
+        <a:defRPr sz="1800" kern="1200">
           <a:solidFill>
             <a:schemeClr val="tx1"/>
           </a:solidFill>
@@ -2931,8 +2931,8 @@
           <a:cs typeface="+mn-cs"/>
         </a:defRPr>
       </a:lvl6pPr>
-      <a:lvl7pPr marL="3239994" algn="l" defTabSz="1079998" rtl="0" eaLnBrk="1" latinLnBrk="1" hangingPunct="1">
-        <a:defRPr sz="2126" kern="1200">
+      <a:lvl7pPr marL="2743200" algn="l" defTabSz="914400" rtl="0" eaLnBrk="1" latinLnBrk="1" hangingPunct="1">
+        <a:defRPr sz="1800" kern="1200">
           <a:solidFill>
             <a:schemeClr val="tx1"/>
           </a:solidFill>
@@ -2941,8 +2941,8 @@
           <a:cs typeface="+mn-cs"/>
         </a:defRPr>
       </a:lvl7pPr>
-      <a:lvl8pPr marL="3779992" algn="l" defTabSz="1079998" rtl="0" eaLnBrk="1" latinLnBrk="1" hangingPunct="1">
-        <a:defRPr sz="2126" kern="1200">
+      <a:lvl8pPr marL="3200400" algn="l" defTabSz="914400" rtl="0" eaLnBrk="1" latinLnBrk="1" hangingPunct="1">
+        <a:defRPr sz="1800" kern="1200">
           <a:solidFill>
             <a:schemeClr val="tx1"/>
           </a:solidFill>
@@ -2951,8 +2951,8 @@
           <a:cs typeface="+mn-cs"/>
         </a:defRPr>
       </a:lvl8pPr>
-      <a:lvl9pPr marL="4319991" algn="l" defTabSz="1079998" rtl="0" eaLnBrk="1" latinLnBrk="1" hangingPunct="1">
-        <a:defRPr sz="2126" kern="1200">
+      <a:lvl9pPr marL="3657600" algn="l" defTabSz="914400" rtl="0" eaLnBrk="1" latinLnBrk="1" hangingPunct="1">
+        <a:defRPr sz="1800" kern="1200">
           <a:solidFill>
             <a:schemeClr val="tx1"/>
           </a:solidFill>
@@ -2985,10 +2985,10 @@
       </p:grpSpPr>
       <p:sp>
         <p:nvSpPr>
-          <p:cNvPr id="5" name="TextBox 4">
+          <p:cNvPr id="4" name="TextBox 3">
             <a:extLst>
               <a:ext uri="{FF2B5EF4-FFF2-40B4-BE49-F238E27FC236}">
-                <a16:creationId xmlns:a16="http://schemas.microsoft.com/office/drawing/2014/main" id="{49B527FD-85A7-FF6D-B7AB-01C113992DD1}"/>
+                <a16:creationId xmlns:a16="http://schemas.microsoft.com/office/drawing/2014/main" id="{CCCC718D-0667-2500-6D82-FC0DF68EB5EA}"/>
               </a:ext>
             </a:extLst>
           </p:cNvPr>
@@ -2997,8 +2997,8 @@
         </p:nvSpPr>
         <p:spPr>
           <a:xfrm>
-            <a:off x="0" y="3783786"/>
-            <a:ext cx="10799763" cy="6832640"/>
+            <a:off x="1" y="1228398"/>
+            <a:ext cx="9143999" cy="4401205"/>
           </a:xfrm>
           <a:prstGeom prst="rect">
             <a:avLst/>
@@ -3015,75 +3015,75 @@
               <a:buNone/>
             </a:pPr>
             <a:r>
-              <a:rPr lang="ko-KR" altLang="en-US" sz="3650" b="1" dirty="0"/>
+              <a:rPr lang="ko-KR" altLang="en-US" sz="2800" b="1" dirty="0"/>
               <a:t>🏭 </a:t>
             </a:r>
             <a:r>
-              <a:rPr lang="ko-KR" altLang="en-US" sz="3650" b="1" dirty="0" err="1"/>
+              <a:rPr lang="ko-KR" altLang="en-US" sz="2800" b="1" dirty="0" err="1"/>
               <a:t>광주오포센터</a:t>
             </a:r>
             <a:r>
-              <a:rPr lang="ko-KR" altLang="en-US" sz="3650" b="1" dirty="0"/>
+              <a:rPr lang="ko-KR" altLang="en-US" sz="2800" b="1" dirty="0"/>
               <a:t> 자동화 </a:t>
             </a:r>
             <a:r>
-              <a:rPr lang="en-US" altLang="ko-KR" sz="3650" b="1" dirty="0"/>
+              <a:rPr lang="en-US" altLang="ko-KR" sz="2800" b="1" dirty="0"/>
               <a:t>ERP </a:t>
             </a:r>
             <a:r>
-              <a:rPr lang="ko-KR" altLang="en-US" sz="3650" b="1" dirty="0"/>
+              <a:rPr lang="ko-KR" altLang="en-US" sz="2800" b="1" dirty="0"/>
               <a:t>시스템 사용 매뉴얼</a:t>
             </a:r>
-            <a:endParaRPr lang="en-US" altLang="ko-KR" sz="3650" b="1" dirty="0"/>
+            <a:endParaRPr lang="en-US" altLang="ko-KR" sz="2800" b="1" dirty="0"/>
           </a:p>
           <a:p>
             <a:pPr>
               <a:buNone/>
             </a:pPr>
-            <a:endParaRPr lang="ko-KR" altLang="en-US" sz="3650" b="1" dirty="0"/>
+            <a:endParaRPr lang="ko-KR" altLang="en-US" sz="2800" b="1" dirty="0"/>
           </a:p>
           <a:p>
             <a:pPr>
               <a:buNone/>
             </a:pPr>
             <a:r>
-              <a:rPr lang="ko-KR" altLang="en-US" sz="3650" dirty="0"/>
+              <a:rPr lang="ko-KR" altLang="en-US" sz="2800" dirty="0"/>
               <a:t>안녕하세요</a:t>
             </a:r>
             <a:r>
-              <a:rPr lang="en-US" altLang="ko-KR" sz="3650" dirty="0"/>
+              <a:rPr lang="en-US" altLang="ko-KR" sz="2800" dirty="0"/>
               <a:t>! </a:t>
             </a:r>
             <a:r>
-              <a:rPr lang="ko-KR" altLang="en-US" sz="3650" dirty="0"/>
+              <a:rPr lang="ko-KR" altLang="en-US" sz="2800" dirty="0"/>
               <a:t>본 시스템은 </a:t>
             </a:r>
             <a:r>
-              <a:rPr lang="ko-KR" altLang="en-US" sz="3650" dirty="0" err="1"/>
+              <a:rPr lang="ko-KR" altLang="en-US" sz="2800" dirty="0" err="1"/>
               <a:t>광주오포센터</a:t>
             </a:r>
             <a:r>
-              <a:rPr lang="ko-KR" altLang="en-US" sz="3650" dirty="0"/>
+              <a:rPr lang="ko-KR" altLang="en-US" sz="2800" dirty="0"/>
               <a:t> 자재 관리의 효율성을 높이고</a:t>
             </a:r>
             <a:r>
-              <a:rPr lang="en-US" altLang="ko-KR" sz="3650" dirty="0"/>
+              <a:rPr lang="en-US" altLang="ko-KR" sz="2800" dirty="0"/>
               <a:t>, </a:t>
             </a:r>
             <a:r>
-              <a:rPr lang="ko-KR" altLang="en-US" sz="3650" dirty="0"/>
+              <a:rPr lang="ko-KR" altLang="en-US" sz="2800" dirty="0"/>
               <a:t>실시간 재고 현황 파악 및 입출고 이력 관리를 위해 제작된 자동화 </a:t>
             </a:r>
             <a:r>
-              <a:rPr lang="en-US" altLang="ko-KR" sz="3650" dirty="0"/>
+              <a:rPr lang="en-US" altLang="ko-KR" sz="2800" dirty="0"/>
               <a:t>ERP </a:t>
             </a:r>
             <a:r>
-              <a:rPr lang="ko-KR" altLang="en-US" sz="3650" dirty="0"/>
+              <a:rPr lang="ko-KR" altLang="en-US" sz="2800" dirty="0"/>
               <a:t>웹 애플리케이션입니다</a:t>
             </a:r>
             <a:r>
-              <a:rPr lang="en-US" altLang="ko-KR" sz="3650" dirty="0"/>
+              <a:rPr lang="en-US" altLang="ko-KR" sz="2800" dirty="0"/>
               <a:t>.</a:t>
             </a:r>
           </a:p>
@@ -3091,52 +3091,52 @@
             <a:pPr>
               <a:buNone/>
             </a:pPr>
-            <a:endParaRPr lang="en-US" altLang="ko-KR" sz="3650" dirty="0"/>
+            <a:endParaRPr lang="en-US" altLang="ko-KR" sz="2800" dirty="0"/>
           </a:p>
           <a:p>
             <a:pPr>
               <a:buNone/>
             </a:pPr>
             <a:r>
-              <a:rPr lang="ko-KR" altLang="en-US" sz="3650" dirty="0"/>
+              <a:rPr lang="ko-KR" altLang="en-US" sz="2800" dirty="0"/>
               <a:t>오픈 </a:t>
             </a:r>
             <a:r>
-              <a:rPr lang="en-US" altLang="ko-KR" sz="3650" dirty="0"/>
+              <a:rPr lang="en-US" altLang="ko-KR" sz="2800" dirty="0"/>
               <a:t>AI</a:t>
             </a:r>
             <a:r>
-              <a:rPr lang="ko-KR" altLang="en-US" sz="3650" dirty="0"/>
+              <a:rPr lang="ko-KR" altLang="en-US" sz="2800" dirty="0"/>
               <a:t>인 </a:t>
             </a:r>
             <a:r>
-              <a:rPr lang="ko-KR" altLang="en-US" sz="3650" dirty="0" err="1"/>
+              <a:rPr lang="ko-KR" altLang="en-US" sz="2800" dirty="0" err="1"/>
               <a:t>제미나이를</a:t>
             </a:r>
             <a:r>
-              <a:rPr lang="ko-KR" altLang="en-US" sz="3650" dirty="0"/>
+              <a:rPr lang="ko-KR" altLang="en-US" sz="2800" dirty="0"/>
               <a:t> 통해 제작된 앱으로</a:t>
             </a:r>
-            <a:endParaRPr lang="en-US" altLang="ko-KR" sz="3650" dirty="0"/>
+            <a:endParaRPr lang="en-US" altLang="ko-KR" sz="2800" dirty="0"/>
           </a:p>
           <a:p>
             <a:pPr>
               <a:buNone/>
             </a:pPr>
             <a:r>
-              <a:rPr lang="ko-KR" altLang="en-US" sz="3650" dirty="0"/>
+              <a:rPr lang="ko-KR" altLang="en-US" sz="2800" dirty="0"/>
               <a:t>수정 및 조치는 모두 </a:t>
             </a:r>
             <a:r>
-              <a:rPr lang="en-US" altLang="ko-KR" sz="3650" dirty="0"/>
+              <a:rPr lang="en-US" altLang="ko-KR" sz="2800" dirty="0"/>
               <a:t>AI</a:t>
             </a:r>
             <a:r>
-              <a:rPr lang="ko-KR" altLang="en-US" sz="3650" dirty="0"/>
+              <a:rPr lang="ko-KR" altLang="en-US" sz="2800" dirty="0"/>
               <a:t>를 통해 진행되어왔습니다</a:t>
             </a:r>
             <a:r>
-              <a:rPr lang="en-US" altLang="ko-KR" sz="3650" dirty="0"/>
+              <a:rPr lang="en-US" altLang="ko-KR" sz="2800" dirty="0"/>
               <a:t>.</a:t>
             </a:r>
           </a:p>
@@ -3145,37 +3145,37 @@
               <a:buNone/>
             </a:pPr>
             <a:r>
-              <a:rPr lang="ko-KR" altLang="en-US" sz="3650" dirty="0"/>
+              <a:rPr lang="ko-KR" altLang="en-US" sz="2800" dirty="0"/>
               <a:t>요구사항을 세부적으로 정확하게 입력하시면</a:t>
             </a:r>
             <a:r>
-              <a:rPr lang="en-US" altLang="ko-KR" sz="3650" dirty="0"/>
+              <a:rPr lang="en-US" altLang="ko-KR" sz="2800" dirty="0"/>
               <a:t>, </a:t>
             </a:r>
             <a:r>
-              <a:rPr lang="ko-KR" altLang="en-US" sz="3650" dirty="0"/>
+              <a:rPr lang="ko-KR" altLang="en-US" sz="2800" dirty="0"/>
               <a:t>코딩 관련 지식이 없어도 </a:t>
             </a:r>
             <a:r>
-              <a:rPr lang="ko-KR" altLang="en-US" sz="3650" dirty="0" err="1"/>
+              <a:rPr lang="ko-KR" altLang="en-US" sz="2800" dirty="0" err="1"/>
               <a:t>무리없이</a:t>
             </a:r>
             <a:r>
-              <a:rPr lang="ko-KR" altLang="en-US" sz="3650" dirty="0"/>
+              <a:rPr lang="ko-KR" altLang="en-US" sz="2800" dirty="0"/>
               <a:t> 업무를 수행하실 수 있습니다</a:t>
             </a:r>
             <a:r>
-              <a:rPr lang="en-US" altLang="ko-KR" sz="3650" dirty="0"/>
+              <a:rPr lang="en-US" altLang="ko-KR" sz="2800" dirty="0"/>
               <a:t>.</a:t>
             </a:r>
-            <a:endParaRPr lang="ko-KR" altLang="en-US" sz="3650" dirty="0"/>
+            <a:endParaRPr lang="ko-KR" altLang="en-US" sz="2800" dirty="0"/>
           </a:p>
         </p:txBody>
       </p:sp>
     </p:spTree>
     <p:extLst>
       <p:ext uri="{BB962C8B-B14F-4D97-AF65-F5344CB8AC3E}">
-        <p14:creationId xmlns:p14="http://schemas.microsoft.com/office/powerpoint/2010/main" val="3216090994"/>
+        <p14:creationId xmlns:p14="http://schemas.microsoft.com/office/powerpoint/2010/main" val="607565403"/>
       </p:ext>
     </p:extLst>
   </p:cSld>
@@ -3190,7 +3190,13 @@
   <p:cSld>
     <p:spTree>
       <p:nvGrpSpPr>
-        <p:cNvPr id="1" name=""/>
+        <p:cNvPr id="1" name="">
+          <a:extLst>
+            <a:ext uri="{FF2B5EF4-FFF2-40B4-BE49-F238E27FC236}">
+              <a16:creationId xmlns:a16="http://schemas.microsoft.com/office/drawing/2014/main" id="{2145D4F0-BB24-31E5-EE22-7AFBBC56118A}"/>
+            </a:ext>
+          </a:extLst>
+        </p:cNvPr>
         <p:cNvGrpSpPr/>
         <p:nvPr/>
       </p:nvGrpSpPr>
@@ -3202,399 +3208,401 @@
           <a:chExt cx="0" cy="0"/>
         </a:xfrm>
       </p:grpSpPr>
-      <p:grpSp>
-        <p:nvGrpSpPr>
-          <p:cNvPr id="20" name="그룹 19">
+      <p:pic>
+        <p:nvPicPr>
+          <p:cNvPr id="2" name="그림 1">
             <a:extLst>
               <a:ext uri="{FF2B5EF4-FFF2-40B4-BE49-F238E27FC236}">
-                <a16:creationId xmlns:a16="http://schemas.microsoft.com/office/drawing/2014/main" id="{76FB384F-A674-6907-6C4D-022EAEF969AE}"/>
+                <a16:creationId xmlns:a16="http://schemas.microsoft.com/office/drawing/2014/main" id="{2F050295-962C-7828-BEDA-4BC19351B371}"/>
               </a:ext>
             </a:extLst>
           </p:cNvPr>
-          <p:cNvGrpSpPr/>
+          <p:cNvPicPr>
+            <a:picLocks noChangeAspect="1"/>
+          </p:cNvPicPr>
           <p:nvPr/>
-        </p:nvGrpSpPr>
-        <p:grpSpPr>
+        </p:nvPicPr>
+        <p:blipFill>
+          <a:blip r:embed="rId2"/>
+          <a:stretch>
+            <a:fillRect/>
+          </a:stretch>
+        </p:blipFill>
+        <p:spPr>
           <a:xfrm>
-            <a:off x="-1747" y="0"/>
-            <a:ext cx="10799764" cy="4404337"/>
-            <a:chOff x="-17459" y="0"/>
-            <a:chExt cx="10799764" cy="4404337"/>
+            <a:off x="1" y="0"/>
+            <a:ext cx="9144000" cy="1671581"/>
           </a:xfrm>
-        </p:grpSpPr>
-        <p:pic>
-          <p:nvPicPr>
-            <p:cNvPr id="5" name="그림 4">
-              <a:extLst>
-                <a:ext uri="{FF2B5EF4-FFF2-40B4-BE49-F238E27FC236}">
-                  <a16:creationId xmlns:a16="http://schemas.microsoft.com/office/drawing/2014/main" id="{2DC8AF88-4282-0A8B-C8F2-A1CA98793569}"/>
-                </a:ext>
-              </a:extLst>
-            </p:cNvPr>
-            <p:cNvPicPr>
-              <a:picLocks noChangeAspect="1"/>
-            </p:cNvPicPr>
-            <p:nvPr/>
-          </p:nvPicPr>
-          <p:blipFill>
-            <a:blip r:embed="rId2"/>
-            <a:stretch>
-              <a:fillRect/>
-            </a:stretch>
-          </p:blipFill>
-          <p:spPr>
-            <a:xfrm>
-              <a:off x="-3492" y="0"/>
-              <a:ext cx="10771831" cy="1970069"/>
-            </a:xfrm>
-            <a:prstGeom prst="rect">
-              <a:avLst/>
-            </a:prstGeom>
-          </p:spPr>
-        </p:pic>
-        <p:sp>
-          <p:nvSpPr>
-            <p:cNvPr id="7" name="TextBox 6">
-              <a:extLst>
-                <a:ext uri="{FF2B5EF4-FFF2-40B4-BE49-F238E27FC236}">
-                  <a16:creationId xmlns:a16="http://schemas.microsoft.com/office/drawing/2014/main" id="{F3E7F943-E11E-78E4-7339-F602F2C81C97}"/>
-                </a:ext>
-              </a:extLst>
-            </p:cNvPr>
-            <p:cNvSpPr txBox="1"/>
-            <p:nvPr/>
-          </p:nvSpPr>
-          <p:spPr>
-            <a:xfrm>
-              <a:off x="-17459" y="2065235"/>
-              <a:ext cx="10799764" cy="2339102"/>
-            </a:xfrm>
-            <a:prstGeom prst="rect">
-              <a:avLst/>
-            </a:prstGeom>
-            <a:noFill/>
-          </p:spPr>
-          <p:txBody>
-            <a:bodyPr wrap="square">
-              <a:spAutoFit/>
-            </a:bodyPr>
-            <a:lstStyle/>
-            <a:p>
-              <a:r>
-                <a:rPr lang="ko-KR" altLang="en-US" sz="3650" b="1" dirty="0"/>
-                <a:t>✍️ 개별 직접 등록</a:t>
-              </a:r>
-              <a:r>
-                <a:rPr lang="en-US" altLang="ko-KR" sz="3650" b="1" dirty="0"/>
-                <a:t>:</a:t>
-              </a:r>
-              <a:r>
-                <a:rPr lang="ko-KR" altLang="en-US" sz="3650" dirty="0"/>
-                <a:t> 품목코드</a:t>
-              </a:r>
-              <a:r>
-                <a:rPr lang="en-US" altLang="ko-KR" sz="3650" dirty="0"/>
-                <a:t>, </a:t>
-              </a:r>
-              <a:r>
-                <a:rPr lang="ko-KR" altLang="en-US" sz="3650" dirty="0"/>
-                <a:t>품명</a:t>
-              </a:r>
-              <a:r>
-                <a:rPr lang="en-US" altLang="ko-KR" sz="3650" dirty="0"/>
-                <a:t>, </a:t>
-              </a:r>
-              <a:r>
-                <a:rPr lang="ko-KR" altLang="en-US" sz="3650" dirty="0"/>
-                <a:t>규격</a:t>
-              </a:r>
-              <a:r>
-                <a:rPr lang="en-US" altLang="ko-KR" sz="3650" dirty="0"/>
-                <a:t>, </a:t>
-              </a:r>
-              <a:r>
-                <a:rPr lang="ko-KR" altLang="en-US" sz="3650" dirty="0"/>
-                <a:t>분류</a:t>
-              </a:r>
-              <a:r>
-                <a:rPr lang="en-US" altLang="ko-KR" sz="3650" dirty="0"/>
-                <a:t>, </a:t>
-              </a:r>
-              <a:r>
-                <a:rPr lang="ko-KR" altLang="en-US" sz="3650" dirty="0"/>
-                <a:t>사진</a:t>
-              </a:r>
-              <a:r>
-                <a:rPr lang="en-US" altLang="ko-KR" sz="3650" dirty="0"/>
-                <a:t>, </a:t>
-              </a:r>
-              <a:r>
-                <a:rPr lang="ko-KR" altLang="en-US" sz="3650" dirty="0"/>
-                <a:t>초기 재고 수량 등을 직접 입력하여 신규 등록합니다</a:t>
-              </a:r>
-              <a:r>
-                <a:rPr lang="en-US" altLang="ko-KR" sz="3650" dirty="0"/>
-                <a:t>. DB</a:t>
-              </a:r>
-              <a:r>
-                <a:rPr lang="ko-KR" altLang="en-US" sz="3650" dirty="0"/>
-                <a:t>에 등록되어 있지 않은 완전 신규 품목을 등록하는 기능입니다</a:t>
-              </a:r>
-              <a:r>
-                <a:rPr lang="en-US" altLang="ko-KR" sz="3650" dirty="0"/>
-                <a:t>.</a:t>
-              </a:r>
-              <a:endParaRPr lang="ko-KR" altLang="en-US" sz="3650" dirty="0"/>
-            </a:p>
-          </p:txBody>
-        </p:sp>
-      </p:grpSp>
-      <p:grpSp>
-        <p:nvGrpSpPr>
-          <p:cNvPr id="19" name="그룹 18">
+          <a:prstGeom prst="rect">
+            <a:avLst/>
+          </a:prstGeom>
+        </p:spPr>
+      </p:pic>
+      <p:sp>
+        <p:nvSpPr>
+          <p:cNvPr id="5" name="TextBox 4">
             <a:extLst>
               <a:ext uri="{FF2B5EF4-FFF2-40B4-BE49-F238E27FC236}">
-                <a16:creationId xmlns:a16="http://schemas.microsoft.com/office/drawing/2014/main" id="{B53FF5F2-8073-8825-4897-3E8990A7F45C}"/>
+                <a16:creationId xmlns:a16="http://schemas.microsoft.com/office/drawing/2014/main" id="{AD13EBFF-6ECA-1D57-476E-FC58642C035F}"/>
               </a:ext>
             </a:extLst>
           </p:cNvPr>
-          <p:cNvGrpSpPr/>
+          <p:cNvSpPr txBox="1"/>
           <p:nvPr/>
-        </p:nvGrpSpPr>
-        <p:grpSpPr>
+        </p:nvSpPr>
+        <p:spPr>
           <a:xfrm>
-            <a:off x="5237" y="5865111"/>
-            <a:ext cx="10785797" cy="3169620"/>
-            <a:chOff x="27933" y="4926164"/>
-            <a:chExt cx="10785797" cy="3169620"/>
+            <a:off x="-1" y="1767544"/>
+            <a:ext cx="9144001" cy="3693319"/>
           </a:xfrm>
-        </p:grpSpPr>
-        <p:pic>
-          <p:nvPicPr>
-            <p:cNvPr id="9" name="그림 8">
-              <a:extLst>
-                <a:ext uri="{FF2B5EF4-FFF2-40B4-BE49-F238E27FC236}">
-                  <a16:creationId xmlns:a16="http://schemas.microsoft.com/office/drawing/2014/main" id="{14B51362-6C77-4595-5374-37DD9D9D93F1}"/>
-                </a:ext>
-              </a:extLst>
-            </p:cNvPr>
-            <p:cNvPicPr>
-              <a:picLocks noChangeAspect="1"/>
-            </p:cNvPicPr>
-            <p:nvPr/>
-          </p:nvPicPr>
-          <p:blipFill>
-            <a:blip r:embed="rId3"/>
-            <a:stretch>
-              <a:fillRect/>
-            </a:stretch>
-          </p:blipFill>
-          <p:spPr>
-            <a:xfrm>
-              <a:off x="27933" y="4926164"/>
-              <a:ext cx="10785797" cy="1920320"/>
-            </a:xfrm>
-            <a:prstGeom prst="rect">
-              <a:avLst/>
-            </a:prstGeom>
-          </p:spPr>
-        </p:pic>
-        <p:sp>
-          <p:nvSpPr>
-            <p:cNvPr id="11" name="TextBox 10">
-              <a:extLst>
-                <a:ext uri="{FF2B5EF4-FFF2-40B4-BE49-F238E27FC236}">
-                  <a16:creationId xmlns:a16="http://schemas.microsoft.com/office/drawing/2014/main" id="{BDE810C5-2E12-9F1D-85B2-9FD9EB97757D}"/>
-                </a:ext>
-              </a:extLst>
-            </p:cNvPr>
-            <p:cNvSpPr txBox="1"/>
-            <p:nvPr/>
-          </p:nvSpPr>
-          <p:spPr>
-            <a:xfrm>
-              <a:off x="27933" y="6880067"/>
-              <a:ext cx="10757864" cy="1215717"/>
-            </a:xfrm>
-            <a:prstGeom prst="rect">
-              <a:avLst/>
-            </a:prstGeom>
-            <a:noFill/>
-          </p:spPr>
-          <p:txBody>
-            <a:bodyPr wrap="square">
-              <a:spAutoFit/>
-            </a:bodyPr>
-            <a:lstStyle/>
-            <a:p>
-              <a:r>
-                <a:rPr lang="ko-KR" altLang="en-US" sz="3650" b="1" dirty="0"/>
-                <a:t>✏️ 기존 품목 수정</a:t>
-              </a:r>
-              <a:r>
-                <a:rPr lang="en-US" altLang="ko-KR" sz="3650" b="1" dirty="0"/>
-                <a:t>:</a:t>
-              </a:r>
-              <a:r>
-                <a:rPr lang="ko-KR" altLang="en-US" sz="3650" dirty="0"/>
-                <a:t> 기존 자재의 품명</a:t>
-              </a:r>
-              <a:r>
-                <a:rPr lang="en-US" altLang="ko-KR" sz="3650" dirty="0"/>
-                <a:t>, </a:t>
-              </a:r>
-              <a:r>
-                <a:rPr lang="ko-KR" altLang="en-US" sz="3650" dirty="0"/>
-                <a:t>단가</a:t>
-              </a:r>
-              <a:r>
-                <a:rPr lang="en-US" altLang="ko-KR" sz="3650" dirty="0"/>
-                <a:t>, </a:t>
-              </a:r>
-              <a:r>
-                <a:rPr lang="ko-KR" altLang="en-US" sz="3650" dirty="0"/>
-                <a:t>비고 및 첨부 사진을 수정하거나 교체합니다</a:t>
-              </a:r>
-              <a:r>
-                <a:rPr lang="en-US" altLang="ko-KR" sz="3650" dirty="0"/>
-                <a:t>.</a:t>
-              </a:r>
-              <a:endParaRPr lang="ko-KR" altLang="en-US" sz="3650" dirty="0"/>
-            </a:p>
-          </p:txBody>
-        </p:sp>
-      </p:grpSp>
-      <p:grpSp>
-        <p:nvGrpSpPr>
-          <p:cNvPr id="18" name="그룹 17">
-            <a:extLst>
-              <a:ext uri="{FF2B5EF4-FFF2-40B4-BE49-F238E27FC236}">
-                <a16:creationId xmlns:a16="http://schemas.microsoft.com/office/drawing/2014/main" id="{7FC40734-EF12-C28C-1C57-E6B2EBB24D6E}"/>
-              </a:ext>
-            </a:extLst>
-          </p:cNvPr>
-          <p:cNvGrpSpPr/>
-          <p:nvPr/>
-        </p:nvGrpSpPr>
-        <p:grpSpPr>
-          <a:xfrm>
-            <a:off x="19203" y="10495504"/>
-            <a:ext cx="10757864" cy="3678947"/>
-            <a:chOff x="20949" y="9458842"/>
-            <a:chExt cx="10757864" cy="3678947"/>
-          </a:xfrm>
-        </p:grpSpPr>
-        <p:pic>
-          <p:nvPicPr>
-            <p:cNvPr id="15" name="그림 14">
-              <a:extLst>
-                <a:ext uri="{FF2B5EF4-FFF2-40B4-BE49-F238E27FC236}">
-                  <a16:creationId xmlns:a16="http://schemas.microsoft.com/office/drawing/2014/main" id="{22CA19E0-14D7-047E-2223-9207EC00FC2B}"/>
-                </a:ext>
-              </a:extLst>
-            </p:cNvPr>
-            <p:cNvPicPr>
-              <a:picLocks noChangeAspect="1"/>
-            </p:cNvPicPr>
-            <p:nvPr/>
-          </p:nvPicPr>
-          <p:blipFill>
-            <a:blip r:embed="rId4"/>
-            <a:stretch>
-              <a:fillRect/>
-            </a:stretch>
-          </p:blipFill>
-          <p:spPr>
-            <a:xfrm>
-              <a:off x="20949" y="9458842"/>
-              <a:ext cx="10757864" cy="1901537"/>
-            </a:xfrm>
-            <a:prstGeom prst="rect">
-              <a:avLst/>
-            </a:prstGeom>
-          </p:spPr>
-        </p:pic>
-        <p:sp>
-          <p:nvSpPr>
-            <p:cNvPr id="17" name="TextBox 16">
-              <a:extLst>
-                <a:ext uri="{FF2B5EF4-FFF2-40B4-BE49-F238E27FC236}">
-                  <a16:creationId xmlns:a16="http://schemas.microsoft.com/office/drawing/2014/main" id="{187E6F58-2DE4-E77A-F910-312618A5EACA}"/>
-                </a:ext>
-              </a:extLst>
-            </p:cNvPr>
-            <p:cNvSpPr txBox="1"/>
-            <p:nvPr/>
-          </p:nvSpPr>
-          <p:spPr>
-            <a:xfrm>
-              <a:off x="20949" y="11360379"/>
-              <a:ext cx="10757864" cy="1777410"/>
-            </a:xfrm>
-            <a:prstGeom prst="rect">
-              <a:avLst/>
-            </a:prstGeom>
-            <a:noFill/>
-          </p:spPr>
-          <p:txBody>
-            <a:bodyPr wrap="square">
-              <a:spAutoFit/>
-            </a:bodyPr>
-            <a:lstStyle/>
-            <a:p>
-              <a:r>
-                <a:rPr lang="ko-KR" altLang="en-US" sz="3650" b="1" dirty="0"/>
-                <a:t>📂 기초 데이터 엑셀 일괄 등록</a:t>
-              </a:r>
-              <a:r>
-                <a:rPr lang="en-US" altLang="ko-KR" sz="3650" b="1" dirty="0"/>
-                <a:t>:</a:t>
-              </a:r>
-              <a:r>
-                <a:rPr lang="ko-KR" altLang="en-US" sz="3650" dirty="0"/>
-                <a:t> 대량의 자재 목록을 엑셀 파일</a:t>
-              </a:r>
-              <a:r>
-                <a:rPr lang="en-US" altLang="ko-KR" sz="3650" dirty="0"/>
-                <a:t>(.xlsx)</a:t>
-              </a:r>
-              <a:r>
-                <a:rPr lang="ko-KR" altLang="en-US" sz="3650" dirty="0"/>
-                <a:t>로 한번에 일괄 업로드합니다</a:t>
-              </a:r>
-              <a:r>
-                <a:rPr lang="en-US" altLang="ko-KR" sz="3650" dirty="0"/>
-                <a:t>. </a:t>
-              </a:r>
-              <a:r>
-                <a:rPr lang="ko-KR" altLang="en-US" sz="3650" dirty="0"/>
-                <a:t>양식 파일은 </a:t>
-              </a:r>
-              <a:r>
-                <a:rPr lang="en-US" altLang="ko-KR" sz="3650" dirty="0" err="1"/>
-                <a:t>my_erp</a:t>
-              </a:r>
-              <a:r>
-                <a:rPr lang="en-US" altLang="ko-KR" sz="3650" dirty="0"/>
-                <a:t> </a:t>
-              </a:r>
-              <a:r>
-                <a:rPr lang="ko-KR" altLang="en-US" sz="3650" dirty="0"/>
-                <a:t>폴더 안에 있습니다</a:t>
-              </a:r>
-              <a:r>
-                <a:rPr lang="en-US" altLang="ko-KR" sz="3650" dirty="0"/>
-                <a:t>.</a:t>
-              </a:r>
-              <a:endParaRPr lang="ko-KR" altLang="en-US" sz="3650" dirty="0"/>
-            </a:p>
-          </p:txBody>
-        </p:sp>
-      </p:grpSp>
+          <a:prstGeom prst="rect">
+            <a:avLst/>
+          </a:prstGeom>
+          <a:noFill/>
+        </p:spPr>
+        <p:txBody>
+          <a:bodyPr wrap="square">
+            <a:spAutoFit/>
+          </a:bodyPr>
+          <a:lstStyle/>
+          <a:p>
+            <a:pPr>
+              <a:buNone/>
+            </a:pPr>
+            <a:r>
+              <a:rPr lang="en-US" altLang="ko-KR" b="1" dirty="0"/>
+              <a:t>3. </a:t>
+            </a:r>
+            <a:r>
+              <a:rPr lang="ko-KR" altLang="en-US" b="1" dirty="0"/>
+              <a:t>자재 입출고 등록</a:t>
+            </a:r>
+          </a:p>
+          <a:p>
+            <a:pPr>
+              <a:buNone/>
+            </a:pPr>
+            <a:r>
+              <a:rPr lang="en-US" altLang="ko-KR" dirty="0"/>
+              <a:t>DB</a:t>
+            </a:r>
+            <a:r>
+              <a:rPr lang="ko-KR" altLang="en-US" dirty="0"/>
+              <a:t>에 저장되어 있는 자재의 입고 및 출고 처리를 진행합니다</a:t>
+            </a:r>
+            <a:r>
+              <a:rPr lang="en-US" altLang="ko-KR" dirty="0"/>
+              <a:t>. </a:t>
+            </a:r>
+            <a:r>
+              <a:rPr lang="ko-KR" altLang="en-US" b="1" dirty="0">
+                <a:highlight>
+                  <a:srgbClr val="CCFF33"/>
+                </a:highlight>
+              </a:rPr>
+              <a:t>품목코드</a:t>
+            </a:r>
+            <a:r>
+              <a:rPr lang="ko-KR" altLang="en-US" dirty="0">
+                <a:highlight>
+                  <a:srgbClr val="CCFF33"/>
+                </a:highlight>
+              </a:rPr>
+              <a:t>를 기준</a:t>
+            </a:r>
+            <a:r>
+              <a:rPr lang="ko-KR" altLang="en-US" dirty="0"/>
+              <a:t>으로 </a:t>
+            </a:r>
+            <a:r>
+              <a:rPr lang="ko-KR" altLang="en-US" dirty="0" err="1"/>
+              <a:t>등록하는것을</a:t>
+            </a:r>
+            <a:r>
+              <a:rPr lang="ko-KR" altLang="en-US" dirty="0"/>
+              <a:t> </a:t>
+            </a:r>
+            <a:r>
+              <a:rPr lang="ko-KR" altLang="en-US" dirty="0" err="1"/>
+              <a:t>추천드립니다</a:t>
+            </a:r>
+            <a:r>
+              <a:rPr lang="en-US" altLang="ko-KR" dirty="0"/>
+              <a:t>.</a:t>
+            </a:r>
+          </a:p>
+          <a:p>
+            <a:pPr>
+              <a:buNone/>
+            </a:pPr>
+            <a:endParaRPr lang="en-US" altLang="ko-KR" dirty="0"/>
+          </a:p>
+          <a:p>
+            <a:pPr>
+              <a:buNone/>
+            </a:pPr>
+            <a:r>
+              <a:rPr lang="ko-KR" altLang="en-US" b="1" dirty="0"/>
+              <a:t>① 신규 입출고 등록</a:t>
+            </a:r>
+          </a:p>
+          <a:p>
+            <a:pPr marL="540000" indent="-540000">
+              <a:buFont typeface="+mj-lt"/>
+              <a:buAutoNum type="arabicParenR"/>
+            </a:pPr>
+            <a:r>
+              <a:rPr lang="ko-KR" altLang="en-US" b="1" dirty="0"/>
+              <a:t>대상 품목 검색</a:t>
+            </a:r>
+            <a:r>
+              <a:rPr lang="en-US" altLang="ko-KR" b="1" dirty="0"/>
+              <a:t>:</a:t>
+            </a:r>
+            <a:r>
+              <a:rPr lang="ko-KR" altLang="en-US" dirty="0"/>
+              <a:t> 상단 검색창에서 대상 품목을 선택합니다</a:t>
+            </a:r>
+            <a:r>
+              <a:rPr lang="en-US" altLang="ko-KR" dirty="0"/>
+              <a:t>.</a:t>
+            </a:r>
+          </a:p>
+          <a:p>
+            <a:pPr>
+              <a:buFont typeface="+mj-lt"/>
+              <a:buAutoNum type="arabicParenR"/>
+            </a:pPr>
+            <a:r>
+              <a:rPr lang="ko-KR" altLang="en-US" b="1" dirty="0"/>
+              <a:t>   구분 선택</a:t>
+            </a:r>
+            <a:r>
+              <a:rPr lang="en-US" altLang="ko-KR" b="1" dirty="0"/>
+              <a:t>:</a:t>
+            </a:r>
+            <a:r>
+              <a:rPr lang="ko-KR" altLang="en-US" dirty="0"/>
+              <a:t> </a:t>
+            </a:r>
+            <a:r>
+              <a:rPr lang="ko-KR" altLang="en-US" b="1" dirty="0">
+                <a:highlight>
+                  <a:srgbClr val="CCFF33"/>
+                </a:highlight>
+                <a:latin typeface="Courier New" panose="02070309020205020404" pitchFamily="49" charset="0"/>
+              </a:rPr>
+              <a:t>입고</a:t>
+            </a:r>
+            <a:r>
+              <a:rPr lang="en-US" altLang="ko-KR" dirty="0"/>
+              <a:t> </a:t>
+            </a:r>
+            <a:r>
+              <a:rPr lang="ko-KR" altLang="en-US" dirty="0"/>
+              <a:t>또는 </a:t>
+            </a:r>
+            <a:r>
+              <a:rPr lang="ko-KR" altLang="en-US" b="1" dirty="0">
+                <a:highlight>
+                  <a:srgbClr val="CCFF33"/>
+                </a:highlight>
+                <a:latin typeface="Courier New" panose="02070309020205020404" pitchFamily="49" charset="0"/>
+              </a:rPr>
+              <a:t>출고</a:t>
+            </a:r>
+            <a:r>
+              <a:rPr lang="en-US" altLang="ko-KR" dirty="0"/>
+              <a:t> </a:t>
+            </a:r>
+            <a:r>
+              <a:rPr lang="ko-KR" altLang="en-US" dirty="0"/>
+              <a:t>버튼을 선택합니다</a:t>
+            </a:r>
+            <a:r>
+              <a:rPr lang="en-US" altLang="ko-KR" dirty="0"/>
+              <a:t>.</a:t>
+            </a:r>
+          </a:p>
+          <a:p>
+            <a:pPr>
+              <a:buFont typeface="+mj-lt"/>
+              <a:buAutoNum type="arabicParenR"/>
+            </a:pPr>
+            <a:r>
+              <a:rPr lang="ko-KR" altLang="en-US" b="1" dirty="0"/>
+              <a:t>   정보 입력</a:t>
+            </a:r>
+            <a:r>
+              <a:rPr lang="en-US" altLang="ko-KR" b="1" dirty="0"/>
+              <a:t>:</a:t>
+            </a:r>
+            <a:r>
+              <a:rPr lang="ko-KR" altLang="en-US" dirty="0"/>
+              <a:t> 일자</a:t>
+            </a:r>
+            <a:r>
+              <a:rPr lang="en-US" altLang="ko-KR" dirty="0"/>
+              <a:t>, </a:t>
+            </a:r>
+            <a:r>
+              <a:rPr lang="ko-KR" altLang="en-US" dirty="0"/>
+              <a:t>수량</a:t>
+            </a:r>
+            <a:r>
+              <a:rPr lang="en-US" altLang="ko-KR" dirty="0"/>
+              <a:t>, </a:t>
+            </a:r>
+            <a:r>
+              <a:rPr lang="ko-KR" altLang="en-US" dirty="0"/>
+              <a:t>단가</a:t>
+            </a:r>
+            <a:r>
+              <a:rPr lang="en-US" altLang="ko-KR" dirty="0"/>
+              <a:t>, </a:t>
+            </a:r>
+            <a:r>
+              <a:rPr lang="ko-KR" altLang="en-US" dirty="0"/>
+              <a:t>담당자</a:t>
+            </a:r>
+            <a:r>
+              <a:rPr lang="en-US" altLang="ko-KR" dirty="0"/>
+              <a:t>, </a:t>
+            </a:r>
+            <a:r>
+              <a:rPr lang="ko-KR" altLang="en-US" b="1" dirty="0" err="1"/>
+              <a:t>요청자</a:t>
+            </a:r>
+            <a:r>
+              <a:rPr lang="en-US" altLang="ko-KR" b="1" dirty="0"/>
+              <a:t>(*</a:t>
+            </a:r>
+            <a:r>
+              <a:rPr lang="ko-KR" altLang="en-US" b="1" dirty="0"/>
+              <a:t>필수</a:t>
+            </a:r>
+            <a:r>
+              <a:rPr lang="en-US" altLang="ko-KR" b="1" dirty="0"/>
+              <a:t>)</a:t>
+            </a:r>
+            <a:r>
+              <a:rPr lang="en-US" altLang="ko-KR" dirty="0"/>
+              <a:t>, </a:t>
+            </a:r>
+            <a:r>
+              <a:rPr lang="ko-KR" altLang="en-US" dirty="0"/>
+              <a:t>비고를 입력합니다</a:t>
+            </a:r>
+            <a:r>
+              <a:rPr lang="en-US" altLang="ko-KR" dirty="0"/>
+              <a:t>.</a:t>
+            </a:r>
+          </a:p>
+          <a:p>
+            <a:pPr>
+              <a:buFont typeface="+mj-lt"/>
+              <a:buAutoNum type="arabicParenR"/>
+            </a:pPr>
+            <a:r>
+              <a:rPr lang="ko-KR" altLang="en-US" b="1" dirty="0"/>
+              <a:t>   저장 및 최종 확인</a:t>
+            </a:r>
+            <a:r>
+              <a:rPr lang="en-US" altLang="ko-KR" b="1" dirty="0"/>
+              <a:t>:</a:t>
+            </a:r>
+            <a:r>
+              <a:rPr lang="ko-KR" altLang="en-US" dirty="0"/>
+              <a:t> </a:t>
+            </a:r>
+            <a:r>
+              <a:rPr lang="ko-KR" altLang="en-US" dirty="0">
+                <a:latin typeface="Courier New" panose="02070309020205020404" pitchFamily="49" charset="0"/>
+              </a:rPr>
+              <a:t>입출고 저장 실행</a:t>
+            </a:r>
+            <a:r>
+              <a:rPr lang="ko-KR" altLang="en-US" dirty="0"/>
+              <a:t> 버튼 클릭 후 나타나는 </a:t>
+            </a:r>
+            <a:r>
+              <a:rPr lang="en-US" altLang="ko-KR" dirty="0"/>
+              <a:t>Pop-up </a:t>
+            </a:r>
+            <a:r>
+              <a:rPr lang="ko-KR" altLang="en-US" dirty="0"/>
+              <a:t>창에서 내역을 확인하고 </a:t>
+            </a:r>
+            <a:r>
+              <a:rPr lang="ko-KR" altLang="en-US" dirty="0">
+                <a:latin typeface="Courier New" panose="02070309020205020404" pitchFamily="49" charset="0"/>
+              </a:rPr>
+              <a:t>최종 확인 및 실행</a:t>
+            </a:r>
+            <a:r>
+              <a:rPr lang="ko-KR" altLang="en-US" dirty="0"/>
+              <a:t>을 누릅니다</a:t>
+            </a:r>
+            <a:r>
+              <a:rPr lang="en-US" altLang="ko-KR" dirty="0"/>
+              <a:t>.</a:t>
+            </a:r>
+          </a:p>
+          <a:p>
+            <a:pPr>
+              <a:buFont typeface="+mj-lt"/>
+              <a:buAutoNum type="arabicParenR"/>
+            </a:pPr>
+            <a:endParaRPr lang="en-US" altLang="ko-KR" dirty="0"/>
+          </a:p>
+          <a:p>
+            <a:r>
+              <a:rPr lang="en-US" altLang="ko-KR" dirty="0">
+                <a:highlight>
+                  <a:srgbClr val="CCFF33"/>
+                </a:highlight>
+              </a:rPr>
+              <a:t>Tip.</a:t>
+            </a:r>
+            <a:r>
+              <a:rPr lang="en-US" altLang="ko-KR" dirty="0"/>
+              <a:t> </a:t>
+            </a:r>
+            <a:r>
+              <a:rPr lang="ko-KR" altLang="en-US" dirty="0"/>
+              <a:t>품목 선택 후 하단의 </a:t>
+            </a:r>
+            <a:r>
+              <a:rPr lang="ko-KR" altLang="en-US" dirty="0">
+                <a:highlight>
+                  <a:srgbClr val="CCFF33"/>
+                </a:highlight>
+              </a:rPr>
+              <a:t>명세서를 확인</a:t>
+            </a:r>
+            <a:r>
+              <a:rPr lang="ko-KR" altLang="en-US" dirty="0"/>
+              <a:t>하여</a:t>
+            </a:r>
+            <a:r>
+              <a:rPr lang="en-US" altLang="ko-KR" dirty="0"/>
+              <a:t>, </a:t>
+            </a:r>
+            <a:r>
+              <a:rPr lang="ko-KR" altLang="en-US" dirty="0"/>
+              <a:t>품목을 바르게 선택했는지 한번 더 확인하면 실수를 줄일 수 있습니다</a:t>
+            </a:r>
+            <a:r>
+              <a:rPr lang="en-US" altLang="ko-KR" dirty="0"/>
+              <a:t>.</a:t>
+            </a:r>
+          </a:p>
+        </p:txBody>
+      </p:sp>
     </p:spTree>
     <p:extLst>
       <p:ext uri="{BB962C8B-B14F-4D97-AF65-F5344CB8AC3E}">
-        <p14:creationId xmlns:p14="http://schemas.microsoft.com/office/powerpoint/2010/main" val="3790577884"/>
+        <p14:creationId xmlns:p14="http://schemas.microsoft.com/office/powerpoint/2010/main" val="1805012874"/>
       </p:ext>
     </p:extLst>
   </p:cSld>
@@ -3609,7 +3617,145 @@
   <p:cSld>
     <p:spTree>
       <p:nvGrpSpPr>
-        <p:cNvPr id="1" name=""/>
+        <p:cNvPr id="1" name="">
+          <a:extLst>
+            <a:ext uri="{FF2B5EF4-FFF2-40B4-BE49-F238E27FC236}">
+              <a16:creationId xmlns:a16="http://schemas.microsoft.com/office/drawing/2014/main" id="{A325AFAD-9B3B-0E5B-2451-739CFB8D6FF2}"/>
+            </a:ext>
+          </a:extLst>
+        </p:cNvPr>
+        <p:cNvGrpSpPr/>
+        <p:nvPr/>
+      </p:nvGrpSpPr>
+      <p:grpSpPr>
+        <a:xfrm>
+          <a:off x="0" y="0"/>
+          <a:ext cx="0" cy="0"/>
+          <a:chOff x="0" y="0"/>
+          <a:chExt cx="0" cy="0"/>
+        </a:xfrm>
+      </p:grpSpPr>
+      <p:pic>
+        <p:nvPicPr>
+          <p:cNvPr id="3" name="그림 2">
+            <a:extLst>
+              <a:ext uri="{FF2B5EF4-FFF2-40B4-BE49-F238E27FC236}">
+                <a16:creationId xmlns:a16="http://schemas.microsoft.com/office/drawing/2014/main" id="{28298697-E846-4CBD-A824-F53695FA2957}"/>
+              </a:ext>
+            </a:extLst>
+          </p:cNvPr>
+          <p:cNvPicPr>
+            <a:picLocks noChangeAspect="1"/>
+          </p:cNvPicPr>
+          <p:nvPr/>
+        </p:nvPicPr>
+        <p:blipFill>
+          <a:blip r:embed="rId2"/>
+          <a:stretch>
+            <a:fillRect/>
+          </a:stretch>
+        </p:blipFill>
+        <p:spPr>
+          <a:xfrm>
+            <a:off x="0" y="797583"/>
+            <a:ext cx="9144000" cy="5262834"/>
+          </a:xfrm>
+          <a:prstGeom prst="rect">
+            <a:avLst/>
+          </a:prstGeom>
+        </p:spPr>
+      </p:pic>
+    </p:spTree>
+    <p:extLst>
+      <p:ext uri="{BB962C8B-B14F-4D97-AF65-F5344CB8AC3E}">
+        <p14:creationId xmlns:p14="http://schemas.microsoft.com/office/powerpoint/2010/main" val="1958597996"/>
+      </p:ext>
+    </p:extLst>
+  </p:cSld>
+  <p:clrMapOvr>
+    <a:masterClrMapping/>
+  </p:clrMapOvr>
+</p:sld>
+</file>
+
+<file path=ppt/slides/slide12.xml><?xml version="1.0" encoding="utf-8"?>
+<p:sld xmlns:a="http://schemas.openxmlformats.org/drawingml/2006/main" xmlns:r="http://schemas.openxmlformats.org/officeDocument/2006/relationships" xmlns:p="http://schemas.openxmlformats.org/presentationml/2006/main">
+  <p:cSld>
+    <p:spTree>
+      <p:nvGrpSpPr>
+        <p:cNvPr id="1" name="">
+          <a:extLst>
+            <a:ext uri="{FF2B5EF4-FFF2-40B4-BE49-F238E27FC236}">
+              <a16:creationId xmlns:a16="http://schemas.microsoft.com/office/drawing/2014/main" id="{C24A7021-969B-BA7B-7E27-9AC79CC6D2F3}"/>
+            </a:ext>
+          </a:extLst>
+        </p:cNvPr>
+        <p:cNvGrpSpPr/>
+        <p:nvPr/>
+      </p:nvGrpSpPr>
+      <p:grpSpPr>
+        <a:xfrm>
+          <a:off x="0" y="0"/>
+          <a:ext cx="0" cy="0"/>
+          <a:chOff x="0" y="0"/>
+          <a:chExt cx="0" cy="0"/>
+        </a:xfrm>
+      </p:grpSpPr>
+      <p:pic>
+        <p:nvPicPr>
+          <p:cNvPr id="3" name="그림 2">
+            <a:extLst>
+              <a:ext uri="{FF2B5EF4-FFF2-40B4-BE49-F238E27FC236}">
+                <a16:creationId xmlns:a16="http://schemas.microsoft.com/office/drawing/2014/main" id="{85C56A77-47A7-76D7-31F8-F1EC5EA1DE4A}"/>
+              </a:ext>
+            </a:extLst>
+          </p:cNvPr>
+          <p:cNvPicPr>
+            <a:picLocks noChangeAspect="1"/>
+          </p:cNvPicPr>
+          <p:nvPr/>
+        </p:nvPicPr>
+        <p:blipFill>
+          <a:blip r:embed="rId2"/>
+          <a:stretch>
+            <a:fillRect/>
+          </a:stretch>
+        </p:blipFill>
+        <p:spPr>
+          <a:xfrm>
+            <a:off x="0" y="723258"/>
+            <a:ext cx="9144000" cy="5411483"/>
+          </a:xfrm>
+          <a:prstGeom prst="rect">
+            <a:avLst/>
+          </a:prstGeom>
+        </p:spPr>
+      </p:pic>
+    </p:spTree>
+    <p:extLst>
+      <p:ext uri="{BB962C8B-B14F-4D97-AF65-F5344CB8AC3E}">
+        <p14:creationId xmlns:p14="http://schemas.microsoft.com/office/powerpoint/2010/main" val="747711059"/>
+      </p:ext>
+    </p:extLst>
+  </p:cSld>
+  <p:clrMapOvr>
+    <a:masterClrMapping/>
+  </p:clrMapOvr>
+</p:sld>
+</file>
+
+<file path=ppt/slides/slide13.xml><?xml version="1.0" encoding="utf-8"?>
+<p:sld xmlns:a="http://schemas.openxmlformats.org/drawingml/2006/main" xmlns:r="http://schemas.openxmlformats.org/officeDocument/2006/relationships" xmlns:p="http://schemas.openxmlformats.org/presentationml/2006/main">
+  <p:cSld>
+    <p:spTree>
+      <p:nvGrpSpPr>
+        <p:cNvPr id="1" name="">
+          <a:extLst>
+            <a:ext uri="{FF2B5EF4-FFF2-40B4-BE49-F238E27FC236}">
+              <a16:creationId xmlns:a16="http://schemas.microsoft.com/office/drawing/2014/main" id="{BA7A1337-82BD-E0EE-7C7B-BDC65B69F060}"/>
+            </a:ext>
+          </a:extLst>
+        </p:cNvPr>
         <p:cNvGrpSpPr/>
         <p:nvPr/>
       </p:nvGrpSpPr>
@@ -3623,10 +3769,10 @@
       </p:grpSpPr>
       <p:sp>
         <p:nvSpPr>
-          <p:cNvPr id="5" name="TextBox 4">
+          <p:cNvPr id="2" name="TextBox 1">
             <a:extLst>
               <a:ext uri="{FF2B5EF4-FFF2-40B4-BE49-F238E27FC236}">
-                <a16:creationId xmlns:a16="http://schemas.microsoft.com/office/drawing/2014/main" id="{89494A3F-2410-90D2-D21B-394BBABECD49}"/>
+                <a16:creationId xmlns:a16="http://schemas.microsoft.com/office/drawing/2014/main" id="{74C00998-7E9A-4327-B639-B34BDDE23B8F}"/>
               </a:ext>
             </a:extLst>
           </p:cNvPr>
@@ -3635,8 +3781,8 @@
         </p:nvSpPr>
         <p:spPr>
           <a:xfrm>
-            <a:off x="0" y="0"/>
-            <a:ext cx="10799763" cy="4024179"/>
+            <a:off x="1" y="1963087"/>
+            <a:ext cx="9144000" cy="2031325"/>
           </a:xfrm>
           <a:prstGeom prst="rect">
             <a:avLst/>
@@ -3653,100 +3799,97 @@
               <a:buNone/>
             </a:pPr>
             <a:r>
-              <a:rPr lang="ko-KR" altLang="en-US" sz="3650" b="1" dirty="0"/>
-              <a:t>시스템 기술 스택 구조 및 유지보수 가이드</a:t>
-            </a:r>
-            <a:endParaRPr lang="en-US" altLang="ko-KR" sz="3650" b="1" dirty="0"/>
+              <a:rPr lang="ko-KR" altLang="en-US" b="1" dirty="0"/>
+              <a:t>② 기존 내역 수정 및 삭제</a:t>
+            </a:r>
+            <a:endParaRPr lang="en-US" altLang="ko-KR" b="1" dirty="0"/>
           </a:p>
           <a:p>
             <a:pPr>
               <a:buNone/>
             </a:pPr>
-            <a:r>
-              <a:rPr lang="en-US" altLang="ko-KR" sz="3650" b="1" dirty="0"/>
-              <a:t>(</a:t>
-            </a:r>
-            <a:r>
-              <a:rPr lang="ko-KR" altLang="en-US" sz="3650" b="1" dirty="0"/>
-              <a:t>관리자 전용</a:t>
-            </a:r>
-            <a:r>
-              <a:rPr lang="en-US" altLang="ko-KR" sz="3650" b="1" dirty="0"/>
-              <a:t>)</a:t>
-            </a:r>
+            <a:endParaRPr lang="ko-KR" altLang="en-US" b="1" dirty="0"/>
           </a:p>
           <a:p>
             <a:pPr>
-              <a:buNone/>
-            </a:pPr>
-            <a:endParaRPr lang="en-US" altLang="ko-KR" sz="3650" b="1" dirty="0"/>
+              <a:buFont typeface="Arial" panose="020B0604020202020204" pitchFamily="34" charset="0"/>
+              <a:buChar char="•"/>
+            </a:pPr>
+            <a:r>
+              <a:rPr lang="ko-KR" altLang="en-US" dirty="0">
+                <a:latin typeface="Courier New" panose="02070309020205020404" pitchFamily="49" charset="0"/>
+              </a:rPr>
+              <a:t> 기존 입출고 내역 수정 및 삭제</a:t>
+            </a:r>
+            <a:r>
+              <a:rPr lang="ko-KR" altLang="en-US" dirty="0"/>
+              <a:t> 탭에서 날짜 범위와 키워드로 이전 입력 내역을 조회한 후</a:t>
+            </a:r>
+            <a:r>
+              <a:rPr lang="en-US" altLang="ko-KR" dirty="0"/>
+              <a:t>, </a:t>
+            </a:r>
+            <a:r>
+              <a:rPr lang="ko-KR" altLang="en-US" dirty="0">
+                <a:latin typeface="+mn-ea"/>
+              </a:rPr>
+              <a:t>수량</a:t>
+            </a:r>
+            <a:r>
+              <a:rPr lang="en-US" altLang="ko-KR" dirty="0">
+                <a:latin typeface="+mn-ea"/>
+              </a:rPr>
+              <a:t>·</a:t>
+            </a:r>
+            <a:r>
+              <a:rPr lang="ko-KR" altLang="en-US" dirty="0">
+                <a:latin typeface="+mn-ea"/>
+              </a:rPr>
+              <a:t>적용 단가 등 수정이나</a:t>
+            </a:r>
+            <a:r>
+              <a:rPr lang="ko-KR" altLang="en-US" dirty="0"/>
+              <a:t> 내역 삭제가 가능합니다</a:t>
+            </a:r>
+            <a:r>
+              <a:rPr lang="en-US" altLang="ko-KR" dirty="0"/>
+              <a:t>.</a:t>
+            </a:r>
           </a:p>
           <a:p>
             <a:pPr>
-              <a:buNone/>
-            </a:pPr>
-            <a:r>
-              <a:rPr lang="ko-KR" altLang="en-US" sz="3650" dirty="0"/>
-              <a:t>본 </a:t>
-            </a:r>
-            <a:r>
-              <a:rPr lang="ko-KR" altLang="en-US" sz="3650" dirty="0" err="1"/>
-              <a:t>광주오포센터</a:t>
-            </a:r>
-            <a:r>
-              <a:rPr lang="ko-KR" altLang="en-US" sz="3650" dirty="0"/>
-              <a:t> 자동화 </a:t>
-            </a:r>
-            <a:r>
-              <a:rPr lang="en-US" altLang="ko-KR" sz="3650" dirty="0"/>
-              <a:t>ERP </a:t>
-            </a:r>
-            <a:r>
-              <a:rPr lang="ko-KR" altLang="en-US" sz="3650" dirty="0"/>
-              <a:t>시스템은 </a:t>
-            </a:r>
-            <a:r>
-              <a:rPr lang="en-US" altLang="ko-KR" sz="3650" b="1" dirty="0"/>
-              <a:t>GitHub</a:t>
-            </a:r>
-            <a:r>
-              <a:rPr lang="en-US" altLang="ko-KR" sz="3650" dirty="0"/>
+              <a:buFont typeface="Arial" panose="020B0604020202020204" pitchFamily="34" charset="0"/>
+              <a:buChar char="•"/>
+            </a:pPr>
+            <a:endParaRPr lang="en-US" altLang="ko-KR" dirty="0"/>
+          </a:p>
+          <a:p>
+            <a:r>
+              <a:rPr lang="en-US" altLang="ko-KR" dirty="0"/>
+              <a:t>Tip. </a:t>
+            </a:r>
+            <a:r>
+              <a:rPr lang="ko-KR" altLang="en-US" dirty="0"/>
+              <a:t>수정이 필요한 내역의 날짜</a:t>
+            </a:r>
+            <a:r>
+              <a:rPr lang="en-US" altLang="ko-KR" dirty="0"/>
               <a:t>, </a:t>
             </a:r>
             <a:r>
-              <a:rPr lang="en-US" altLang="ko-KR" sz="3650" b="1" dirty="0" err="1"/>
-              <a:t>Streamlit</a:t>
-            </a:r>
-            <a:r>
-              <a:rPr lang="en-US" altLang="ko-KR" sz="3650" dirty="0"/>
+              <a:rPr lang="ko-KR" altLang="en-US" dirty="0" err="1"/>
+              <a:t>요청자</a:t>
+            </a:r>
+            <a:r>
+              <a:rPr lang="en-US" altLang="ko-KR" dirty="0"/>
               <a:t>, </a:t>
             </a:r>
             <a:r>
-              <a:rPr lang="en-US" altLang="ko-KR" sz="3650" b="1" dirty="0" err="1"/>
-              <a:t>Supabase</a:t>
-            </a:r>
-            <a:r>
-              <a:rPr lang="ko-KR" altLang="en-US" sz="3650" dirty="0"/>
-              <a:t>의 </a:t>
-            </a:r>
-            <a:r>
-              <a:rPr lang="en-US" altLang="ko-KR" sz="3650" dirty="0"/>
-              <a:t>3</a:t>
-            </a:r>
-            <a:r>
-              <a:rPr lang="ko-KR" altLang="en-US" sz="3650" dirty="0"/>
-              <a:t>가지 핵심 기술 조합으로 구축되어 있습니다</a:t>
-            </a:r>
-            <a:r>
-              <a:rPr lang="en-US" altLang="ko-KR" sz="3650" dirty="0"/>
-              <a:t>. </a:t>
-            </a:r>
-            <a:r>
-              <a:rPr lang="ko-KR" altLang="en-US" sz="3650" dirty="0"/>
-              <a:t>각 기술의 역할과 기본적인 수정 및 관리 방법은 다음과 같습니다</a:t>
-            </a:r>
-            <a:r>
-              <a:rPr lang="en-US" altLang="ko-KR" sz="3650" dirty="0"/>
+              <a:rPr lang="ko-KR" altLang="en-US" dirty="0"/>
+              <a:t>품목코드를 미리 파악하여 내역을 검색 및 선택하면 보다 정확한 수정이 가능합니다</a:t>
+            </a:r>
+            <a:r>
+              <a:rPr lang="en-US" altLang="ko-KR" dirty="0"/>
               <a:t>.</a:t>
             </a:r>
           </a:p>
@@ -3754,10 +3897,629 @@
       </p:sp>
       <p:pic>
         <p:nvPicPr>
-          <p:cNvPr id="1026" name="Picture 2" descr="What is GitHub.. GitHub is a platform for online… | by Sameer Hussain |  Medium">
+          <p:cNvPr id="3" name="그림 2">
             <a:extLst>
               <a:ext uri="{FF2B5EF4-FFF2-40B4-BE49-F238E27FC236}">
-                <a16:creationId xmlns:a16="http://schemas.microsoft.com/office/drawing/2014/main" id="{9FC0DA66-3990-4116-6777-ED0566E93D09}"/>
+                <a16:creationId xmlns:a16="http://schemas.microsoft.com/office/drawing/2014/main" id="{23898125-C6A9-93DB-C2FE-A604C1DDAD86}"/>
+              </a:ext>
+            </a:extLst>
+          </p:cNvPr>
+          <p:cNvPicPr>
+            <a:picLocks noChangeAspect="1"/>
+          </p:cNvPicPr>
+          <p:nvPr/>
+        </p:nvPicPr>
+        <p:blipFill>
+          <a:blip r:embed="rId2"/>
+          <a:stretch>
+            <a:fillRect/>
+          </a:stretch>
+        </p:blipFill>
+        <p:spPr>
+          <a:xfrm>
+            <a:off x="0" y="1"/>
+            <a:ext cx="9144000" cy="1657578"/>
+          </a:xfrm>
+          <a:prstGeom prst="rect">
+            <a:avLst/>
+          </a:prstGeom>
+        </p:spPr>
+      </p:pic>
+    </p:spTree>
+    <p:extLst>
+      <p:ext uri="{BB962C8B-B14F-4D97-AF65-F5344CB8AC3E}">
+        <p14:creationId xmlns:p14="http://schemas.microsoft.com/office/powerpoint/2010/main" val="3254769824"/>
+      </p:ext>
+    </p:extLst>
+  </p:cSld>
+  <p:clrMapOvr>
+    <a:masterClrMapping/>
+  </p:clrMapOvr>
+</p:sld>
+</file>
+
+<file path=ppt/slides/slide14.xml><?xml version="1.0" encoding="utf-8"?>
+<p:sld xmlns:a="http://schemas.openxmlformats.org/drawingml/2006/main" xmlns:r="http://schemas.openxmlformats.org/officeDocument/2006/relationships" xmlns:p="http://schemas.openxmlformats.org/presentationml/2006/main">
+  <p:cSld>
+    <p:spTree>
+      <p:nvGrpSpPr>
+        <p:cNvPr id="1" name="">
+          <a:extLst>
+            <a:ext uri="{FF2B5EF4-FFF2-40B4-BE49-F238E27FC236}">
+              <a16:creationId xmlns:a16="http://schemas.microsoft.com/office/drawing/2014/main" id="{3FF7C2AE-47AA-D089-6617-D7E7B75FC2A5}"/>
+            </a:ext>
+          </a:extLst>
+        </p:cNvPr>
+        <p:cNvGrpSpPr/>
+        <p:nvPr/>
+      </p:nvGrpSpPr>
+      <p:grpSpPr>
+        <a:xfrm>
+          <a:off x="0" y="0"/>
+          <a:ext cx="0" cy="0"/>
+          <a:chOff x="0" y="0"/>
+          <a:chExt cx="0" cy="0"/>
+        </a:xfrm>
+      </p:grpSpPr>
+      <p:pic>
+        <p:nvPicPr>
+          <p:cNvPr id="3" name="그림 2">
+            <a:extLst>
+              <a:ext uri="{FF2B5EF4-FFF2-40B4-BE49-F238E27FC236}">
+                <a16:creationId xmlns:a16="http://schemas.microsoft.com/office/drawing/2014/main" id="{989F72FE-DBF4-74D7-4055-6E97A3494A07}"/>
+              </a:ext>
+            </a:extLst>
+          </p:cNvPr>
+          <p:cNvPicPr>
+            <a:picLocks noChangeAspect="1"/>
+          </p:cNvPicPr>
+          <p:nvPr/>
+        </p:nvPicPr>
+        <p:blipFill>
+          <a:blip r:embed="rId2"/>
+          <a:stretch>
+            <a:fillRect/>
+          </a:stretch>
+        </p:blipFill>
+        <p:spPr>
+          <a:xfrm>
+            <a:off x="0" y="883763"/>
+            <a:ext cx="9144000" cy="5090474"/>
+          </a:xfrm>
+          <a:prstGeom prst="rect">
+            <a:avLst/>
+          </a:prstGeom>
+        </p:spPr>
+      </p:pic>
+    </p:spTree>
+    <p:extLst>
+      <p:ext uri="{BB962C8B-B14F-4D97-AF65-F5344CB8AC3E}">
+        <p14:creationId xmlns:p14="http://schemas.microsoft.com/office/powerpoint/2010/main" val="2411438591"/>
+      </p:ext>
+    </p:extLst>
+  </p:cSld>
+  <p:clrMapOvr>
+    <a:masterClrMapping/>
+  </p:clrMapOvr>
+</p:sld>
+</file>
+
+<file path=ppt/slides/slide15.xml><?xml version="1.0" encoding="utf-8"?>
+<p:sld xmlns:a="http://schemas.openxmlformats.org/drawingml/2006/main" xmlns:r="http://schemas.openxmlformats.org/officeDocument/2006/relationships" xmlns:p="http://schemas.openxmlformats.org/presentationml/2006/main">
+  <p:cSld>
+    <p:spTree>
+      <p:nvGrpSpPr>
+        <p:cNvPr id="1" name="">
+          <a:extLst>
+            <a:ext uri="{FF2B5EF4-FFF2-40B4-BE49-F238E27FC236}">
+              <a16:creationId xmlns:a16="http://schemas.microsoft.com/office/drawing/2014/main" id="{F779BF7A-F43C-A79C-94F7-C773C1D031EC}"/>
+            </a:ext>
+          </a:extLst>
+        </p:cNvPr>
+        <p:cNvGrpSpPr/>
+        <p:nvPr/>
+      </p:nvGrpSpPr>
+      <p:grpSpPr>
+        <a:xfrm>
+          <a:off x="0" y="0"/>
+          <a:ext cx="0" cy="0"/>
+          <a:chOff x="0" y="0"/>
+          <a:chExt cx="0" cy="0"/>
+        </a:xfrm>
+      </p:grpSpPr>
+      <p:pic>
+        <p:nvPicPr>
+          <p:cNvPr id="3" name="그림 2">
+            <a:extLst>
+              <a:ext uri="{FF2B5EF4-FFF2-40B4-BE49-F238E27FC236}">
+                <a16:creationId xmlns:a16="http://schemas.microsoft.com/office/drawing/2014/main" id="{CD49B7D5-9D73-4417-0C3D-1D945F54F113}"/>
+              </a:ext>
+            </a:extLst>
+          </p:cNvPr>
+          <p:cNvPicPr>
+            <a:picLocks noChangeAspect="1"/>
+          </p:cNvPicPr>
+          <p:nvPr/>
+        </p:nvPicPr>
+        <p:blipFill>
+          <a:blip r:embed="rId2"/>
+          <a:stretch>
+            <a:fillRect/>
+          </a:stretch>
+        </p:blipFill>
+        <p:spPr>
+          <a:xfrm>
+            <a:off x="-10475" y="0"/>
+            <a:ext cx="9131779" cy="1667435"/>
+          </a:xfrm>
+          <a:prstGeom prst="rect">
+            <a:avLst/>
+          </a:prstGeom>
+        </p:spPr>
+      </p:pic>
+      <p:sp>
+        <p:nvSpPr>
+          <p:cNvPr id="4" name="TextBox 3">
+            <a:extLst>
+              <a:ext uri="{FF2B5EF4-FFF2-40B4-BE49-F238E27FC236}">
+                <a16:creationId xmlns:a16="http://schemas.microsoft.com/office/drawing/2014/main" id="{207A7D58-213F-E966-122D-0967E7B1B3BB}"/>
+              </a:ext>
+            </a:extLst>
+          </p:cNvPr>
+          <p:cNvSpPr txBox="1"/>
+          <p:nvPr/>
+        </p:nvSpPr>
+        <p:spPr>
+          <a:xfrm>
+            <a:off x="-10475" y="1723673"/>
+            <a:ext cx="9145747" cy="646331"/>
+          </a:xfrm>
+          <a:prstGeom prst="rect">
+            <a:avLst/>
+          </a:prstGeom>
+          <a:noFill/>
+        </p:spPr>
+        <p:txBody>
+          <a:bodyPr wrap="square">
+            <a:spAutoFit/>
+          </a:bodyPr>
+          <a:lstStyle/>
+          <a:p>
+            <a:r>
+              <a:rPr lang="ko-KR" altLang="en-US" b="1" dirty="0"/>
+              <a:t>✍️ 개별 직접 등록</a:t>
+            </a:r>
+            <a:r>
+              <a:rPr lang="en-US" altLang="ko-KR" b="1" dirty="0"/>
+              <a:t>:</a:t>
+            </a:r>
+            <a:r>
+              <a:rPr lang="ko-KR" altLang="en-US" dirty="0"/>
+              <a:t> 품목코드</a:t>
+            </a:r>
+            <a:r>
+              <a:rPr lang="en-US" altLang="ko-KR" dirty="0"/>
+              <a:t>, </a:t>
+            </a:r>
+            <a:r>
+              <a:rPr lang="ko-KR" altLang="en-US" dirty="0"/>
+              <a:t>품명</a:t>
+            </a:r>
+            <a:r>
+              <a:rPr lang="en-US" altLang="ko-KR" dirty="0"/>
+              <a:t>, </a:t>
+            </a:r>
+            <a:r>
+              <a:rPr lang="ko-KR" altLang="en-US" dirty="0"/>
+              <a:t>규격</a:t>
+            </a:r>
+            <a:r>
+              <a:rPr lang="en-US" altLang="ko-KR" dirty="0"/>
+              <a:t>, </a:t>
+            </a:r>
+            <a:r>
+              <a:rPr lang="ko-KR" altLang="en-US" dirty="0"/>
+              <a:t>분류</a:t>
+            </a:r>
+            <a:r>
+              <a:rPr lang="en-US" altLang="ko-KR" dirty="0"/>
+              <a:t>, </a:t>
+            </a:r>
+            <a:r>
+              <a:rPr lang="ko-KR" altLang="en-US" dirty="0"/>
+              <a:t>사진</a:t>
+            </a:r>
+            <a:r>
+              <a:rPr lang="en-US" altLang="ko-KR" dirty="0"/>
+              <a:t>, </a:t>
+            </a:r>
+            <a:r>
+              <a:rPr lang="ko-KR" altLang="en-US" dirty="0"/>
+              <a:t>초기 재고 수량 등을 직접 입력하여 신규 등록합니다</a:t>
+            </a:r>
+            <a:r>
+              <a:rPr lang="en-US" altLang="ko-KR" dirty="0"/>
+              <a:t>. DB</a:t>
+            </a:r>
+            <a:r>
+              <a:rPr lang="ko-KR" altLang="en-US" dirty="0"/>
+              <a:t>에 등록되어 있지 않은 완전 신규 품목을 등록하는 기능입니다</a:t>
+            </a:r>
+            <a:r>
+              <a:rPr lang="en-US" altLang="ko-KR" dirty="0"/>
+              <a:t>.</a:t>
+            </a:r>
+            <a:endParaRPr lang="ko-KR" altLang="en-US" dirty="0"/>
+          </a:p>
+        </p:txBody>
+      </p:sp>
+      <p:pic>
+        <p:nvPicPr>
+          <p:cNvPr id="6" name="그림 5">
+            <a:extLst>
+              <a:ext uri="{FF2B5EF4-FFF2-40B4-BE49-F238E27FC236}">
+                <a16:creationId xmlns:a16="http://schemas.microsoft.com/office/drawing/2014/main" id="{FFA14C89-FE48-B298-A66F-7F978E11630A}"/>
+              </a:ext>
+            </a:extLst>
+          </p:cNvPr>
+          <p:cNvPicPr>
+            <a:picLocks noChangeAspect="1"/>
+          </p:cNvPicPr>
+          <p:nvPr/>
+        </p:nvPicPr>
+        <p:blipFill>
+          <a:blip r:embed="rId3"/>
+          <a:stretch>
+            <a:fillRect/>
+          </a:stretch>
+        </p:blipFill>
+        <p:spPr>
+          <a:xfrm>
+            <a:off x="-10475" y="2426242"/>
+            <a:ext cx="9152730" cy="1629566"/>
+          </a:xfrm>
+          <a:prstGeom prst="rect">
+            <a:avLst/>
+          </a:prstGeom>
+        </p:spPr>
+      </p:pic>
+      <p:sp>
+        <p:nvSpPr>
+          <p:cNvPr id="7" name="TextBox 6">
+            <a:extLst>
+              <a:ext uri="{FF2B5EF4-FFF2-40B4-BE49-F238E27FC236}">
+                <a16:creationId xmlns:a16="http://schemas.microsoft.com/office/drawing/2014/main" id="{0F43611F-470C-0610-759D-A8FF7369AC2C}"/>
+              </a:ext>
+            </a:extLst>
+          </p:cNvPr>
+          <p:cNvSpPr txBox="1"/>
+          <p:nvPr/>
+        </p:nvSpPr>
+        <p:spPr>
+          <a:xfrm>
+            <a:off x="-10475" y="4112046"/>
+            <a:ext cx="9152730" cy="369332"/>
+          </a:xfrm>
+          <a:prstGeom prst="rect">
+            <a:avLst/>
+          </a:prstGeom>
+          <a:noFill/>
+        </p:spPr>
+        <p:txBody>
+          <a:bodyPr wrap="square">
+            <a:spAutoFit/>
+          </a:bodyPr>
+          <a:lstStyle/>
+          <a:p>
+            <a:r>
+              <a:rPr lang="ko-KR" altLang="en-US" b="1" dirty="0"/>
+              <a:t>✏️ 기존 품목 수정</a:t>
+            </a:r>
+            <a:r>
+              <a:rPr lang="en-US" altLang="ko-KR" b="1" dirty="0"/>
+              <a:t>:</a:t>
+            </a:r>
+            <a:r>
+              <a:rPr lang="ko-KR" altLang="en-US" dirty="0"/>
+              <a:t> 기존 자재의 품명</a:t>
+            </a:r>
+            <a:r>
+              <a:rPr lang="en-US" altLang="ko-KR" dirty="0"/>
+              <a:t>, </a:t>
+            </a:r>
+            <a:r>
+              <a:rPr lang="ko-KR" altLang="en-US" dirty="0"/>
+              <a:t>단가</a:t>
+            </a:r>
+            <a:r>
+              <a:rPr lang="en-US" altLang="ko-KR" dirty="0"/>
+              <a:t>, </a:t>
+            </a:r>
+            <a:r>
+              <a:rPr lang="ko-KR" altLang="en-US" dirty="0"/>
+              <a:t>비고 및 첨부 사진을 수정하거나 교체합니다</a:t>
+            </a:r>
+            <a:r>
+              <a:rPr lang="en-US" altLang="ko-KR" dirty="0"/>
+              <a:t>.</a:t>
+            </a:r>
+            <a:endParaRPr lang="ko-KR" altLang="en-US" dirty="0"/>
+          </a:p>
+        </p:txBody>
+      </p:sp>
+      <p:pic>
+        <p:nvPicPr>
+          <p:cNvPr id="9" name="그림 8">
+            <a:extLst>
+              <a:ext uri="{FF2B5EF4-FFF2-40B4-BE49-F238E27FC236}">
+                <a16:creationId xmlns:a16="http://schemas.microsoft.com/office/drawing/2014/main" id="{B3C995B2-2AC6-F5AD-1958-BB7FA970E07A}"/>
+              </a:ext>
+            </a:extLst>
+          </p:cNvPr>
+          <p:cNvPicPr>
+            <a:picLocks noChangeAspect="1"/>
+          </p:cNvPicPr>
+          <p:nvPr/>
+        </p:nvPicPr>
+        <p:blipFill>
+          <a:blip r:embed="rId4"/>
+          <a:stretch>
+            <a:fillRect/>
+          </a:stretch>
+        </p:blipFill>
+        <p:spPr>
+          <a:xfrm>
+            <a:off x="-10475" y="4537616"/>
+            <a:ext cx="9152730" cy="1617817"/>
+          </a:xfrm>
+          <a:prstGeom prst="rect">
+            <a:avLst/>
+          </a:prstGeom>
+        </p:spPr>
+      </p:pic>
+      <p:sp>
+        <p:nvSpPr>
+          <p:cNvPr id="10" name="TextBox 9">
+            <a:extLst>
+              <a:ext uri="{FF2B5EF4-FFF2-40B4-BE49-F238E27FC236}">
+                <a16:creationId xmlns:a16="http://schemas.microsoft.com/office/drawing/2014/main" id="{0A5B8732-5AB5-7380-B55B-1EE0D8517B94}"/>
+              </a:ext>
+            </a:extLst>
+          </p:cNvPr>
+          <p:cNvSpPr txBox="1"/>
+          <p:nvPr/>
+        </p:nvSpPr>
+        <p:spPr>
+          <a:xfrm>
+            <a:off x="-10475" y="6211669"/>
+            <a:ext cx="9131780" cy="646331"/>
+          </a:xfrm>
+          <a:prstGeom prst="rect">
+            <a:avLst/>
+          </a:prstGeom>
+          <a:noFill/>
+        </p:spPr>
+        <p:txBody>
+          <a:bodyPr wrap="square">
+            <a:spAutoFit/>
+          </a:bodyPr>
+          <a:lstStyle/>
+          <a:p>
+            <a:r>
+              <a:rPr lang="ko-KR" altLang="en-US" b="1" dirty="0"/>
+              <a:t>📂 기초 데이터 엑셀 일괄 등록</a:t>
+            </a:r>
+            <a:r>
+              <a:rPr lang="en-US" altLang="ko-KR" b="1" dirty="0"/>
+              <a:t>:</a:t>
+            </a:r>
+            <a:r>
+              <a:rPr lang="ko-KR" altLang="en-US" dirty="0"/>
+              <a:t> 대량의 자재 목록을 엑셀 파일</a:t>
+            </a:r>
+            <a:r>
+              <a:rPr lang="en-US" altLang="ko-KR" dirty="0"/>
+              <a:t>(.xlsx)</a:t>
+            </a:r>
+            <a:r>
+              <a:rPr lang="ko-KR" altLang="en-US" dirty="0"/>
+              <a:t>로 한번에 일괄 업로드합니다</a:t>
+            </a:r>
+            <a:r>
+              <a:rPr lang="en-US" altLang="ko-KR" dirty="0"/>
+              <a:t>. </a:t>
+            </a:r>
+            <a:r>
+              <a:rPr lang="ko-KR" altLang="en-US" dirty="0"/>
+              <a:t>양식 파일은 </a:t>
+            </a:r>
+            <a:r>
+              <a:rPr lang="en-US" altLang="ko-KR" dirty="0" err="1"/>
+              <a:t>my_erp</a:t>
+            </a:r>
+            <a:r>
+              <a:rPr lang="en-US" altLang="ko-KR" dirty="0"/>
+              <a:t> </a:t>
+            </a:r>
+            <a:r>
+              <a:rPr lang="ko-KR" altLang="en-US" dirty="0"/>
+              <a:t>폴더 안에 있습니다</a:t>
+            </a:r>
+            <a:r>
+              <a:rPr lang="en-US" altLang="ko-KR" dirty="0"/>
+              <a:t>.</a:t>
+            </a:r>
+            <a:endParaRPr lang="ko-KR" altLang="en-US" dirty="0"/>
+          </a:p>
+        </p:txBody>
+      </p:sp>
+    </p:spTree>
+    <p:extLst>
+      <p:ext uri="{BB962C8B-B14F-4D97-AF65-F5344CB8AC3E}">
+        <p14:creationId xmlns:p14="http://schemas.microsoft.com/office/powerpoint/2010/main" val="3566132756"/>
+      </p:ext>
+    </p:extLst>
+  </p:cSld>
+  <p:clrMapOvr>
+    <a:masterClrMapping/>
+  </p:clrMapOvr>
+</p:sld>
+</file>
+
+<file path=ppt/slides/slide16.xml><?xml version="1.0" encoding="utf-8"?>
+<p:sld xmlns:a="http://schemas.openxmlformats.org/drawingml/2006/main" xmlns:r="http://schemas.openxmlformats.org/officeDocument/2006/relationships" xmlns:p="http://schemas.openxmlformats.org/presentationml/2006/main">
+  <p:cSld>
+    <p:spTree>
+      <p:nvGrpSpPr>
+        <p:cNvPr id="1" name="">
+          <a:extLst>
+            <a:ext uri="{FF2B5EF4-FFF2-40B4-BE49-F238E27FC236}">
+              <a16:creationId xmlns:a16="http://schemas.microsoft.com/office/drawing/2014/main" id="{9FB49AEF-6D66-9166-D7A4-09ACB9C8F520}"/>
+            </a:ext>
+          </a:extLst>
+        </p:cNvPr>
+        <p:cNvGrpSpPr/>
+        <p:nvPr/>
+      </p:nvGrpSpPr>
+      <p:grpSpPr>
+        <a:xfrm>
+          <a:off x="0" y="0"/>
+          <a:ext cx="0" cy="0"/>
+          <a:chOff x="0" y="0"/>
+          <a:chExt cx="0" cy="0"/>
+        </a:xfrm>
+      </p:grpSpPr>
+      <p:sp>
+        <p:nvSpPr>
+          <p:cNvPr id="2" name="TextBox 1">
+            <a:extLst>
+              <a:ext uri="{FF2B5EF4-FFF2-40B4-BE49-F238E27FC236}">
+                <a16:creationId xmlns:a16="http://schemas.microsoft.com/office/drawing/2014/main" id="{299BFEF1-F996-4A22-35D4-AC41A63531C3}"/>
+              </a:ext>
+            </a:extLst>
+          </p:cNvPr>
+          <p:cNvSpPr txBox="1"/>
+          <p:nvPr/>
+        </p:nvSpPr>
+        <p:spPr>
+          <a:xfrm>
+            <a:off x="1" y="0"/>
+            <a:ext cx="9144000" cy="1477328"/>
+          </a:xfrm>
+          <a:prstGeom prst="rect">
+            <a:avLst/>
+          </a:prstGeom>
+          <a:noFill/>
+        </p:spPr>
+        <p:txBody>
+          <a:bodyPr wrap="square">
+            <a:spAutoFit/>
+          </a:bodyPr>
+          <a:lstStyle/>
+          <a:p>
+            <a:pPr>
+              <a:buNone/>
+            </a:pPr>
+            <a:r>
+              <a:rPr lang="ko-KR" altLang="en-US" b="1" dirty="0"/>
+              <a:t>시스템 기술 스택 구조 및 유지보수 가이드</a:t>
+            </a:r>
+            <a:r>
+              <a:rPr lang="en-US" altLang="ko-KR" b="1" dirty="0"/>
+              <a:t>(</a:t>
+            </a:r>
+            <a:r>
+              <a:rPr lang="ko-KR" altLang="en-US" b="1" dirty="0"/>
+              <a:t>관리자 전용</a:t>
+            </a:r>
+            <a:r>
+              <a:rPr lang="en-US" altLang="ko-KR" b="1" dirty="0"/>
+              <a:t>)</a:t>
+            </a:r>
+          </a:p>
+          <a:p>
+            <a:pPr>
+              <a:buNone/>
+            </a:pPr>
+            <a:endParaRPr lang="en-US" altLang="ko-KR" b="1" dirty="0"/>
+          </a:p>
+          <a:p>
+            <a:pPr>
+              <a:buNone/>
+            </a:pPr>
+            <a:r>
+              <a:rPr lang="ko-KR" altLang="en-US" dirty="0"/>
+              <a:t>본 </a:t>
+            </a:r>
+            <a:r>
+              <a:rPr lang="ko-KR" altLang="en-US" dirty="0" err="1"/>
+              <a:t>광주오포센터</a:t>
+            </a:r>
+            <a:r>
+              <a:rPr lang="ko-KR" altLang="en-US" dirty="0"/>
+              <a:t> 자동화 </a:t>
+            </a:r>
+            <a:r>
+              <a:rPr lang="en-US" altLang="ko-KR" dirty="0"/>
+              <a:t>ERP </a:t>
+            </a:r>
+            <a:r>
+              <a:rPr lang="ko-KR" altLang="en-US" dirty="0"/>
+              <a:t>시스템은 </a:t>
+            </a:r>
+            <a:r>
+              <a:rPr lang="en-US" altLang="ko-KR" b="1" dirty="0"/>
+              <a:t>GitHub</a:t>
+            </a:r>
+            <a:r>
+              <a:rPr lang="en-US" altLang="ko-KR" dirty="0"/>
+              <a:t>, </a:t>
+            </a:r>
+            <a:r>
+              <a:rPr lang="en-US" altLang="ko-KR" b="1" dirty="0" err="1"/>
+              <a:t>Streamlit</a:t>
+            </a:r>
+            <a:r>
+              <a:rPr lang="en-US" altLang="ko-KR" dirty="0"/>
+              <a:t>, </a:t>
+            </a:r>
+            <a:r>
+              <a:rPr lang="en-US" altLang="ko-KR" b="1" dirty="0" err="1"/>
+              <a:t>Supabase</a:t>
+            </a:r>
+            <a:r>
+              <a:rPr lang="ko-KR" altLang="en-US" dirty="0"/>
+              <a:t>의 </a:t>
+            </a:r>
+            <a:r>
+              <a:rPr lang="en-US" altLang="ko-KR" dirty="0"/>
+              <a:t>3</a:t>
+            </a:r>
+            <a:r>
+              <a:rPr lang="ko-KR" altLang="en-US" dirty="0"/>
+              <a:t>가지 핵심 기술 조합으로 구축되어 있습니다</a:t>
+            </a:r>
+            <a:r>
+              <a:rPr lang="en-US" altLang="ko-KR" dirty="0"/>
+              <a:t>. </a:t>
+            </a:r>
+            <a:r>
+              <a:rPr lang="ko-KR" altLang="en-US" dirty="0"/>
+              <a:t>각 기술의 역할과 기본적인 수정 및 관리 방법은 다음과 같습니다</a:t>
+            </a:r>
+            <a:r>
+              <a:rPr lang="en-US" altLang="ko-KR" dirty="0"/>
+              <a:t>.</a:t>
+            </a:r>
+          </a:p>
+        </p:txBody>
+      </p:sp>
+      <p:pic>
+        <p:nvPicPr>
+          <p:cNvPr id="3" name="Picture 2" descr="What is GitHub.. GitHub is a platform for online… | by Sameer Hussain |  Medium">
+            <a:extLst>
+              <a:ext uri="{FF2B5EF4-FFF2-40B4-BE49-F238E27FC236}">
+                <a16:creationId xmlns:a16="http://schemas.microsoft.com/office/drawing/2014/main" id="{4DB9C1D9-D747-F0E6-2FFF-872C4F854EEF}"/>
               </a:ext>
             </a:extLst>
           </p:cNvPr>
@@ -3781,7 +4543,7 @@
         </p:blipFill>
         <p:spPr bwMode="auto">
           <a:xfrm>
-            <a:off x="0" y="4597530"/>
+            <a:off x="0" y="1477328"/>
             <a:ext cx="4249219" cy="1575044"/>
           </a:xfrm>
           <a:prstGeom prst="rect">
@@ -3801,10 +4563,10 @@
       </p:pic>
       <p:sp>
         <p:nvSpPr>
-          <p:cNvPr id="7" name="TextBox 6">
+          <p:cNvPr id="4" name="TextBox 3">
             <a:extLst>
               <a:ext uri="{FF2B5EF4-FFF2-40B4-BE49-F238E27FC236}">
-                <a16:creationId xmlns:a16="http://schemas.microsoft.com/office/drawing/2014/main" id="{26C1744F-A485-AB7C-F7C0-B46454F00348}"/>
+                <a16:creationId xmlns:a16="http://schemas.microsoft.com/office/drawing/2014/main" id="{47B62B83-B4F1-EB4B-7317-BC9A5C2D2EB7}"/>
               </a:ext>
             </a:extLst>
           </p:cNvPr>
@@ -3813,8 +4575,8 @@
         </p:nvSpPr>
         <p:spPr>
           <a:xfrm>
-            <a:off x="-1" y="6172574"/>
-            <a:ext cx="10799763" cy="6270947"/>
+            <a:off x="1" y="3052372"/>
+            <a:ext cx="9144000" cy="2862322"/>
           </a:xfrm>
           <a:prstGeom prst="rect">
             <a:avLst/>
@@ -3831,21 +4593,27 @@
               <a:buNone/>
             </a:pPr>
             <a:r>
-              <a:rPr lang="ko-KR" altLang="en-US" sz="3650" b="1" dirty="0"/>
+              <a:rPr lang="ko-KR" altLang="en-US" b="1" dirty="0"/>
               <a:t>① </a:t>
             </a:r>
             <a:r>
-              <a:rPr lang="en-US" altLang="ko-KR" sz="3650" b="1" dirty="0"/>
+              <a:rPr lang="en-US" altLang="ko-KR" b="1" dirty="0"/>
               <a:t>GitHub (</a:t>
             </a:r>
             <a:r>
-              <a:rPr lang="ko-KR" altLang="en-US" sz="3650" b="1" dirty="0"/>
+              <a:rPr lang="ko-KR" altLang="en-US" b="1" dirty="0"/>
               <a:t>기능 추가 및 수정</a:t>
             </a:r>
             <a:r>
-              <a:rPr lang="en-US" altLang="ko-KR" sz="3650" b="1" dirty="0"/>
+              <a:rPr lang="en-US" altLang="ko-KR" b="1" dirty="0"/>
               <a:t>)</a:t>
             </a:r>
+          </a:p>
+          <a:p>
+            <a:pPr>
+              <a:buNone/>
+            </a:pPr>
+            <a:endParaRPr lang="en-US" altLang="ko-KR" b="1" dirty="0"/>
           </a:p>
           <a:p>
             <a:pPr>
@@ -3853,14 +4621,14 @@
               <a:buChar char="•"/>
             </a:pPr>
             <a:r>
-              <a:rPr lang="ko-KR" altLang="en-US" sz="3650" b="1" dirty="0"/>
+              <a:rPr lang="ko-KR" altLang="en-US" b="1" dirty="0"/>
               <a:t>역할과 기능</a:t>
             </a:r>
             <a:r>
-              <a:rPr lang="en-US" altLang="ko-KR" sz="3650" b="1" dirty="0"/>
+              <a:rPr lang="en-US" altLang="ko-KR" b="1" dirty="0"/>
               <a:t>:</a:t>
             </a:r>
-            <a:endParaRPr lang="ko-KR" altLang="en-US" sz="3650" dirty="0"/>
+            <a:endParaRPr lang="ko-KR" altLang="en-US" dirty="0"/>
           </a:p>
           <a:p>
             <a:pPr marL="742950" lvl="1" indent="-285750">
@@ -3868,49 +4636,49 @@
               <a:buChar char="•"/>
             </a:pPr>
             <a:r>
-              <a:rPr lang="en-US" altLang="ko-KR" sz="3650" dirty="0"/>
+              <a:rPr lang="en-US" altLang="ko-KR" dirty="0"/>
               <a:t>ERP </a:t>
             </a:r>
             <a:r>
-              <a:rPr lang="ko-KR" altLang="en-US" sz="3650" dirty="0"/>
+              <a:rPr lang="ko-KR" altLang="en-US" dirty="0"/>
               <a:t>앱의 전체 소스 코드</a:t>
             </a:r>
             <a:r>
-              <a:rPr lang="en-US" altLang="ko-KR" sz="3650" dirty="0"/>
+              <a:rPr lang="en-US" altLang="ko-KR" dirty="0"/>
               <a:t>(</a:t>
             </a:r>
             <a:r>
-              <a:rPr lang="en-US" altLang="ko-KR" sz="3650" dirty="0" err="1">
+              <a:rPr lang="en-US" altLang="ko-KR" dirty="0" err="1">
                 <a:latin typeface="Courier New" panose="02070309020205020404" pitchFamily="49" charset="0"/>
               </a:rPr>
               <a:t>app.py</a:t>
             </a:r>
             <a:r>
-              <a:rPr lang="en-US" altLang="ko-KR" sz="3650" dirty="0"/>
+              <a:rPr lang="en-US" altLang="ko-KR" dirty="0"/>
               <a:t>, </a:t>
             </a:r>
             <a:r>
-              <a:rPr lang="ko-KR" altLang="en-US" sz="3650" dirty="0"/>
+              <a:rPr lang="ko-KR" altLang="en-US" dirty="0"/>
               <a:t>데이터베이스 연동 모듈 등</a:t>
             </a:r>
             <a:r>
-              <a:rPr lang="en-US" altLang="ko-KR" sz="3650" dirty="0"/>
+              <a:rPr lang="en-US" altLang="ko-KR" dirty="0"/>
               <a:t>)</a:t>
             </a:r>
             <a:r>
-              <a:rPr lang="ko-KR" altLang="en-US" sz="3650" dirty="0"/>
+              <a:rPr lang="ko-KR" altLang="en-US" dirty="0"/>
               <a:t>를 안전하게 저장하고 관리하는 저장소</a:t>
             </a:r>
             <a:r>
-              <a:rPr lang="en-US" altLang="ko-KR" sz="3650" dirty="0"/>
+              <a:rPr lang="en-US" altLang="ko-KR" dirty="0"/>
               <a:t>(Repository)</a:t>
             </a:r>
             <a:r>
-              <a:rPr lang="ko-KR" altLang="en-US" sz="3650" dirty="0"/>
+              <a:rPr lang="ko-KR" altLang="en-US" dirty="0"/>
               <a:t>입니다</a:t>
             </a:r>
             <a:r>
-              <a:rPr lang="en-US" altLang="ko-KR" sz="3650" dirty="0"/>
+              <a:rPr lang="en-US" altLang="ko-KR" dirty="0"/>
               <a:t>.</a:t>
             </a:r>
           </a:p>
@@ -3920,27 +4688,27 @@
               <a:buChar char="•"/>
             </a:pPr>
             <a:r>
-              <a:rPr lang="ko-KR" altLang="en-US" sz="3650" dirty="0"/>
+              <a:rPr lang="ko-KR" altLang="en-US" dirty="0"/>
               <a:t>코드가 수정될 때마다 이력이 기록되며</a:t>
             </a:r>
             <a:r>
-              <a:rPr lang="en-US" altLang="ko-KR" sz="3650" dirty="0"/>
+              <a:rPr lang="en-US" altLang="ko-KR" dirty="0"/>
               <a:t>, </a:t>
             </a:r>
             <a:r>
-              <a:rPr lang="en-US" altLang="ko-KR" sz="3650" dirty="0" err="1"/>
+              <a:rPr lang="en-US" altLang="ko-KR" dirty="0" err="1"/>
               <a:t>Streamlit</a:t>
             </a:r>
             <a:r>
-              <a:rPr lang="en-US" altLang="ko-KR" sz="3650" dirty="0"/>
+              <a:rPr lang="en-US" altLang="ko-KR" dirty="0"/>
               <a:t> Cloud</a:t>
             </a:r>
             <a:r>
-              <a:rPr lang="ko-KR" altLang="en-US" sz="3650" dirty="0"/>
+              <a:rPr lang="ko-KR" altLang="en-US" dirty="0"/>
               <a:t>와 실시간으로 연동되어 코드 업데이트 시 웹 앱에 자동 반영됩니다</a:t>
             </a:r>
             <a:r>
-              <a:rPr lang="en-US" altLang="ko-KR" sz="3650" dirty="0"/>
+              <a:rPr lang="en-US" altLang="ko-KR" dirty="0"/>
               <a:t>.</a:t>
             </a:r>
           </a:p>
@@ -3950,18 +4718,18 @@
               <a:buChar char="•"/>
             </a:pPr>
             <a:r>
-              <a:rPr lang="en-US" altLang="ko-KR" sz="3650" dirty="0" err="1"/>
+              <a:rPr lang="en-US" altLang="ko-KR" dirty="0" err="1"/>
               <a:t>app.py</a:t>
             </a:r>
             <a:r>
-              <a:rPr lang="en-US" altLang="ko-KR" sz="3650" dirty="0"/>
+              <a:rPr lang="en-US" altLang="ko-KR" dirty="0"/>
               <a:t> : </a:t>
             </a:r>
             <a:r>
-              <a:rPr lang="ko-KR" altLang="en-US" sz="3650" dirty="0"/>
+              <a:rPr lang="ko-KR" altLang="en-US" dirty="0"/>
               <a:t>기능 수행을 관장하는 메인 코드</a:t>
             </a:r>
-            <a:endParaRPr lang="en-US" altLang="ko-KR" sz="3650" dirty="0"/>
+            <a:endParaRPr lang="en-US" altLang="ko-KR" dirty="0"/>
           </a:p>
           <a:p>
             <a:pPr marL="742950" lvl="1" indent="-285750">
@@ -3969,18 +4737,18 @@
               <a:buChar char="•"/>
             </a:pPr>
             <a:r>
-              <a:rPr lang="en-US" altLang="ko-KR" sz="3650" dirty="0" err="1"/>
+              <a:rPr lang="en-US" altLang="ko-KR" dirty="0" err="1"/>
               <a:t>db_helper.py</a:t>
             </a:r>
             <a:r>
-              <a:rPr lang="en-US" altLang="ko-KR" sz="3650" dirty="0"/>
+              <a:rPr lang="en-US" altLang="ko-KR" dirty="0"/>
               <a:t> : </a:t>
             </a:r>
             <a:r>
-              <a:rPr lang="ko-KR" altLang="en-US" sz="3650" dirty="0"/>
+              <a:rPr lang="ko-KR" altLang="en-US" dirty="0"/>
               <a:t>데이터 베이스 호출 관장 코드</a:t>
             </a:r>
-            <a:endParaRPr lang="en-US" altLang="ko-KR" sz="3650" dirty="0"/>
+            <a:endParaRPr lang="en-US" altLang="ko-KR" dirty="0"/>
           </a:p>
           <a:p>
             <a:pPr marL="742950" lvl="1" indent="-285750">
@@ -3988,25 +4756,25 @@
               <a:buChar char="•"/>
             </a:pPr>
             <a:r>
-              <a:rPr lang="en-US" altLang="ko-KR" sz="3650" dirty="0" err="1"/>
+              <a:rPr lang="en-US" altLang="ko-KR" dirty="0" err="1"/>
               <a:t>Requirements.txt</a:t>
             </a:r>
             <a:r>
-              <a:rPr lang="en-US" altLang="ko-KR" sz="3650" dirty="0"/>
+              <a:rPr lang="en-US" altLang="ko-KR" dirty="0"/>
               <a:t> : </a:t>
             </a:r>
             <a:r>
-              <a:rPr lang="ko-KR" altLang="en-US" sz="3650" dirty="0"/>
+              <a:rPr lang="ko-KR" altLang="en-US" dirty="0"/>
               <a:t>기능 수행에 필요한 도구 목록</a:t>
             </a:r>
-            <a:endParaRPr lang="en-US" altLang="ko-KR" sz="3650" dirty="0"/>
+            <a:endParaRPr lang="en-US" altLang="ko-KR" dirty="0"/>
           </a:p>
         </p:txBody>
       </p:sp>
     </p:spTree>
     <p:extLst>
       <p:ext uri="{BB962C8B-B14F-4D97-AF65-F5344CB8AC3E}">
-        <p14:creationId xmlns:p14="http://schemas.microsoft.com/office/powerpoint/2010/main" val="2751124986"/>
+        <p14:creationId xmlns:p14="http://schemas.microsoft.com/office/powerpoint/2010/main" val="2874730842"/>
       </p:ext>
     </p:extLst>
   </p:cSld>
@@ -4016,12 +4784,18 @@
 </p:sld>
 </file>
 
-<file path=ppt/slides/slide12.xml><?xml version="1.0" encoding="utf-8"?>
+<file path=ppt/slides/slide17.xml><?xml version="1.0" encoding="utf-8"?>
 <p:sld xmlns:a="http://schemas.openxmlformats.org/drawingml/2006/main" xmlns:r="http://schemas.openxmlformats.org/officeDocument/2006/relationships" xmlns:p="http://schemas.openxmlformats.org/presentationml/2006/main">
   <p:cSld>
     <p:spTree>
       <p:nvGrpSpPr>
-        <p:cNvPr id="1" name=""/>
+        <p:cNvPr id="1" name="">
+          <a:extLst>
+            <a:ext uri="{FF2B5EF4-FFF2-40B4-BE49-F238E27FC236}">
+              <a16:creationId xmlns:a16="http://schemas.microsoft.com/office/drawing/2014/main" id="{5A5421C5-2C90-3FA9-81FF-403C7ADFD4D8}"/>
+            </a:ext>
+          </a:extLst>
+        </p:cNvPr>
         <p:cNvGrpSpPr/>
         <p:nvPr/>
       </p:nvGrpSpPr>
@@ -4035,10 +4809,10 @@
       </p:grpSpPr>
       <p:pic>
         <p:nvPicPr>
-          <p:cNvPr id="2050" name="Picture 2" descr="Supabase is Supa Awesome: Here is Why You Should Use It for Your Next Web  Application | by Abe Ahn | Medium">
+          <p:cNvPr id="2" name="Picture 2" descr="Supabase is Supa Awesome: Here is Why You Should Use It for Your Next Web  Application | by Abe Ahn | Medium">
             <a:extLst>
               <a:ext uri="{FF2B5EF4-FFF2-40B4-BE49-F238E27FC236}">
-                <a16:creationId xmlns:a16="http://schemas.microsoft.com/office/drawing/2014/main" id="{DB33F381-7231-2BDD-FDE5-1DB59A1628C3}"/>
+                <a16:creationId xmlns:a16="http://schemas.microsoft.com/office/drawing/2014/main" id="{81696CE2-9FEB-2E5B-C383-A1B98D49521B}"/>
               </a:ext>
             </a:extLst>
           </p:cNvPr>
@@ -4082,10 +4856,10 @@
       </p:pic>
       <p:sp>
         <p:nvSpPr>
-          <p:cNvPr id="5" name="TextBox 4">
+          <p:cNvPr id="3" name="TextBox 2">
             <a:extLst>
               <a:ext uri="{FF2B5EF4-FFF2-40B4-BE49-F238E27FC236}">
-                <a16:creationId xmlns:a16="http://schemas.microsoft.com/office/drawing/2014/main" id="{1D8C192C-39BB-1D36-5670-E9DF5A08988A}"/>
+                <a16:creationId xmlns:a16="http://schemas.microsoft.com/office/drawing/2014/main" id="{69E47019-46D6-28B2-6B22-28969F90ECC9}"/>
               </a:ext>
             </a:extLst>
           </p:cNvPr>
@@ -4095,7 +4869,7 @@
         <p:spPr>
           <a:xfrm>
             <a:off x="0" y="1303337"/>
-            <a:ext cx="10799764" cy="11887870"/>
+            <a:ext cx="9144000" cy="4801314"/>
           </a:xfrm>
           <a:prstGeom prst="rect">
             <a:avLst/>
@@ -4112,21 +4886,27 @@
               <a:buNone/>
             </a:pPr>
             <a:r>
-              <a:rPr lang="en-US" altLang="ko-KR" sz="3650" b="1" dirty="0" err="1"/>
+              <a:rPr lang="en-US" altLang="ko-KR" b="1" dirty="0" err="1"/>
               <a:t>Supabase</a:t>
             </a:r>
             <a:r>
-              <a:rPr lang="en-US" altLang="ko-KR" sz="3650" b="1" dirty="0"/>
+              <a:rPr lang="en-US" altLang="ko-KR" b="1" dirty="0"/>
               <a:t> (</a:t>
             </a:r>
             <a:r>
-              <a:rPr lang="ko-KR" altLang="en-US" sz="3650" b="1" dirty="0"/>
+              <a:rPr lang="ko-KR" altLang="en-US" b="1" dirty="0"/>
               <a:t>데이터베이스 저장 및 관리</a:t>
             </a:r>
             <a:r>
-              <a:rPr lang="en-US" altLang="ko-KR" sz="3650" b="1" dirty="0"/>
+              <a:rPr lang="en-US" altLang="ko-KR" b="1" dirty="0"/>
               <a:t>)</a:t>
             </a:r>
+          </a:p>
+          <a:p>
+            <a:pPr>
+              <a:buNone/>
+            </a:pPr>
+            <a:endParaRPr lang="en-US" altLang="ko-KR" b="1" dirty="0"/>
           </a:p>
           <a:p>
             <a:pPr>
@@ -4134,14 +4914,14 @@
               <a:buChar char="•"/>
             </a:pPr>
             <a:r>
-              <a:rPr lang="ko-KR" altLang="en-US" sz="3650" b="1" dirty="0"/>
+              <a:rPr lang="ko-KR" altLang="en-US" b="1" dirty="0"/>
               <a:t>역할과 기능</a:t>
             </a:r>
             <a:r>
-              <a:rPr lang="en-US" altLang="ko-KR" sz="3650" b="1" dirty="0"/>
+              <a:rPr lang="en-US" altLang="ko-KR" b="1" dirty="0"/>
               <a:t>:</a:t>
             </a:r>
-            <a:endParaRPr lang="ko-KR" altLang="en-US" sz="3650" dirty="0"/>
+            <a:endParaRPr lang="ko-KR" altLang="en-US" dirty="0"/>
           </a:p>
           <a:p>
             <a:pPr marL="742950" lvl="1" indent="-285750">
@@ -4149,99 +4929,99 @@
               <a:buChar char="•"/>
             </a:pPr>
             <a:r>
-              <a:rPr lang="ko-KR" altLang="en-US" sz="3650" dirty="0"/>
+              <a:rPr lang="ko-KR" altLang="en-US" dirty="0"/>
               <a:t>센터의 모든 자재 정보</a:t>
             </a:r>
             <a:r>
-              <a:rPr lang="en-US" altLang="ko-KR" sz="3650" dirty="0"/>
+              <a:rPr lang="en-US" altLang="ko-KR" dirty="0"/>
               <a:t>(</a:t>
             </a:r>
             <a:r>
-              <a:rPr lang="en-US" altLang="ko-KR" sz="3650" dirty="0">
+              <a:rPr lang="en-US" altLang="ko-KR" dirty="0">
                 <a:latin typeface="Courier New" panose="02070309020205020404" pitchFamily="49" charset="0"/>
               </a:rPr>
               <a:t>items</a:t>
             </a:r>
             <a:r>
-              <a:rPr lang="en-US" altLang="ko-KR" sz="3650" dirty="0"/>
+              <a:rPr lang="en-US" altLang="ko-KR" dirty="0"/>
               <a:t>), </a:t>
             </a:r>
             <a:r>
-              <a:rPr lang="ko-KR" altLang="en-US" sz="3650" dirty="0"/>
+              <a:rPr lang="ko-KR" altLang="en-US" dirty="0"/>
               <a:t>입출고 트랜잭션</a:t>
             </a:r>
             <a:r>
-              <a:rPr lang="en-US" altLang="ko-KR" sz="3650" dirty="0"/>
+              <a:rPr lang="en-US" altLang="ko-KR" dirty="0"/>
               <a:t>(</a:t>
             </a:r>
             <a:r>
-              <a:rPr lang="en-US" altLang="ko-KR" sz="3650" dirty="0" err="1">
+              <a:rPr lang="en-US" altLang="ko-KR" dirty="0" err="1">
                 <a:latin typeface="Courier New" panose="02070309020205020404" pitchFamily="49" charset="0"/>
               </a:rPr>
               <a:t>stock_transactions</a:t>
             </a:r>
             <a:r>
-              <a:rPr lang="en-US" altLang="ko-KR" sz="3650" dirty="0"/>
+              <a:rPr lang="en-US" altLang="ko-KR" dirty="0"/>
               <a:t>), </a:t>
             </a:r>
             <a:r>
-              <a:rPr lang="ko-KR" altLang="en-US" sz="3650" dirty="0"/>
+              <a:rPr lang="ko-KR" altLang="en-US" dirty="0"/>
               <a:t>사용자 계정</a:t>
             </a:r>
             <a:r>
-              <a:rPr lang="en-US" altLang="ko-KR" sz="3650" dirty="0"/>
+              <a:rPr lang="en-US" altLang="ko-KR" dirty="0"/>
               <a:t>(</a:t>
             </a:r>
             <a:r>
-              <a:rPr lang="en-US" altLang="ko-KR" sz="3650" dirty="0">
+              <a:rPr lang="en-US" altLang="ko-KR" dirty="0">
                 <a:latin typeface="Courier New" panose="02070309020205020404" pitchFamily="49" charset="0"/>
               </a:rPr>
               <a:t>users</a:t>
             </a:r>
             <a:r>
-              <a:rPr lang="en-US" altLang="ko-KR" sz="3650" dirty="0"/>
+              <a:rPr lang="en-US" altLang="ko-KR" dirty="0"/>
               <a:t>), </a:t>
             </a:r>
             <a:r>
-              <a:rPr lang="ko-KR" altLang="en-US" sz="3650" dirty="0"/>
+              <a:rPr lang="ko-KR" altLang="en-US" dirty="0"/>
               <a:t>환율 정보</a:t>
             </a:r>
             <a:r>
-              <a:rPr lang="en-US" altLang="ko-KR" sz="3650" dirty="0"/>
+              <a:rPr lang="en-US" altLang="ko-KR" dirty="0"/>
               <a:t>(</a:t>
             </a:r>
             <a:r>
-              <a:rPr lang="en-US" altLang="ko-KR" sz="3650" dirty="0" err="1">
+              <a:rPr lang="en-US" altLang="ko-KR" dirty="0" err="1">
                 <a:latin typeface="Courier New" panose="02070309020205020404" pitchFamily="49" charset="0"/>
               </a:rPr>
               <a:t>exchange_rates</a:t>
             </a:r>
             <a:r>
-              <a:rPr lang="en-US" altLang="ko-KR" sz="3650" dirty="0"/>
+              <a:rPr lang="en-US" altLang="ko-KR" dirty="0"/>
               <a:t>)</a:t>
             </a:r>
             <a:r>
-              <a:rPr lang="ko-KR" altLang="en-US" sz="3650" dirty="0"/>
+              <a:rPr lang="ko-KR" altLang="en-US" dirty="0"/>
               <a:t>를 안전하게 보관하는 클라우드 데이터베이스</a:t>
             </a:r>
             <a:r>
-              <a:rPr lang="en-US" altLang="ko-KR" sz="3650" dirty="0"/>
+              <a:rPr lang="en-US" altLang="ko-KR" dirty="0"/>
               <a:t>(PostgreSQL </a:t>
             </a:r>
             <a:r>
-              <a:rPr lang="ko-KR" altLang="en-US" sz="3650" dirty="0"/>
+              <a:rPr lang="ko-KR" altLang="en-US" dirty="0"/>
               <a:t>기반</a:t>
             </a:r>
             <a:r>
-              <a:rPr lang="en-US" altLang="ko-KR" sz="3650" dirty="0"/>
+              <a:rPr lang="en-US" altLang="ko-KR" dirty="0"/>
               <a:t>)</a:t>
             </a:r>
             <a:r>
-              <a:rPr lang="ko-KR" altLang="en-US" sz="3650" dirty="0"/>
+              <a:rPr lang="ko-KR" altLang="en-US" dirty="0"/>
               <a:t>입니다</a:t>
             </a:r>
             <a:r>
-              <a:rPr lang="en-US" altLang="ko-KR" sz="3650" dirty="0"/>
+              <a:rPr lang="en-US" altLang="ko-KR" dirty="0"/>
               <a:t>.</a:t>
             </a:r>
           </a:p>
@@ -4251,45 +5031,49 @@
               <a:buChar char="•"/>
             </a:pPr>
             <a:r>
-              <a:rPr lang="ko-KR" altLang="en-US" sz="3650" dirty="0"/>
+              <a:rPr lang="ko-KR" altLang="en-US" dirty="0"/>
               <a:t>데이터 저장</a:t>
             </a:r>
             <a:r>
-              <a:rPr lang="en-US" altLang="ko-KR" sz="3650" dirty="0"/>
+              <a:rPr lang="en-US" altLang="ko-KR" dirty="0"/>
               <a:t>, </a:t>
             </a:r>
             <a:r>
-              <a:rPr lang="ko-KR" altLang="en-US" sz="3650" dirty="0"/>
+              <a:rPr lang="ko-KR" altLang="en-US" dirty="0"/>
               <a:t>불러오기</a:t>
             </a:r>
             <a:r>
-              <a:rPr lang="en-US" altLang="ko-KR" sz="3650" dirty="0"/>
+              <a:rPr lang="en-US" altLang="ko-KR" dirty="0"/>
               <a:t>, </a:t>
             </a:r>
             <a:r>
-              <a:rPr lang="ko-KR" altLang="en-US" sz="3650" dirty="0"/>
+              <a:rPr lang="ko-KR" altLang="en-US" dirty="0"/>
               <a:t>수정</a:t>
             </a:r>
             <a:r>
-              <a:rPr lang="en-US" altLang="ko-KR" sz="3650" dirty="0"/>
+              <a:rPr lang="en-US" altLang="ko-KR" dirty="0"/>
               <a:t>, </a:t>
             </a:r>
             <a:r>
-              <a:rPr lang="ko-KR" altLang="en-US" sz="3650" dirty="0"/>
+              <a:rPr lang="ko-KR" altLang="en-US" dirty="0"/>
               <a:t>삭제 등의 </a:t>
             </a:r>
             <a:r>
-              <a:rPr lang="ko-KR" altLang="en-US" sz="3650" dirty="0" err="1"/>
+              <a:rPr lang="ko-KR" altLang="en-US" dirty="0" err="1"/>
               <a:t>백엔드</a:t>
             </a:r>
             <a:r>
-              <a:rPr lang="ko-KR" altLang="en-US" sz="3650" dirty="0"/>
+              <a:rPr lang="ko-KR" altLang="en-US" dirty="0"/>
               <a:t> 처리를 담당합니다</a:t>
             </a:r>
             <a:r>
-              <a:rPr lang="en-US" altLang="ko-KR" sz="3650" dirty="0"/>
+              <a:rPr lang="en-US" altLang="ko-KR" dirty="0"/>
               <a:t>.</a:t>
             </a:r>
+          </a:p>
+          <a:p>
+            <a:pPr lvl="1"/>
+            <a:endParaRPr lang="en-US" altLang="ko-KR" dirty="0"/>
           </a:p>
           <a:p>
             <a:pPr>
@@ -4297,14 +5081,14 @@
               <a:buChar char="•"/>
             </a:pPr>
             <a:r>
-              <a:rPr lang="ko-KR" altLang="en-US" sz="3650" b="1" dirty="0"/>
+              <a:rPr lang="ko-KR" altLang="en-US" b="1" dirty="0"/>
               <a:t>기본적인 사용 방법</a:t>
             </a:r>
             <a:r>
-              <a:rPr lang="en-US" altLang="ko-KR" sz="3650" b="1" dirty="0"/>
+              <a:rPr lang="en-US" altLang="ko-KR" b="1" dirty="0"/>
               <a:t>:</a:t>
             </a:r>
-            <a:endParaRPr lang="ko-KR" altLang="en-US" sz="3650" dirty="0"/>
+            <a:endParaRPr lang="ko-KR" altLang="en-US" dirty="0"/>
           </a:p>
           <a:p>
             <a:pPr marL="742950" lvl="1" indent="-285750">
@@ -4312,47 +5096,47 @@
               <a:buChar char="•"/>
             </a:pPr>
             <a:r>
-              <a:rPr lang="ko-KR" altLang="en-US" sz="3650" b="1" dirty="0"/>
+              <a:rPr lang="ko-KR" altLang="en-US" b="1" dirty="0"/>
               <a:t>데이터 직접 확인</a:t>
             </a:r>
             <a:r>
-              <a:rPr lang="en-US" altLang="ko-KR" sz="3650" b="1" dirty="0"/>
+              <a:rPr lang="en-US" altLang="ko-KR" b="1" dirty="0"/>
               <a:t>/</a:t>
             </a:r>
             <a:r>
-              <a:rPr lang="ko-KR" altLang="en-US" sz="3650" b="1" dirty="0"/>
+              <a:rPr lang="ko-KR" altLang="en-US" b="1" dirty="0"/>
               <a:t>수정</a:t>
             </a:r>
             <a:r>
-              <a:rPr lang="en-US" altLang="ko-KR" sz="3650" b="1" dirty="0"/>
+              <a:rPr lang="en-US" altLang="ko-KR" b="1" dirty="0"/>
               <a:t>:</a:t>
             </a:r>
             <a:r>
-              <a:rPr lang="ko-KR" altLang="en-US" sz="3650" dirty="0"/>
+              <a:rPr lang="ko-KR" altLang="en-US" dirty="0"/>
               <a:t> </a:t>
             </a:r>
             <a:r>
-              <a:rPr lang="en-US" altLang="ko-KR" sz="3650" dirty="0" err="1"/>
+              <a:rPr lang="en-US" altLang="ko-KR" dirty="0" err="1"/>
               <a:t>Supabase</a:t>
             </a:r>
             <a:r>
-              <a:rPr lang="en-US" altLang="ko-KR" sz="3650" dirty="0"/>
+              <a:rPr lang="en-US" altLang="ko-KR" dirty="0"/>
               <a:t> </a:t>
             </a:r>
             <a:r>
-              <a:rPr lang="ko-KR" altLang="en-US" sz="3650" dirty="0"/>
+              <a:rPr lang="ko-KR" altLang="en-US" dirty="0"/>
               <a:t>대시보드에 로그인한 후 </a:t>
             </a:r>
             <a:r>
-              <a:rPr lang="en-US" altLang="ko-KR" sz="3650" b="1" dirty="0"/>
+              <a:rPr lang="en-US" altLang="ko-KR" b="1" dirty="0"/>
               <a:t>Table Editor</a:t>
             </a:r>
             <a:r>
-              <a:rPr lang="ko-KR" altLang="en-US" sz="3650" dirty="0"/>
+              <a:rPr lang="ko-KR" altLang="en-US" dirty="0"/>
               <a:t> 메뉴로 이동하면 엑셀 시트처럼 자재 목록이나 사용자 정보를 직접 확인하고 긴급 수정할 수 있습니다</a:t>
             </a:r>
             <a:r>
-              <a:rPr lang="en-US" altLang="ko-KR" sz="3650" dirty="0"/>
+              <a:rPr lang="en-US" altLang="ko-KR" dirty="0"/>
               <a:t>.</a:t>
             </a:r>
           </a:p>
@@ -4362,59 +5146,59 @@
               <a:buChar char="•"/>
             </a:pPr>
             <a:r>
-              <a:rPr lang="ko-KR" altLang="en-US" sz="3650" b="1" dirty="0"/>
+              <a:rPr lang="ko-KR" altLang="en-US" b="1" dirty="0"/>
               <a:t>테이블 구조 확인</a:t>
             </a:r>
             <a:r>
-              <a:rPr lang="en-US" altLang="ko-KR" sz="3650" b="1" dirty="0"/>
+              <a:rPr lang="en-US" altLang="ko-KR" b="1" dirty="0"/>
               <a:t>:</a:t>
             </a:r>
             <a:r>
-              <a:rPr lang="ko-KR" altLang="en-US" sz="3650" dirty="0"/>
+              <a:rPr lang="ko-KR" altLang="en-US" dirty="0"/>
               <a:t> 새로운 컬럼</a:t>
             </a:r>
             <a:r>
-              <a:rPr lang="en-US" altLang="ko-KR" sz="3650" dirty="0"/>
+              <a:rPr lang="en-US" altLang="ko-KR" dirty="0"/>
               <a:t>(</a:t>
             </a:r>
             <a:r>
-              <a:rPr lang="ko-KR" altLang="en-US" sz="3650" dirty="0"/>
+              <a:rPr lang="ko-KR" altLang="en-US" dirty="0"/>
               <a:t>열</a:t>
             </a:r>
             <a:r>
-              <a:rPr lang="en-US" altLang="ko-KR" sz="3650" dirty="0"/>
+              <a:rPr lang="en-US" altLang="ko-KR" dirty="0"/>
               <a:t>)</a:t>
             </a:r>
             <a:r>
-              <a:rPr lang="ko-KR" altLang="en-US" sz="3650" dirty="0"/>
+              <a:rPr lang="ko-KR" altLang="en-US" dirty="0"/>
               <a:t>을 추가하거나 데이터 타입을 변경해야 할 때는 </a:t>
             </a:r>
             <a:r>
-              <a:rPr lang="en-US" altLang="ko-KR" sz="3650" dirty="0" err="1"/>
+              <a:rPr lang="en-US" altLang="ko-KR" dirty="0" err="1"/>
               <a:t>Supabase</a:t>
             </a:r>
             <a:r>
-              <a:rPr lang="ko-KR" altLang="en-US" sz="3650" dirty="0"/>
+              <a:rPr lang="ko-KR" altLang="en-US" dirty="0"/>
               <a:t>의 </a:t>
             </a:r>
             <a:r>
-              <a:rPr lang="en-US" altLang="ko-KR" sz="3650" dirty="0"/>
+              <a:rPr lang="en-US" altLang="ko-KR" dirty="0"/>
               <a:t>SQL Editor</a:t>
             </a:r>
             <a:r>
-              <a:rPr lang="ko-KR" altLang="en-US" sz="3650" dirty="0"/>
+              <a:rPr lang="ko-KR" altLang="en-US" dirty="0"/>
               <a:t>나 </a:t>
             </a:r>
             <a:r>
-              <a:rPr lang="en-US" altLang="ko-KR" sz="3650" dirty="0"/>
+              <a:rPr lang="en-US" altLang="ko-KR" dirty="0"/>
               <a:t>Table Editor </a:t>
             </a:r>
             <a:r>
-              <a:rPr lang="ko-KR" altLang="en-US" sz="3650" dirty="0"/>
+              <a:rPr lang="ko-KR" altLang="en-US" dirty="0"/>
               <a:t>기능을 활용합니다</a:t>
             </a:r>
             <a:r>
-              <a:rPr lang="en-US" altLang="ko-KR" sz="3650" dirty="0"/>
+              <a:rPr lang="en-US" altLang="ko-KR" dirty="0"/>
               <a:t>.</a:t>
             </a:r>
           </a:p>
@@ -4423,28 +5207,28 @@
               <a:buFont typeface="Arial" panose="020B0604020202020204" pitchFamily="34" charset="0"/>
               <a:buChar char="•"/>
             </a:pPr>
-            <a:endParaRPr lang="en-US" altLang="ko-KR" sz="3650" dirty="0"/>
+            <a:endParaRPr lang="en-US" altLang="ko-KR" dirty="0"/>
           </a:p>
           <a:p>
             <a:pPr lvl="1"/>
             <a:r>
-              <a:rPr lang="ko-KR" altLang="en-US" sz="3650" dirty="0"/>
+              <a:rPr lang="ko-KR" altLang="en-US" dirty="0"/>
               <a:t>* 데이터가 지워지면 복구를 할 수 없습니다</a:t>
             </a:r>
             <a:r>
-              <a:rPr lang="en-US" altLang="ko-KR" sz="3650" dirty="0"/>
+              <a:rPr lang="en-US" altLang="ko-KR" dirty="0"/>
               <a:t>. </a:t>
             </a:r>
             <a:r>
-              <a:rPr lang="en-US" altLang="ko-KR" sz="3650" dirty="0" err="1"/>
+              <a:rPr lang="en-US" altLang="ko-KR" dirty="0" err="1"/>
               <a:t>Supabase</a:t>
             </a:r>
             <a:r>
-              <a:rPr lang="ko-KR" altLang="en-US" sz="3650" dirty="0"/>
+              <a:rPr lang="ko-KR" altLang="en-US" dirty="0"/>
               <a:t>에서 데이터를 수정하거나 삭제하는 것은 가급적 지양 바랍니다</a:t>
             </a:r>
             <a:r>
-              <a:rPr lang="en-US" altLang="ko-KR" sz="3650" dirty="0"/>
+              <a:rPr lang="en-US" altLang="ko-KR" dirty="0"/>
               <a:t>.</a:t>
             </a:r>
           </a:p>
@@ -4453,7 +5237,7 @@
     </p:spTree>
     <p:extLst>
       <p:ext uri="{BB962C8B-B14F-4D97-AF65-F5344CB8AC3E}">
-        <p14:creationId xmlns:p14="http://schemas.microsoft.com/office/powerpoint/2010/main" val="240299800"/>
+        <p14:creationId xmlns:p14="http://schemas.microsoft.com/office/powerpoint/2010/main" val="414260212"/>
       </p:ext>
     </p:extLst>
   </p:cSld>
@@ -4463,12 +5247,18 @@
 </p:sld>
 </file>
 
-<file path=ppt/slides/slide13.xml><?xml version="1.0" encoding="utf-8"?>
+<file path=ppt/slides/slide18.xml><?xml version="1.0" encoding="utf-8"?>
 <p:sld xmlns:a="http://schemas.openxmlformats.org/drawingml/2006/main" xmlns:r="http://schemas.openxmlformats.org/officeDocument/2006/relationships" xmlns:p="http://schemas.openxmlformats.org/presentationml/2006/main">
   <p:cSld>
     <p:spTree>
       <p:nvGrpSpPr>
-        <p:cNvPr id="1" name=""/>
+        <p:cNvPr id="1" name="">
+          <a:extLst>
+            <a:ext uri="{FF2B5EF4-FFF2-40B4-BE49-F238E27FC236}">
+              <a16:creationId xmlns:a16="http://schemas.microsoft.com/office/drawing/2014/main" id="{122D3429-AFFE-7170-660B-3C02500A4356}"/>
+            </a:ext>
+          </a:extLst>
+        </p:cNvPr>
         <p:cNvGrpSpPr/>
         <p:nvPr/>
       </p:nvGrpSpPr>
@@ -4482,10 +5272,10 @@
       </p:grpSpPr>
       <p:pic>
         <p:nvPicPr>
-          <p:cNvPr id="3074" name="Picture 2" descr="개념정리] Streamlit👑 소개 및 활용 가이드">
+          <p:cNvPr id="2" name="Picture 2" descr="개념정리] Streamlit👑 소개 및 활용 가이드">
             <a:extLst>
               <a:ext uri="{FF2B5EF4-FFF2-40B4-BE49-F238E27FC236}">
-                <a16:creationId xmlns:a16="http://schemas.microsoft.com/office/drawing/2014/main" id="{BCE7E5A8-9757-DCF0-B383-E2763640EB91}"/>
+                <a16:creationId xmlns:a16="http://schemas.microsoft.com/office/drawing/2014/main" id="{7D1C8221-0500-1EF7-142E-1AD214FB2745}"/>
               </a:ext>
             </a:extLst>
           </p:cNvPr>
@@ -4510,7 +5300,7 @@
         <p:spPr bwMode="auto">
           <a:xfrm>
             <a:off x="0" y="0"/>
-            <a:ext cx="5399881" cy="3160712"/>
+            <a:ext cx="2706166" cy="1584000"/>
           </a:xfrm>
           <a:prstGeom prst="rect">
             <a:avLst/>
@@ -4529,10 +5319,10 @@
       </p:pic>
       <p:sp>
         <p:nvSpPr>
-          <p:cNvPr id="5" name="TextBox 4">
+          <p:cNvPr id="3" name="TextBox 2">
             <a:extLst>
               <a:ext uri="{FF2B5EF4-FFF2-40B4-BE49-F238E27FC236}">
-                <a16:creationId xmlns:a16="http://schemas.microsoft.com/office/drawing/2014/main" id="{9A7F52E2-78B5-AE4E-30FA-18811B73FBFD}"/>
+                <a16:creationId xmlns:a16="http://schemas.microsoft.com/office/drawing/2014/main" id="{4DABF2E5-CA2F-8F9D-98CE-E8D06CE73368}"/>
               </a:ext>
             </a:extLst>
           </p:cNvPr>
@@ -4541,8 +5331,8 @@
         </p:nvSpPr>
         <p:spPr>
           <a:xfrm>
-            <a:off x="-1" y="3160712"/>
-            <a:ext cx="10799763" cy="6832640"/>
+            <a:off x="1" y="1584000"/>
+            <a:ext cx="9144000" cy="3139321"/>
           </a:xfrm>
           <a:prstGeom prst="rect">
             <a:avLst/>
@@ -4559,21 +5349,27 @@
               <a:buNone/>
             </a:pPr>
             <a:r>
-              <a:rPr lang="en-US" altLang="ko-KR" sz="3650" b="1" dirty="0" err="1"/>
+              <a:rPr lang="en-US" altLang="ko-KR" b="1" dirty="0" err="1"/>
               <a:t>Streamlit</a:t>
             </a:r>
             <a:r>
-              <a:rPr lang="en-US" altLang="ko-KR" sz="3650" b="1" dirty="0"/>
+              <a:rPr lang="en-US" altLang="ko-KR" b="1" dirty="0"/>
               <a:t> (</a:t>
             </a:r>
             <a:r>
-              <a:rPr lang="ko-KR" altLang="en-US" sz="3650" b="1" dirty="0"/>
+              <a:rPr lang="ko-KR" altLang="en-US" b="1" dirty="0"/>
               <a:t>코드 기능을 웹으로 구현</a:t>
             </a:r>
             <a:r>
-              <a:rPr lang="en-US" altLang="ko-KR" sz="3650" b="1" dirty="0"/>
+              <a:rPr lang="en-US" altLang="ko-KR" b="1" dirty="0"/>
               <a:t>)</a:t>
             </a:r>
+          </a:p>
+          <a:p>
+            <a:pPr>
+              <a:buNone/>
+            </a:pPr>
+            <a:endParaRPr lang="en-US" altLang="ko-KR" b="1" dirty="0"/>
           </a:p>
           <a:p>
             <a:pPr>
@@ -4581,14 +5377,14 @@
               <a:buChar char="•"/>
             </a:pPr>
             <a:r>
-              <a:rPr lang="ko-KR" altLang="en-US" sz="3650" b="1" dirty="0"/>
+              <a:rPr lang="ko-KR" altLang="en-US" b="1" dirty="0"/>
               <a:t>역할과 기능</a:t>
             </a:r>
             <a:r>
-              <a:rPr lang="en-US" altLang="ko-KR" sz="3650" b="1" dirty="0"/>
+              <a:rPr lang="en-US" altLang="ko-KR" b="1" dirty="0"/>
               <a:t>:</a:t>
             </a:r>
-            <a:endParaRPr lang="ko-KR" altLang="en-US" sz="3650" dirty="0"/>
+            <a:endParaRPr lang="ko-KR" altLang="en-US" dirty="0"/>
           </a:p>
           <a:p>
             <a:pPr marL="742950" lvl="1" indent="-285750">
@@ -4596,35 +5392,35 @@
               <a:buChar char="•"/>
             </a:pPr>
             <a:r>
-              <a:rPr lang="ko-KR" altLang="en-US" sz="3650" dirty="0"/>
+              <a:rPr lang="ko-KR" altLang="en-US" dirty="0"/>
               <a:t>파이썬</a:t>
             </a:r>
             <a:r>
-              <a:rPr lang="en-US" altLang="ko-KR" sz="3650" dirty="0"/>
+              <a:rPr lang="en-US" altLang="ko-KR" dirty="0"/>
               <a:t>(Python) </a:t>
             </a:r>
             <a:r>
-              <a:rPr lang="ko-KR" altLang="en-US" sz="3650" dirty="0"/>
+              <a:rPr lang="ko-KR" altLang="en-US" dirty="0"/>
               <a:t>코드를 기반으로 복잡한 </a:t>
             </a:r>
             <a:r>
-              <a:rPr lang="en-US" altLang="ko-KR" sz="3650" dirty="0"/>
+              <a:rPr lang="en-US" altLang="ko-KR" dirty="0"/>
               <a:t>HTML/JS </a:t>
             </a:r>
             <a:r>
-              <a:rPr lang="ko-KR" altLang="en-US" sz="3650" dirty="0"/>
+              <a:rPr lang="ko-KR" altLang="en-US" dirty="0"/>
               <a:t>작업 없이 직관적인 웹 화면</a:t>
             </a:r>
             <a:r>
-              <a:rPr lang="en-US" altLang="ko-KR" sz="3650" dirty="0"/>
+              <a:rPr lang="en-US" altLang="ko-KR" dirty="0"/>
               <a:t>(UI)</a:t>
             </a:r>
             <a:r>
-              <a:rPr lang="ko-KR" altLang="en-US" sz="3650" dirty="0"/>
+              <a:rPr lang="ko-KR" altLang="en-US" dirty="0"/>
               <a:t>과 대시보드를 만들어주는 프레임워크입니다</a:t>
             </a:r>
             <a:r>
-              <a:rPr lang="en-US" altLang="ko-KR" sz="3650" dirty="0"/>
+              <a:rPr lang="en-US" altLang="ko-KR" dirty="0"/>
               <a:t>.</a:t>
             </a:r>
           </a:p>
@@ -4634,57 +5430,61 @@
               <a:buChar char="•"/>
             </a:pPr>
             <a:r>
-              <a:rPr lang="ko-KR" altLang="en-US" sz="3650" dirty="0"/>
+              <a:rPr lang="ko-KR" altLang="en-US" dirty="0"/>
               <a:t>사용자가 보는 버튼</a:t>
             </a:r>
             <a:r>
-              <a:rPr lang="en-US" altLang="ko-KR" sz="3650" dirty="0"/>
+              <a:rPr lang="en-US" altLang="ko-KR" dirty="0"/>
               <a:t>, </a:t>
             </a:r>
             <a:r>
-              <a:rPr lang="ko-KR" altLang="en-US" sz="3650" dirty="0"/>
+              <a:rPr lang="ko-KR" altLang="en-US" dirty="0"/>
               <a:t>입력 폼</a:t>
             </a:r>
             <a:r>
-              <a:rPr lang="en-US" altLang="ko-KR" sz="3650" dirty="0"/>
+              <a:rPr lang="en-US" altLang="ko-KR" dirty="0"/>
               <a:t>, </a:t>
             </a:r>
             <a:r>
-              <a:rPr lang="ko-KR" altLang="en-US" sz="3650" dirty="0"/>
+              <a:rPr lang="ko-KR" altLang="en-US" dirty="0"/>
               <a:t>표</a:t>
             </a:r>
             <a:r>
-              <a:rPr lang="en-US" altLang="ko-KR" sz="3650" dirty="0"/>
+              <a:rPr lang="en-US" altLang="ko-KR" dirty="0"/>
               <a:t>(</a:t>
             </a:r>
             <a:r>
-              <a:rPr lang="en-US" altLang="ko-KR" sz="3650" dirty="0" err="1"/>
+              <a:rPr lang="en-US" altLang="ko-KR" dirty="0" err="1"/>
               <a:t>DataFrame</a:t>
             </a:r>
             <a:r>
-              <a:rPr lang="en-US" altLang="ko-KR" sz="3650" dirty="0"/>
+              <a:rPr lang="en-US" altLang="ko-KR" dirty="0"/>
               <a:t>), </a:t>
             </a:r>
             <a:r>
-              <a:rPr lang="ko-KR" altLang="en-US" sz="3650" dirty="0"/>
+              <a:rPr lang="ko-KR" altLang="en-US" dirty="0"/>
               <a:t>그래프 등이 모두 </a:t>
             </a:r>
             <a:r>
-              <a:rPr lang="en-US" altLang="ko-KR" sz="3650" dirty="0" err="1"/>
+              <a:rPr lang="en-US" altLang="ko-KR" dirty="0" err="1"/>
               <a:t>Streamlit</a:t>
             </a:r>
             <a:r>
-              <a:rPr lang="en-US" altLang="ko-KR" sz="3650" dirty="0"/>
+              <a:rPr lang="en-US" altLang="ko-KR" dirty="0"/>
               <a:t> </a:t>
             </a:r>
             <a:r>
-              <a:rPr lang="ko-KR" altLang="en-US" sz="3650" dirty="0"/>
+              <a:rPr lang="ko-KR" altLang="en-US" dirty="0"/>
               <a:t>라이브러리로 구현되어 있습니다</a:t>
             </a:r>
             <a:r>
-              <a:rPr lang="en-US" altLang="ko-KR" sz="3650" dirty="0"/>
+              <a:rPr lang="en-US" altLang="ko-KR" dirty="0"/>
               <a:t>.</a:t>
             </a:r>
+          </a:p>
+          <a:p>
+            <a:pPr lvl="1"/>
+            <a:endParaRPr lang="en-US" altLang="ko-KR" dirty="0"/>
           </a:p>
           <a:p>
             <a:pPr>
@@ -4692,14 +5492,14 @@
               <a:buChar char="•"/>
             </a:pPr>
             <a:r>
-              <a:rPr lang="ko-KR" altLang="en-US" sz="3650" b="1" dirty="0"/>
+              <a:rPr lang="ko-KR" altLang="en-US" b="1" dirty="0"/>
               <a:t>기본적인 사용 방법</a:t>
             </a:r>
             <a:r>
-              <a:rPr lang="en-US" altLang="ko-KR" sz="3650" b="1" dirty="0"/>
+              <a:rPr lang="en-US" altLang="ko-KR" b="1" dirty="0"/>
               <a:t>:</a:t>
             </a:r>
-            <a:endParaRPr lang="ko-KR" altLang="en-US" sz="3650" dirty="0"/>
+            <a:endParaRPr lang="ko-KR" altLang="en-US" dirty="0"/>
           </a:p>
           <a:p>
             <a:pPr marL="742950" lvl="1" indent="-285750">
@@ -4707,39 +5507,39 @@
               <a:buChar char="•"/>
             </a:pPr>
             <a:r>
-              <a:rPr lang="ko-KR" altLang="en-US" sz="3650" dirty="0"/>
+              <a:rPr lang="ko-KR" altLang="en-US" dirty="0"/>
               <a:t>화면 레이아웃이나 문구를 변경하고 싶을 때는 </a:t>
             </a:r>
             <a:r>
-              <a:rPr lang="en-US" altLang="ko-KR" sz="3650" dirty="0" err="1"/>
+              <a:rPr lang="en-US" altLang="ko-KR" dirty="0" err="1"/>
               <a:t>Github</a:t>
             </a:r>
             <a:r>
-              <a:rPr lang="ko-KR" altLang="en-US" sz="3650" dirty="0"/>
+              <a:rPr lang="ko-KR" altLang="en-US" dirty="0"/>
               <a:t>의 </a:t>
             </a:r>
             <a:r>
-              <a:rPr lang="en-US" altLang="ko-KR" sz="3650" dirty="0" err="1"/>
+              <a:rPr lang="en-US" altLang="ko-KR" dirty="0" err="1"/>
               <a:t>app.py</a:t>
             </a:r>
             <a:r>
-              <a:rPr lang="en-US" altLang="ko-KR" sz="3650" dirty="0"/>
+              <a:rPr lang="en-US" altLang="ko-KR" dirty="0"/>
               <a:t> </a:t>
             </a:r>
             <a:r>
-              <a:rPr lang="ko-KR" altLang="en-US" sz="3650" dirty="0"/>
+              <a:rPr lang="ko-KR" altLang="en-US" dirty="0"/>
               <a:t>코드를 통해 수정하면</a:t>
             </a:r>
             <a:r>
-              <a:rPr lang="en-US" altLang="ko-KR" sz="3650" dirty="0"/>
+              <a:rPr lang="en-US" altLang="ko-KR" dirty="0"/>
               <a:t>, </a:t>
             </a:r>
             <a:r>
-              <a:rPr lang="ko-KR" altLang="en-US" sz="3650" dirty="0"/>
+              <a:rPr lang="ko-KR" altLang="en-US" dirty="0"/>
               <a:t>잠시 후 수정사항이 반영된 웹페이지를 이용가능 합니다</a:t>
             </a:r>
             <a:r>
-              <a:rPr lang="en-US" altLang="ko-KR" sz="3650" dirty="0"/>
+              <a:rPr lang="en-US" altLang="ko-KR" dirty="0"/>
               <a:t>.</a:t>
             </a:r>
           </a:p>
@@ -4748,7 +5548,7 @@
     </p:spTree>
     <p:extLst>
       <p:ext uri="{BB962C8B-B14F-4D97-AF65-F5344CB8AC3E}">
-        <p14:creationId xmlns:p14="http://schemas.microsoft.com/office/powerpoint/2010/main" val="1058910490"/>
+        <p14:creationId xmlns:p14="http://schemas.microsoft.com/office/powerpoint/2010/main" val="1858309546"/>
       </p:ext>
     </p:extLst>
   </p:cSld>
@@ -4763,7 +5563,13 @@
   <p:cSld>
     <p:spTree>
       <p:nvGrpSpPr>
-        <p:cNvPr id="1" name=""/>
+        <p:cNvPr id="1" name="">
+          <a:extLst>
+            <a:ext uri="{FF2B5EF4-FFF2-40B4-BE49-F238E27FC236}">
+              <a16:creationId xmlns:a16="http://schemas.microsoft.com/office/drawing/2014/main" id="{DF3AE3F8-44E1-1C49-E427-6F9D15B87192}"/>
+            </a:ext>
+          </a:extLst>
+        </p:cNvPr>
         <p:cNvGrpSpPr/>
         <p:nvPr/>
       </p:nvGrpSpPr>
@@ -4777,10 +5583,10 @@
       </p:grpSpPr>
       <p:sp>
         <p:nvSpPr>
-          <p:cNvPr id="5" name="TextBox 4">
+          <p:cNvPr id="2" name="TextBox 1">
             <a:extLst>
               <a:ext uri="{FF2B5EF4-FFF2-40B4-BE49-F238E27FC236}">
-                <a16:creationId xmlns:a16="http://schemas.microsoft.com/office/drawing/2014/main" id="{AEE8E410-0187-7775-9624-956B1ED73288}"/>
+                <a16:creationId xmlns:a16="http://schemas.microsoft.com/office/drawing/2014/main" id="{0F882C12-ECE8-75B6-6F71-397A1DBF941C}"/>
               </a:ext>
             </a:extLst>
           </p:cNvPr>
@@ -4789,8 +5595,8 @@
         </p:nvSpPr>
         <p:spPr>
           <a:xfrm>
-            <a:off x="-1" y="212103"/>
-            <a:ext cx="10799763" cy="13976005"/>
+            <a:off x="-1" y="160317"/>
+            <a:ext cx="9144001" cy="6537367"/>
           </a:xfrm>
           <a:prstGeom prst="rect">
             <a:avLst/>
@@ -4807,75 +5613,75 @@
               <a:buNone/>
             </a:pPr>
             <a:r>
-              <a:rPr lang="ko-KR" altLang="en-US" sz="3651" b="1" dirty="0"/>
+              <a:rPr lang="ko-KR" altLang="en-US" sz="2800" b="1" dirty="0"/>
               <a:t>🏭 </a:t>
             </a:r>
             <a:r>
-              <a:rPr lang="ko-KR" altLang="en-US" sz="3651" b="1" dirty="0" err="1"/>
+              <a:rPr lang="ko-KR" altLang="en-US" sz="2800" b="1" dirty="0" err="1"/>
               <a:t>광주오포센터</a:t>
             </a:r>
             <a:r>
-              <a:rPr lang="ko-KR" altLang="en-US" sz="3651" b="1" dirty="0"/>
+              <a:rPr lang="ko-KR" altLang="en-US" sz="2800" b="1" dirty="0"/>
               <a:t> 자동화 </a:t>
             </a:r>
             <a:r>
-              <a:rPr lang="en-US" altLang="ko-KR" sz="3651" b="1" dirty="0"/>
+              <a:rPr lang="en-US" altLang="ko-KR" sz="2800" b="1" dirty="0"/>
               <a:t>ERP </a:t>
             </a:r>
             <a:r>
-              <a:rPr lang="ko-KR" altLang="en-US" sz="3651" b="1" dirty="0"/>
+              <a:rPr lang="ko-KR" altLang="en-US" sz="2800" b="1" dirty="0"/>
               <a:t>시스템 주소 및 관리자 계정</a:t>
             </a:r>
-            <a:endParaRPr lang="en-US" altLang="ko-KR" sz="3651" b="1" dirty="0"/>
+            <a:endParaRPr lang="en-US" altLang="ko-KR" sz="2800" b="1" dirty="0"/>
           </a:p>
           <a:p>
             <a:pPr>
               <a:buNone/>
             </a:pPr>
-            <a:endParaRPr lang="en-US" altLang="ko-KR" sz="3651" b="1" dirty="0"/>
+            <a:endParaRPr lang="en-US" altLang="ko-KR" sz="2800" b="1" dirty="0"/>
           </a:p>
           <a:p>
             <a:pPr>
               <a:buNone/>
             </a:pPr>
             <a:r>
-              <a:rPr lang="en-US" altLang="ko-KR" sz="3651" dirty="0">
+              <a:rPr lang="en-US" altLang="ko-KR" sz="2000" dirty="0">
                 <a:hlinkClick r:id="rId2"/>
               </a:rPr>
               <a:t>https://my-</a:t>
             </a:r>
             <a:r>
-              <a:rPr lang="en-US" altLang="ko-KR" sz="3651" dirty="0" err="1">
+              <a:rPr lang="en-US" altLang="ko-KR" sz="2000" dirty="0" err="1">
                 <a:hlinkClick r:id="rId2"/>
               </a:rPr>
               <a:t>erp</a:t>
             </a:r>
             <a:r>
-              <a:rPr lang="en-US" altLang="ko-KR" sz="3651" dirty="0">
+              <a:rPr lang="en-US" altLang="ko-KR" sz="2000" dirty="0">
                 <a:hlinkClick r:id="rId2"/>
               </a:rPr>
               <a:t>-</a:t>
             </a:r>
             <a:r>
-              <a:rPr lang="en-US" altLang="ko-KR" sz="3651" dirty="0" err="1">
+              <a:rPr lang="en-US" altLang="ko-KR" sz="2000" dirty="0" err="1">
                 <a:hlinkClick r:id="rId2"/>
               </a:rPr>
               <a:t>66zbzaffpenjtjjf2kengo.streamlit.app</a:t>
             </a:r>
             <a:r>
-              <a:rPr lang="en-US" altLang="ko-KR" sz="3651" dirty="0">
+              <a:rPr lang="en-US" altLang="ko-KR" sz="2000" dirty="0">
                 <a:hlinkClick r:id="rId2"/>
               </a:rPr>
               <a:t>/</a:t>
             </a:r>
-            <a:endParaRPr lang="en-US" altLang="ko-KR" sz="3651" dirty="0"/>
+            <a:endParaRPr lang="en-US" altLang="ko-KR" sz="2000" dirty="0"/>
           </a:p>
           <a:p>
             <a:pPr>
               <a:buNone/>
             </a:pPr>
             <a:r>
-              <a:rPr lang="en-US" altLang="ko-KR" sz="3651" dirty="0"/>
+              <a:rPr lang="en-US" altLang="ko-KR" sz="2000" dirty="0"/>
               <a:t>ID : admin / PW : admin</a:t>
             </a:r>
           </a:p>
@@ -4884,47 +5690,47 @@
               <a:buNone/>
             </a:pPr>
             <a:r>
-              <a:rPr lang="ko-KR" altLang="en-US" sz="3651" dirty="0"/>
+              <a:rPr lang="ko-KR" altLang="en-US" sz="2000" dirty="0"/>
               <a:t>바탕화면</a:t>
             </a:r>
             <a:r>
-              <a:rPr lang="en-US" altLang="ko-KR" sz="3651" dirty="0"/>
+              <a:rPr lang="en-US" altLang="ko-KR" sz="2000" dirty="0"/>
               <a:t>-my </a:t>
             </a:r>
             <a:r>
-              <a:rPr lang="en-US" altLang="ko-KR" sz="3651" dirty="0" err="1"/>
+              <a:rPr lang="en-US" altLang="ko-KR" sz="2000" dirty="0" err="1"/>
               <a:t>erp</a:t>
             </a:r>
             <a:r>
-              <a:rPr lang="en-US" altLang="ko-KR" sz="3651" dirty="0"/>
+              <a:rPr lang="en-US" altLang="ko-KR" sz="2000" dirty="0"/>
               <a:t> </a:t>
             </a:r>
             <a:r>
-              <a:rPr lang="ko-KR" altLang="en-US" sz="3651" dirty="0"/>
+              <a:rPr lang="ko-KR" altLang="en-US" sz="2000" dirty="0"/>
               <a:t>폴더 내 백업용 코드</a:t>
             </a:r>
             <a:r>
-              <a:rPr lang="en-US" altLang="ko-KR" sz="3651" dirty="0"/>
+              <a:rPr lang="en-US" altLang="ko-KR" sz="2000" dirty="0"/>
               <a:t>, </a:t>
             </a:r>
             <a:r>
-              <a:rPr lang="ko-KR" altLang="en-US" sz="3651" dirty="0"/>
+              <a:rPr lang="ko-KR" altLang="en-US" sz="2000" dirty="0"/>
               <a:t>각종 아이디 메모 참고</a:t>
             </a:r>
-            <a:endParaRPr lang="en-US" altLang="ko-KR" sz="3651" dirty="0"/>
+            <a:endParaRPr lang="en-US" altLang="ko-KR" sz="2000" dirty="0"/>
           </a:p>
           <a:p>
             <a:pPr>
               <a:buNone/>
             </a:pPr>
-            <a:endParaRPr lang="en-US" altLang="ko-KR" sz="3651" dirty="0"/>
+            <a:endParaRPr lang="en-US" altLang="ko-KR" sz="2800" dirty="0"/>
           </a:p>
           <a:p>
             <a:pPr>
               <a:buNone/>
             </a:pPr>
             <a:r>
-              <a:rPr lang="ko-KR" altLang="en-US" sz="3651" b="1" dirty="0"/>
+              <a:rPr lang="ko-KR" altLang="en-US" sz="2800" b="1" dirty="0"/>
               <a:t>📌 목차</a:t>
             </a:r>
           </a:p>
@@ -4937,7 +5743,7 @@
               <a:buAutoNum type="arabicPeriod"/>
             </a:pPr>
             <a:r>
-              <a:rPr lang="ko-KR" altLang="en-US" sz="3651" dirty="0">
+              <a:rPr lang="ko-KR" altLang="en-US" dirty="0">
                 <a:solidFill>
                   <a:srgbClr val="0070C0"/>
                 </a:solidFill>
@@ -4954,7 +5760,7 @@
               <a:buAutoNum type="arabicPeriod"/>
             </a:pPr>
             <a:r>
-              <a:rPr lang="ko-KR" altLang="en-US" sz="3651" dirty="0">
+              <a:rPr lang="ko-KR" altLang="en-US" dirty="0">
                 <a:solidFill>
                   <a:srgbClr val="0070C0"/>
                 </a:solidFill>
@@ -4962,7 +5768,7 @@
               <a:t> 재고 </a:t>
             </a:r>
             <a:r>
-              <a:rPr lang="ko-KR" altLang="en-US" sz="3651" dirty="0" err="1">
+              <a:rPr lang="ko-KR" altLang="en-US" dirty="0" err="1">
                 <a:solidFill>
                   <a:srgbClr val="0070C0"/>
                 </a:solidFill>
@@ -4970,7 +5776,7 @@
               <a:t>현황판</a:t>
             </a:r>
             <a:r>
-              <a:rPr lang="ko-KR" altLang="en-US" sz="3651" dirty="0">
+              <a:rPr lang="ko-KR" altLang="en-US" dirty="0">
                 <a:solidFill>
                   <a:srgbClr val="0070C0"/>
                 </a:solidFill>
@@ -4978,7 +5784,7 @@
               <a:t> </a:t>
             </a:r>
             <a:r>
-              <a:rPr lang="en-US" altLang="ko-KR" sz="3651" dirty="0">
+              <a:rPr lang="en-US" altLang="ko-KR" dirty="0">
                 <a:solidFill>
                   <a:srgbClr val="0070C0"/>
                 </a:solidFill>
@@ -4986,7 +5792,7 @@
               <a:t>(</a:t>
             </a:r>
             <a:r>
-              <a:rPr lang="ko-KR" altLang="en-US" sz="3651" dirty="0">
+              <a:rPr lang="ko-KR" altLang="en-US" dirty="0">
                 <a:solidFill>
                   <a:srgbClr val="0070C0"/>
                 </a:solidFill>
@@ -4994,14 +5800,14 @@
               <a:t>조회 및 명세서 출력</a:t>
             </a:r>
             <a:r>
-              <a:rPr lang="en-US" altLang="ko-KR" sz="3651" dirty="0">
+              <a:rPr lang="en-US" altLang="ko-KR" dirty="0">
                 <a:solidFill>
                   <a:srgbClr val="0070C0"/>
                 </a:solidFill>
               </a:rPr>
               <a:t>)</a:t>
             </a:r>
-            <a:endParaRPr lang="ko-KR" altLang="en-US" sz="3651" dirty="0">
+            <a:endParaRPr lang="ko-KR" altLang="en-US" dirty="0">
               <a:solidFill>
                 <a:srgbClr val="0070C0"/>
               </a:solidFill>
@@ -5016,7 +5822,7 @@
               <a:buAutoNum type="arabicPeriod"/>
             </a:pPr>
             <a:r>
-              <a:rPr lang="ko-KR" altLang="en-US" sz="3651" dirty="0">
+              <a:rPr lang="ko-KR" altLang="en-US" dirty="0">
                 <a:solidFill>
                   <a:srgbClr val="0070C0"/>
                 </a:solidFill>
@@ -5033,7 +5839,7 @@
               <a:buAutoNum type="arabicPeriod"/>
             </a:pPr>
             <a:r>
-              <a:rPr lang="ko-KR" altLang="en-US" sz="3651" dirty="0">
+              <a:rPr lang="ko-KR" altLang="en-US" dirty="0">
                 <a:solidFill>
                   <a:srgbClr val="0070C0"/>
                 </a:solidFill>
@@ -5041,7 +5847,7 @@
               <a:t> 품목 관리 </a:t>
             </a:r>
             <a:r>
-              <a:rPr lang="en-US" altLang="ko-KR" sz="3651" dirty="0">
+              <a:rPr lang="en-US" altLang="ko-KR" dirty="0">
                 <a:solidFill>
                   <a:srgbClr val="0070C0"/>
                 </a:solidFill>
@@ -5049,7 +5855,7 @@
               <a:t>(</a:t>
             </a:r>
             <a:r>
-              <a:rPr lang="ko-KR" altLang="en-US" sz="3651" dirty="0">
+              <a:rPr lang="ko-KR" altLang="en-US" dirty="0">
                 <a:solidFill>
                   <a:srgbClr val="0070C0"/>
                 </a:solidFill>
@@ -5057,14 +5863,14 @@
               <a:t>신규 등록 및 수정</a:t>
             </a:r>
             <a:r>
-              <a:rPr lang="en-US" altLang="ko-KR" sz="3651" dirty="0">
+              <a:rPr lang="en-US" altLang="ko-KR" dirty="0">
                 <a:solidFill>
                   <a:srgbClr val="0070C0"/>
                 </a:solidFill>
               </a:rPr>
               <a:t>)</a:t>
             </a:r>
-            <a:endParaRPr lang="ko-KR" altLang="en-US" sz="3651" dirty="0">
+            <a:endParaRPr lang="ko-KR" altLang="en-US" dirty="0">
               <a:solidFill>
                 <a:srgbClr val="0070C0"/>
               </a:solidFill>
@@ -5079,7 +5885,7 @@
               <a:buAutoNum type="arabicPeriod"/>
             </a:pPr>
             <a:r>
-              <a:rPr lang="ko-KR" altLang="en-US" sz="3651" dirty="0">
+              <a:rPr lang="ko-KR" altLang="en-US" dirty="0">
                 <a:solidFill>
                   <a:srgbClr val="0070C0"/>
                 </a:solidFill>
@@ -5096,7 +5902,7 @@
               <a:buAutoNum type="arabicPeriod"/>
             </a:pPr>
             <a:r>
-              <a:rPr lang="ko-KR" altLang="en-US" sz="3651" dirty="0">
+              <a:rPr lang="ko-KR" altLang="en-US" dirty="0">
                 <a:solidFill>
                   <a:srgbClr val="0070C0"/>
                 </a:solidFill>
@@ -5104,7 +5910,7 @@
               <a:t> 환율 설정 및 사용자 관리 </a:t>
             </a:r>
             <a:r>
-              <a:rPr lang="en-US" altLang="ko-KR" sz="3651" dirty="0">
+              <a:rPr lang="en-US" altLang="ko-KR" dirty="0">
                 <a:solidFill>
                   <a:srgbClr val="0070C0"/>
                 </a:solidFill>
@@ -5112,7 +5918,7 @@
               <a:t>(</a:t>
             </a:r>
             <a:r>
-              <a:rPr lang="ko-KR" altLang="en-US" sz="3651" dirty="0">
+              <a:rPr lang="ko-KR" altLang="en-US" dirty="0">
                 <a:solidFill>
                   <a:srgbClr val="0070C0"/>
                 </a:solidFill>
@@ -5120,7 +5926,7 @@
               <a:t>관리자 전용</a:t>
             </a:r>
             <a:r>
-              <a:rPr lang="en-US" altLang="ko-KR" sz="3651" dirty="0">
+              <a:rPr lang="en-US" altLang="ko-KR" dirty="0">
                 <a:solidFill>
                   <a:srgbClr val="0070C0"/>
                 </a:solidFill>
@@ -5137,7 +5943,7 @@
               <a:buAutoNum type="arabicPeriod"/>
             </a:pPr>
             <a:r>
-              <a:rPr lang="ko-KR" altLang="en-US" sz="3651" dirty="0">
+              <a:rPr lang="ko-KR" altLang="en-US" dirty="0">
                 <a:solidFill>
                   <a:srgbClr val="0070C0"/>
                 </a:solidFill>
@@ -5145,7 +5951,7 @@
               <a:t> 시스템 기술 스택 구조 및 유지보수 가이드</a:t>
             </a:r>
             <a:r>
-              <a:rPr lang="en-US" altLang="ko-KR" sz="3651" dirty="0">
+              <a:rPr lang="en-US" altLang="ko-KR" dirty="0">
                 <a:solidFill>
                   <a:srgbClr val="0070C0"/>
                 </a:solidFill>
@@ -5153,7 +5959,7 @@
               <a:t>(</a:t>
             </a:r>
             <a:r>
-              <a:rPr lang="ko-KR" altLang="en-US" sz="3651" dirty="0">
+              <a:rPr lang="ko-KR" altLang="en-US" dirty="0">
                 <a:solidFill>
                   <a:srgbClr val="0070C0"/>
                 </a:solidFill>
@@ -5161,14 +5967,14 @@
               <a:t>담당자 전용</a:t>
             </a:r>
             <a:r>
-              <a:rPr lang="en-US" altLang="ko-KR" sz="3651" dirty="0">
+              <a:rPr lang="en-US" altLang="ko-KR" dirty="0">
                 <a:solidFill>
                   <a:srgbClr val="0070C0"/>
                 </a:solidFill>
               </a:rPr>
               <a:t>)</a:t>
             </a:r>
-            <a:endParaRPr lang="ko-KR" altLang="en-US" sz="3651" dirty="0">
+            <a:endParaRPr lang="ko-KR" altLang="en-US" dirty="0">
               <a:solidFill>
                 <a:srgbClr val="0070C0"/>
               </a:solidFill>
@@ -5179,7 +5985,7 @@
     </p:spTree>
     <p:extLst>
       <p:ext uri="{BB962C8B-B14F-4D97-AF65-F5344CB8AC3E}">
-        <p14:creationId xmlns:p14="http://schemas.microsoft.com/office/powerpoint/2010/main" val="1759303537"/>
+        <p14:creationId xmlns:p14="http://schemas.microsoft.com/office/powerpoint/2010/main" val="2967794130"/>
       </p:ext>
     </p:extLst>
   </p:cSld>
@@ -5194,7 +6000,13 @@
   <p:cSld>
     <p:spTree>
       <p:nvGrpSpPr>
-        <p:cNvPr id="1" name=""/>
+        <p:cNvPr id="1" name="">
+          <a:extLst>
+            <a:ext uri="{FF2B5EF4-FFF2-40B4-BE49-F238E27FC236}">
+              <a16:creationId xmlns:a16="http://schemas.microsoft.com/office/drawing/2014/main" id="{D7423C95-EFAD-EB4A-21C9-EC1297BD31C0}"/>
+            </a:ext>
+          </a:extLst>
+        </p:cNvPr>
         <p:cNvGrpSpPr/>
         <p:nvPr/>
       </p:nvGrpSpPr>
@@ -5206,669 +6018,12 @@
           <a:chExt cx="0" cy="0"/>
         </a:xfrm>
       </p:grpSpPr>
-      <p:grpSp>
-        <p:nvGrpSpPr>
-          <p:cNvPr id="9" name="그룹 8">
+      <p:pic>
+        <p:nvPicPr>
+          <p:cNvPr id="3" name="그림 2">
             <a:extLst>
               <a:ext uri="{FF2B5EF4-FFF2-40B4-BE49-F238E27FC236}">
-                <a16:creationId xmlns:a16="http://schemas.microsoft.com/office/drawing/2014/main" id="{D78B5781-0269-A7E8-5F59-08A1257E0304}"/>
-              </a:ext>
-            </a:extLst>
-          </p:cNvPr>
-          <p:cNvGrpSpPr/>
-          <p:nvPr/>
-        </p:nvGrpSpPr>
-        <p:grpSpPr>
-          <a:xfrm>
-            <a:off x="0" y="1071571"/>
-            <a:ext cx="10799763" cy="12257070"/>
-            <a:chOff x="0" y="477052"/>
-            <a:chExt cx="6858000" cy="7783411"/>
-          </a:xfrm>
-        </p:grpSpPr>
-        <p:sp>
-          <p:nvSpPr>
-            <p:cNvPr id="5" name="TextBox 4">
-              <a:extLst>
-                <a:ext uri="{FF2B5EF4-FFF2-40B4-BE49-F238E27FC236}">
-                  <a16:creationId xmlns:a16="http://schemas.microsoft.com/office/drawing/2014/main" id="{6AA05B22-C4C4-79EC-27DF-19123D475C5C}"/>
-                </a:ext>
-              </a:extLst>
-            </p:cNvPr>
-            <p:cNvSpPr txBox="1"/>
-            <p:nvPr/>
-          </p:nvSpPr>
-          <p:spPr>
-            <a:xfrm>
-              <a:off x="0" y="2136845"/>
-              <a:ext cx="6858000" cy="6123618"/>
-            </a:xfrm>
-            <a:prstGeom prst="rect">
-              <a:avLst/>
-            </a:prstGeom>
-            <a:noFill/>
-          </p:spPr>
-          <p:txBody>
-            <a:bodyPr wrap="square">
-              <a:spAutoFit/>
-            </a:bodyPr>
-            <a:lstStyle/>
-            <a:p>
-              <a:pPr marL="540000" indent="-540000">
-                <a:buAutoNum type="arabicPeriod"/>
-              </a:pPr>
-              <a:r>
-                <a:rPr lang="ko-KR" altLang="en-US" sz="3651" b="1" dirty="0"/>
-                <a:t>시스템 접속 및 로그인</a:t>
-              </a:r>
-              <a:endParaRPr lang="en-US" altLang="ko-KR" sz="3651" b="1" dirty="0"/>
-            </a:p>
-            <a:p>
-              <a:endParaRPr lang="ko-KR" altLang="en-US" sz="3651" b="1" dirty="0"/>
-            </a:p>
-            <a:p>
-              <a:pPr>
-                <a:buNone/>
-              </a:pPr>
-              <a:r>
-                <a:rPr lang="ko-KR" altLang="en-US" sz="3651" dirty="0"/>
-                <a:t>웹 브라우저를 통해 </a:t>
-              </a:r>
-              <a:r>
-                <a:rPr lang="en-US" altLang="ko-KR" sz="3651" dirty="0"/>
-                <a:t>ERP </a:t>
-              </a:r>
-              <a:r>
-                <a:rPr lang="ko-KR" altLang="en-US" sz="3651" dirty="0"/>
-                <a:t>시스템에 접속한 후</a:t>
-              </a:r>
-              <a:r>
-                <a:rPr lang="en-US" altLang="ko-KR" sz="3651" dirty="0"/>
-                <a:t>, </a:t>
-              </a:r>
-              <a:r>
-                <a:rPr lang="ko-KR" altLang="en-US" sz="3651" dirty="0" err="1"/>
-                <a:t>부여받은</a:t>
-              </a:r>
-              <a:r>
-                <a:rPr lang="ko-KR" altLang="en-US" sz="3651" dirty="0"/>
-                <a:t> 계정 정보를 입력합니다</a:t>
-              </a:r>
-              <a:r>
-                <a:rPr lang="en-US" altLang="ko-KR" sz="3651" dirty="0"/>
-                <a:t>.</a:t>
-              </a:r>
-            </a:p>
-            <a:p>
-              <a:pPr>
-                <a:buNone/>
-              </a:pPr>
-              <a:endParaRPr lang="en-US" altLang="ko-KR" sz="3651" dirty="0"/>
-            </a:p>
-            <a:p>
-              <a:pPr>
-                <a:buFont typeface="Arial" panose="020B0604020202020204" pitchFamily="34" charset="0"/>
-                <a:buChar char="•"/>
-              </a:pPr>
-              <a:r>
-                <a:rPr lang="ko-KR" altLang="en-US" sz="3651" b="1" dirty="0"/>
-                <a:t>접속 방법</a:t>
-              </a:r>
-              <a:r>
-                <a:rPr lang="en-US" altLang="ko-KR" sz="3651" b="1" dirty="0"/>
-                <a:t>:</a:t>
-              </a:r>
-              <a:r>
-                <a:rPr lang="ko-KR" altLang="en-US" sz="3651" dirty="0"/>
-                <a:t> 지정된 </a:t>
-              </a:r>
-              <a:r>
-                <a:rPr lang="en-US" altLang="ko-KR" sz="3651" dirty="0"/>
-                <a:t>URL</a:t>
-              </a:r>
-              <a:r>
-                <a:rPr lang="ko-KR" altLang="en-US" sz="3651" dirty="0"/>
-                <a:t>로 접속</a:t>
-              </a:r>
-              <a:endParaRPr lang="en-US" altLang="ko-KR" sz="3651" dirty="0"/>
-            </a:p>
-            <a:p>
-              <a:endParaRPr lang="ko-KR" altLang="en-US" sz="3651" dirty="0"/>
-            </a:p>
-            <a:p>
-              <a:pPr>
-                <a:buFont typeface="Arial" panose="020B0604020202020204" pitchFamily="34" charset="0"/>
-                <a:buChar char="•"/>
-              </a:pPr>
-              <a:r>
-                <a:rPr lang="ko-KR" altLang="en-US" sz="3651" b="1" dirty="0"/>
-                <a:t>로그인 절차</a:t>
-              </a:r>
-              <a:r>
-                <a:rPr lang="en-US" altLang="ko-KR" sz="3651" b="1" dirty="0"/>
-                <a:t>:</a:t>
-              </a:r>
-              <a:endParaRPr lang="ko-KR" altLang="en-US" sz="3651" dirty="0"/>
-            </a:p>
-            <a:p>
-              <a:pPr marL="1170001" lvl="1" indent="-450000">
-                <a:buFont typeface="Arial" panose="020B0604020202020204" pitchFamily="34" charset="0"/>
-                <a:buChar char="•"/>
-              </a:pPr>
-              <a:r>
-                <a:rPr lang="ko-KR" altLang="en-US" sz="3651" dirty="0"/>
-                <a:t>본인의 사번</a:t>
-              </a:r>
-              <a:r>
-                <a:rPr lang="en-US" altLang="ko-KR" sz="3651" dirty="0"/>
-                <a:t>(ID)</a:t>
-              </a:r>
-              <a:r>
-                <a:rPr lang="ko-KR" altLang="en-US" sz="3651" dirty="0"/>
-                <a:t>과 비밀번호</a:t>
-              </a:r>
-              <a:r>
-                <a:rPr lang="en-US" altLang="ko-KR" sz="3651" dirty="0"/>
-                <a:t>(PW)</a:t>
-              </a:r>
-              <a:r>
-                <a:rPr lang="ko-KR" altLang="en-US" sz="3651" dirty="0"/>
-                <a:t>를 입력합니다</a:t>
-              </a:r>
-              <a:r>
-                <a:rPr lang="en-US" altLang="ko-KR" sz="3651" dirty="0"/>
-                <a:t>.</a:t>
-              </a:r>
-            </a:p>
-            <a:p>
-              <a:pPr marL="1170001" lvl="1" indent="-450000">
-                <a:buFont typeface="Arial" panose="020B0604020202020204" pitchFamily="34" charset="0"/>
-                <a:buChar char="•"/>
-              </a:pPr>
-              <a:r>
-                <a:rPr lang="ko-KR" altLang="en-US" sz="3651" dirty="0">
-                  <a:latin typeface="Courier New" panose="02070309020205020404" pitchFamily="49" charset="0"/>
-                </a:rPr>
-                <a:t>로그인</a:t>
-              </a:r>
-              <a:r>
-                <a:rPr lang="ko-KR" altLang="en-US" sz="3651" dirty="0"/>
-                <a:t> 버튼을 클릭합니다</a:t>
-              </a:r>
-              <a:r>
-                <a:rPr lang="en-US" altLang="ko-KR" sz="3651" dirty="0"/>
-                <a:t>.</a:t>
-              </a:r>
-            </a:p>
-            <a:p>
-              <a:pPr lvl="1"/>
-              <a:endParaRPr lang="en-US" altLang="ko-KR" sz="3651" dirty="0"/>
-            </a:p>
-            <a:p>
-              <a:pPr>
-                <a:buFont typeface="Arial" panose="020B0604020202020204" pitchFamily="34" charset="0"/>
-                <a:buChar char="•"/>
-              </a:pPr>
-              <a:r>
-                <a:rPr lang="ko-KR" altLang="en-US" sz="3651" b="1" dirty="0"/>
-                <a:t>접속 권한 종류</a:t>
-              </a:r>
-              <a:r>
-                <a:rPr lang="en-US" altLang="ko-KR" sz="3651" b="1" dirty="0"/>
-                <a:t>:</a:t>
-              </a:r>
-              <a:endParaRPr lang="ko-KR" altLang="en-US" sz="3651" dirty="0"/>
-            </a:p>
-            <a:p>
-              <a:pPr marL="1170001" lvl="1" indent="-450000">
-                <a:buFont typeface="Arial" panose="020B0604020202020204" pitchFamily="34" charset="0"/>
-                <a:buChar char="•"/>
-              </a:pPr>
-              <a:r>
-                <a:rPr lang="ko-KR" altLang="en-US" sz="3651" b="1" dirty="0"/>
-                <a:t>일반 사용자 </a:t>
-              </a:r>
-              <a:r>
-                <a:rPr lang="en-US" altLang="ko-KR" sz="3651" b="1" dirty="0"/>
-                <a:t>/ </a:t>
-              </a:r>
-              <a:r>
-                <a:rPr lang="ko-KR" altLang="en-US" sz="3651" b="1" dirty="0"/>
-                <a:t>관리자</a:t>
-              </a:r>
-              <a:r>
-                <a:rPr lang="en-US" altLang="ko-KR" sz="3651" b="1" dirty="0"/>
-                <a:t>:</a:t>
-              </a:r>
-              <a:r>
-                <a:rPr lang="ko-KR" altLang="en-US" sz="3651" dirty="0"/>
-                <a:t> 전체 기능 이용 가능</a:t>
-              </a:r>
-            </a:p>
-            <a:p>
-              <a:pPr marL="1170001" lvl="1" indent="-450000">
-                <a:buFont typeface="Arial" panose="020B0604020202020204" pitchFamily="34" charset="0"/>
-                <a:buChar char="•"/>
-              </a:pPr>
-              <a:r>
-                <a:rPr lang="ko-KR" altLang="en-US" sz="3651" b="1" dirty="0"/>
-                <a:t>게스트 </a:t>
-              </a:r>
-              <a:r>
-                <a:rPr lang="en-US" altLang="ko-KR" sz="3651" b="1" dirty="0"/>
-                <a:t>(Guest):</a:t>
-              </a:r>
-              <a:r>
-                <a:rPr lang="ko-KR" altLang="en-US" sz="3651" dirty="0"/>
-                <a:t> </a:t>
-              </a:r>
-              <a:r>
-                <a:rPr lang="en-US" altLang="ko-KR" sz="3651" dirty="0"/>
-                <a:t>'</a:t>
-              </a:r>
-              <a:r>
-                <a:rPr lang="ko-KR" altLang="en-US" sz="3651" dirty="0"/>
-                <a:t>재고 </a:t>
-              </a:r>
-              <a:r>
-                <a:rPr lang="ko-KR" altLang="en-US" sz="3651" dirty="0" err="1"/>
-                <a:t>현황판</a:t>
-              </a:r>
-              <a:r>
-                <a:rPr lang="en-US" altLang="ko-KR" sz="3651" dirty="0"/>
-                <a:t>' </a:t>
-              </a:r>
-              <a:r>
-                <a:rPr lang="ko-KR" altLang="en-US" sz="3651" dirty="0"/>
-                <a:t>및 </a:t>
-              </a:r>
-              <a:r>
-                <a:rPr lang="en-US" altLang="ko-KR" sz="3651" dirty="0"/>
-                <a:t>'</a:t>
-              </a:r>
-              <a:r>
-                <a:rPr lang="ko-KR" altLang="en-US" sz="3651" dirty="0"/>
-                <a:t>입출고 내역 조회</a:t>
-              </a:r>
-              <a:r>
-                <a:rPr lang="en-US" altLang="ko-KR" sz="3651" dirty="0"/>
-                <a:t>'</a:t>
-              </a:r>
-              <a:r>
-                <a:rPr lang="ko-KR" altLang="en-US" sz="3651" dirty="0"/>
-                <a:t>만 가능 </a:t>
-              </a:r>
-              <a:r>
-                <a:rPr lang="en-US" altLang="ko-KR" sz="3651" dirty="0"/>
-                <a:t>(</a:t>
-              </a:r>
-              <a:r>
-                <a:rPr lang="ko-KR" altLang="en-US" sz="3651" dirty="0"/>
-                <a:t>등록 및 수정 불가</a:t>
-              </a:r>
-              <a:r>
-                <a:rPr lang="en-US" altLang="ko-KR" sz="3651" dirty="0"/>
-                <a:t>)</a:t>
-              </a:r>
-            </a:p>
-            <a:p>
-              <a:pPr marL="1170001" lvl="1" indent="-450000">
-                <a:buFont typeface="Arial" panose="020B0604020202020204" pitchFamily="34" charset="0"/>
-                <a:buChar char="•"/>
-              </a:pPr>
-              <a:endParaRPr lang="en-US" altLang="ko-KR" sz="3651" dirty="0"/>
-            </a:p>
-          </p:txBody>
-        </p:sp>
-        <p:pic>
-          <p:nvPicPr>
-            <p:cNvPr id="8" name="그림 7">
-              <a:extLst>
-                <a:ext uri="{FF2B5EF4-FFF2-40B4-BE49-F238E27FC236}">
-                  <a16:creationId xmlns:a16="http://schemas.microsoft.com/office/drawing/2014/main" id="{B3BBDBF1-C52E-69FE-EF09-CD9385E70860}"/>
-                </a:ext>
-              </a:extLst>
-            </p:cNvPr>
-            <p:cNvPicPr>
-              <a:picLocks noChangeAspect="1"/>
-            </p:cNvPicPr>
-            <p:nvPr/>
-          </p:nvPicPr>
-          <p:blipFill>
-            <a:blip r:embed="rId2"/>
-            <a:stretch>
-              <a:fillRect/>
-            </a:stretch>
-          </p:blipFill>
-          <p:spPr>
-            <a:xfrm>
-              <a:off x="0" y="477052"/>
-              <a:ext cx="6858000" cy="1481993"/>
-            </a:xfrm>
-            <a:prstGeom prst="rect">
-              <a:avLst/>
-            </a:prstGeom>
-          </p:spPr>
-        </p:pic>
-      </p:grpSp>
-    </p:spTree>
-    <p:extLst>
-      <p:ext uri="{BB962C8B-B14F-4D97-AF65-F5344CB8AC3E}">
-        <p14:creationId xmlns:p14="http://schemas.microsoft.com/office/powerpoint/2010/main" val="721206451"/>
-      </p:ext>
-    </p:extLst>
-  </p:cSld>
-  <p:clrMapOvr>
-    <a:masterClrMapping/>
-  </p:clrMapOvr>
-</p:sld>
-</file>
-
-<file path=ppt/slides/slide4.xml><?xml version="1.0" encoding="utf-8"?>
-<p:sld xmlns:a="http://schemas.openxmlformats.org/drawingml/2006/main" xmlns:r="http://schemas.openxmlformats.org/officeDocument/2006/relationships" xmlns:p="http://schemas.openxmlformats.org/presentationml/2006/main">
-  <p:cSld>
-    <p:spTree>
-      <p:nvGrpSpPr>
-        <p:cNvPr id="1" name=""/>
-        <p:cNvGrpSpPr/>
-        <p:nvPr/>
-      </p:nvGrpSpPr>
-      <p:grpSpPr>
-        <a:xfrm>
-          <a:off x="0" y="0"/>
-          <a:ext cx="0" cy="0"/>
-          <a:chOff x="0" y="0"/>
-          <a:chExt cx="0" cy="0"/>
-        </a:xfrm>
-      </p:grpSpPr>
-      <p:sp>
-        <p:nvSpPr>
-          <p:cNvPr id="7" name="TextBox 6">
-            <a:extLst>
-              <a:ext uri="{FF2B5EF4-FFF2-40B4-BE49-F238E27FC236}">
-                <a16:creationId xmlns:a16="http://schemas.microsoft.com/office/drawing/2014/main" id="{70BF63CE-F965-1F09-9E2C-32374ED23334}"/>
-              </a:ext>
-            </a:extLst>
-          </p:cNvPr>
-          <p:cNvSpPr txBox="1"/>
-          <p:nvPr/>
-        </p:nvSpPr>
-        <p:spPr>
-          <a:xfrm>
-            <a:off x="-3" y="1743538"/>
-            <a:ext cx="10799763" cy="7395999"/>
-          </a:xfrm>
-          <a:prstGeom prst="rect">
-            <a:avLst/>
-          </a:prstGeom>
-          <a:noFill/>
-        </p:spPr>
-        <p:txBody>
-          <a:bodyPr wrap="square">
-            <a:spAutoFit/>
-          </a:bodyPr>
-          <a:lstStyle/>
-          <a:p>
-            <a:pPr>
-              <a:buNone/>
-            </a:pPr>
-            <a:r>
-              <a:rPr lang="en-US" altLang="ko-KR" sz="3651" b="1" dirty="0"/>
-              <a:t>2. </a:t>
-            </a:r>
-            <a:r>
-              <a:rPr lang="ko-KR" altLang="en-US" sz="3651" b="1" dirty="0"/>
-              <a:t>재고 </a:t>
-            </a:r>
-            <a:r>
-              <a:rPr lang="ko-KR" altLang="en-US" sz="3651" b="1" dirty="0" err="1"/>
-              <a:t>현황판</a:t>
-            </a:r>
-            <a:r>
-              <a:rPr lang="ko-KR" altLang="en-US" sz="3651" b="1" dirty="0"/>
-              <a:t> </a:t>
-            </a:r>
-            <a:r>
-              <a:rPr lang="en-US" altLang="ko-KR" sz="3651" b="1" dirty="0"/>
-              <a:t>(</a:t>
-            </a:r>
-            <a:r>
-              <a:rPr lang="ko-KR" altLang="en-US" sz="3651" b="1" dirty="0"/>
-              <a:t>조회 및 명세서 출력</a:t>
-            </a:r>
-            <a:r>
-              <a:rPr lang="en-US" altLang="ko-KR" sz="3651" b="1" dirty="0"/>
-              <a:t>)</a:t>
-            </a:r>
-          </a:p>
-          <a:p>
-            <a:pPr>
-              <a:buNone/>
-            </a:pPr>
-            <a:endParaRPr lang="en-US" altLang="ko-KR" sz="3651" b="1" dirty="0"/>
-          </a:p>
-          <a:p>
-            <a:pPr>
-              <a:buNone/>
-            </a:pPr>
-            <a:r>
-              <a:rPr lang="ko-KR" altLang="en-US" sz="3651" dirty="0"/>
-              <a:t>센터에 보유 중인 전체 자재의 실시간 재고량과 자산 금액을 확인할 수 있습니다</a:t>
-            </a:r>
-            <a:r>
-              <a:rPr lang="en-US" altLang="ko-KR" sz="3651" dirty="0"/>
-              <a:t>.</a:t>
-            </a:r>
-          </a:p>
-          <a:p>
-            <a:pPr>
-              <a:buNone/>
-            </a:pPr>
-            <a:endParaRPr lang="en-US" altLang="ko-KR" sz="3651" dirty="0"/>
-          </a:p>
-          <a:p>
-            <a:pPr>
-              <a:buNone/>
-            </a:pPr>
-            <a:r>
-              <a:rPr lang="ko-KR" altLang="en-US" sz="3651" b="1" dirty="0"/>
-              <a:t>① 통합 검색 및 필터링</a:t>
-            </a:r>
-            <a:endParaRPr lang="en-US" altLang="ko-KR" sz="3651" b="1" dirty="0"/>
-          </a:p>
-          <a:p>
-            <a:pPr>
-              <a:buNone/>
-            </a:pPr>
-            <a:endParaRPr lang="ko-KR" altLang="en-US" sz="3651" b="1" dirty="0"/>
-          </a:p>
-          <a:p>
-            <a:pPr>
-              <a:buFont typeface="Arial" panose="020B0604020202020204" pitchFamily="34" charset="0"/>
-              <a:buChar char="•"/>
-            </a:pPr>
-            <a:r>
-              <a:rPr lang="ko-KR" altLang="en-US" sz="3651" b="1" dirty="0"/>
-              <a:t>통합 검색</a:t>
-            </a:r>
-            <a:r>
-              <a:rPr lang="en-US" altLang="ko-KR" sz="3651" b="1" dirty="0"/>
-              <a:t>:</a:t>
-            </a:r>
-            <a:r>
-              <a:rPr lang="ko-KR" altLang="en-US" sz="3651" dirty="0"/>
-              <a:t> 검색창에 </a:t>
-            </a:r>
-            <a:r>
-              <a:rPr lang="ko-KR" altLang="en-US" sz="3651" b="1" dirty="0">
-                <a:highlight>
-                  <a:srgbClr val="CCFF33"/>
-                </a:highlight>
-              </a:rPr>
-              <a:t>품목코드</a:t>
-            </a:r>
-            <a:r>
-              <a:rPr lang="en-US" altLang="ko-KR" sz="3651" b="1" dirty="0">
-                <a:highlight>
-                  <a:srgbClr val="CCFF33"/>
-                </a:highlight>
-              </a:rPr>
-              <a:t>, </a:t>
-            </a:r>
-            <a:r>
-              <a:rPr lang="ko-KR" altLang="en-US" sz="3651" b="1" dirty="0">
-                <a:highlight>
-                  <a:srgbClr val="CCFF33"/>
-                </a:highlight>
-              </a:rPr>
-              <a:t>품명</a:t>
-            </a:r>
-            <a:r>
-              <a:rPr lang="en-US" altLang="ko-KR" sz="3651" b="1" dirty="0">
-                <a:highlight>
-                  <a:srgbClr val="CCFF33"/>
-                </a:highlight>
-              </a:rPr>
-              <a:t>, </a:t>
-            </a:r>
-            <a:r>
-              <a:rPr lang="ko-KR" altLang="en-US" sz="3651" b="1" dirty="0">
-                <a:highlight>
-                  <a:srgbClr val="CCFF33"/>
-                </a:highlight>
-              </a:rPr>
-              <a:t>상세번호</a:t>
-            </a:r>
-            <a:r>
-              <a:rPr lang="en-US" altLang="ko-KR" sz="3651" b="1" dirty="0">
-                <a:highlight>
-                  <a:srgbClr val="CCFF33"/>
-                </a:highlight>
-              </a:rPr>
-              <a:t>, </a:t>
-            </a:r>
-            <a:r>
-              <a:rPr lang="ko-KR" altLang="en-US" sz="3651" b="1" dirty="0">
-                <a:highlight>
-                  <a:srgbClr val="CCFF33"/>
-                </a:highlight>
-              </a:rPr>
-              <a:t>규격</a:t>
-            </a:r>
-            <a:r>
-              <a:rPr lang="en-US" altLang="ko-KR" sz="3651" b="1" dirty="0">
-                <a:highlight>
-                  <a:srgbClr val="CCFF33"/>
-                </a:highlight>
-              </a:rPr>
-              <a:t>/</a:t>
-            </a:r>
-            <a:r>
-              <a:rPr lang="ko-KR" altLang="en-US" sz="3651" b="1" dirty="0">
-                <a:highlight>
-                  <a:srgbClr val="CCFF33"/>
-                </a:highlight>
-              </a:rPr>
-              <a:t>모델</a:t>
-            </a:r>
-            <a:r>
-              <a:rPr lang="en-US" altLang="ko-KR" sz="3651" b="1" dirty="0">
-                <a:highlight>
-                  <a:srgbClr val="CCFF33"/>
-                </a:highlight>
-              </a:rPr>
-              <a:t>, </a:t>
-            </a:r>
-            <a:r>
-              <a:rPr lang="ko-KR" altLang="en-US" sz="3651" b="1" dirty="0">
-                <a:highlight>
-                  <a:srgbClr val="CCFF33"/>
-                </a:highlight>
-              </a:rPr>
-              <a:t>비고</a:t>
-            </a:r>
-            <a:r>
-              <a:rPr lang="ko-KR" altLang="en-US" sz="3651" dirty="0">
-                <a:highlight>
-                  <a:srgbClr val="CCFF33"/>
-                </a:highlight>
-              </a:rPr>
-              <a:t> </a:t>
-            </a:r>
-            <a:r>
-              <a:rPr lang="ko-KR" altLang="en-US" sz="3651" dirty="0"/>
-              <a:t>등을 입력하면 특수문자</a:t>
-            </a:r>
-            <a:r>
-              <a:rPr lang="en-US" altLang="ko-KR" sz="3651" dirty="0"/>
-              <a:t>/</a:t>
-            </a:r>
-            <a:r>
-              <a:rPr lang="ko-KR" altLang="en-US" sz="3651" dirty="0"/>
-              <a:t>괄호 구분 없이 즉시 조회됩니다</a:t>
-            </a:r>
-            <a:r>
-              <a:rPr lang="en-US" altLang="ko-KR" sz="3651" dirty="0"/>
-              <a:t>.</a:t>
-            </a:r>
-          </a:p>
-          <a:p>
-            <a:endParaRPr lang="en-US" altLang="ko-KR" sz="3651" dirty="0"/>
-          </a:p>
-          <a:p>
-            <a:pPr>
-              <a:buFont typeface="Arial" panose="020B0604020202020204" pitchFamily="34" charset="0"/>
-              <a:buChar char="•"/>
-            </a:pPr>
-            <a:r>
-              <a:rPr lang="ko-KR" altLang="en-US" sz="3651" b="1" dirty="0"/>
-              <a:t>상세 필터</a:t>
-            </a:r>
-            <a:r>
-              <a:rPr lang="en-US" altLang="ko-KR" sz="3651" b="1" dirty="0"/>
-              <a:t>:</a:t>
-            </a:r>
-            <a:r>
-              <a:rPr lang="ko-KR" altLang="en-US" sz="3651" dirty="0"/>
-              <a:t> 입고일</a:t>
-            </a:r>
-            <a:r>
-              <a:rPr lang="en-US" altLang="ko-KR" sz="3651" dirty="0"/>
-              <a:t>, </a:t>
-            </a:r>
-            <a:r>
-              <a:rPr lang="ko-KR" altLang="en-US" sz="3651" dirty="0"/>
-              <a:t>재고 수량 범주</a:t>
-            </a:r>
-            <a:r>
-              <a:rPr lang="en-US" altLang="ko-KR" sz="3651" dirty="0"/>
-              <a:t>, </a:t>
-            </a:r>
-            <a:r>
-              <a:rPr lang="ko-KR" altLang="en-US" sz="3651" dirty="0" err="1"/>
-              <a:t>기기명</a:t>
-            </a:r>
-            <a:r>
-              <a:rPr lang="en-US" altLang="ko-KR" sz="3651" dirty="0"/>
-              <a:t>, Maker, </a:t>
-            </a:r>
-            <a:r>
-              <a:rPr lang="ko-KR" altLang="en-US" sz="3651" dirty="0"/>
-              <a:t>대분류별로 원하는 조건만 선별해 볼 수 있습니다</a:t>
-            </a:r>
-            <a:r>
-              <a:rPr lang="en-US" altLang="ko-KR" sz="3651" dirty="0"/>
-              <a:t>.</a:t>
-            </a:r>
-          </a:p>
-        </p:txBody>
-      </p:sp>
-      <p:pic>
-        <p:nvPicPr>
-          <p:cNvPr id="9" name="그림 8">
-            <a:extLst>
-              <a:ext uri="{FF2B5EF4-FFF2-40B4-BE49-F238E27FC236}">
-                <a16:creationId xmlns:a16="http://schemas.microsoft.com/office/drawing/2014/main" id="{94A1C565-7B6C-1BB7-E3DB-94DB282DC67F}"/>
+                <a16:creationId xmlns:a16="http://schemas.microsoft.com/office/drawing/2014/main" id="{C25C6BC6-4958-DC7D-CAD2-A672AF4F9862}"/>
               </a:ext>
             </a:extLst>
           </p:cNvPr>
@@ -5885,8 +6040,8 @@
         </p:blipFill>
         <p:spPr>
           <a:xfrm>
-            <a:off x="-4" y="9422936"/>
-            <a:ext cx="10799763" cy="4403647"/>
+            <a:off x="0" y="993415"/>
+            <a:ext cx="9144000" cy="4871169"/>
           </a:xfrm>
           <a:prstGeom prst="rect">
             <a:avLst/>
@@ -5895,10 +6050,10 @@
       </p:pic>
       <p:sp>
         <p:nvSpPr>
-          <p:cNvPr id="10" name="직사각형 9">
+          <p:cNvPr id="6" name="말풍선: 사각형 5">
             <a:extLst>
               <a:ext uri="{FF2B5EF4-FFF2-40B4-BE49-F238E27FC236}">
-                <a16:creationId xmlns:a16="http://schemas.microsoft.com/office/drawing/2014/main" id="{0C5D1FC7-11BA-3013-B7F0-5351842AED47}"/>
+                <a16:creationId xmlns:a16="http://schemas.microsoft.com/office/drawing/2014/main" id="{7214CDBF-759B-1C60-9D0E-210F1944C295}"/>
               </a:ext>
             </a:extLst>
           </p:cNvPr>
@@ -5907,16 +6062,21 @@
         </p:nvSpPr>
         <p:spPr>
           <a:xfrm>
-            <a:off x="99995" y="10714779"/>
-            <a:ext cx="3059932" cy="1153760"/>
+            <a:off x="5728447" y="968189"/>
+            <a:ext cx="3334871" cy="950258"/>
           </a:xfrm>
-          <a:prstGeom prst="rect">
-            <a:avLst/>
+          <a:prstGeom prst="wedgeRectCallout">
+            <a:avLst>
+              <a:gd name="adj1" fmla="val -41753"/>
+              <a:gd name="adj2" fmla="val 88915"/>
+            </a:avLst>
           </a:prstGeom>
-          <a:noFill/>
-          <a:ln w="38100">
+          <a:solidFill>
+            <a:srgbClr val="99FF99"/>
+          </a:solidFill>
+          <a:ln>
             <a:solidFill>
-              <a:srgbClr val="CCFF33"/>
+              <a:srgbClr val="99FF99"/>
             </a:solidFill>
           </a:ln>
         </p:spPr>
@@ -5941,16 +6101,71 @@
           <a:lstStyle/>
           <a:p>
             <a:pPr algn="ctr"/>
-            <a:endParaRPr lang="ko-KR" altLang="en-US" sz="3651"/>
+            <a:r>
+              <a:rPr lang="ko-KR" altLang="en-US" sz="1400" dirty="0">
+                <a:solidFill>
+                  <a:schemeClr val="tx1"/>
+                </a:solidFill>
+              </a:rPr>
+              <a:t>아이디와 비밀번호를 입력하여 로그인 합니다</a:t>
+            </a:r>
+            <a:r>
+              <a:rPr lang="en-US" altLang="ko-KR" sz="1400" dirty="0">
+                <a:solidFill>
+                  <a:schemeClr val="tx1"/>
+                </a:solidFill>
+              </a:rPr>
+              <a:t>. </a:t>
+            </a:r>
+            <a:r>
+              <a:rPr lang="ko-KR" altLang="en-US" sz="1400" dirty="0">
+                <a:solidFill>
+                  <a:schemeClr val="tx1"/>
+                </a:solidFill>
+              </a:rPr>
+              <a:t>아이디와 비밀번호는 개인의 사번을 각각 입력합니다</a:t>
+            </a:r>
+            <a:r>
+              <a:rPr lang="en-US" altLang="ko-KR" sz="1400" dirty="0">
+                <a:solidFill>
+                  <a:schemeClr val="tx1"/>
+                </a:solidFill>
+              </a:rPr>
+              <a:t>.</a:t>
+            </a:r>
+          </a:p>
+          <a:p>
+            <a:pPr algn="ctr"/>
+            <a:r>
+              <a:rPr lang="ko-KR" altLang="en-US" sz="1400" dirty="0">
+                <a:solidFill>
+                  <a:schemeClr val="tx1"/>
+                </a:solidFill>
+              </a:rPr>
+              <a:t>게스트계정은 </a:t>
+            </a:r>
+            <a:r>
+              <a:rPr lang="en-US" altLang="ko-KR" sz="1400" dirty="0">
+                <a:solidFill>
+                  <a:schemeClr val="tx1"/>
+                </a:solidFill>
+              </a:rPr>
+              <a:t>"12345 / 12345”</a:t>
+            </a:r>
+            <a:endParaRPr lang="ko-KR" altLang="en-US" sz="1400" dirty="0">
+              <a:solidFill>
+                <a:schemeClr val="tx1"/>
+              </a:solidFill>
+            </a:endParaRPr>
           </a:p>
         </p:txBody>
       </p:sp>
       <p:sp>
         <p:nvSpPr>
-          <p:cNvPr id="11" name="직사각형 10">
+          <p:cNvPr id="7" name="말풍선: 사각형 6">
             <a:extLst>
               <a:ext uri="{FF2B5EF4-FFF2-40B4-BE49-F238E27FC236}">
-                <a16:creationId xmlns:a16="http://schemas.microsoft.com/office/drawing/2014/main" id="{7250C763-8F98-AD5C-A8C9-BDD344349513}"/>
+                <a16:creationId xmlns:a16="http://schemas.microsoft.com/office/drawing/2014/main" id="{9154AD24-9164-5406-116D-2B92073A15ED}"/>
               </a:ext>
             </a:extLst>
           </p:cNvPr>
@@ -5959,16 +6174,21 @@
         </p:nvSpPr>
         <p:spPr>
           <a:xfrm>
-            <a:off x="189992" y="13206594"/>
-            <a:ext cx="10529769" cy="619987"/>
+            <a:off x="5728446" y="3657600"/>
+            <a:ext cx="3334871" cy="950258"/>
           </a:xfrm>
-          <a:prstGeom prst="rect">
-            <a:avLst/>
+          <a:prstGeom prst="wedgeRectCallout">
+            <a:avLst>
+              <a:gd name="adj1" fmla="val -41753"/>
+              <a:gd name="adj2" fmla="val 88915"/>
+            </a:avLst>
           </a:prstGeom>
-          <a:noFill/>
-          <a:ln w="38100">
+          <a:solidFill>
+            <a:srgbClr val="99FF99"/>
+          </a:solidFill>
+          <a:ln>
             <a:solidFill>
-              <a:srgbClr val="CCFF33"/>
+              <a:srgbClr val="99FF99"/>
             </a:solidFill>
           </a:ln>
         </p:spPr>
@@ -5993,16 +6213,535 @@
           <a:lstStyle/>
           <a:p>
             <a:pPr algn="ctr"/>
-            <a:endParaRPr lang="ko-KR" altLang="en-US" sz="3651"/>
+            <a:r>
+              <a:rPr lang="ko-KR" altLang="en-US" sz="1400" dirty="0">
+                <a:solidFill>
+                  <a:schemeClr val="tx1"/>
+                </a:solidFill>
+              </a:rPr>
+              <a:t>매뉴얼을 다운로드 하거나</a:t>
+            </a:r>
+            <a:r>
+              <a:rPr lang="en-US" altLang="ko-KR" sz="1400" dirty="0">
+                <a:solidFill>
+                  <a:schemeClr val="tx1"/>
+                </a:solidFill>
+              </a:rPr>
+              <a:t>,</a:t>
+            </a:r>
+          </a:p>
+          <a:p>
+            <a:pPr algn="ctr"/>
+            <a:r>
+              <a:rPr lang="ko-KR" altLang="en-US" sz="1400" dirty="0">
+                <a:solidFill>
+                  <a:schemeClr val="tx1"/>
+                </a:solidFill>
+              </a:rPr>
+              <a:t>웹에서 바로 확인할 수 있습니다</a:t>
+            </a:r>
+            <a:r>
+              <a:rPr lang="en-US" altLang="ko-KR" sz="1400" dirty="0">
+                <a:solidFill>
+                  <a:schemeClr val="tx1"/>
+                </a:solidFill>
+              </a:rPr>
+              <a:t>.</a:t>
+            </a:r>
+            <a:endParaRPr lang="ko-KR" altLang="en-US" sz="1400" dirty="0">
+              <a:solidFill>
+                <a:schemeClr val="tx1"/>
+              </a:solidFill>
+            </a:endParaRPr>
           </a:p>
         </p:txBody>
       </p:sp>
+    </p:spTree>
+    <p:extLst>
+      <p:ext uri="{BB962C8B-B14F-4D97-AF65-F5344CB8AC3E}">
+        <p14:creationId xmlns:p14="http://schemas.microsoft.com/office/powerpoint/2010/main" val="2884254808"/>
+      </p:ext>
+    </p:extLst>
+  </p:cSld>
+  <p:clrMapOvr>
+    <a:masterClrMapping/>
+  </p:clrMapOvr>
+</p:sld>
+</file>
+
+<file path=ppt/slides/slide4.xml><?xml version="1.0" encoding="utf-8"?>
+<p:sld xmlns:a="http://schemas.openxmlformats.org/drawingml/2006/main" xmlns:r="http://schemas.openxmlformats.org/officeDocument/2006/relationships" xmlns:p="http://schemas.openxmlformats.org/presentationml/2006/main">
+  <p:cSld>
+    <p:spTree>
+      <p:nvGrpSpPr>
+        <p:cNvPr id="1" name="">
+          <a:extLst>
+            <a:ext uri="{FF2B5EF4-FFF2-40B4-BE49-F238E27FC236}">
+              <a16:creationId xmlns:a16="http://schemas.microsoft.com/office/drawing/2014/main" id="{F8BE1576-C908-B02C-A13E-40D075109E8F}"/>
+            </a:ext>
+          </a:extLst>
+        </p:cNvPr>
+        <p:cNvGrpSpPr/>
+        <p:nvPr/>
+      </p:nvGrpSpPr>
+      <p:grpSpPr>
+        <a:xfrm>
+          <a:off x="0" y="0"/>
+          <a:ext cx="0" cy="0"/>
+          <a:chOff x="0" y="0"/>
+          <a:chExt cx="0" cy="0"/>
+        </a:xfrm>
+      </p:grpSpPr>
       <p:pic>
         <p:nvPicPr>
-          <p:cNvPr id="18" name="그림 17">
+          <p:cNvPr id="2" name="그림 1">
             <a:extLst>
               <a:ext uri="{FF2B5EF4-FFF2-40B4-BE49-F238E27FC236}">
-                <a16:creationId xmlns:a16="http://schemas.microsoft.com/office/drawing/2014/main" id="{09AF947D-3B98-259E-2785-597639184A4F}"/>
+                <a16:creationId xmlns:a16="http://schemas.microsoft.com/office/drawing/2014/main" id="{0C8B9E64-BD82-287D-5094-11091B4B8122}"/>
+              </a:ext>
+            </a:extLst>
+          </p:cNvPr>
+          <p:cNvPicPr>
+            <a:picLocks noChangeAspect="1"/>
+          </p:cNvPicPr>
+          <p:nvPr/>
+        </p:nvPicPr>
+        <p:blipFill>
+          <a:blip r:embed="rId2"/>
+          <a:stretch>
+            <a:fillRect/>
+          </a:stretch>
+        </p:blipFill>
+        <p:spPr>
+          <a:xfrm>
+            <a:off x="1" y="0"/>
+            <a:ext cx="9144000" cy="1137268"/>
+          </a:xfrm>
+          <a:prstGeom prst="rect">
+            <a:avLst/>
+          </a:prstGeom>
+        </p:spPr>
+      </p:pic>
+      <p:sp>
+        <p:nvSpPr>
+          <p:cNvPr id="4" name="TextBox 3">
+            <a:extLst>
+              <a:ext uri="{FF2B5EF4-FFF2-40B4-BE49-F238E27FC236}">
+                <a16:creationId xmlns:a16="http://schemas.microsoft.com/office/drawing/2014/main" id="{E9E4B3FA-C748-2FD9-C066-B9997323AC9B}"/>
+              </a:ext>
+            </a:extLst>
+          </p:cNvPr>
+          <p:cNvSpPr txBox="1"/>
+          <p:nvPr/>
+        </p:nvSpPr>
+        <p:spPr>
+          <a:xfrm>
+            <a:off x="1" y="1137268"/>
+            <a:ext cx="9144000" cy="3477875"/>
+          </a:xfrm>
+          <a:prstGeom prst="rect">
+            <a:avLst/>
+          </a:prstGeom>
+          <a:noFill/>
+        </p:spPr>
+        <p:txBody>
+          <a:bodyPr wrap="square">
+            <a:spAutoFit/>
+          </a:bodyPr>
+          <a:lstStyle/>
+          <a:p>
+            <a:pPr>
+              <a:buNone/>
+            </a:pPr>
+            <a:r>
+              <a:rPr lang="en-US" altLang="ko-KR" sz="2000" b="1" dirty="0"/>
+              <a:t>2. </a:t>
+            </a:r>
+            <a:r>
+              <a:rPr lang="ko-KR" altLang="en-US" sz="2000" b="1" dirty="0"/>
+              <a:t>재고 </a:t>
+            </a:r>
+            <a:r>
+              <a:rPr lang="ko-KR" altLang="en-US" sz="2000" b="1" dirty="0" err="1"/>
+              <a:t>현황판</a:t>
+            </a:r>
+            <a:r>
+              <a:rPr lang="ko-KR" altLang="en-US" sz="2000" b="1" dirty="0"/>
+              <a:t> </a:t>
+            </a:r>
+            <a:r>
+              <a:rPr lang="en-US" altLang="ko-KR" sz="2000" b="1" dirty="0"/>
+              <a:t>(</a:t>
+            </a:r>
+            <a:r>
+              <a:rPr lang="ko-KR" altLang="en-US" sz="2000" b="1" dirty="0"/>
+              <a:t>조회 및 명세서 출력</a:t>
+            </a:r>
+            <a:r>
+              <a:rPr lang="en-US" altLang="ko-KR" sz="2000" b="1" dirty="0"/>
+              <a:t>)</a:t>
+            </a:r>
+          </a:p>
+          <a:p>
+            <a:pPr>
+              <a:buNone/>
+            </a:pPr>
+            <a:endParaRPr lang="en-US" altLang="ko-KR" sz="2000" b="1" dirty="0"/>
+          </a:p>
+          <a:p>
+            <a:pPr>
+              <a:buNone/>
+            </a:pPr>
+            <a:r>
+              <a:rPr lang="ko-KR" altLang="en-US" sz="2000" dirty="0"/>
+              <a:t>센터에 보유 중인 전체 자재의 실시간 재고량과 자산 금액을 확인할 수 있습니다</a:t>
+            </a:r>
+            <a:r>
+              <a:rPr lang="en-US" altLang="ko-KR" sz="2000" dirty="0"/>
+              <a:t>.</a:t>
+            </a:r>
+          </a:p>
+          <a:p>
+            <a:pPr>
+              <a:buNone/>
+            </a:pPr>
+            <a:endParaRPr lang="en-US" altLang="ko-KR" sz="2000" dirty="0"/>
+          </a:p>
+          <a:p>
+            <a:pPr>
+              <a:buNone/>
+            </a:pPr>
+            <a:r>
+              <a:rPr lang="ko-KR" altLang="en-US" sz="2000" b="1" dirty="0"/>
+              <a:t>① 통합 검색 및 필터링</a:t>
+            </a:r>
+            <a:endParaRPr lang="en-US" altLang="ko-KR" sz="2000" b="1" dirty="0"/>
+          </a:p>
+          <a:p>
+            <a:pPr>
+              <a:buNone/>
+            </a:pPr>
+            <a:endParaRPr lang="ko-KR" altLang="en-US" sz="2000" b="1" dirty="0"/>
+          </a:p>
+          <a:p>
+            <a:pPr>
+              <a:buFont typeface="Arial" panose="020B0604020202020204" pitchFamily="34" charset="0"/>
+              <a:buChar char="•"/>
+            </a:pPr>
+            <a:r>
+              <a:rPr lang="ko-KR" altLang="en-US" sz="2000" b="1" dirty="0"/>
+              <a:t>통합 검색</a:t>
+            </a:r>
+            <a:r>
+              <a:rPr lang="en-US" altLang="ko-KR" sz="2000" b="1" dirty="0"/>
+              <a:t>:</a:t>
+            </a:r>
+            <a:r>
+              <a:rPr lang="ko-KR" altLang="en-US" sz="2000" dirty="0"/>
+              <a:t> 검색창에 </a:t>
+            </a:r>
+            <a:r>
+              <a:rPr lang="ko-KR" altLang="en-US" sz="2000" b="1" dirty="0">
+                <a:highlight>
+                  <a:srgbClr val="CCFF33"/>
+                </a:highlight>
+              </a:rPr>
+              <a:t>품목코드</a:t>
+            </a:r>
+            <a:r>
+              <a:rPr lang="en-US" altLang="ko-KR" sz="2000" b="1" dirty="0">
+                <a:highlight>
+                  <a:srgbClr val="CCFF33"/>
+                </a:highlight>
+              </a:rPr>
+              <a:t>, </a:t>
+            </a:r>
+            <a:r>
+              <a:rPr lang="ko-KR" altLang="en-US" sz="2000" b="1" dirty="0">
+                <a:highlight>
+                  <a:srgbClr val="CCFF33"/>
+                </a:highlight>
+              </a:rPr>
+              <a:t>품명</a:t>
+            </a:r>
+            <a:r>
+              <a:rPr lang="en-US" altLang="ko-KR" sz="2000" b="1" dirty="0">
+                <a:highlight>
+                  <a:srgbClr val="CCFF33"/>
+                </a:highlight>
+              </a:rPr>
+              <a:t>, </a:t>
+            </a:r>
+            <a:r>
+              <a:rPr lang="ko-KR" altLang="en-US" sz="2000" b="1" dirty="0">
+                <a:highlight>
+                  <a:srgbClr val="CCFF33"/>
+                </a:highlight>
+              </a:rPr>
+              <a:t>상세번호</a:t>
+            </a:r>
+            <a:r>
+              <a:rPr lang="en-US" altLang="ko-KR" sz="2000" b="1" dirty="0">
+                <a:highlight>
+                  <a:srgbClr val="CCFF33"/>
+                </a:highlight>
+              </a:rPr>
+              <a:t>, </a:t>
+            </a:r>
+            <a:r>
+              <a:rPr lang="ko-KR" altLang="en-US" sz="2000" b="1" dirty="0">
+                <a:highlight>
+                  <a:srgbClr val="CCFF33"/>
+                </a:highlight>
+              </a:rPr>
+              <a:t>규격</a:t>
+            </a:r>
+            <a:r>
+              <a:rPr lang="en-US" altLang="ko-KR" sz="2000" b="1" dirty="0">
+                <a:highlight>
+                  <a:srgbClr val="CCFF33"/>
+                </a:highlight>
+              </a:rPr>
+              <a:t>/</a:t>
+            </a:r>
+            <a:r>
+              <a:rPr lang="ko-KR" altLang="en-US" sz="2000" b="1" dirty="0">
+                <a:highlight>
+                  <a:srgbClr val="CCFF33"/>
+                </a:highlight>
+              </a:rPr>
+              <a:t>모델</a:t>
+            </a:r>
+            <a:r>
+              <a:rPr lang="en-US" altLang="ko-KR" sz="2000" b="1" dirty="0">
+                <a:highlight>
+                  <a:srgbClr val="CCFF33"/>
+                </a:highlight>
+              </a:rPr>
+              <a:t>, </a:t>
+            </a:r>
+            <a:r>
+              <a:rPr lang="ko-KR" altLang="en-US" sz="2000" b="1" dirty="0">
+                <a:highlight>
+                  <a:srgbClr val="CCFF33"/>
+                </a:highlight>
+              </a:rPr>
+              <a:t>비고</a:t>
+            </a:r>
+            <a:r>
+              <a:rPr lang="ko-KR" altLang="en-US" sz="2000" dirty="0">
+                <a:highlight>
+                  <a:srgbClr val="CCFF33"/>
+                </a:highlight>
+              </a:rPr>
+              <a:t> </a:t>
+            </a:r>
+            <a:r>
+              <a:rPr lang="ko-KR" altLang="en-US" sz="2000" dirty="0"/>
+              <a:t>등을 입력하면 특수문자</a:t>
+            </a:r>
+            <a:r>
+              <a:rPr lang="en-US" altLang="ko-KR" sz="2000" dirty="0"/>
+              <a:t>/</a:t>
+            </a:r>
+            <a:r>
+              <a:rPr lang="ko-KR" altLang="en-US" sz="2000" dirty="0"/>
+              <a:t>괄호 구분 없이 즉시 조회됩니다</a:t>
+            </a:r>
+            <a:r>
+              <a:rPr lang="en-US" altLang="ko-KR" sz="2000" dirty="0"/>
+              <a:t>.</a:t>
+            </a:r>
+          </a:p>
+          <a:p>
+            <a:endParaRPr lang="en-US" altLang="ko-KR" sz="2000" dirty="0"/>
+          </a:p>
+          <a:p>
+            <a:pPr>
+              <a:buFont typeface="Arial" panose="020B0604020202020204" pitchFamily="34" charset="0"/>
+              <a:buChar char="•"/>
+            </a:pPr>
+            <a:r>
+              <a:rPr lang="ko-KR" altLang="en-US" sz="2000" b="1" dirty="0"/>
+              <a:t>상세 필터</a:t>
+            </a:r>
+            <a:r>
+              <a:rPr lang="en-US" altLang="ko-KR" sz="2000" b="1" dirty="0"/>
+              <a:t>:</a:t>
+            </a:r>
+            <a:r>
+              <a:rPr lang="ko-KR" altLang="en-US" sz="2000" dirty="0"/>
+              <a:t> 입고일</a:t>
+            </a:r>
+            <a:r>
+              <a:rPr lang="en-US" altLang="ko-KR" sz="2000" dirty="0"/>
+              <a:t>, </a:t>
+            </a:r>
+            <a:r>
+              <a:rPr lang="ko-KR" altLang="en-US" sz="2000" dirty="0"/>
+              <a:t>재고 수량 범주</a:t>
+            </a:r>
+            <a:r>
+              <a:rPr lang="en-US" altLang="ko-KR" sz="2000" dirty="0"/>
+              <a:t>, </a:t>
+            </a:r>
+            <a:r>
+              <a:rPr lang="ko-KR" altLang="en-US" sz="2000" dirty="0" err="1"/>
+              <a:t>기기명</a:t>
+            </a:r>
+            <a:r>
+              <a:rPr lang="en-US" altLang="ko-KR" sz="2000" dirty="0"/>
+              <a:t>, Maker, </a:t>
+            </a:r>
+            <a:r>
+              <a:rPr lang="ko-KR" altLang="en-US" sz="2000" dirty="0"/>
+              <a:t>대분류별로 원하는 조건만 선별해 볼 수 있습니다</a:t>
+            </a:r>
+            <a:r>
+              <a:rPr lang="en-US" altLang="ko-KR" sz="2000" dirty="0"/>
+              <a:t>.</a:t>
+            </a:r>
+          </a:p>
+        </p:txBody>
+      </p:sp>
+    </p:spTree>
+    <p:extLst>
+      <p:ext uri="{BB962C8B-B14F-4D97-AF65-F5344CB8AC3E}">
+        <p14:creationId xmlns:p14="http://schemas.microsoft.com/office/powerpoint/2010/main" val="81783185"/>
+      </p:ext>
+    </p:extLst>
+  </p:cSld>
+  <p:clrMapOvr>
+    <a:masterClrMapping/>
+  </p:clrMapOvr>
+</p:sld>
+</file>
+
+<file path=ppt/slides/slide5.xml><?xml version="1.0" encoding="utf-8"?>
+<p:sld xmlns:a="http://schemas.openxmlformats.org/drawingml/2006/main" xmlns:r="http://schemas.openxmlformats.org/officeDocument/2006/relationships" xmlns:p="http://schemas.openxmlformats.org/presentationml/2006/main">
+  <p:cSld>
+    <p:spTree>
+      <p:nvGrpSpPr>
+        <p:cNvPr id="1" name="">
+          <a:extLst>
+            <a:ext uri="{FF2B5EF4-FFF2-40B4-BE49-F238E27FC236}">
+              <a16:creationId xmlns:a16="http://schemas.microsoft.com/office/drawing/2014/main" id="{AC220C0C-E5DC-B81E-740E-26198D3E62BB}"/>
+            </a:ext>
+          </a:extLst>
+        </p:cNvPr>
+        <p:cNvGrpSpPr/>
+        <p:nvPr/>
+      </p:nvGrpSpPr>
+      <p:grpSpPr>
+        <a:xfrm>
+          <a:off x="0" y="0"/>
+          <a:ext cx="0" cy="0"/>
+          <a:chOff x="0" y="0"/>
+          <a:chExt cx="0" cy="0"/>
+        </a:xfrm>
+      </p:grpSpPr>
+      <p:pic>
+        <p:nvPicPr>
+          <p:cNvPr id="3" name="그림 2">
+            <a:extLst>
+              <a:ext uri="{FF2B5EF4-FFF2-40B4-BE49-F238E27FC236}">
+                <a16:creationId xmlns:a16="http://schemas.microsoft.com/office/drawing/2014/main" id="{4474ED34-618C-1E14-3F67-5B6247FB73D5}"/>
+              </a:ext>
+            </a:extLst>
+          </p:cNvPr>
+          <p:cNvPicPr>
+            <a:picLocks noChangeAspect="1"/>
+          </p:cNvPicPr>
+          <p:nvPr/>
+        </p:nvPicPr>
+        <p:blipFill>
+          <a:blip r:embed="rId2"/>
+          <a:stretch>
+            <a:fillRect/>
+          </a:stretch>
+        </p:blipFill>
+        <p:spPr>
+          <a:xfrm>
+            <a:off x="0" y="839874"/>
+            <a:ext cx="9144000" cy="5178251"/>
+          </a:xfrm>
+          <a:prstGeom prst="rect">
+            <a:avLst/>
+          </a:prstGeom>
+        </p:spPr>
+      </p:pic>
+    </p:spTree>
+    <p:extLst>
+      <p:ext uri="{BB962C8B-B14F-4D97-AF65-F5344CB8AC3E}">
+        <p14:creationId xmlns:p14="http://schemas.microsoft.com/office/powerpoint/2010/main" val="715143422"/>
+      </p:ext>
+    </p:extLst>
+  </p:cSld>
+  <p:clrMapOvr>
+    <a:masterClrMapping/>
+  </p:clrMapOvr>
+</p:sld>
+</file>
+
+<file path=ppt/slides/slide6.xml><?xml version="1.0" encoding="utf-8"?>
+<p:sld xmlns:a="http://schemas.openxmlformats.org/drawingml/2006/main" xmlns:r="http://schemas.openxmlformats.org/officeDocument/2006/relationships" xmlns:p="http://schemas.openxmlformats.org/presentationml/2006/main">
+  <p:cSld>
+    <p:spTree>
+      <p:nvGrpSpPr>
+        <p:cNvPr id="1" name="">
+          <a:extLst>
+            <a:ext uri="{FF2B5EF4-FFF2-40B4-BE49-F238E27FC236}">
+              <a16:creationId xmlns:a16="http://schemas.microsoft.com/office/drawing/2014/main" id="{D6104227-3CE8-6568-87E1-50AD4191A991}"/>
+            </a:ext>
+          </a:extLst>
+        </p:cNvPr>
+        <p:cNvGrpSpPr/>
+        <p:nvPr/>
+      </p:nvGrpSpPr>
+      <p:grpSpPr>
+        <a:xfrm>
+          <a:off x="0" y="0"/>
+          <a:ext cx="0" cy="0"/>
+          <a:chOff x="0" y="0"/>
+          <a:chExt cx="0" cy="0"/>
+        </a:xfrm>
+      </p:grpSpPr>
+      <p:pic>
+        <p:nvPicPr>
+          <p:cNvPr id="2" name="그림 1">
+            <a:extLst>
+              <a:ext uri="{FF2B5EF4-FFF2-40B4-BE49-F238E27FC236}">
+                <a16:creationId xmlns:a16="http://schemas.microsoft.com/office/drawing/2014/main" id="{1293AA68-67B6-181E-B875-E6C6985313BE}"/>
+              </a:ext>
+            </a:extLst>
+          </p:cNvPr>
+          <p:cNvPicPr>
+            <a:picLocks noChangeAspect="1"/>
+          </p:cNvPicPr>
+          <p:nvPr/>
+        </p:nvPicPr>
+        <p:blipFill>
+          <a:blip r:embed="rId2"/>
+          <a:stretch>
+            <a:fillRect/>
+          </a:stretch>
+        </p:blipFill>
+        <p:spPr>
+          <a:xfrm>
+            <a:off x="-1" y="0"/>
+            <a:ext cx="9144001" cy="1137268"/>
+          </a:xfrm>
+          <a:prstGeom prst="rect">
+            <a:avLst/>
+          </a:prstGeom>
+        </p:spPr>
+      </p:pic>
+      <p:pic>
+        <p:nvPicPr>
+          <p:cNvPr id="4" name="그림 3">
+            <a:extLst>
+              <a:ext uri="{FF2B5EF4-FFF2-40B4-BE49-F238E27FC236}">
+                <a16:creationId xmlns:a16="http://schemas.microsoft.com/office/drawing/2014/main" id="{8B90CC01-59FF-AD05-3B74-CC5754D8F8A3}"/>
               </a:ext>
             </a:extLst>
           </p:cNvPr>
@@ -6019,18 +6758,420 @@
         </p:blipFill>
         <p:spPr>
           <a:xfrm>
-            <a:off x="-2" y="116939"/>
-            <a:ext cx="10799763" cy="1343200"/>
+            <a:off x="-1" y="1377385"/>
+            <a:ext cx="9144001" cy="1270180"/>
           </a:xfrm>
           <a:prstGeom prst="rect">
             <a:avLst/>
           </a:prstGeom>
         </p:spPr>
       </p:pic>
+      <p:sp>
+        <p:nvSpPr>
+          <p:cNvPr id="5" name="TextBox 4">
+            <a:extLst>
+              <a:ext uri="{FF2B5EF4-FFF2-40B4-BE49-F238E27FC236}">
+                <a16:creationId xmlns:a16="http://schemas.microsoft.com/office/drawing/2014/main" id="{5BD2305C-B018-FFD2-BE0B-DB3BC41AD635}"/>
+              </a:ext>
+            </a:extLst>
+          </p:cNvPr>
+          <p:cNvSpPr txBox="1"/>
+          <p:nvPr/>
+        </p:nvSpPr>
+        <p:spPr>
+          <a:xfrm>
+            <a:off x="0" y="2887682"/>
+            <a:ext cx="9144001" cy="3970318"/>
+          </a:xfrm>
+          <a:prstGeom prst="rect">
+            <a:avLst/>
+          </a:prstGeom>
+          <a:noFill/>
+        </p:spPr>
+        <p:txBody>
+          <a:bodyPr wrap="square">
+            <a:spAutoFit/>
+          </a:bodyPr>
+          <a:lstStyle/>
+          <a:p>
+            <a:pPr>
+              <a:buFont typeface="Arial" panose="020B0604020202020204" pitchFamily="34" charset="0"/>
+              <a:buChar char="•"/>
+            </a:pPr>
+            <a:r>
+              <a:rPr lang="en-US" altLang="ko-KR" dirty="0"/>
+              <a:t> </a:t>
+            </a:r>
+            <a:r>
+              <a:rPr lang="ko-KR" altLang="en-US" b="1" dirty="0">
+                <a:highlight>
+                  <a:srgbClr val="CCFF33"/>
+                </a:highlight>
+              </a:rPr>
+              <a:t>품목코드</a:t>
+            </a:r>
+            <a:r>
+              <a:rPr lang="ko-KR" altLang="en-US" dirty="0"/>
+              <a:t> </a:t>
+            </a:r>
+            <a:r>
+              <a:rPr lang="en-US" altLang="ko-KR" dirty="0"/>
+              <a:t>: </a:t>
+            </a:r>
+            <a:r>
+              <a:rPr lang="ko-KR" altLang="en-US" dirty="0"/>
+              <a:t>품목코드는 각 품목에 부여된 </a:t>
+            </a:r>
+            <a:r>
+              <a:rPr lang="ko-KR" altLang="en-US" dirty="0">
+                <a:highlight>
+                  <a:srgbClr val="CCFF33"/>
+                </a:highlight>
+              </a:rPr>
+              <a:t>개별 </a:t>
+            </a:r>
+            <a:r>
+              <a:rPr lang="en-US" altLang="ko-KR" dirty="0">
+                <a:highlight>
+                  <a:srgbClr val="CCFF33"/>
+                </a:highlight>
+              </a:rPr>
+              <a:t>ID </a:t>
+            </a:r>
+            <a:r>
+              <a:rPr lang="ko-KR" altLang="en-US" dirty="0"/>
+              <a:t>입니다</a:t>
+            </a:r>
+            <a:r>
+              <a:rPr lang="en-US" altLang="ko-KR" dirty="0"/>
+              <a:t>. </a:t>
+            </a:r>
+            <a:r>
+              <a:rPr lang="ko-KR" altLang="en-US" dirty="0"/>
+              <a:t>중복이 없는 데이터이기에</a:t>
+            </a:r>
+            <a:r>
+              <a:rPr lang="en-US" altLang="ko-KR" dirty="0"/>
+              <a:t>, </a:t>
+            </a:r>
+            <a:r>
+              <a:rPr lang="ko-KR" altLang="en-US" dirty="0" err="1"/>
+              <a:t>검색값이</a:t>
+            </a:r>
+            <a:r>
+              <a:rPr lang="ko-KR" altLang="en-US" dirty="0"/>
+              <a:t> </a:t>
+            </a:r>
+            <a:r>
+              <a:rPr lang="ko-KR" altLang="en-US" dirty="0">
+                <a:highlight>
+                  <a:srgbClr val="CCFF33"/>
+                </a:highlight>
+              </a:rPr>
+              <a:t>가장 정확</a:t>
+            </a:r>
+            <a:r>
+              <a:rPr lang="ko-KR" altLang="en-US" dirty="0"/>
+              <a:t>합니다</a:t>
+            </a:r>
+            <a:r>
+              <a:rPr lang="en-US" altLang="ko-KR" dirty="0"/>
+              <a:t>. </a:t>
+            </a:r>
+            <a:r>
+              <a:rPr lang="ko-KR" altLang="en-US" dirty="0"/>
+              <a:t>트러스트에 전달한 자료에도 품목코드가 부여된 자료를 전달하여</a:t>
+            </a:r>
+            <a:r>
+              <a:rPr lang="en-US" altLang="ko-KR" dirty="0"/>
+              <a:t>, </a:t>
+            </a:r>
+            <a:r>
+              <a:rPr lang="ko-KR" altLang="en-US" dirty="0"/>
+              <a:t>추후 반출요청시 품목코드를 활용하여 품목을 찾으시는 것을 </a:t>
+            </a:r>
+            <a:r>
+              <a:rPr lang="ko-KR" altLang="en-US" dirty="0" err="1"/>
+              <a:t>추천드립니다</a:t>
+            </a:r>
+            <a:r>
+              <a:rPr lang="en-US" altLang="ko-KR" dirty="0"/>
+              <a:t>. </a:t>
+            </a:r>
+            <a:r>
+              <a:rPr lang="ko-KR" altLang="en-US" dirty="0" err="1"/>
+              <a:t>검색시</a:t>
+            </a:r>
+            <a:r>
+              <a:rPr lang="ko-KR" altLang="en-US" dirty="0"/>
+              <a:t> </a:t>
+            </a:r>
+            <a:r>
+              <a:rPr lang="ko-KR" altLang="en-US" dirty="0">
+                <a:highlight>
+                  <a:srgbClr val="CCFF33"/>
+                </a:highlight>
+              </a:rPr>
+              <a:t>숫자 </a:t>
+            </a:r>
+            <a:r>
+              <a:rPr lang="en-US" altLang="ko-KR" dirty="0">
+                <a:highlight>
+                  <a:srgbClr val="CCFF33"/>
+                </a:highlight>
+              </a:rPr>
+              <a:t>5</a:t>
+            </a:r>
+            <a:r>
+              <a:rPr lang="ko-KR" altLang="en-US" dirty="0">
+                <a:highlight>
+                  <a:srgbClr val="CCFF33"/>
+                </a:highlight>
+              </a:rPr>
+              <a:t>자리 전부 입력</a:t>
+            </a:r>
+            <a:r>
+              <a:rPr lang="ko-KR" altLang="en-US" dirty="0"/>
+              <a:t>하여 검색하는 것이 좋습니다</a:t>
+            </a:r>
+            <a:r>
+              <a:rPr lang="en-US" altLang="ko-KR" dirty="0"/>
+              <a:t>.</a:t>
+            </a:r>
+          </a:p>
+          <a:p>
+            <a:pPr>
+              <a:buFont typeface="Arial" panose="020B0604020202020204" pitchFamily="34" charset="0"/>
+              <a:buChar char="•"/>
+            </a:pPr>
+            <a:endParaRPr lang="en-US" altLang="ko-KR" dirty="0"/>
+          </a:p>
+          <a:p>
+            <a:pPr>
+              <a:buFont typeface="Arial" panose="020B0604020202020204" pitchFamily="34" charset="0"/>
+              <a:buChar char="•"/>
+            </a:pPr>
+            <a:r>
+              <a:rPr lang="ko-KR" altLang="en-US" dirty="0"/>
+              <a:t> </a:t>
+            </a:r>
+            <a:r>
+              <a:rPr lang="ko-KR" altLang="en-US" b="1" dirty="0"/>
+              <a:t>품명</a:t>
+            </a:r>
+            <a:r>
+              <a:rPr lang="ko-KR" altLang="en-US" dirty="0"/>
+              <a:t> </a:t>
+            </a:r>
+            <a:r>
+              <a:rPr lang="en-US" altLang="ko-KR" dirty="0"/>
+              <a:t>: </a:t>
+            </a:r>
+            <a:r>
+              <a:rPr lang="ko-KR" altLang="en-US" dirty="0"/>
+              <a:t>품목의 명칭입니다</a:t>
+            </a:r>
+            <a:r>
+              <a:rPr lang="en-US" altLang="ko-KR" dirty="0"/>
+              <a:t>. </a:t>
+            </a:r>
+            <a:r>
+              <a:rPr lang="ko-KR" altLang="en-US" dirty="0" err="1"/>
+              <a:t>검색시</a:t>
+            </a:r>
+            <a:r>
+              <a:rPr lang="ko-KR" altLang="en-US" dirty="0"/>
+              <a:t> 대</a:t>
+            </a:r>
+            <a:r>
+              <a:rPr lang="en-US" altLang="ko-KR" dirty="0">
+                <a:latin typeface="굴림" panose="020B0600000101010101" pitchFamily="50" charset="-127"/>
+                <a:ea typeface="굴림" panose="020B0600000101010101" pitchFamily="50" charset="-127"/>
+              </a:rPr>
+              <a:t>·</a:t>
+            </a:r>
+            <a:r>
+              <a:rPr lang="ko-KR" altLang="en-US" dirty="0"/>
+              <a:t>소문자는 구분하지 않습니다</a:t>
+            </a:r>
+            <a:r>
+              <a:rPr lang="en-US" altLang="ko-KR" dirty="0"/>
+              <a:t>.</a:t>
+            </a:r>
+          </a:p>
+          <a:p>
+            <a:pPr>
+              <a:buFont typeface="Arial" panose="020B0604020202020204" pitchFamily="34" charset="0"/>
+              <a:buChar char="•"/>
+            </a:pPr>
+            <a:endParaRPr lang="en-US" altLang="ko-KR" dirty="0"/>
+          </a:p>
+          <a:p>
+            <a:pPr>
+              <a:buFont typeface="Arial" panose="020B0604020202020204" pitchFamily="34" charset="0"/>
+              <a:buChar char="•"/>
+            </a:pPr>
+            <a:r>
+              <a:rPr lang="en-US" altLang="ko-KR" dirty="0"/>
+              <a:t> </a:t>
+            </a:r>
+            <a:r>
+              <a:rPr lang="ko-KR" altLang="en-US" b="1" dirty="0">
+                <a:highlight>
+                  <a:srgbClr val="CCFF33"/>
+                </a:highlight>
+              </a:rPr>
+              <a:t>상세번호</a:t>
+            </a:r>
+            <a:r>
+              <a:rPr lang="ko-KR" altLang="en-US" dirty="0"/>
+              <a:t> </a:t>
+            </a:r>
+            <a:r>
+              <a:rPr lang="en-US" altLang="ko-KR" dirty="0"/>
+              <a:t>: </a:t>
+            </a:r>
+            <a:r>
+              <a:rPr lang="ko-KR" altLang="en-US" dirty="0" err="1"/>
+              <a:t>제조사측에서</a:t>
+            </a:r>
+            <a:r>
+              <a:rPr lang="ko-KR" altLang="en-US" dirty="0"/>
+              <a:t> 품목에 부여한 고유번호 입니다</a:t>
+            </a:r>
+            <a:r>
+              <a:rPr lang="en-US" altLang="ko-KR" dirty="0"/>
+              <a:t>. </a:t>
+            </a:r>
+            <a:r>
+              <a:rPr lang="ko-KR" altLang="en-US" dirty="0"/>
+              <a:t>같은 제품일지라도 제조국에 따라 상세번호가 다른 등 변수가 있을 수 있습니다</a:t>
+            </a:r>
+            <a:r>
+              <a:rPr lang="en-US" altLang="ko-KR" dirty="0"/>
+              <a:t>.</a:t>
+            </a:r>
+          </a:p>
+          <a:p>
+            <a:pPr>
+              <a:buFont typeface="Arial" panose="020B0604020202020204" pitchFamily="34" charset="0"/>
+              <a:buChar char="•"/>
+            </a:pPr>
+            <a:endParaRPr lang="en-US" altLang="ko-KR" dirty="0"/>
+          </a:p>
+          <a:p>
+            <a:pPr>
+              <a:buFont typeface="Arial" panose="020B0604020202020204" pitchFamily="34" charset="0"/>
+              <a:buChar char="•"/>
+            </a:pPr>
+            <a:r>
+              <a:rPr lang="en-US" altLang="ko-KR" dirty="0"/>
+              <a:t> </a:t>
+            </a:r>
+            <a:r>
+              <a:rPr lang="ko-KR" altLang="en-US" b="1" dirty="0">
+                <a:highlight>
+                  <a:srgbClr val="CCFF33"/>
+                </a:highlight>
+              </a:rPr>
+              <a:t>규격</a:t>
+            </a:r>
+            <a:r>
+              <a:rPr lang="en-US" altLang="ko-KR" b="1" dirty="0">
+                <a:highlight>
+                  <a:srgbClr val="CCFF33"/>
+                </a:highlight>
+              </a:rPr>
+              <a:t>/</a:t>
+            </a:r>
+            <a:r>
+              <a:rPr lang="ko-KR" altLang="en-US" b="1" dirty="0">
+                <a:highlight>
+                  <a:srgbClr val="CCFF33"/>
+                </a:highlight>
+              </a:rPr>
+              <a:t>모델</a:t>
+            </a:r>
+            <a:r>
+              <a:rPr lang="ko-KR" altLang="en-US" dirty="0"/>
+              <a:t> </a:t>
+            </a:r>
+            <a:r>
+              <a:rPr lang="en-US" altLang="ko-KR" dirty="0"/>
+              <a:t>: </a:t>
+            </a:r>
+            <a:r>
+              <a:rPr lang="ko-KR" altLang="en-US" dirty="0"/>
+              <a:t>상품별 규격 혹은 모델명을 입력한 데이터 입니다</a:t>
+            </a:r>
+            <a:r>
+              <a:rPr lang="en-US" altLang="ko-KR" dirty="0"/>
+              <a:t>. </a:t>
+            </a:r>
+            <a:r>
+              <a:rPr lang="ko-KR" altLang="en-US" dirty="0" err="1"/>
+              <a:t>검색시</a:t>
+            </a:r>
+            <a:r>
+              <a:rPr lang="ko-KR" altLang="en-US" dirty="0"/>
+              <a:t> 특수문자로 인해 정확한 검색결과를 얻지 못할 수 있습니다</a:t>
+            </a:r>
+            <a:r>
+              <a:rPr lang="en-US" altLang="ko-KR" dirty="0"/>
+              <a:t>.</a:t>
+            </a:r>
+          </a:p>
+          <a:p>
+            <a:pPr>
+              <a:buFont typeface="Arial" panose="020B0604020202020204" pitchFamily="34" charset="0"/>
+              <a:buChar char="•"/>
+            </a:pPr>
+            <a:endParaRPr lang="en-US" altLang="ko-KR" dirty="0"/>
+          </a:p>
+          <a:p>
+            <a:pPr>
+              <a:buFont typeface="Arial" panose="020B0604020202020204" pitchFamily="34" charset="0"/>
+              <a:buChar char="•"/>
+            </a:pPr>
+            <a:r>
+              <a:rPr lang="en-US" altLang="ko-KR" dirty="0"/>
+              <a:t> </a:t>
+            </a:r>
+            <a:r>
+              <a:rPr lang="ko-KR" altLang="en-US" b="1" dirty="0"/>
+              <a:t>구분</a:t>
+            </a:r>
+            <a:r>
+              <a:rPr lang="ko-KR" altLang="en-US" dirty="0"/>
+              <a:t> </a:t>
+            </a:r>
+            <a:r>
+              <a:rPr lang="en-US" altLang="ko-KR" dirty="0"/>
+              <a:t>: </a:t>
+            </a:r>
+            <a:r>
+              <a:rPr lang="ko-KR" altLang="en-US" dirty="0"/>
+              <a:t>상품 </a:t>
+            </a:r>
+            <a:r>
+              <a:rPr lang="ko-KR" altLang="en-US" dirty="0" err="1"/>
+              <a:t>입고시</a:t>
+            </a:r>
+            <a:r>
+              <a:rPr lang="ko-KR" altLang="en-US" dirty="0"/>
+              <a:t> 구분을 위해 부여하는 임시 번호 입니다</a:t>
+            </a:r>
+            <a:r>
+              <a:rPr lang="en-US" altLang="ko-KR" dirty="0"/>
+              <a:t>.</a:t>
+            </a:r>
+          </a:p>
+        </p:txBody>
+      </p:sp>
     </p:spTree>
     <p:extLst>
       <p:ext uri="{BB962C8B-B14F-4D97-AF65-F5344CB8AC3E}">
-        <p14:creationId xmlns:p14="http://schemas.microsoft.com/office/powerpoint/2010/main" val="4096258251"/>
+        <p14:creationId xmlns:p14="http://schemas.microsoft.com/office/powerpoint/2010/main" val="3079066006"/>
       </p:ext>
     </p:extLst>
   </p:cSld>
@@ -6040,12 +7181,18 @@
 </p:sld>
 </file>
 
-<file path=ppt/slides/slide5.xml><?xml version="1.0" encoding="utf-8"?>
+<file path=ppt/slides/slide7.xml><?xml version="1.0" encoding="utf-8"?>
 <p:sld xmlns:a="http://schemas.openxmlformats.org/drawingml/2006/main" xmlns:r="http://schemas.openxmlformats.org/officeDocument/2006/relationships" xmlns:p="http://schemas.openxmlformats.org/presentationml/2006/main">
   <p:cSld>
     <p:spTree>
       <p:nvGrpSpPr>
-        <p:cNvPr id="1" name=""/>
+        <p:cNvPr id="1" name="">
+          <a:extLst>
+            <a:ext uri="{FF2B5EF4-FFF2-40B4-BE49-F238E27FC236}">
+              <a16:creationId xmlns:a16="http://schemas.microsoft.com/office/drawing/2014/main" id="{6FA49142-B431-AE8B-D3BB-146F242436DF}"/>
+            </a:ext>
+          </a:extLst>
+        </p:cNvPr>
         <p:cNvGrpSpPr/>
         <p:nvPr/>
       </p:nvGrpSpPr>
@@ -6057,414 +7204,12 @@
           <a:chExt cx="0" cy="0"/>
         </a:xfrm>
       </p:grpSpPr>
-      <p:sp>
-        <p:nvSpPr>
-          <p:cNvPr id="4" name="TextBox 3">
+      <p:pic>
+        <p:nvPicPr>
+          <p:cNvPr id="2" name="그림 1">
             <a:extLst>
               <a:ext uri="{FF2B5EF4-FFF2-40B4-BE49-F238E27FC236}">
-                <a16:creationId xmlns:a16="http://schemas.microsoft.com/office/drawing/2014/main" id="{29EC6B2F-7503-48F5-433E-B43AEB99909A}"/>
-              </a:ext>
-            </a:extLst>
-          </p:cNvPr>
-          <p:cNvSpPr txBox="1"/>
-          <p:nvPr/>
-        </p:nvSpPr>
-        <p:spPr>
-          <a:xfrm>
-            <a:off x="-1" y="2618723"/>
-            <a:ext cx="10799763" cy="11890563"/>
-          </a:xfrm>
-          <a:prstGeom prst="rect">
-            <a:avLst/>
-          </a:prstGeom>
-          <a:noFill/>
-        </p:spPr>
-        <p:txBody>
-          <a:bodyPr wrap="square">
-            <a:spAutoFit/>
-          </a:bodyPr>
-          <a:lstStyle/>
-          <a:p>
-            <a:pPr>
-              <a:buFont typeface="Arial" panose="020B0604020202020204" pitchFamily="34" charset="0"/>
-              <a:buChar char="•"/>
-            </a:pPr>
-            <a:r>
-              <a:rPr lang="en-US" altLang="ko-KR" sz="3651" dirty="0"/>
-              <a:t> </a:t>
-            </a:r>
-            <a:r>
-              <a:rPr lang="ko-KR" altLang="en-US" sz="3651" b="1" dirty="0">
-                <a:highlight>
-                  <a:srgbClr val="CCFF33"/>
-                </a:highlight>
-              </a:rPr>
-              <a:t>품목코드</a:t>
-            </a:r>
-            <a:r>
-              <a:rPr lang="ko-KR" altLang="en-US" sz="3651" dirty="0"/>
-              <a:t> </a:t>
-            </a:r>
-            <a:r>
-              <a:rPr lang="en-US" altLang="ko-KR" sz="3651" dirty="0"/>
-              <a:t>: </a:t>
-            </a:r>
-            <a:r>
-              <a:rPr lang="ko-KR" altLang="en-US" sz="3651" dirty="0"/>
-              <a:t>품목코드는 각 품목에 부여된 </a:t>
-            </a:r>
-            <a:r>
-              <a:rPr lang="ko-KR" altLang="en-US" sz="3651" dirty="0">
-                <a:highlight>
-                  <a:srgbClr val="CCFF33"/>
-                </a:highlight>
-              </a:rPr>
-              <a:t>개별 </a:t>
-            </a:r>
-            <a:r>
-              <a:rPr lang="en-US" altLang="ko-KR" sz="3651" dirty="0">
-                <a:highlight>
-                  <a:srgbClr val="CCFF33"/>
-                </a:highlight>
-              </a:rPr>
-              <a:t>ID </a:t>
-            </a:r>
-            <a:r>
-              <a:rPr lang="ko-KR" altLang="en-US" sz="3651" dirty="0"/>
-              <a:t>입니다</a:t>
-            </a:r>
-            <a:r>
-              <a:rPr lang="en-US" altLang="ko-KR" sz="3651" dirty="0"/>
-              <a:t>. </a:t>
-            </a:r>
-            <a:r>
-              <a:rPr lang="ko-KR" altLang="en-US" sz="3651" dirty="0"/>
-              <a:t>중복이 없는 데이터이기에</a:t>
-            </a:r>
-            <a:r>
-              <a:rPr lang="en-US" altLang="ko-KR" sz="3651" dirty="0"/>
-              <a:t>, </a:t>
-            </a:r>
-            <a:r>
-              <a:rPr lang="ko-KR" altLang="en-US" sz="3651" dirty="0" err="1"/>
-              <a:t>검색값이</a:t>
-            </a:r>
-            <a:r>
-              <a:rPr lang="ko-KR" altLang="en-US" sz="3651" dirty="0"/>
-              <a:t> </a:t>
-            </a:r>
-            <a:r>
-              <a:rPr lang="ko-KR" altLang="en-US" sz="3651" dirty="0">
-                <a:highlight>
-                  <a:srgbClr val="CCFF33"/>
-                </a:highlight>
-              </a:rPr>
-              <a:t>가장 정확</a:t>
-            </a:r>
-            <a:r>
-              <a:rPr lang="ko-KR" altLang="en-US" sz="3651" dirty="0"/>
-              <a:t>합니다</a:t>
-            </a:r>
-            <a:r>
-              <a:rPr lang="en-US" altLang="ko-KR" sz="3651" dirty="0"/>
-              <a:t>. </a:t>
-            </a:r>
-            <a:r>
-              <a:rPr lang="ko-KR" altLang="en-US" sz="3651" dirty="0"/>
-              <a:t>트러스트에 전달한 자료에도 품목코드가 부여된 자료를 전달하여</a:t>
-            </a:r>
-            <a:r>
-              <a:rPr lang="en-US" altLang="ko-KR" sz="3651" dirty="0"/>
-              <a:t>, </a:t>
-            </a:r>
-            <a:r>
-              <a:rPr lang="ko-KR" altLang="en-US" sz="3651" dirty="0"/>
-              <a:t>추후 반출요청시 품목코드를 활용하여 품목을 찾으시는 것을 </a:t>
-            </a:r>
-            <a:r>
-              <a:rPr lang="ko-KR" altLang="en-US" sz="3651" dirty="0" err="1"/>
-              <a:t>추천드립니다</a:t>
-            </a:r>
-            <a:r>
-              <a:rPr lang="en-US" altLang="ko-KR" sz="3651" dirty="0"/>
-              <a:t>. </a:t>
-            </a:r>
-            <a:r>
-              <a:rPr lang="ko-KR" altLang="en-US" sz="3651" dirty="0" err="1"/>
-              <a:t>검색시</a:t>
-            </a:r>
-            <a:r>
-              <a:rPr lang="ko-KR" altLang="en-US" sz="3651" dirty="0"/>
-              <a:t> </a:t>
-            </a:r>
-            <a:r>
-              <a:rPr lang="ko-KR" altLang="en-US" sz="3651" dirty="0">
-                <a:highlight>
-                  <a:srgbClr val="CCFF33"/>
-                </a:highlight>
-              </a:rPr>
-              <a:t>숫자 </a:t>
-            </a:r>
-            <a:r>
-              <a:rPr lang="en-US" altLang="ko-KR" sz="3651" dirty="0">
-                <a:highlight>
-                  <a:srgbClr val="CCFF33"/>
-                </a:highlight>
-              </a:rPr>
-              <a:t>5</a:t>
-            </a:r>
-            <a:r>
-              <a:rPr lang="ko-KR" altLang="en-US" sz="3651" dirty="0">
-                <a:highlight>
-                  <a:srgbClr val="CCFF33"/>
-                </a:highlight>
-              </a:rPr>
-              <a:t>자리 전부 입력</a:t>
-            </a:r>
-            <a:r>
-              <a:rPr lang="ko-KR" altLang="en-US" sz="3651" dirty="0"/>
-              <a:t>하여 검색하는 것이 좋습니다</a:t>
-            </a:r>
-            <a:r>
-              <a:rPr lang="en-US" altLang="ko-KR" sz="3651" dirty="0"/>
-              <a:t>.</a:t>
-            </a:r>
-          </a:p>
-          <a:p>
-            <a:pPr>
-              <a:buFont typeface="Arial" panose="020B0604020202020204" pitchFamily="34" charset="0"/>
-              <a:buChar char="•"/>
-            </a:pPr>
-            <a:endParaRPr lang="en-US" altLang="ko-KR" sz="3651" dirty="0"/>
-          </a:p>
-          <a:p>
-            <a:pPr>
-              <a:buFont typeface="Arial" panose="020B0604020202020204" pitchFamily="34" charset="0"/>
-              <a:buChar char="•"/>
-            </a:pPr>
-            <a:r>
-              <a:rPr lang="ko-KR" altLang="en-US" sz="3651" dirty="0"/>
-              <a:t> </a:t>
-            </a:r>
-            <a:r>
-              <a:rPr lang="ko-KR" altLang="en-US" sz="3651" b="1" dirty="0"/>
-              <a:t>품명</a:t>
-            </a:r>
-            <a:r>
-              <a:rPr lang="ko-KR" altLang="en-US" sz="3651" dirty="0"/>
-              <a:t> </a:t>
-            </a:r>
-            <a:r>
-              <a:rPr lang="en-US" altLang="ko-KR" sz="3651" dirty="0"/>
-              <a:t>: </a:t>
-            </a:r>
-            <a:r>
-              <a:rPr lang="ko-KR" altLang="en-US" sz="3651" dirty="0"/>
-              <a:t>품목의 명칭입니다</a:t>
-            </a:r>
-            <a:r>
-              <a:rPr lang="en-US" altLang="ko-KR" sz="3651" dirty="0"/>
-              <a:t>. </a:t>
-            </a:r>
-            <a:r>
-              <a:rPr lang="ko-KR" altLang="en-US" sz="3651" dirty="0" err="1"/>
-              <a:t>검색시</a:t>
-            </a:r>
-            <a:r>
-              <a:rPr lang="ko-KR" altLang="en-US" sz="3651" dirty="0"/>
-              <a:t> 대</a:t>
-            </a:r>
-            <a:r>
-              <a:rPr lang="en-US" altLang="ko-KR" sz="3651" dirty="0">
-                <a:latin typeface="굴림" panose="020B0600000101010101" pitchFamily="50" charset="-127"/>
-                <a:ea typeface="굴림" panose="020B0600000101010101" pitchFamily="50" charset="-127"/>
-              </a:rPr>
-              <a:t>·</a:t>
-            </a:r>
-            <a:r>
-              <a:rPr lang="ko-KR" altLang="en-US" sz="3651" dirty="0"/>
-              <a:t>소문자는 구분하지 않습니다</a:t>
-            </a:r>
-            <a:r>
-              <a:rPr lang="en-US" altLang="ko-KR" sz="3651" dirty="0"/>
-              <a:t>.</a:t>
-            </a:r>
-          </a:p>
-          <a:p>
-            <a:pPr>
-              <a:buFont typeface="Arial" panose="020B0604020202020204" pitchFamily="34" charset="0"/>
-              <a:buChar char="•"/>
-            </a:pPr>
-            <a:endParaRPr lang="en-US" altLang="ko-KR" sz="3651" dirty="0"/>
-          </a:p>
-          <a:p>
-            <a:pPr>
-              <a:buFont typeface="Arial" panose="020B0604020202020204" pitchFamily="34" charset="0"/>
-              <a:buChar char="•"/>
-            </a:pPr>
-            <a:r>
-              <a:rPr lang="en-US" altLang="ko-KR" sz="3651" dirty="0"/>
-              <a:t> </a:t>
-            </a:r>
-            <a:r>
-              <a:rPr lang="ko-KR" altLang="en-US" sz="3651" b="1" dirty="0">
-                <a:highlight>
-                  <a:srgbClr val="CCFF33"/>
-                </a:highlight>
-              </a:rPr>
-              <a:t>상세번호</a:t>
-            </a:r>
-            <a:r>
-              <a:rPr lang="ko-KR" altLang="en-US" sz="3651" dirty="0"/>
-              <a:t> </a:t>
-            </a:r>
-            <a:r>
-              <a:rPr lang="en-US" altLang="ko-KR" sz="3651" dirty="0"/>
-              <a:t>: </a:t>
-            </a:r>
-            <a:r>
-              <a:rPr lang="ko-KR" altLang="en-US" sz="3651" dirty="0" err="1"/>
-              <a:t>제조사측에서</a:t>
-            </a:r>
-            <a:r>
-              <a:rPr lang="ko-KR" altLang="en-US" sz="3651" dirty="0"/>
-              <a:t> 품목에 부여한 고유번호 입니다</a:t>
-            </a:r>
-            <a:r>
-              <a:rPr lang="en-US" altLang="ko-KR" sz="3651" dirty="0"/>
-              <a:t>. </a:t>
-            </a:r>
-            <a:r>
-              <a:rPr lang="ko-KR" altLang="en-US" sz="3651" dirty="0"/>
-              <a:t>같은 제품일지라도 제조국에 따라 상세번호가 다른 등 변수가 있을 수 있습니다</a:t>
-            </a:r>
-            <a:r>
-              <a:rPr lang="en-US" altLang="ko-KR" sz="3651" dirty="0"/>
-              <a:t>.</a:t>
-            </a:r>
-          </a:p>
-          <a:p>
-            <a:pPr>
-              <a:buFont typeface="Arial" panose="020B0604020202020204" pitchFamily="34" charset="0"/>
-              <a:buChar char="•"/>
-            </a:pPr>
-            <a:endParaRPr lang="en-US" altLang="ko-KR" sz="3651" dirty="0"/>
-          </a:p>
-          <a:p>
-            <a:pPr>
-              <a:buFont typeface="Arial" panose="020B0604020202020204" pitchFamily="34" charset="0"/>
-              <a:buChar char="•"/>
-            </a:pPr>
-            <a:r>
-              <a:rPr lang="en-US" altLang="ko-KR" sz="3651" dirty="0"/>
-              <a:t> </a:t>
-            </a:r>
-            <a:r>
-              <a:rPr lang="ko-KR" altLang="en-US" sz="3651" b="1" dirty="0">
-                <a:highlight>
-                  <a:srgbClr val="CCFF33"/>
-                </a:highlight>
-              </a:rPr>
-              <a:t>규격</a:t>
-            </a:r>
-            <a:r>
-              <a:rPr lang="en-US" altLang="ko-KR" sz="3651" b="1" dirty="0">
-                <a:highlight>
-                  <a:srgbClr val="CCFF33"/>
-                </a:highlight>
-              </a:rPr>
-              <a:t>/</a:t>
-            </a:r>
-            <a:r>
-              <a:rPr lang="ko-KR" altLang="en-US" sz="3651" b="1" dirty="0">
-                <a:highlight>
-                  <a:srgbClr val="CCFF33"/>
-                </a:highlight>
-              </a:rPr>
-              <a:t>모델</a:t>
-            </a:r>
-            <a:r>
-              <a:rPr lang="ko-KR" altLang="en-US" sz="3651" dirty="0"/>
-              <a:t> </a:t>
-            </a:r>
-            <a:r>
-              <a:rPr lang="en-US" altLang="ko-KR" sz="3651" dirty="0"/>
-              <a:t>: </a:t>
-            </a:r>
-            <a:r>
-              <a:rPr lang="ko-KR" altLang="en-US" sz="3651" dirty="0"/>
-              <a:t>상품별 규격 혹은 모델명을 입력한 데이터 입니다</a:t>
-            </a:r>
-            <a:r>
-              <a:rPr lang="en-US" altLang="ko-KR" sz="3651" dirty="0"/>
-              <a:t>. </a:t>
-            </a:r>
-            <a:r>
-              <a:rPr lang="ko-KR" altLang="en-US" sz="3651" dirty="0" err="1"/>
-              <a:t>검색시</a:t>
-            </a:r>
-            <a:r>
-              <a:rPr lang="ko-KR" altLang="en-US" sz="3651" dirty="0"/>
-              <a:t> 특수문자로 인해 정확한 검색결과를 얻지 못할 수 있습니다</a:t>
-            </a:r>
-            <a:r>
-              <a:rPr lang="en-US" altLang="ko-KR" sz="3651" dirty="0"/>
-              <a:t>.</a:t>
-            </a:r>
-          </a:p>
-          <a:p>
-            <a:pPr>
-              <a:buFont typeface="Arial" panose="020B0604020202020204" pitchFamily="34" charset="0"/>
-              <a:buChar char="•"/>
-            </a:pPr>
-            <a:endParaRPr lang="en-US" altLang="ko-KR" sz="3651" dirty="0"/>
-          </a:p>
-          <a:p>
-            <a:pPr>
-              <a:buFont typeface="Arial" panose="020B0604020202020204" pitchFamily="34" charset="0"/>
-              <a:buChar char="•"/>
-            </a:pPr>
-            <a:r>
-              <a:rPr lang="en-US" altLang="ko-KR" sz="3651" dirty="0"/>
-              <a:t> </a:t>
-            </a:r>
-            <a:r>
-              <a:rPr lang="ko-KR" altLang="en-US" sz="3651" b="1" dirty="0"/>
-              <a:t>구분</a:t>
-            </a:r>
-            <a:r>
-              <a:rPr lang="ko-KR" altLang="en-US" sz="3651" dirty="0"/>
-              <a:t> </a:t>
-            </a:r>
-            <a:r>
-              <a:rPr lang="en-US" altLang="ko-KR" sz="3651" dirty="0"/>
-              <a:t>: </a:t>
-            </a:r>
-            <a:r>
-              <a:rPr lang="ko-KR" altLang="en-US" sz="3651" dirty="0"/>
-              <a:t>상품 </a:t>
-            </a:r>
-            <a:r>
-              <a:rPr lang="ko-KR" altLang="en-US" sz="3651" dirty="0" err="1"/>
-              <a:t>입고시</a:t>
-            </a:r>
-            <a:r>
-              <a:rPr lang="ko-KR" altLang="en-US" sz="3651" dirty="0"/>
-              <a:t> 구분을 위해 부여하는 임시 번호 입니다</a:t>
-            </a:r>
-            <a:r>
-              <a:rPr lang="en-US" altLang="ko-KR" sz="3651" dirty="0"/>
-              <a:t>.</a:t>
-            </a:r>
-          </a:p>
-        </p:txBody>
-      </p:sp>
-      <p:pic>
-        <p:nvPicPr>
-          <p:cNvPr id="5" name="그림 4">
-            <a:extLst>
-              <a:ext uri="{FF2B5EF4-FFF2-40B4-BE49-F238E27FC236}">
-                <a16:creationId xmlns:a16="http://schemas.microsoft.com/office/drawing/2014/main" id="{A8D4A0DA-A914-A357-16F0-8F9DD5347567}"/>
+                <a16:creationId xmlns:a16="http://schemas.microsoft.com/office/drawing/2014/main" id="{12CAF83A-3FA1-2D67-FBB2-98BF8A0F4591}"/>
               </a:ext>
             </a:extLst>
           </p:cNvPr>
@@ -6481,8 +7226,8 @@
         </p:blipFill>
         <p:spPr>
           <a:xfrm>
-            <a:off x="-1" y="-257774"/>
-            <a:ext cx="10799763" cy="1343200"/>
+            <a:off x="-1" y="0"/>
+            <a:ext cx="9144001" cy="1137268"/>
           </a:xfrm>
           <a:prstGeom prst="rect">
             <a:avLst/>
@@ -6491,10 +7236,10 @@
       </p:pic>
       <p:pic>
         <p:nvPicPr>
-          <p:cNvPr id="7" name="그림 6">
+          <p:cNvPr id="4" name="그림 3">
             <a:extLst>
               <a:ext uri="{FF2B5EF4-FFF2-40B4-BE49-F238E27FC236}">
-                <a16:creationId xmlns:a16="http://schemas.microsoft.com/office/drawing/2014/main" id="{603A313B-1290-2092-DE7E-3B0F0086AF28}"/>
+                <a16:creationId xmlns:a16="http://schemas.microsoft.com/office/drawing/2014/main" id="{35557398-352F-740D-A0E1-A39ACA416178}"/>
               </a:ext>
             </a:extLst>
           </p:cNvPr>
@@ -6511,18 +7256,245 @@
         </p:blipFill>
         <p:spPr>
           <a:xfrm>
-            <a:off x="-1" y="1085426"/>
-            <a:ext cx="10799763" cy="1500179"/>
+            <a:off x="-1" y="1377385"/>
+            <a:ext cx="9144001" cy="1270180"/>
           </a:xfrm>
           <a:prstGeom prst="rect">
             <a:avLst/>
           </a:prstGeom>
         </p:spPr>
       </p:pic>
+      <p:sp>
+        <p:nvSpPr>
+          <p:cNvPr id="3" name="TextBox 2">
+            <a:extLst>
+              <a:ext uri="{FF2B5EF4-FFF2-40B4-BE49-F238E27FC236}">
+                <a16:creationId xmlns:a16="http://schemas.microsoft.com/office/drawing/2014/main" id="{19DC3495-95F3-6EBD-BDAE-B3C2E5FAA957}"/>
+              </a:ext>
+            </a:extLst>
+          </p:cNvPr>
+          <p:cNvSpPr txBox="1"/>
+          <p:nvPr/>
+        </p:nvSpPr>
+        <p:spPr>
+          <a:xfrm>
+            <a:off x="0" y="2887682"/>
+            <a:ext cx="9144001" cy="2862322"/>
+          </a:xfrm>
+          <a:prstGeom prst="rect">
+            <a:avLst/>
+          </a:prstGeom>
+          <a:noFill/>
+        </p:spPr>
+        <p:txBody>
+          <a:bodyPr wrap="square">
+            <a:spAutoFit/>
+          </a:bodyPr>
+          <a:lstStyle/>
+          <a:p>
+            <a:pPr>
+              <a:buFont typeface="Arial" panose="020B0604020202020204" pitchFamily="34" charset="0"/>
+              <a:buChar char="•"/>
+            </a:pPr>
+            <a:r>
+              <a:rPr lang="en-US" altLang="ko-KR" dirty="0"/>
+              <a:t> </a:t>
+            </a:r>
+            <a:r>
+              <a:rPr lang="ko-KR" altLang="en-US" b="1" dirty="0"/>
+              <a:t>분류체계</a:t>
+            </a:r>
+            <a:r>
+              <a:rPr lang="ko-KR" altLang="en-US" dirty="0"/>
+              <a:t> </a:t>
+            </a:r>
+            <a:r>
+              <a:rPr lang="en-US" altLang="ko-KR" dirty="0"/>
+              <a:t>: </a:t>
+            </a:r>
+            <a:r>
+              <a:rPr lang="ko-KR" altLang="en-US" dirty="0"/>
+              <a:t>상품을 보관중인 </a:t>
+            </a:r>
+            <a:r>
+              <a:rPr lang="ko-KR" altLang="en-US" dirty="0" err="1"/>
+              <a:t>렉</a:t>
+            </a:r>
+            <a:r>
+              <a:rPr lang="ko-KR" altLang="en-US" dirty="0"/>
+              <a:t> 선반의 위치 입니다</a:t>
+            </a:r>
+            <a:r>
+              <a:rPr lang="en-US" altLang="ko-KR" dirty="0"/>
+              <a:t>.</a:t>
+            </a:r>
+          </a:p>
+          <a:p>
+            <a:pPr>
+              <a:buFont typeface="Arial" panose="020B0604020202020204" pitchFamily="34" charset="0"/>
+              <a:buChar char="•"/>
+            </a:pPr>
+            <a:endParaRPr lang="en-US" altLang="ko-KR" dirty="0"/>
+          </a:p>
+          <a:p>
+            <a:pPr>
+              <a:buFont typeface="Arial" panose="020B0604020202020204" pitchFamily="34" charset="0"/>
+              <a:buChar char="•"/>
+            </a:pPr>
+            <a:r>
+              <a:rPr lang="en-US" altLang="ko-KR" dirty="0"/>
+              <a:t> </a:t>
+            </a:r>
+            <a:r>
+              <a:rPr lang="ko-KR" altLang="en-US" b="1" dirty="0" err="1"/>
+              <a:t>기기명</a:t>
+            </a:r>
+            <a:r>
+              <a:rPr lang="ko-KR" altLang="en-US" dirty="0"/>
+              <a:t> </a:t>
+            </a:r>
+            <a:r>
+              <a:rPr lang="en-US" altLang="ko-KR" dirty="0"/>
+              <a:t>: </a:t>
+            </a:r>
+            <a:r>
+              <a:rPr lang="ko-KR" altLang="en-US" dirty="0"/>
+              <a:t>품목이 설치되는 자동화 설비의 명칭 입니다</a:t>
+            </a:r>
+            <a:r>
+              <a:rPr lang="en-US" altLang="ko-KR" dirty="0"/>
+              <a:t>.</a:t>
+            </a:r>
+          </a:p>
+          <a:p>
+            <a:pPr>
+              <a:buFont typeface="Arial" panose="020B0604020202020204" pitchFamily="34" charset="0"/>
+              <a:buChar char="•"/>
+            </a:pPr>
+            <a:endParaRPr lang="en-US" altLang="ko-KR" dirty="0"/>
+          </a:p>
+          <a:p>
+            <a:pPr>
+              <a:buFont typeface="Arial" panose="020B0604020202020204" pitchFamily="34" charset="0"/>
+              <a:buChar char="•"/>
+            </a:pPr>
+            <a:r>
+              <a:rPr lang="en-US" altLang="ko-KR" dirty="0"/>
+              <a:t> </a:t>
+            </a:r>
+            <a:r>
+              <a:rPr lang="en-US" altLang="ko-KR" b="1" dirty="0"/>
+              <a:t>Maker</a:t>
+            </a:r>
+            <a:r>
+              <a:rPr lang="en-US" altLang="ko-KR" dirty="0"/>
+              <a:t> : </a:t>
+            </a:r>
+            <a:r>
+              <a:rPr lang="ko-KR" altLang="en-US" dirty="0"/>
+              <a:t>품목을 제조 혹은 유통하는 회사의 명칭 입니다</a:t>
+            </a:r>
+            <a:r>
+              <a:rPr lang="en-US" altLang="ko-KR" dirty="0"/>
+              <a:t>.</a:t>
+            </a:r>
+          </a:p>
+          <a:p>
+            <a:pPr>
+              <a:buFont typeface="Arial" panose="020B0604020202020204" pitchFamily="34" charset="0"/>
+              <a:buChar char="•"/>
+            </a:pPr>
+            <a:endParaRPr lang="en-US" altLang="ko-KR" dirty="0"/>
+          </a:p>
+          <a:p>
+            <a:pPr>
+              <a:buFont typeface="Arial" panose="020B0604020202020204" pitchFamily="34" charset="0"/>
+              <a:buChar char="•"/>
+            </a:pPr>
+            <a:r>
+              <a:rPr lang="en-US" altLang="ko-KR" dirty="0"/>
+              <a:t> </a:t>
+            </a:r>
+            <a:r>
+              <a:rPr lang="ko-KR" altLang="en-US" b="1" dirty="0"/>
+              <a:t>원화환산액</a:t>
+            </a:r>
+            <a:r>
+              <a:rPr lang="ko-KR" altLang="en-US" dirty="0"/>
+              <a:t> </a:t>
+            </a:r>
+            <a:r>
+              <a:rPr lang="en-US" altLang="ko-KR" dirty="0"/>
+              <a:t>:  </a:t>
+            </a:r>
+            <a:r>
+              <a:rPr lang="ko-KR" altLang="en-US" dirty="0"/>
+              <a:t>입고되는 품목이 수입되는 경우</a:t>
+            </a:r>
+            <a:r>
+              <a:rPr lang="en-US" altLang="ko-KR" dirty="0"/>
+              <a:t>, </a:t>
+            </a:r>
+            <a:r>
+              <a:rPr lang="ko-KR" altLang="en-US" dirty="0"/>
+              <a:t>외화로 결제된 품목의 단가를 환율을 적용하여 원화로 환산한 금액을 의미합니다</a:t>
+            </a:r>
+            <a:r>
+              <a:rPr lang="en-US" altLang="ko-KR" dirty="0"/>
+              <a:t>.</a:t>
+            </a:r>
+          </a:p>
+          <a:p>
+            <a:pPr>
+              <a:buFont typeface="Arial" panose="020B0604020202020204" pitchFamily="34" charset="0"/>
+              <a:buChar char="•"/>
+            </a:pPr>
+            <a:endParaRPr lang="en-US" altLang="ko-KR" dirty="0"/>
+          </a:p>
+          <a:p>
+            <a:pPr>
+              <a:buFont typeface="Arial" panose="020B0604020202020204" pitchFamily="34" charset="0"/>
+              <a:buChar char="•"/>
+            </a:pPr>
+            <a:r>
+              <a:rPr lang="en-US" altLang="ko-KR" dirty="0"/>
+              <a:t> </a:t>
+            </a:r>
+            <a:r>
+              <a:rPr lang="ko-KR" altLang="en-US" b="1" dirty="0"/>
+              <a:t>재고금액</a:t>
+            </a:r>
+            <a:r>
+              <a:rPr lang="ko-KR" altLang="en-US" dirty="0"/>
+              <a:t> </a:t>
+            </a:r>
+            <a:r>
+              <a:rPr lang="en-US" altLang="ko-KR" dirty="0"/>
+              <a:t>: </a:t>
+            </a:r>
+            <a:r>
+              <a:rPr lang="ko-KR" altLang="en-US" dirty="0"/>
+              <a:t>품목의 수량 </a:t>
+            </a:r>
+            <a:r>
+              <a:rPr lang="en-US" altLang="ko-KR" dirty="0"/>
+              <a:t>X </a:t>
+            </a:r>
+            <a:r>
+              <a:rPr lang="ko-KR" altLang="en-US" dirty="0"/>
+              <a:t>원화환산액 의 금액입니다</a:t>
+            </a:r>
+            <a:r>
+              <a:rPr lang="en-US" altLang="ko-KR" dirty="0"/>
+              <a:t>.</a:t>
+            </a:r>
+          </a:p>
+        </p:txBody>
+      </p:sp>
     </p:spTree>
     <p:extLst>
       <p:ext uri="{BB962C8B-B14F-4D97-AF65-F5344CB8AC3E}">
-        <p14:creationId xmlns:p14="http://schemas.microsoft.com/office/powerpoint/2010/main" val="2255943869"/>
+        <p14:creationId xmlns:p14="http://schemas.microsoft.com/office/powerpoint/2010/main" val="1831205776"/>
       </p:ext>
     </p:extLst>
   </p:cSld>
@@ -6532,12 +7504,18 @@
 </p:sld>
 </file>
 
-<file path=ppt/slides/slide6.xml><?xml version="1.0" encoding="utf-8"?>
+<file path=ppt/slides/slide8.xml><?xml version="1.0" encoding="utf-8"?>
 <p:sld xmlns:a="http://schemas.openxmlformats.org/drawingml/2006/main" xmlns:r="http://schemas.openxmlformats.org/officeDocument/2006/relationships" xmlns:p="http://schemas.openxmlformats.org/presentationml/2006/main">
   <p:cSld>
     <p:spTree>
       <p:nvGrpSpPr>
-        <p:cNvPr id="1" name=""/>
+        <p:cNvPr id="1" name="">
+          <a:extLst>
+            <a:ext uri="{FF2B5EF4-FFF2-40B4-BE49-F238E27FC236}">
+              <a16:creationId xmlns:a16="http://schemas.microsoft.com/office/drawing/2014/main" id="{67DB2751-1074-5A3C-610F-4C8D6058BB49}"/>
+            </a:ext>
+          </a:extLst>
+        </p:cNvPr>
         <p:cNvGrpSpPr/>
         <p:nvPr/>
       </p:nvGrpSpPr>
@@ -6551,10 +7529,10 @@
       </p:grpSpPr>
       <p:pic>
         <p:nvPicPr>
-          <p:cNvPr id="4" name="그림 3">
+          <p:cNvPr id="3" name="그림 2">
             <a:extLst>
               <a:ext uri="{FF2B5EF4-FFF2-40B4-BE49-F238E27FC236}">
-                <a16:creationId xmlns:a16="http://schemas.microsoft.com/office/drawing/2014/main" id="{A4162066-2425-DD53-E915-49F26F483FA2}"/>
+                <a16:creationId xmlns:a16="http://schemas.microsoft.com/office/drawing/2014/main" id="{DBD5F4AD-717D-6B13-3F68-8B047D4EE4AC}"/>
               </a:ext>
             </a:extLst>
           </p:cNvPr>
@@ -6571,275 +7549,18 @@
         </p:blipFill>
         <p:spPr>
           <a:xfrm>
-            <a:off x="-1" y="-257774"/>
-            <a:ext cx="10799763" cy="1343200"/>
+            <a:off x="0" y="658906"/>
+            <a:ext cx="9144000" cy="5540188"/>
           </a:xfrm>
           <a:prstGeom prst="rect">
             <a:avLst/>
           </a:prstGeom>
         </p:spPr>
       </p:pic>
-      <p:pic>
-        <p:nvPicPr>
-          <p:cNvPr id="5" name="그림 4">
-            <a:extLst>
-              <a:ext uri="{FF2B5EF4-FFF2-40B4-BE49-F238E27FC236}">
-                <a16:creationId xmlns:a16="http://schemas.microsoft.com/office/drawing/2014/main" id="{F6F2C4F7-5515-BA01-6B0C-7E5DE6B71A63}"/>
-              </a:ext>
-            </a:extLst>
-          </p:cNvPr>
-          <p:cNvPicPr>
-            <a:picLocks noChangeAspect="1"/>
-          </p:cNvPicPr>
-          <p:nvPr/>
-        </p:nvPicPr>
-        <p:blipFill>
-          <a:blip r:embed="rId3"/>
-          <a:stretch>
-            <a:fillRect/>
-          </a:stretch>
-        </p:blipFill>
-        <p:spPr>
-          <a:xfrm>
-            <a:off x="-1" y="1085426"/>
-            <a:ext cx="10799763" cy="1500179"/>
-          </a:xfrm>
-          <a:prstGeom prst="rect">
-            <a:avLst/>
-          </a:prstGeom>
-        </p:spPr>
-      </p:pic>
-      <p:sp>
-        <p:nvSpPr>
-          <p:cNvPr id="6" name="TextBox 5">
-            <a:extLst>
-              <a:ext uri="{FF2B5EF4-FFF2-40B4-BE49-F238E27FC236}">
-                <a16:creationId xmlns:a16="http://schemas.microsoft.com/office/drawing/2014/main" id="{D5A80649-D5B4-5C19-932C-1B349322E652}"/>
-              </a:ext>
-            </a:extLst>
-          </p:cNvPr>
-          <p:cNvSpPr txBox="1"/>
-          <p:nvPr/>
-        </p:nvSpPr>
-        <p:spPr>
-          <a:xfrm>
-            <a:off x="-1" y="2618723"/>
-            <a:ext cx="10799763" cy="7957820"/>
-          </a:xfrm>
-          <a:prstGeom prst="rect">
-            <a:avLst/>
-          </a:prstGeom>
-          <a:noFill/>
-        </p:spPr>
-        <p:txBody>
-          <a:bodyPr wrap="square">
-            <a:spAutoFit/>
-          </a:bodyPr>
-          <a:lstStyle/>
-          <a:p>
-            <a:pPr>
-              <a:buFont typeface="Arial" panose="020B0604020202020204" pitchFamily="34" charset="0"/>
-              <a:buChar char="•"/>
-            </a:pPr>
-            <a:r>
-              <a:rPr lang="en-US" altLang="ko-KR" sz="3651" dirty="0"/>
-              <a:t> </a:t>
-            </a:r>
-            <a:r>
-              <a:rPr lang="ko-KR" altLang="en-US" sz="3651" b="1" dirty="0"/>
-              <a:t>분류체계</a:t>
-            </a:r>
-            <a:r>
-              <a:rPr lang="ko-KR" altLang="en-US" sz="3651" dirty="0"/>
-              <a:t> </a:t>
-            </a:r>
-            <a:r>
-              <a:rPr lang="en-US" altLang="ko-KR" sz="3651" dirty="0"/>
-              <a:t>: </a:t>
-            </a:r>
-            <a:r>
-              <a:rPr lang="ko-KR" altLang="en-US" sz="3651" dirty="0"/>
-              <a:t>상품을 보관중인 </a:t>
-            </a:r>
-            <a:r>
-              <a:rPr lang="ko-KR" altLang="en-US" sz="3651" dirty="0" err="1"/>
-              <a:t>렉</a:t>
-            </a:r>
-            <a:r>
-              <a:rPr lang="ko-KR" altLang="en-US" sz="3651" dirty="0"/>
-              <a:t> 선반의 위치 입니다</a:t>
-            </a:r>
-            <a:r>
-              <a:rPr lang="en-US" altLang="ko-KR" sz="3651" dirty="0"/>
-              <a:t>.</a:t>
-            </a:r>
-          </a:p>
-          <a:p>
-            <a:pPr>
-              <a:buFont typeface="Arial" panose="020B0604020202020204" pitchFamily="34" charset="0"/>
-              <a:buChar char="•"/>
-            </a:pPr>
-            <a:endParaRPr lang="en-US" altLang="ko-KR" sz="3651" dirty="0"/>
-          </a:p>
-          <a:p>
-            <a:pPr>
-              <a:buFont typeface="Arial" panose="020B0604020202020204" pitchFamily="34" charset="0"/>
-              <a:buChar char="•"/>
-            </a:pPr>
-            <a:r>
-              <a:rPr lang="en-US" altLang="ko-KR" sz="3651" dirty="0"/>
-              <a:t> </a:t>
-            </a:r>
-            <a:r>
-              <a:rPr lang="ko-KR" altLang="en-US" sz="3651" b="1" dirty="0" err="1"/>
-              <a:t>기기명</a:t>
-            </a:r>
-            <a:r>
-              <a:rPr lang="ko-KR" altLang="en-US" sz="3651" dirty="0"/>
-              <a:t> </a:t>
-            </a:r>
-            <a:r>
-              <a:rPr lang="en-US" altLang="ko-KR" sz="3651" dirty="0"/>
-              <a:t>: </a:t>
-            </a:r>
-            <a:r>
-              <a:rPr lang="ko-KR" altLang="en-US" sz="3651" dirty="0"/>
-              <a:t>품목이 설치되는 자동화 설비의 명칭 입니다</a:t>
-            </a:r>
-            <a:r>
-              <a:rPr lang="en-US" altLang="ko-KR" sz="3651" dirty="0"/>
-              <a:t>.</a:t>
-            </a:r>
-          </a:p>
-          <a:p>
-            <a:pPr>
-              <a:buFont typeface="Arial" panose="020B0604020202020204" pitchFamily="34" charset="0"/>
-              <a:buChar char="•"/>
-            </a:pPr>
-            <a:endParaRPr lang="en-US" altLang="ko-KR" sz="3651" dirty="0"/>
-          </a:p>
-          <a:p>
-            <a:pPr>
-              <a:buFont typeface="Arial" panose="020B0604020202020204" pitchFamily="34" charset="0"/>
-              <a:buChar char="•"/>
-            </a:pPr>
-            <a:r>
-              <a:rPr lang="en-US" altLang="ko-KR" sz="3651" dirty="0"/>
-              <a:t> </a:t>
-            </a:r>
-            <a:r>
-              <a:rPr lang="en-US" altLang="ko-KR" sz="3651" b="1" dirty="0"/>
-              <a:t>Maker</a:t>
-            </a:r>
-            <a:r>
-              <a:rPr lang="en-US" altLang="ko-KR" sz="3651" dirty="0"/>
-              <a:t> : </a:t>
-            </a:r>
-            <a:r>
-              <a:rPr lang="ko-KR" altLang="en-US" sz="3651" dirty="0"/>
-              <a:t>품목을 제조 혹은 유통하는 회사의 명칭 입니다</a:t>
-            </a:r>
-            <a:r>
-              <a:rPr lang="en-US" altLang="ko-KR" sz="3651" dirty="0"/>
-              <a:t>.</a:t>
-            </a:r>
-          </a:p>
-          <a:p>
-            <a:pPr>
-              <a:buFont typeface="Arial" panose="020B0604020202020204" pitchFamily="34" charset="0"/>
-              <a:buChar char="•"/>
-            </a:pPr>
-            <a:endParaRPr lang="en-US" altLang="ko-KR" sz="3651" dirty="0"/>
-          </a:p>
-          <a:p>
-            <a:pPr>
-              <a:buFont typeface="Arial" panose="020B0604020202020204" pitchFamily="34" charset="0"/>
-              <a:buChar char="•"/>
-            </a:pPr>
-            <a:r>
-              <a:rPr lang="en-US" altLang="ko-KR" sz="3651" dirty="0"/>
-              <a:t> </a:t>
-            </a:r>
-            <a:r>
-              <a:rPr lang="ko-KR" altLang="en-US" sz="3651" b="1" dirty="0"/>
-              <a:t>원화환산액</a:t>
-            </a:r>
-            <a:r>
-              <a:rPr lang="ko-KR" altLang="en-US" sz="3651" dirty="0"/>
-              <a:t> </a:t>
-            </a:r>
-            <a:r>
-              <a:rPr lang="en-US" altLang="ko-KR" sz="3651" dirty="0"/>
-              <a:t>:  </a:t>
-            </a:r>
-            <a:r>
-              <a:rPr lang="ko-KR" altLang="en-US" sz="3651" dirty="0"/>
-              <a:t>입고되는 품목이 수입되는 경우</a:t>
-            </a:r>
-            <a:r>
-              <a:rPr lang="en-US" altLang="ko-KR" sz="3651" dirty="0"/>
-              <a:t>, </a:t>
-            </a:r>
-            <a:r>
-              <a:rPr lang="ko-KR" altLang="en-US" sz="3651" dirty="0"/>
-              <a:t>외화로 결제된 품목의 단가를 환율을 적용하여 원화로 환산한 금액을 의미합니다</a:t>
-            </a:r>
-            <a:r>
-              <a:rPr lang="en-US" altLang="ko-KR" sz="3651" dirty="0"/>
-              <a:t>.</a:t>
-            </a:r>
-          </a:p>
-          <a:p>
-            <a:pPr>
-              <a:buFont typeface="Arial" panose="020B0604020202020204" pitchFamily="34" charset="0"/>
-              <a:buChar char="•"/>
-            </a:pPr>
-            <a:endParaRPr lang="en-US" altLang="ko-KR" sz="3651" dirty="0"/>
-          </a:p>
-          <a:p>
-            <a:pPr>
-              <a:buFont typeface="Arial" panose="020B0604020202020204" pitchFamily="34" charset="0"/>
-              <a:buChar char="•"/>
-            </a:pPr>
-            <a:r>
-              <a:rPr lang="en-US" altLang="ko-KR" sz="3651" dirty="0"/>
-              <a:t> </a:t>
-            </a:r>
-            <a:r>
-              <a:rPr lang="ko-KR" altLang="en-US" sz="3651" b="1" dirty="0"/>
-              <a:t>재고금액</a:t>
-            </a:r>
-            <a:r>
-              <a:rPr lang="ko-KR" altLang="en-US" sz="3651" dirty="0"/>
-              <a:t> </a:t>
-            </a:r>
-            <a:r>
-              <a:rPr lang="en-US" altLang="ko-KR" sz="3651" dirty="0"/>
-              <a:t>: </a:t>
-            </a:r>
-            <a:r>
-              <a:rPr lang="ko-KR" altLang="en-US" sz="3651" dirty="0"/>
-              <a:t>품목의 수량 </a:t>
-            </a:r>
-            <a:r>
-              <a:rPr lang="en-US" altLang="ko-KR" sz="3651" dirty="0"/>
-              <a:t>X </a:t>
-            </a:r>
-            <a:r>
-              <a:rPr lang="ko-KR" altLang="en-US" sz="3651" dirty="0"/>
-              <a:t>원화환산액 의 금액입니다</a:t>
-            </a:r>
-            <a:r>
-              <a:rPr lang="en-US" altLang="ko-KR" sz="3651" dirty="0"/>
-              <a:t>.</a:t>
-            </a:r>
-          </a:p>
-        </p:txBody>
-      </p:sp>
     </p:spTree>
     <p:extLst>
       <p:ext uri="{BB962C8B-B14F-4D97-AF65-F5344CB8AC3E}">
-        <p14:creationId xmlns:p14="http://schemas.microsoft.com/office/powerpoint/2010/main" val="330546788"/>
+        <p14:creationId xmlns:p14="http://schemas.microsoft.com/office/powerpoint/2010/main" val="1596259991"/>
       </p:ext>
     </p:extLst>
   </p:cSld>
@@ -6849,12 +7570,18 @@
 </p:sld>
 </file>
 
-<file path=ppt/slides/slide7.xml><?xml version="1.0" encoding="utf-8"?>
+<file path=ppt/slides/slide9.xml><?xml version="1.0" encoding="utf-8"?>
 <p:sld xmlns:a="http://schemas.openxmlformats.org/drawingml/2006/main" xmlns:r="http://schemas.openxmlformats.org/officeDocument/2006/relationships" xmlns:p="http://schemas.openxmlformats.org/presentationml/2006/main">
   <p:cSld>
     <p:spTree>
       <p:nvGrpSpPr>
-        <p:cNvPr id="1" name=""/>
+        <p:cNvPr id="1" name="">
+          <a:extLst>
+            <a:ext uri="{FF2B5EF4-FFF2-40B4-BE49-F238E27FC236}">
+              <a16:creationId xmlns:a16="http://schemas.microsoft.com/office/drawing/2014/main" id="{29BD1077-65A4-3628-32FB-ABF923739C21}"/>
+            </a:ext>
+          </a:extLst>
+        </p:cNvPr>
         <p:cNvGrpSpPr/>
         <p:nvPr/>
       </p:nvGrpSpPr>
@@ -6866,264 +7593,12 @@
           <a:chExt cx="0" cy="0"/>
         </a:xfrm>
       </p:grpSpPr>
-      <p:sp>
-        <p:nvSpPr>
-          <p:cNvPr id="5" name="TextBox 4">
+      <p:pic>
+        <p:nvPicPr>
+          <p:cNvPr id="2" name="그림 1">
             <a:extLst>
               <a:ext uri="{FF2B5EF4-FFF2-40B4-BE49-F238E27FC236}">
-                <a16:creationId xmlns:a16="http://schemas.microsoft.com/office/drawing/2014/main" id="{F52641F7-FE98-404A-2DA6-0C2DA1BA2852}"/>
-              </a:ext>
-            </a:extLst>
-          </p:cNvPr>
-          <p:cNvSpPr txBox="1"/>
-          <p:nvPr/>
-        </p:nvSpPr>
-        <p:spPr>
-          <a:xfrm>
-            <a:off x="-1" y="1038757"/>
-            <a:ext cx="10799763" cy="8519640"/>
-          </a:xfrm>
-          <a:prstGeom prst="rect">
-            <a:avLst/>
-          </a:prstGeom>
-          <a:noFill/>
-        </p:spPr>
-        <p:txBody>
-          <a:bodyPr wrap="square">
-            <a:spAutoFit/>
-          </a:bodyPr>
-          <a:lstStyle/>
-          <a:p>
-            <a:pPr>
-              <a:buNone/>
-            </a:pPr>
-            <a:r>
-              <a:rPr lang="ko-KR" altLang="en-US" sz="3651" b="1" dirty="0"/>
-              <a:t>② 자재품목명세서 </a:t>
-            </a:r>
-            <a:r>
-              <a:rPr lang="en-US" altLang="ko-KR" sz="3651" b="1" dirty="0"/>
-              <a:t>(</a:t>
-            </a:r>
-            <a:r>
-              <a:rPr lang="en-US" altLang="ko-KR" sz="3651" b="1" dirty="0" err="1"/>
-              <a:t>A4</a:t>
-            </a:r>
-            <a:r>
-              <a:rPr lang="en-US" altLang="ko-KR" sz="3651" b="1" dirty="0"/>
-              <a:t> </a:t>
-            </a:r>
-            <a:r>
-              <a:rPr lang="ko-KR" altLang="en-US" sz="3651" b="1" dirty="0"/>
-              <a:t>카드</a:t>
-            </a:r>
-            <a:r>
-              <a:rPr lang="en-US" altLang="ko-KR" sz="3651" b="1" dirty="0"/>
-              <a:t>) </a:t>
-            </a:r>
-            <a:r>
-              <a:rPr lang="ko-KR" altLang="en-US" sz="3651" b="1" dirty="0"/>
-              <a:t>조회 및 인쇄</a:t>
-            </a:r>
-            <a:endParaRPr lang="en-US" altLang="ko-KR" sz="3651" b="1" dirty="0"/>
-          </a:p>
-          <a:p>
-            <a:pPr>
-              <a:buNone/>
-            </a:pPr>
-            <a:endParaRPr lang="ko-KR" altLang="en-US" sz="3651" b="1" dirty="0"/>
-          </a:p>
-          <a:p>
-            <a:pPr>
-              <a:buFont typeface="Arial" panose="020B0604020202020204" pitchFamily="34" charset="0"/>
-              <a:buChar char="•"/>
-            </a:pPr>
-            <a:r>
-              <a:rPr lang="ko-KR" altLang="en-US" sz="3651" dirty="0"/>
-              <a:t> 목록에서 특정 품목을 </a:t>
-            </a:r>
-            <a:r>
-              <a:rPr lang="ko-KR" altLang="en-US" sz="3651" dirty="0">
-                <a:highlight>
-                  <a:srgbClr val="CCFF33"/>
-                </a:highlight>
-              </a:rPr>
-              <a:t>클릭</a:t>
-            </a:r>
-            <a:r>
-              <a:rPr lang="ko-KR" altLang="en-US" sz="3651" dirty="0"/>
-              <a:t>하면 하단에 </a:t>
-            </a:r>
-            <a:r>
-              <a:rPr lang="ko-KR" altLang="en-US" sz="3651" b="1" dirty="0"/>
-              <a:t>자재품목명세서 카드</a:t>
-            </a:r>
-            <a:r>
-              <a:rPr lang="ko-KR" altLang="en-US" sz="3651" dirty="0"/>
-              <a:t>가 생성됩니다</a:t>
-            </a:r>
-            <a:r>
-              <a:rPr lang="en-US" altLang="ko-KR" sz="3651" dirty="0"/>
-              <a:t>.</a:t>
-            </a:r>
-            <a:endParaRPr lang="en-US" altLang="ko-KR" sz="3651" b="1" dirty="0"/>
-          </a:p>
-          <a:p>
-            <a:pPr>
-              <a:buFont typeface="Arial" panose="020B0604020202020204" pitchFamily="34" charset="0"/>
-              <a:buChar char="•"/>
-            </a:pPr>
-            <a:r>
-              <a:rPr lang="ko-KR" altLang="en-US" sz="3651" b="1" dirty="0"/>
-              <a:t> 기간 필터</a:t>
-            </a:r>
-            <a:r>
-              <a:rPr lang="en-US" altLang="ko-KR" sz="3651" b="1" dirty="0"/>
-              <a:t>(3</a:t>
-            </a:r>
-            <a:r>
-              <a:rPr lang="ko-KR" altLang="en-US" sz="3651" b="1" dirty="0"/>
-              <a:t>개월</a:t>
-            </a:r>
-            <a:r>
-              <a:rPr lang="en-US" altLang="ko-KR" sz="3651" b="1" dirty="0"/>
-              <a:t>, 6</a:t>
-            </a:r>
-            <a:r>
-              <a:rPr lang="ko-KR" altLang="en-US" sz="3651" b="1" dirty="0"/>
-              <a:t>개월</a:t>
-            </a:r>
-            <a:r>
-              <a:rPr lang="en-US" altLang="ko-KR" sz="3651" b="1" dirty="0"/>
-              <a:t>, 1</a:t>
-            </a:r>
-            <a:r>
-              <a:rPr lang="ko-KR" altLang="en-US" sz="3651" b="1" dirty="0"/>
-              <a:t>년 등</a:t>
-            </a:r>
-            <a:r>
-              <a:rPr lang="en-US" altLang="ko-KR" sz="3651" b="1" dirty="0"/>
-              <a:t>):</a:t>
-            </a:r>
-            <a:r>
-              <a:rPr lang="ko-KR" altLang="en-US" sz="3651" dirty="0"/>
-              <a:t> 원하는 기간 동안의 입고</a:t>
-            </a:r>
-            <a:r>
-              <a:rPr lang="en-US" altLang="ko-KR" sz="3651" dirty="0"/>
-              <a:t>/</a:t>
-            </a:r>
-            <a:r>
-              <a:rPr lang="ko-KR" altLang="en-US" sz="3651" dirty="0"/>
-              <a:t>출고 합계 수량 및 금액을 자동 계산합니다</a:t>
-            </a:r>
-            <a:r>
-              <a:rPr lang="en-US" altLang="ko-KR" sz="3651" dirty="0"/>
-              <a:t>.</a:t>
-            </a:r>
-          </a:p>
-          <a:p>
-            <a:pPr>
-              <a:buFont typeface="Arial" panose="020B0604020202020204" pitchFamily="34" charset="0"/>
-              <a:buChar char="•"/>
-            </a:pPr>
-            <a:r>
-              <a:rPr lang="ko-KR" altLang="en-US" sz="3651" b="1" dirty="0"/>
-              <a:t> 🖨️ 명세서 인쇄</a:t>
-            </a:r>
-            <a:r>
-              <a:rPr lang="en-US" altLang="ko-KR" sz="3651" b="1" dirty="0"/>
-              <a:t>/PDF </a:t>
-            </a:r>
-            <a:r>
-              <a:rPr lang="ko-KR" altLang="en-US" sz="3651" b="1" dirty="0"/>
-              <a:t>저장</a:t>
-            </a:r>
-            <a:r>
-              <a:rPr lang="en-US" altLang="ko-KR" sz="3651" b="1" dirty="0"/>
-              <a:t>:</a:t>
-            </a:r>
-            <a:r>
-              <a:rPr lang="ko-KR" altLang="en-US" sz="3651" dirty="0"/>
-              <a:t> 버튼을 누르면 </a:t>
-            </a:r>
-            <a:r>
-              <a:rPr lang="en-US" altLang="ko-KR" sz="3651" dirty="0" err="1"/>
-              <a:t>A4</a:t>
-            </a:r>
-            <a:r>
-              <a:rPr lang="en-US" altLang="ko-KR" sz="3651" dirty="0"/>
-              <a:t> </a:t>
-            </a:r>
-            <a:r>
-              <a:rPr lang="ko-KR" altLang="en-US" sz="3651" dirty="0"/>
-              <a:t>규격의 깔끔한 명세서 출력 창이 열립니다</a:t>
-            </a:r>
-            <a:r>
-              <a:rPr lang="en-US" altLang="ko-KR" sz="3651" dirty="0"/>
-              <a:t>.</a:t>
-            </a:r>
-          </a:p>
-          <a:p>
-            <a:pPr>
-              <a:buFont typeface="Arial" panose="020B0604020202020204" pitchFamily="34" charset="0"/>
-              <a:buChar char="•"/>
-            </a:pPr>
-            <a:endParaRPr lang="en-US" altLang="ko-KR" sz="3651" dirty="0"/>
-          </a:p>
-          <a:p>
-            <a:pPr>
-              <a:buNone/>
-            </a:pPr>
-            <a:r>
-              <a:rPr lang="ko-KR" altLang="en-US" sz="3651" b="1" dirty="0"/>
-              <a:t>③ 전체 품목 엑셀 다운로드</a:t>
-            </a:r>
-            <a:endParaRPr lang="en-US" altLang="ko-KR" sz="3651" b="1" dirty="0"/>
-          </a:p>
-          <a:p>
-            <a:pPr>
-              <a:buNone/>
-            </a:pPr>
-            <a:endParaRPr lang="ko-KR" altLang="en-US" sz="3651" b="1" dirty="0"/>
-          </a:p>
-          <a:p>
-            <a:pPr>
-              <a:buFont typeface="Arial" panose="020B0604020202020204" pitchFamily="34" charset="0"/>
-              <a:buChar char="•"/>
-            </a:pPr>
-            <a:r>
-              <a:rPr lang="en-US" altLang="ko-KR" sz="3651" dirty="0"/>
-              <a:t>DB</a:t>
-            </a:r>
-            <a:r>
-              <a:rPr lang="ko-KR" altLang="en-US" sz="3651" dirty="0"/>
-              <a:t>에 저장된 전체 품목 내역을 엑셀로 다운로드 합니다</a:t>
-            </a:r>
-            <a:r>
-              <a:rPr lang="en-US" altLang="ko-KR" sz="3651" dirty="0"/>
-              <a:t>. </a:t>
-            </a:r>
-            <a:r>
-              <a:rPr lang="ko-KR" altLang="en-US" sz="3651" dirty="0"/>
-              <a:t>재고조사시 자료로 활용할 수 있습니다</a:t>
-            </a:r>
-            <a:r>
-              <a:rPr lang="en-US" altLang="ko-KR" sz="3651" dirty="0"/>
-              <a:t>.</a:t>
-            </a:r>
-          </a:p>
-          <a:p>
-            <a:endParaRPr lang="en-US" altLang="ko-KR" sz="3651" dirty="0"/>
-          </a:p>
-        </p:txBody>
-      </p:sp>
-      <p:pic>
-        <p:nvPicPr>
-          <p:cNvPr id="6" name="그림 5">
-            <a:extLst>
-              <a:ext uri="{FF2B5EF4-FFF2-40B4-BE49-F238E27FC236}">
-                <a16:creationId xmlns:a16="http://schemas.microsoft.com/office/drawing/2014/main" id="{01927B81-6A1E-7876-6584-6BC7E69034B7}"/>
+                <a16:creationId xmlns:a16="http://schemas.microsoft.com/office/drawing/2014/main" id="{BCB6943B-E9E0-44B2-9FAC-E4F0E71F3BBC}"/>
               </a:ext>
             </a:extLst>
           </p:cNvPr>
@@ -7140,146 +7615,20 @@
         </p:blipFill>
         <p:spPr>
           <a:xfrm>
-            <a:off x="-1" y="-519555"/>
-            <a:ext cx="10799763" cy="1343200"/>
+            <a:off x="-1" y="0"/>
+            <a:ext cx="9144001" cy="1137268"/>
           </a:xfrm>
           <a:prstGeom prst="rect">
             <a:avLst/>
           </a:prstGeom>
         </p:spPr>
       </p:pic>
-      <p:pic>
-        <p:nvPicPr>
-          <p:cNvPr id="3" name="그림 2">
+      <p:sp>
+        <p:nvSpPr>
+          <p:cNvPr id="3" name="TextBox 2">
             <a:extLst>
               <a:ext uri="{FF2B5EF4-FFF2-40B4-BE49-F238E27FC236}">
-                <a16:creationId xmlns:a16="http://schemas.microsoft.com/office/drawing/2014/main" id="{3BBEB0F4-5373-93AD-F7E7-C1DA12EBD440}"/>
-              </a:ext>
-            </a:extLst>
-          </p:cNvPr>
-          <p:cNvPicPr>
-            <a:picLocks noChangeAspect="1"/>
-          </p:cNvPicPr>
-          <p:nvPr/>
-        </p:nvPicPr>
-        <p:blipFill>
-          <a:blip r:embed="rId3"/>
-          <a:stretch>
-            <a:fillRect/>
-          </a:stretch>
-        </p:blipFill>
-        <p:spPr>
-          <a:xfrm>
-            <a:off x="7019318" y="9558397"/>
-            <a:ext cx="3780444" cy="990116"/>
-          </a:xfrm>
-          <a:prstGeom prst="rect">
-            <a:avLst/>
-          </a:prstGeom>
-        </p:spPr>
-      </p:pic>
-      <p:pic>
-        <p:nvPicPr>
-          <p:cNvPr id="7" name="그래픽 6" descr="커서">
-            <a:extLst>
-              <a:ext uri="{FF2B5EF4-FFF2-40B4-BE49-F238E27FC236}">
-                <a16:creationId xmlns:a16="http://schemas.microsoft.com/office/drawing/2014/main" id="{F50313B2-E540-0E40-AF4E-CF1443B1D961}"/>
-              </a:ext>
-            </a:extLst>
-          </p:cNvPr>
-          <p:cNvPicPr>
-            <a:picLocks noChangeAspect="1"/>
-          </p:cNvPicPr>
-          <p:nvPr/>
-        </p:nvPicPr>
-        <p:blipFill>
-          <a:blip r:embed="rId4">
-            <a:extLst>
-              <a:ext uri="{96DAC541-7B7A-43D3-8B79-37D633B846F1}">
-                <asvg:svgBlip xmlns:asvg="http://schemas.microsoft.com/office/drawing/2016/SVG/main" r:embed="rId5"/>
-              </a:ext>
-            </a:extLst>
-          </a:blip>
-          <a:stretch>
-            <a:fillRect/>
-          </a:stretch>
-        </p:blipFill>
-        <p:spPr>
-          <a:xfrm>
-            <a:off x="9825520" y="10103539"/>
-            <a:ext cx="660088" cy="660088"/>
-          </a:xfrm>
-          <a:prstGeom prst="rect">
-            <a:avLst/>
-          </a:prstGeom>
-        </p:spPr>
-      </p:pic>
-      <p:pic>
-        <p:nvPicPr>
-          <p:cNvPr id="15" name="그림 14">
-            <a:extLst>
-              <a:ext uri="{FF2B5EF4-FFF2-40B4-BE49-F238E27FC236}">
-                <a16:creationId xmlns:a16="http://schemas.microsoft.com/office/drawing/2014/main" id="{633CFF54-CC30-1ED2-8605-5C3170653B93}"/>
-              </a:ext>
-            </a:extLst>
-          </p:cNvPr>
-          <p:cNvPicPr>
-            <a:picLocks noChangeAspect="1"/>
-          </p:cNvPicPr>
-          <p:nvPr/>
-        </p:nvPicPr>
-        <p:blipFill>
-          <a:blip r:embed="rId6"/>
-          <a:stretch>
-            <a:fillRect/>
-          </a:stretch>
-        </p:blipFill>
-        <p:spPr>
-          <a:xfrm>
-            <a:off x="1" y="9702721"/>
-            <a:ext cx="7019318" cy="4697492"/>
-          </a:xfrm>
-          <a:prstGeom prst="rect">
-            <a:avLst/>
-          </a:prstGeom>
-        </p:spPr>
-      </p:pic>
-    </p:spTree>
-    <p:extLst>
-      <p:ext uri="{BB962C8B-B14F-4D97-AF65-F5344CB8AC3E}">
-        <p14:creationId xmlns:p14="http://schemas.microsoft.com/office/powerpoint/2010/main" val="2365861899"/>
-      </p:ext>
-    </p:extLst>
-  </p:cSld>
-  <p:clrMapOvr>
-    <a:masterClrMapping/>
-  </p:clrMapOvr>
-</p:sld>
-</file>
-
-<file path=ppt/slides/slide8.xml><?xml version="1.0" encoding="utf-8"?>
-<p:sld xmlns:a="http://schemas.openxmlformats.org/drawingml/2006/main" xmlns:r="http://schemas.openxmlformats.org/officeDocument/2006/relationships" xmlns:p="http://schemas.openxmlformats.org/presentationml/2006/main">
-  <p:cSld>
-    <p:spTree>
-      <p:nvGrpSpPr>
-        <p:cNvPr id="1" name=""/>
-        <p:cNvGrpSpPr/>
-        <p:nvPr/>
-      </p:nvGrpSpPr>
-      <p:grpSpPr>
-        <a:xfrm>
-          <a:off x="0" y="0"/>
-          <a:ext cx="0" cy="0"/>
-          <a:chOff x="0" y="0"/>
-          <a:chExt cx="0" cy="0"/>
-        </a:xfrm>
-      </p:grpSpPr>
-      <p:sp>
-        <p:nvSpPr>
-          <p:cNvPr id="7" name="TextBox 6">
-            <a:extLst>
-              <a:ext uri="{FF2B5EF4-FFF2-40B4-BE49-F238E27FC236}">
-                <a16:creationId xmlns:a16="http://schemas.microsoft.com/office/drawing/2014/main" id="{39D4A821-3838-FE2D-EFD2-4F1ADF5EE67A}"/>
+                <a16:creationId xmlns:a16="http://schemas.microsoft.com/office/drawing/2014/main" id="{07D47576-CE20-7B8D-C23F-C27ED80D5E04}"/>
               </a:ext>
             </a:extLst>
           </p:cNvPr>
@@ -7288,8 +7637,8 @@
         </p:nvSpPr>
         <p:spPr>
           <a:xfrm>
-            <a:off x="-1" y="2619192"/>
-            <a:ext cx="10799763" cy="10205101"/>
+            <a:off x="0" y="1603533"/>
+            <a:ext cx="9144001" cy="3416320"/>
           </a:xfrm>
           <a:prstGeom prst="rect">
             <a:avLst/>
@@ -7306,587 +7655,230 @@
               <a:buNone/>
             </a:pPr>
             <a:r>
-              <a:rPr lang="en-US" altLang="ko-KR" sz="3651" b="1" dirty="0"/>
-              <a:t>3. </a:t>
-            </a:r>
-            <a:r>
-              <a:rPr lang="ko-KR" altLang="en-US" sz="3651" b="1" dirty="0"/>
-              <a:t>자재 입출고 등록</a:t>
-            </a:r>
+              <a:rPr lang="ko-KR" altLang="en-US" b="1" dirty="0"/>
+              <a:t>② 자재품목명세서 </a:t>
+            </a:r>
+            <a:r>
+              <a:rPr lang="en-US" altLang="ko-KR" b="1" dirty="0"/>
+              <a:t>(</a:t>
+            </a:r>
+            <a:r>
+              <a:rPr lang="en-US" altLang="ko-KR" b="1" dirty="0" err="1"/>
+              <a:t>A4</a:t>
+            </a:r>
+            <a:r>
+              <a:rPr lang="en-US" altLang="ko-KR" b="1" dirty="0"/>
+              <a:t> </a:t>
+            </a:r>
+            <a:r>
+              <a:rPr lang="ko-KR" altLang="en-US" b="1" dirty="0"/>
+              <a:t>카드</a:t>
+            </a:r>
+            <a:r>
+              <a:rPr lang="en-US" altLang="ko-KR" b="1" dirty="0"/>
+              <a:t>) </a:t>
+            </a:r>
+            <a:r>
+              <a:rPr lang="ko-KR" altLang="en-US" b="1" dirty="0"/>
+              <a:t>조회 및 인쇄</a:t>
+            </a:r>
+            <a:endParaRPr lang="en-US" altLang="ko-KR" b="1" dirty="0"/>
           </a:p>
           <a:p>
             <a:pPr>
               <a:buNone/>
             </a:pPr>
-            <a:r>
-              <a:rPr lang="en-US" altLang="ko-KR" sz="3651" dirty="0"/>
-              <a:t>DB</a:t>
-            </a:r>
-            <a:r>
-              <a:rPr lang="ko-KR" altLang="en-US" sz="3651" dirty="0"/>
-              <a:t>에 저장되어 있는 자재의 입고 및 출고 처리를 진행합니다</a:t>
-            </a:r>
-            <a:r>
-              <a:rPr lang="en-US" altLang="ko-KR" sz="3651" dirty="0"/>
-              <a:t>. </a:t>
-            </a:r>
-            <a:r>
-              <a:rPr lang="ko-KR" altLang="en-US" sz="3651" b="1" dirty="0">
+            <a:endParaRPr lang="ko-KR" altLang="en-US" b="1" dirty="0"/>
+          </a:p>
+          <a:p>
+            <a:pPr>
+              <a:buFont typeface="Arial" panose="020B0604020202020204" pitchFamily="34" charset="0"/>
+              <a:buChar char="•"/>
+            </a:pPr>
+            <a:r>
+              <a:rPr lang="ko-KR" altLang="en-US" dirty="0"/>
+              <a:t> 목록에서 특정 품목을 </a:t>
+            </a:r>
+            <a:r>
+              <a:rPr lang="ko-KR" altLang="en-US" dirty="0">
                 <a:highlight>
                   <a:srgbClr val="CCFF33"/>
                 </a:highlight>
               </a:rPr>
-              <a:t>품목코드</a:t>
-            </a:r>
-            <a:r>
-              <a:rPr lang="ko-KR" altLang="en-US" sz="3651" dirty="0">
-                <a:highlight>
-                  <a:srgbClr val="CCFF33"/>
-                </a:highlight>
-              </a:rPr>
-              <a:t>를 기준</a:t>
-            </a:r>
-            <a:r>
-              <a:rPr lang="ko-KR" altLang="en-US" sz="3651" dirty="0"/>
-              <a:t>으로 </a:t>
-            </a:r>
-            <a:r>
-              <a:rPr lang="ko-KR" altLang="en-US" sz="3651" dirty="0" err="1"/>
-              <a:t>등록하는것을</a:t>
-            </a:r>
-            <a:r>
-              <a:rPr lang="ko-KR" altLang="en-US" sz="3651" dirty="0"/>
+              <a:t>클릭</a:t>
+            </a:r>
+            <a:r>
+              <a:rPr lang="ko-KR" altLang="en-US" dirty="0"/>
+              <a:t>하면 하단에 </a:t>
+            </a:r>
+            <a:r>
+              <a:rPr lang="ko-KR" altLang="en-US" b="1" dirty="0"/>
+              <a:t>자재품목명세서 카드</a:t>
+            </a:r>
+            <a:r>
+              <a:rPr lang="ko-KR" altLang="en-US" dirty="0"/>
+              <a:t>가 생성됩니다</a:t>
+            </a:r>
+            <a:r>
+              <a:rPr lang="en-US" altLang="ko-KR" dirty="0"/>
+              <a:t>.</a:t>
+            </a:r>
+            <a:endParaRPr lang="en-US" altLang="ko-KR" b="1" dirty="0"/>
+          </a:p>
+          <a:p>
+            <a:pPr>
+              <a:buFont typeface="Arial" panose="020B0604020202020204" pitchFamily="34" charset="0"/>
+              <a:buChar char="•"/>
+            </a:pPr>
+            <a:r>
+              <a:rPr lang="ko-KR" altLang="en-US" b="1" dirty="0"/>
+              <a:t> 기간 필터</a:t>
+            </a:r>
+            <a:r>
+              <a:rPr lang="en-US" altLang="ko-KR" b="1" dirty="0"/>
+              <a:t>(3</a:t>
+            </a:r>
+            <a:r>
+              <a:rPr lang="ko-KR" altLang="en-US" b="1" dirty="0"/>
+              <a:t>개월</a:t>
+            </a:r>
+            <a:r>
+              <a:rPr lang="en-US" altLang="ko-KR" b="1" dirty="0"/>
+              <a:t>, 6</a:t>
+            </a:r>
+            <a:r>
+              <a:rPr lang="ko-KR" altLang="en-US" b="1" dirty="0"/>
+              <a:t>개월</a:t>
+            </a:r>
+            <a:r>
+              <a:rPr lang="en-US" altLang="ko-KR" b="1" dirty="0"/>
+              <a:t>, 1</a:t>
+            </a:r>
+            <a:r>
+              <a:rPr lang="ko-KR" altLang="en-US" b="1" dirty="0"/>
+              <a:t>년 등</a:t>
+            </a:r>
+            <a:r>
+              <a:rPr lang="en-US" altLang="ko-KR" b="1" dirty="0"/>
+              <a:t>):</a:t>
+            </a:r>
+            <a:r>
+              <a:rPr lang="ko-KR" altLang="en-US" dirty="0"/>
+              <a:t> 원하는 기간 동안의 입고</a:t>
+            </a:r>
+            <a:r>
+              <a:rPr lang="en-US" altLang="ko-KR" dirty="0"/>
+              <a:t>/</a:t>
+            </a:r>
+            <a:r>
+              <a:rPr lang="ko-KR" altLang="en-US" dirty="0"/>
+              <a:t>출고 합계 수량 및 금액을 자동 계산합니다</a:t>
+            </a:r>
+            <a:r>
+              <a:rPr lang="en-US" altLang="ko-KR" dirty="0"/>
+              <a:t>.</a:t>
+            </a:r>
+          </a:p>
+          <a:p>
+            <a:pPr>
+              <a:buFont typeface="Arial" panose="020B0604020202020204" pitchFamily="34" charset="0"/>
+              <a:buChar char="•"/>
+            </a:pPr>
+            <a:r>
+              <a:rPr lang="ko-KR" altLang="en-US" b="1" dirty="0"/>
+              <a:t> 🖨️ 명세서 인쇄</a:t>
+            </a:r>
+            <a:r>
+              <a:rPr lang="en-US" altLang="ko-KR" b="1" dirty="0"/>
+              <a:t>/PDF </a:t>
+            </a:r>
+            <a:r>
+              <a:rPr lang="ko-KR" altLang="en-US" b="1" dirty="0"/>
+              <a:t>저장</a:t>
+            </a:r>
+            <a:r>
+              <a:rPr lang="en-US" altLang="ko-KR" b="1" dirty="0"/>
+              <a:t>:</a:t>
+            </a:r>
+            <a:r>
+              <a:rPr lang="ko-KR" altLang="en-US" dirty="0"/>
+              <a:t> 버튼을 누르면 </a:t>
+            </a:r>
+            <a:r>
+              <a:rPr lang="en-US" altLang="ko-KR" dirty="0" err="1"/>
+              <a:t>A4</a:t>
+            </a:r>
+            <a:r>
+              <a:rPr lang="en-US" altLang="ko-KR" dirty="0"/>
               <a:t> </a:t>
             </a:r>
             <a:r>
-              <a:rPr lang="ko-KR" altLang="en-US" sz="3651" dirty="0" err="1"/>
-              <a:t>추천드립니다</a:t>
-            </a:r>
-            <a:r>
-              <a:rPr lang="en-US" altLang="ko-KR" sz="3651" dirty="0"/>
+              <a:rPr lang="ko-KR" altLang="en-US" dirty="0"/>
+              <a:t>규격의 깔끔한 명세서 출력 창이 열립니다</a:t>
+            </a:r>
+            <a:r>
+              <a:rPr lang="en-US" altLang="ko-KR" dirty="0"/>
               <a:t>.</a:t>
             </a:r>
           </a:p>
           <a:p>
             <a:pPr>
-              <a:buNone/>
-            </a:pPr>
-            <a:endParaRPr lang="en-US" altLang="ko-KR" sz="3651" dirty="0"/>
+              <a:buFont typeface="Arial" panose="020B0604020202020204" pitchFamily="34" charset="0"/>
+              <a:buChar char="•"/>
+            </a:pPr>
+            <a:endParaRPr lang="en-US" altLang="ko-KR" dirty="0"/>
           </a:p>
           <a:p>
             <a:pPr>
               <a:buNone/>
             </a:pPr>
             <a:r>
-              <a:rPr lang="ko-KR" altLang="en-US" sz="3651" b="1" dirty="0"/>
-              <a:t>① 신규 입출고 등록</a:t>
-            </a:r>
-          </a:p>
-          <a:p>
-            <a:pPr marL="540000" indent="-540000">
-              <a:buFont typeface="+mj-lt"/>
-              <a:buAutoNum type="arabicParenR"/>
-            </a:pPr>
-            <a:r>
-              <a:rPr lang="ko-KR" altLang="en-US" sz="3651" b="1" dirty="0"/>
-              <a:t>대상 품목 검색</a:t>
-            </a:r>
-            <a:r>
-              <a:rPr lang="en-US" altLang="ko-KR" sz="3651" b="1" dirty="0"/>
-              <a:t>:</a:t>
-            </a:r>
-            <a:r>
-              <a:rPr lang="ko-KR" altLang="en-US" sz="3651" dirty="0"/>
-              <a:t> 상단 검색창에서 대상 품목을 선택합니다</a:t>
-            </a:r>
-            <a:r>
-              <a:rPr lang="en-US" altLang="ko-KR" sz="3651" dirty="0"/>
+              <a:rPr lang="ko-KR" altLang="en-US" b="1" dirty="0"/>
+              <a:t>③ 전체 품목 엑셀 다운로드</a:t>
+            </a:r>
+            <a:endParaRPr lang="en-US" altLang="ko-KR" b="1" dirty="0"/>
+          </a:p>
+          <a:p>
+            <a:pPr>
+              <a:buNone/>
+            </a:pPr>
+            <a:endParaRPr lang="ko-KR" altLang="en-US" b="1" dirty="0"/>
+          </a:p>
+          <a:p>
+            <a:pPr>
+              <a:buFont typeface="Arial" panose="020B0604020202020204" pitchFamily="34" charset="0"/>
+              <a:buChar char="•"/>
+            </a:pPr>
+            <a:r>
+              <a:rPr lang="en-US" altLang="ko-KR" dirty="0"/>
+              <a:t>DB</a:t>
+            </a:r>
+            <a:r>
+              <a:rPr lang="ko-KR" altLang="en-US" dirty="0"/>
+              <a:t>에 저장된 전체 품목 내역을 엑셀로 다운로드 합니다</a:t>
+            </a:r>
+            <a:r>
+              <a:rPr lang="en-US" altLang="ko-KR" dirty="0"/>
+              <a:t>. </a:t>
+            </a:r>
+            <a:r>
+              <a:rPr lang="ko-KR" altLang="en-US" dirty="0"/>
+              <a:t>재고조사시 자료로 활용할 수 있습니다</a:t>
+            </a:r>
+            <a:r>
+              <a:rPr lang="en-US" altLang="ko-KR" dirty="0"/>
               <a:t>.</a:t>
             </a:r>
           </a:p>
           <a:p>
-            <a:pPr>
-              <a:buFont typeface="+mj-lt"/>
-              <a:buAutoNum type="arabicParenR"/>
-            </a:pPr>
-            <a:r>
-              <a:rPr lang="ko-KR" altLang="en-US" sz="3651" b="1" dirty="0"/>
-              <a:t>   구분 선택</a:t>
-            </a:r>
-            <a:r>
-              <a:rPr lang="en-US" altLang="ko-KR" sz="3651" b="1" dirty="0"/>
-              <a:t>:</a:t>
-            </a:r>
-            <a:r>
-              <a:rPr lang="ko-KR" altLang="en-US" sz="3651" dirty="0"/>
-              <a:t> </a:t>
-            </a:r>
-            <a:r>
-              <a:rPr lang="ko-KR" altLang="en-US" sz="3651" b="1" dirty="0">
-                <a:highlight>
-                  <a:srgbClr val="CCFF33"/>
-                </a:highlight>
-                <a:latin typeface="Courier New" panose="02070309020205020404" pitchFamily="49" charset="0"/>
-              </a:rPr>
-              <a:t>입고</a:t>
-            </a:r>
-            <a:r>
-              <a:rPr lang="en-US" altLang="ko-KR" sz="3651" dirty="0"/>
-              <a:t> </a:t>
-            </a:r>
-            <a:r>
-              <a:rPr lang="ko-KR" altLang="en-US" sz="3651" dirty="0"/>
-              <a:t>또는 </a:t>
-            </a:r>
-            <a:r>
-              <a:rPr lang="ko-KR" altLang="en-US" sz="3651" b="1" dirty="0">
-                <a:highlight>
-                  <a:srgbClr val="CCFF33"/>
-                </a:highlight>
-                <a:latin typeface="Courier New" panose="02070309020205020404" pitchFamily="49" charset="0"/>
-              </a:rPr>
-              <a:t>출고</a:t>
-            </a:r>
-            <a:r>
-              <a:rPr lang="en-US" altLang="ko-KR" sz="3651" dirty="0"/>
-              <a:t> </a:t>
-            </a:r>
-            <a:r>
-              <a:rPr lang="ko-KR" altLang="en-US" sz="3651" dirty="0"/>
-              <a:t>버튼을 선택합니다</a:t>
-            </a:r>
-            <a:r>
-              <a:rPr lang="en-US" altLang="ko-KR" sz="3651" dirty="0"/>
-              <a:t>.</a:t>
-            </a:r>
-          </a:p>
-          <a:p>
-            <a:pPr>
-              <a:buFont typeface="+mj-lt"/>
-              <a:buAutoNum type="arabicParenR"/>
-            </a:pPr>
-            <a:r>
-              <a:rPr lang="ko-KR" altLang="en-US" sz="3651" b="1" dirty="0"/>
-              <a:t>   정보 입력</a:t>
-            </a:r>
-            <a:r>
-              <a:rPr lang="en-US" altLang="ko-KR" sz="3651" b="1" dirty="0"/>
-              <a:t>:</a:t>
-            </a:r>
-            <a:r>
-              <a:rPr lang="ko-KR" altLang="en-US" sz="3651" dirty="0"/>
-              <a:t> 일자</a:t>
-            </a:r>
-            <a:r>
-              <a:rPr lang="en-US" altLang="ko-KR" sz="3651" dirty="0"/>
-              <a:t>, </a:t>
-            </a:r>
-            <a:r>
-              <a:rPr lang="ko-KR" altLang="en-US" sz="3651" dirty="0"/>
-              <a:t>수량</a:t>
-            </a:r>
-            <a:r>
-              <a:rPr lang="en-US" altLang="ko-KR" sz="3651" dirty="0"/>
-              <a:t>, </a:t>
-            </a:r>
-            <a:r>
-              <a:rPr lang="ko-KR" altLang="en-US" sz="3651" dirty="0"/>
-              <a:t>단가</a:t>
-            </a:r>
-            <a:r>
-              <a:rPr lang="en-US" altLang="ko-KR" sz="3651" dirty="0"/>
-              <a:t>, </a:t>
-            </a:r>
-            <a:r>
-              <a:rPr lang="ko-KR" altLang="en-US" sz="3651" dirty="0"/>
-              <a:t>담당자</a:t>
-            </a:r>
-            <a:r>
-              <a:rPr lang="en-US" altLang="ko-KR" sz="3651" dirty="0"/>
-              <a:t>, </a:t>
-            </a:r>
-            <a:r>
-              <a:rPr lang="ko-KR" altLang="en-US" sz="3651" b="1" dirty="0" err="1"/>
-              <a:t>요청자</a:t>
-            </a:r>
-            <a:r>
-              <a:rPr lang="en-US" altLang="ko-KR" sz="3651" b="1" dirty="0"/>
-              <a:t>(*</a:t>
-            </a:r>
-            <a:r>
-              <a:rPr lang="ko-KR" altLang="en-US" sz="3651" b="1" dirty="0"/>
-              <a:t>필수</a:t>
-            </a:r>
-            <a:r>
-              <a:rPr lang="en-US" altLang="ko-KR" sz="3651" b="1" dirty="0"/>
-              <a:t>)</a:t>
-            </a:r>
-            <a:r>
-              <a:rPr lang="en-US" altLang="ko-KR" sz="3651" dirty="0"/>
-              <a:t>, </a:t>
-            </a:r>
-            <a:r>
-              <a:rPr lang="ko-KR" altLang="en-US" sz="3651" dirty="0"/>
-              <a:t>비고를 입력합니다</a:t>
-            </a:r>
-            <a:r>
-              <a:rPr lang="en-US" altLang="ko-KR" sz="3651" dirty="0"/>
-              <a:t>.</a:t>
-            </a:r>
-          </a:p>
-          <a:p>
-            <a:pPr>
-              <a:buFont typeface="+mj-lt"/>
-              <a:buAutoNum type="arabicParenR"/>
-            </a:pPr>
-            <a:r>
-              <a:rPr lang="ko-KR" altLang="en-US" sz="3651" b="1" dirty="0"/>
-              <a:t>   저장 및 최종 확인</a:t>
-            </a:r>
-            <a:r>
-              <a:rPr lang="en-US" altLang="ko-KR" sz="3651" b="1" dirty="0"/>
-              <a:t>:</a:t>
-            </a:r>
-            <a:r>
-              <a:rPr lang="ko-KR" altLang="en-US" sz="3651" dirty="0"/>
-              <a:t> </a:t>
-            </a:r>
-            <a:r>
-              <a:rPr lang="ko-KR" altLang="en-US" sz="3651" dirty="0">
-                <a:latin typeface="Courier New" panose="02070309020205020404" pitchFamily="49" charset="0"/>
-              </a:rPr>
-              <a:t>입출고 저장 실행</a:t>
-            </a:r>
-            <a:r>
-              <a:rPr lang="ko-KR" altLang="en-US" sz="3651" dirty="0"/>
-              <a:t> 버튼 클릭 후 나타나는 </a:t>
-            </a:r>
-            <a:r>
-              <a:rPr lang="en-US" altLang="ko-KR" sz="3651" dirty="0"/>
-              <a:t>Pop-up </a:t>
-            </a:r>
-            <a:r>
-              <a:rPr lang="ko-KR" altLang="en-US" sz="3651" dirty="0"/>
-              <a:t>창에서 내역을 확인하고 </a:t>
-            </a:r>
-            <a:r>
-              <a:rPr lang="ko-KR" altLang="en-US" sz="3651" dirty="0">
-                <a:latin typeface="Courier New" panose="02070309020205020404" pitchFamily="49" charset="0"/>
-              </a:rPr>
-              <a:t>최종 확인 및 실행</a:t>
-            </a:r>
-            <a:r>
-              <a:rPr lang="ko-KR" altLang="en-US" sz="3651" dirty="0"/>
-              <a:t>을 누릅니다</a:t>
-            </a:r>
-            <a:r>
-              <a:rPr lang="en-US" altLang="ko-KR" sz="3651" dirty="0"/>
-              <a:t>.</a:t>
-            </a:r>
-          </a:p>
-          <a:p>
-            <a:pPr>
-              <a:buFont typeface="+mj-lt"/>
-              <a:buAutoNum type="arabicParenR"/>
-            </a:pPr>
-            <a:endParaRPr lang="en-US" altLang="ko-KR" sz="3651" dirty="0"/>
-          </a:p>
-          <a:p>
-            <a:r>
-              <a:rPr lang="en-US" altLang="ko-KR" sz="3651" dirty="0">
-                <a:highlight>
-                  <a:srgbClr val="CCFF33"/>
-                </a:highlight>
-              </a:rPr>
-              <a:t>Tip.</a:t>
-            </a:r>
-            <a:r>
-              <a:rPr lang="en-US" altLang="ko-KR" sz="3651" dirty="0"/>
-              <a:t> </a:t>
-            </a:r>
-            <a:r>
-              <a:rPr lang="ko-KR" altLang="en-US" sz="3651" dirty="0"/>
-              <a:t>품목 선택 후 하단의 </a:t>
-            </a:r>
-            <a:r>
-              <a:rPr lang="ko-KR" altLang="en-US" sz="3651" dirty="0">
-                <a:highlight>
-                  <a:srgbClr val="CCFF33"/>
-                </a:highlight>
-              </a:rPr>
-              <a:t>명세서를 확인</a:t>
-            </a:r>
-            <a:r>
-              <a:rPr lang="ko-KR" altLang="en-US" sz="3651" dirty="0"/>
-              <a:t>하여</a:t>
-            </a:r>
-            <a:r>
-              <a:rPr lang="en-US" altLang="ko-KR" sz="3651" dirty="0"/>
-              <a:t>, </a:t>
-            </a:r>
-            <a:r>
-              <a:rPr lang="ko-KR" altLang="en-US" sz="3651" dirty="0"/>
-              <a:t>품목을 바르게 선택했는지 한번 더 확인하면 실수를 줄일 수 있습니다</a:t>
-            </a:r>
-            <a:r>
-              <a:rPr lang="en-US" altLang="ko-KR" sz="3651" dirty="0"/>
-              <a:t>.</a:t>
-            </a:r>
+            <a:endParaRPr lang="en-US" altLang="ko-KR" dirty="0"/>
           </a:p>
         </p:txBody>
       </p:sp>
-      <p:pic>
-        <p:nvPicPr>
-          <p:cNvPr id="18" name="그림 17">
-            <a:extLst>
-              <a:ext uri="{FF2B5EF4-FFF2-40B4-BE49-F238E27FC236}">
-                <a16:creationId xmlns:a16="http://schemas.microsoft.com/office/drawing/2014/main" id="{E6D7E9D3-B204-B81E-1F80-10F66E2F68B9}"/>
-              </a:ext>
-            </a:extLst>
-          </p:cNvPr>
-          <p:cNvPicPr>
-            <a:picLocks noChangeAspect="1"/>
-          </p:cNvPicPr>
-          <p:nvPr/>
-        </p:nvPicPr>
-        <p:blipFill>
-          <a:blip r:embed="rId2"/>
-          <a:stretch>
-            <a:fillRect/>
-          </a:stretch>
-        </p:blipFill>
-        <p:spPr>
-          <a:xfrm>
-            <a:off x="0" y="0"/>
-            <a:ext cx="10799763" cy="1974265"/>
-          </a:xfrm>
-          <a:prstGeom prst="rect">
-            <a:avLst/>
-          </a:prstGeom>
-        </p:spPr>
-      </p:pic>
     </p:spTree>
     <p:extLst>
       <p:ext uri="{BB962C8B-B14F-4D97-AF65-F5344CB8AC3E}">
-        <p14:creationId xmlns:p14="http://schemas.microsoft.com/office/powerpoint/2010/main" val="1419660141"/>
-      </p:ext>
-    </p:extLst>
-  </p:cSld>
-  <p:clrMapOvr>
-    <a:masterClrMapping/>
-  </p:clrMapOvr>
-</p:sld>
-</file>
-
-<file path=ppt/slides/slide9.xml><?xml version="1.0" encoding="utf-8"?>
-<p:sld xmlns:a="http://schemas.openxmlformats.org/drawingml/2006/main" xmlns:r="http://schemas.openxmlformats.org/officeDocument/2006/relationships" xmlns:p="http://schemas.openxmlformats.org/presentationml/2006/main">
-  <p:cSld>
-    <p:spTree>
-      <p:nvGrpSpPr>
-        <p:cNvPr id="1" name=""/>
-        <p:cNvGrpSpPr/>
-        <p:nvPr/>
-      </p:nvGrpSpPr>
-      <p:grpSpPr>
-        <a:xfrm>
-          <a:off x="0" y="0"/>
-          <a:ext cx="0" cy="0"/>
-          <a:chOff x="0" y="0"/>
-          <a:chExt cx="0" cy="0"/>
-        </a:xfrm>
-      </p:grpSpPr>
-      <p:sp>
-        <p:nvSpPr>
-          <p:cNvPr id="6" name="TextBox 5">
-            <a:extLst>
-              <a:ext uri="{FF2B5EF4-FFF2-40B4-BE49-F238E27FC236}">
-                <a16:creationId xmlns:a16="http://schemas.microsoft.com/office/drawing/2014/main" id="{CDC99AAF-CCA7-5608-A49C-FE21CCAA7FAD}"/>
-              </a:ext>
-            </a:extLst>
-          </p:cNvPr>
-          <p:cNvSpPr txBox="1"/>
-          <p:nvPr/>
-        </p:nvSpPr>
-        <p:spPr>
-          <a:xfrm>
-            <a:off x="0" y="2796805"/>
-            <a:ext cx="10799763" cy="5710538"/>
-          </a:xfrm>
-          <a:prstGeom prst="rect">
-            <a:avLst/>
-          </a:prstGeom>
-          <a:noFill/>
-        </p:spPr>
-        <p:txBody>
-          <a:bodyPr wrap="square">
-            <a:spAutoFit/>
-          </a:bodyPr>
-          <a:lstStyle/>
-          <a:p>
-            <a:pPr>
-              <a:buNone/>
-            </a:pPr>
-            <a:r>
-              <a:rPr lang="ko-KR" altLang="en-US" sz="3651" b="1" dirty="0"/>
-              <a:t>② 기존 내역 수정 및 삭제</a:t>
-            </a:r>
-            <a:endParaRPr lang="en-US" altLang="ko-KR" sz="3651" b="1" dirty="0"/>
-          </a:p>
-          <a:p>
-            <a:pPr>
-              <a:buNone/>
-            </a:pPr>
-            <a:endParaRPr lang="ko-KR" altLang="en-US" sz="3651" b="1" dirty="0"/>
-          </a:p>
-          <a:p>
-            <a:pPr>
-              <a:buFont typeface="Arial" panose="020B0604020202020204" pitchFamily="34" charset="0"/>
-              <a:buChar char="•"/>
-            </a:pPr>
-            <a:r>
-              <a:rPr lang="ko-KR" altLang="en-US" sz="3651" dirty="0">
-                <a:latin typeface="Courier New" panose="02070309020205020404" pitchFamily="49" charset="0"/>
-              </a:rPr>
-              <a:t> 기존 입출고 내역 수정 및 삭제</a:t>
-            </a:r>
-            <a:r>
-              <a:rPr lang="ko-KR" altLang="en-US" sz="3651" dirty="0"/>
-              <a:t> 탭에서 날짜 범위와 키워드로 이전 입력 내역을 조회한 후</a:t>
-            </a:r>
-            <a:r>
-              <a:rPr lang="en-US" altLang="ko-KR" sz="3651" dirty="0"/>
-              <a:t>, </a:t>
-            </a:r>
-            <a:r>
-              <a:rPr lang="ko-KR" altLang="en-US" sz="3651" dirty="0">
-                <a:latin typeface="+mn-ea"/>
-              </a:rPr>
-              <a:t>수량</a:t>
-            </a:r>
-            <a:r>
-              <a:rPr lang="en-US" altLang="ko-KR" sz="3651" dirty="0">
-                <a:latin typeface="+mn-ea"/>
-              </a:rPr>
-              <a:t>·</a:t>
-            </a:r>
-            <a:r>
-              <a:rPr lang="ko-KR" altLang="en-US" sz="3651" dirty="0">
-                <a:latin typeface="+mn-ea"/>
-              </a:rPr>
-              <a:t>적용 단가 등 수정이나</a:t>
-            </a:r>
-            <a:r>
-              <a:rPr lang="ko-KR" altLang="en-US" sz="3651" dirty="0"/>
-              <a:t> 내역 삭제가 가능합니다</a:t>
-            </a:r>
-            <a:r>
-              <a:rPr lang="en-US" altLang="ko-KR" sz="3651" dirty="0"/>
-              <a:t>.</a:t>
-            </a:r>
-          </a:p>
-          <a:p>
-            <a:pPr>
-              <a:buFont typeface="Arial" panose="020B0604020202020204" pitchFamily="34" charset="0"/>
-              <a:buChar char="•"/>
-            </a:pPr>
-            <a:endParaRPr lang="en-US" altLang="ko-KR" sz="3651" dirty="0"/>
-          </a:p>
-          <a:p>
-            <a:r>
-              <a:rPr lang="en-US" altLang="ko-KR" sz="3651" dirty="0"/>
-              <a:t>Tip. </a:t>
-            </a:r>
-            <a:r>
-              <a:rPr lang="ko-KR" altLang="en-US" sz="3651" dirty="0"/>
-              <a:t>수정이 필요한 내역의 날짜</a:t>
-            </a:r>
-            <a:r>
-              <a:rPr lang="en-US" altLang="ko-KR" sz="3651" dirty="0"/>
-              <a:t>, </a:t>
-            </a:r>
-            <a:r>
-              <a:rPr lang="ko-KR" altLang="en-US" sz="3651" dirty="0" err="1"/>
-              <a:t>요청자</a:t>
-            </a:r>
-            <a:r>
-              <a:rPr lang="en-US" altLang="ko-KR" sz="3651" dirty="0"/>
-              <a:t>, </a:t>
-            </a:r>
-            <a:r>
-              <a:rPr lang="ko-KR" altLang="en-US" sz="3651" dirty="0"/>
-              <a:t>품목코드를 미리 파악하여 내역을 검색 및 선택하면 보다 정확한 수정이 가능합니다</a:t>
-            </a:r>
-            <a:r>
-              <a:rPr lang="en-US" altLang="ko-KR" sz="3651" dirty="0"/>
-              <a:t>.</a:t>
-            </a:r>
-          </a:p>
-        </p:txBody>
-      </p:sp>
-      <p:pic>
-        <p:nvPicPr>
-          <p:cNvPr id="8" name="그림 7">
-            <a:extLst>
-              <a:ext uri="{FF2B5EF4-FFF2-40B4-BE49-F238E27FC236}">
-                <a16:creationId xmlns:a16="http://schemas.microsoft.com/office/drawing/2014/main" id="{BF861282-1D85-CBAE-1566-DEDF325686A4}"/>
-              </a:ext>
-            </a:extLst>
-          </p:cNvPr>
-          <p:cNvPicPr>
-            <a:picLocks noChangeAspect="1"/>
-          </p:cNvPicPr>
-          <p:nvPr/>
-        </p:nvPicPr>
-        <p:blipFill>
-          <a:blip r:embed="rId2"/>
-          <a:stretch>
-            <a:fillRect/>
-          </a:stretch>
-        </p:blipFill>
-        <p:spPr>
-          <a:xfrm>
-            <a:off x="0" y="9165845"/>
-            <a:ext cx="10799763" cy="5234368"/>
-          </a:xfrm>
-          <a:prstGeom prst="rect">
-            <a:avLst/>
-          </a:prstGeom>
-        </p:spPr>
-      </p:pic>
-      <p:pic>
-        <p:nvPicPr>
-          <p:cNvPr id="12" name="그림 11">
-            <a:extLst>
-              <a:ext uri="{FF2B5EF4-FFF2-40B4-BE49-F238E27FC236}">
-                <a16:creationId xmlns:a16="http://schemas.microsoft.com/office/drawing/2014/main" id="{2332DC28-48B8-4B7D-C6DE-8D0679889D27}"/>
-              </a:ext>
-            </a:extLst>
-          </p:cNvPr>
-          <p:cNvPicPr>
-            <a:picLocks noChangeAspect="1"/>
-          </p:cNvPicPr>
-          <p:nvPr/>
-        </p:nvPicPr>
-        <p:blipFill>
-          <a:blip r:embed="rId3"/>
-          <a:stretch>
-            <a:fillRect/>
-          </a:stretch>
-        </p:blipFill>
-        <p:spPr>
-          <a:xfrm>
-            <a:off x="0" y="0"/>
-            <a:ext cx="10799768" cy="1957727"/>
-          </a:xfrm>
-          <a:prstGeom prst="rect">
-            <a:avLst/>
-          </a:prstGeom>
-        </p:spPr>
-      </p:pic>
-    </p:spTree>
-    <p:extLst>
-      <p:ext uri="{BB962C8B-B14F-4D97-AF65-F5344CB8AC3E}">
-        <p14:creationId xmlns:p14="http://schemas.microsoft.com/office/powerpoint/2010/main" val="1641006525"/>
+        <p14:creationId xmlns:p14="http://schemas.microsoft.com/office/powerpoint/2010/main" val="4052409197"/>
       </p:ext>
     </p:extLst>
   </p:cSld>
